--- a/docs/week-7/cen429-week-7-sunum.tr.pptx
+++ b/docs/week-7/cen429-week-7-sunum.tr.pptx
@@ -40,6 +40,10 @@
     <p:sldId id="288" r:id="rId40"/>
     <p:sldId id="289" r:id="rId41"/>
     <p:sldId id="290" r:id="rId42"/>
+    <p:sldId id="291" r:id="rId43"/>
+    <p:sldId id="292" r:id="rId44"/>
+    <p:sldId id="293" r:id="rId45"/>
+    <p:sldId id="294" r:id="rId46"/>
   </p:sldIdLst>
   <p:sldSz cx="12191695" cy="6858000" type="screen4x3"/>
   <p:notesSz cx="6858000" cy="9144000"/>
@@ -3974,7 +3978,7 @@
                   <a:srgbClr val="006D77"/>
                 </a:solidFill>
               </a:rPr>
-              <a:t>Gelecek hafta</a:t>
+              <a:t>Örnek sorular</a:t>
             </a:r>
           </a:p>
         </p:txBody>
@@ -3988,41 +3992,7 @@
         <p:spPr>
           <a:xfrm>
             <a:off x="640080" y="1325880"/>
-            <a:ext cx="10911535" cy="439928"/>
-          </a:xfrm>
-          <a:prstGeom prst="rect">
-            <a:avLst/>
-          </a:prstGeom>
-          <a:noFill/>
-        </p:spPr>
-        <p:txBody>
-          <a:bodyPr wrap="square" lIns="45720" rIns="45720">
-            <a:spAutoFit/>
-          </a:bodyPr>
-          <a:lstStyle/>
-          <a:p>
-            <a:pPr algn="l"/>
-            <a:r>
-              <a:rPr sz="2000" b="1">
-                <a:solidFill>
-                  <a:srgbClr val="1F2D3A"/>
-                </a:solidFill>
-              </a:rPr>
-              <a:t>Hafta 8 — Ara sınav haftası: Quiz-1</a:t>
-            </a:r>
-          </a:p>
-        </p:txBody>
-      </p:sp>
-      <p:sp>
-        <p:nvSpPr>
-          <p:cNvPr id="8" name="TextBox 7"/>
-          <p:cNvSpPr txBox="1"/>
-          <p:nvPr/>
-        </p:nvSpPr>
-        <p:spPr>
-          <a:xfrm>
-            <a:off x="640080" y="1875536"/>
-            <a:ext cx="10911535" cy="843280"/>
+            <a:ext cx="10911535" cy="2346960"/>
           </a:xfrm>
           <a:prstGeom prst="rect">
             <a:avLst/>
@@ -4054,7 +4024,7 @@
                   <a:srgbClr val="1F2D3A"/>
                 </a:solidFill>
               </a:rPr>
-              <a:t>Kapsam: 1–6. haftalar</a:t>
+              <a:t>Güven sınırını geçen en riskli akış hangisi?</a:t>
             </a:r>
           </a:p>
           <a:p>
@@ -4077,7 +4047,99 @@
                   <a:srgbClr val="1F2D3A"/>
                 </a:solidFill>
               </a:rPr>
-              <a:t>Çalışma rehberi ve örnek sorular: 8. hafta sayfası</a:t>
+              <a:t>Bu varlık bellekte ne kadar açık kalıyor, nerede siliniyor?</a:t>
+            </a:r>
+          </a:p>
+          <a:p>
+            <a:pPr>
+              <a:spcAft>
+                <a:spcPts val="300"/>
+              </a:spcAft>
+            </a:pPr>
+            <a:r>
+              <a:rPr sz="2000" b="1">
+                <a:solidFill>
+                  <a:srgbClr val="006D77"/>
+                </a:solidFill>
+              </a:rPr>
+              <a:t>• </a:t>
+            </a:r>
+            <a:r>
+              <a:rPr sz="2000" b="0">
+                <a:solidFill>
+                  <a:srgbClr val="1F2D3A"/>
+                </a:solidFill>
+              </a:rPr>
+              <a:t>Anahtar nereden geliyor, nerede duruyor? Nonce tekrar edebilir mi?</a:t>
+            </a:r>
+          </a:p>
+          <a:p>
+            <a:pPr>
+              <a:spcAft>
+                <a:spcPts val="300"/>
+              </a:spcAft>
+            </a:pPr>
+            <a:r>
+              <a:rPr sz="2000" b="1">
+                <a:solidFill>
+                  <a:srgbClr val="006D77"/>
+                </a:solidFill>
+              </a:rPr>
+              <a:t>• </a:t>
+            </a:r>
+            <a:r>
+              <a:rPr sz="2000" b="0">
+                <a:solidFill>
+                  <a:srgbClr val="1F2D3A"/>
+                </a:solidFill>
+              </a:rPr>
+              <a:t>Hangi derleyici koruması kapalı, neden?</a:t>
+            </a:r>
+          </a:p>
+          <a:p>
+            <a:pPr>
+              <a:spcAft>
+                <a:spcPts val="300"/>
+              </a:spcAft>
+            </a:pPr>
+            <a:r>
+              <a:rPr sz="2000" b="1">
+                <a:solidFill>
+                  <a:srgbClr val="006D77"/>
+                </a:solidFill>
+              </a:rPr>
+              <a:t>• </a:t>
+            </a:r>
+            <a:r>
+              <a:rPr sz="2000" b="0">
+                <a:solidFill>
+                  <a:srgbClr val="1F2D3A"/>
+                </a:solidFill>
+              </a:rPr>
+              <a:t>RASP denetimi başarısız olunca ne oluyor?</a:t>
+            </a:r>
+          </a:p>
+          <a:p>
+            <a:pPr>
+              <a:spcAft>
+                <a:spcPts val="300"/>
+              </a:spcAft>
+            </a:pPr>
+            <a:r>
+              <a:rPr sz="2000" b="1">
+                <a:solidFill>
+                  <a:srgbClr val="006D77"/>
+                </a:solidFill>
+              </a:rPr>
+              <a:t>• </a:t>
+            </a:r>
+            <a:r>
+              <a:rPr sz="2000" b="0">
+                <a:solidFill>
+                  <a:srgbClr val="1F2D3A"/>
+                </a:solidFill>
+              </a:rPr>
+              <a:t>SBOM'da zafiyetli bileşen var mı? Etkileniyor musunuz?</a:t>
             </a:r>
           </a:p>
         </p:txBody>
@@ -4093,14 +4155,6 @@
 <file path=ppt/slides/slide11.xml><?xml version="1.0" encoding="utf-8"?>
 <p:sld xmlns:a="http://schemas.openxmlformats.org/drawingml/2006/main" xmlns:p="http://schemas.openxmlformats.org/presentationml/2006/main" xmlns:r="http://schemas.openxmlformats.org/officeDocument/2006/relationships">
   <p:cSld>
-    <p:bg>
-      <p:bgPr>
-        <a:solidFill>
-          <a:srgbClr val="006D77"/>
-        </a:solidFill>
-        <a:effectLst/>
-      </p:bgPr>
-    </p:bg>
     <p:spTree>
       <p:nvGrpSpPr>
         <p:cNvPr id="1" name=""/>
@@ -4108,9 +4162,33 @@
         <p:nvPr/>
       </p:nvGrpSpPr>
       <p:grpSpPr/>
-      <p:sp>
-        <p:nvSpPr>
-          <p:cNvPr id="2" name="TextBox 1"/>
+      <p:pic>
+        <p:nvPicPr>
+          <p:cNvPr id="2" name="Picture 1" descr="rteu_logo_kucuk.jpg"/>
+          <p:cNvPicPr>
+            <a:picLocks noChangeAspect="1"/>
+          </p:cNvPicPr>
+          <p:nvPr/>
+        </p:nvPicPr>
+        <p:blipFill>
+          <a:blip r:embed="rId2"/>
+          <a:stretch>
+            <a:fillRect/>
+          </a:stretch>
+        </p:blipFill>
+        <p:spPr>
+          <a:xfrm>
+            <a:off x="640080" y="164592"/>
+            <a:ext cx="242773" cy="329184"/>
+          </a:xfrm>
+          <a:prstGeom prst="rect">
+            <a:avLst/>
+          </a:prstGeom>
+        </p:spPr>
+      </p:pic>
+      <p:sp>
+        <p:nvSpPr>
+          <p:cNvPr id="3" name="TextBox 2"/>
           <p:cNvSpPr txBox="1"/>
           <p:nvPr/>
         </p:nvSpPr>
@@ -4133,7 +4211,7 @@
             <a:r>
               <a:rPr sz="1100" b="0">
                 <a:solidFill>
-                  <a:srgbClr val="D8F0F2"/>
+                  <a:srgbClr val="5B6770"/>
                 </a:solidFill>
               </a:rPr>
               <a:t>CEN429 Güvenli Programlama · Hafta 7</a:t>
@@ -4143,7 +4221,7 @@
       </p:sp>
       <p:sp>
         <p:nvSpPr>
-          <p:cNvPr id="3" name="TextBox 2"/>
+          <p:cNvPr id="4" name="TextBox 3"/>
           <p:cNvSpPr txBox="1"/>
           <p:nvPr/>
         </p:nvSpPr>
@@ -4166,7 +4244,7 @@
             <a:r>
               <a:rPr sz="1000" b="0">
                 <a:solidFill>
-                  <a:srgbClr val="D8F0F2"/>
+                  <a:srgbClr val="5B6770"/>
                 </a:solidFill>
               </a:rPr>
               <a:t>RTEÜ Bilgisayar Mühendisliği · 2026-2027 Güz</a:t>
@@ -4176,7 +4254,7 @@
       </p:sp>
       <p:sp>
         <p:nvSpPr>
-          <p:cNvPr id="4" name="TextBox 3"/>
+          <p:cNvPr id="5" name="TextBox 4"/>
           <p:cNvSpPr txBox="1"/>
           <p:nvPr/>
         </p:nvSpPr>
@@ -4200,7 +4278,7 @@
             <a:r>
               <a:rPr sz="1000" b="0">
                 <a:solidFill>
-                  <a:srgbClr val="D8F0F2"/>
+                  <a:srgbClr val="5B6770"/>
                 </a:solidFill>
               </a:rPr>
               <a:t>11</a:t>
@@ -4210,38 +4288,379 @@
       </p:sp>
       <p:sp>
         <p:nvSpPr>
-          <p:cNvPr id="5" name="TextBox 4"/>
-          <p:cNvSpPr txBox="1"/>
-          <p:nvPr/>
-        </p:nvSpPr>
-        <p:spPr>
-          <a:xfrm>
-            <a:off x="640080" y="2743200"/>
-            <a:ext cx="10911535" cy="1280160"/>
-          </a:xfrm>
-          <a:prstGeom prst="rect">
-            <a:avLst/>
-          </a:prstGeom>
-          <a:noFill/>
-        </p:spPr>
-        <p:txBody>
-          <a:bodyPr wrap="square" lIns="45720" rIns="45720">
-            <a:spAutoFit/>
-          </a:bodyPr>
-          <a:lstStyle/>
-          <a:p>
-            <a:pPr algn="l"/>
-            <a:r>
-              <a:rPr sz="4000" b="1">
-                <a:solidFill>
-                  <a:srgbClr val="FFFFFF"/>
-                </a:solidFill>
-              </a:rPr>
-              <a:t>Ek · Rubrik madde madde</a:t>
-            </a:r>
-          </a:p>
-        </p:txBody>
-      </p:sp>
+          <p:cNvPr id="6" name="TextBox 5"/>
+          <p:cNvSpPr txBox="1"/>
+          <p:nvPr/>
+        </p:nvSpPr>
+        <p:spPr>
+          <a:xfrm>
+            <a:off x="640080" y="548640"/>
+            <a:ext cx="10911535" cy="731520"/>
+          </a:xfrm>
+          <a:prstGeom prst="rect">
+            <a:avLst/>
+          </a:prstGeom>
+          <a:noFill/>
+        </p:spPr>
+        <p:txBody>
+          <a:bodyPr wrap="square" lIns="45720" rIns="45720" anchor="ctr">
+            <a:spAutoFit/>
+          </a:bodyPr>
+          <a:lstStyle/>
+          <a:p>
+            <a:r>
+              <a:rPr sz="2600" b="1">
+                <a:solidFill>
+                  <a:srgbClr val="006D77"/>
+                </a:solidFill>
+              </a:rPr>
+              <a:t>Sık yapılan hatalar</a:t>
+            </a:r>
+          </a:p>
+        </p:txBody>
+      </p:sp>
+      <p:graphicFrame>
+        <p:nvGraphicFramePr>
+          <p:cNvPr id="7" name="Table 6"/>
+          <p:cNvGraphicFramePr>
+            <a:graphicFrameLocks noGrp="1"/>
+          </p:cNvGraphicFramePr>
+          <p:nvPr/>
+        </p:nvGraphicFramePr>
+        <p:xfrm>
+          <a:off x="640080" y="1325880"/>
+          <a:ext cx="10911535" cy="2403043"/>
+        </p:xfrm>
+        <a:graphic>
+          <a:graphicData uri="http://schemas.openxmlformats.org/drawingml/2006/table">
+            <a:tbl>
+              <a:tblPr firstRow="1" bandRow="1">
+                <a:tableStyleId>{5C22544A-7EE6-4342-B048-85BDC9FD1C3A}</a:tableStyleId>
+              </a:tblPr>
+              <a:tblGrid>
+                <a:gridCol w="5279775"/>
+                <a:gridCol w="5631760"/>
+              </a:tblGrid>
+              <a:tr h="343291">
+                <a:tc>
+                  <a:txBody>
+                    <a:bodyPr wrap="square"/>
+                    <a:lstStyle/>
+                    <a:p>
+                      <a:r>
+                        <a:rPr sz="1296" b="1">
+                          <a:solidFill>
+                            <a:srgbClr val="FFFFFF"/>
+                          </a:solidFill>
+                        </a:rPr>
+                        <a:t>Hata</a:t>
+                      </a:r>
+                    </a:p>
+                  </a:txBody>
+                  <a:tcPr marL="54864" marR="54864" marT="27432" marB="27432" anchor="ctr">
+                    <a:solidFill>
+                      <a:srgbClr val="006D77"/>
+                    </a:solidFill>
+                  </a:tcPr>
+                </a:tc>
+                <a:tc>
+                  <a:txBody>
+                    <a:bodyPr wrap="square"/>
+                    <a:lstStyle/>
+                    <a:p>
+                      <a:r>
+                        <a:rPr sz="1296" b="1">
+                          <a:solidFill>
+                            <a:srgbClr val="FFFFFF"/>
+                          </a:solidFill>
+                        </a:rPr>
+                        <a:t>Neden sorun?</a:t>
+                      </a:r>
+                    </a:p>
+                  </a:txBody>
+                  <a:tcPr marL="54864" marR="54864" marT="27432" marB="27432" anchor="ctr">
+                    <a:solidFill>
+                      <a:srgbClr val="006D77"/>
+                    </a:solidFill>
+                  </a:tcPr>
+                </a:tc>
+              </a:tr>
+              <a:tr h="343291">
+                <a:tc>
+                  <a:txBody>
+                    <a:bodyPr wrap="square"/>
+                    <a:lstStyle/>
+                    <a:p>
+                      <a:r>
+                        <a:rPr sz="1296" b="0">
+                          <a:solidFill>
+                            <a:srgbClr val="1F2D3A"/>
+                          </a:solidFill>
+                        </a:rPr>
+                        <a:t>Kılavuz ile kod tutarsız</a:t>
+                      </a:r>
+                    </a:p>
+                  </a:txBody>
+                  <a:tcPr marL="54864" marR="54864" marT="27432" marB="27432" anchor="ctr">
+                    <a:solidFill>
+                      <a:srgbClr val="FFFFFF"/>
+                    </a:solidFill>
+                  </a:tcPr>
+                </a:tc>
+                <a:tc>
+                  <a:txBody>
+                    <a:bodyPr wrap="square"/>
+                    <a:lstStyle/>
+                    <a:p>
+                      <a:r>
+                        <a:rPr sz="1296" b="0">
+                          <a:solidFill>
+                            <a:srgbClr val="1F2D3A"/>
+                          </a:solidFill>
+                        </a:rPr>
+                        <a:t>En ciddi bulgulardan biri</a:t>
+                      </a:r>
+                    </a:p>
+                  </a:txBody>
+                  <a:tcPr marL="54864" marR="54864" marT="27432" marB="27432" anchor="ctr">
+                    <a:solidFill>
+                      <a:srgbClr val="FFFFFF"/>
+                    </a:solidFill>
+                  </a:tcPr>
+                </a:tc>
+              </a:tr>
+              <a:tr h="343291">
+                <a:tc>
+                  <a:txBody>
+                    <a:bodyPr wrap="square"/>
+                    <a:lstStyle/>
+                    <a:p>
+                      <a:r>
+                        <a:rPr sz="1296" b="0">
+                          <a:solidFill>
+                            <a:srgbClr val="1F2D3A"/>
+                          </a:solidFill>
+                        </a:rPr>
+                        <a:t>Kanıtsız "güvenli" iddiası</a:t>
+                      </a:r>
+                    </a:p>
+                  </a:txBody>
+                  <a:tcPr marL="54864" marR="54864" marT="27432" marB="27432" anchor="ctr">
+                    <a:solidFill>
+                      <a:srgbClr val="EEF7F8"/>
+                    </a:solidFill>
+                  </a:tcPr>
+                </a:tc>
+                <a:tc>
+                  <a:txBody>
+                    <a:bodyPr wrap="square"/>
+                    <a:lstStyle/>
+                    <a:p>
+                      <a:r>
+                        <a:rPr sz="1296" b="0">
+                          <a:solidFill>
+                            <a:srgbClr val="1F2D3A"/>
+                          </a:solidFill>
+                        </a:rPr>
+                        <a:t>Puanlanmaz</a:t>
+                      </a:r>
+                    </a:p>
+                  </a:txBody>
+                  <a:tcPr marL="54864" marR="54864" marT="27432" marB="27432" anchor="ctr">
+                    <a:solidFill>
+                      <a:srgbClr val="EEF7F8"/>
+                    </a:solidFill>
+                  </a:tcPr>
+                </a:tc>
+              </a:tr>
+              <a:tr h="343291">
+                <a:tc>
+                  <a:txBody>
+                    <a:bodyPr wrap="square"/>
+                    <a:lstStyle/>
+                    <a:p>
+                      <a:r>
+                        <a:rPr sz="1296" b="0">
+                          <a:solidFill>
+                            <a:srgbClr val="1F2D3A"/>
+                          </a:solidFill>
+                        </a:rPr>
+                        <a:t>Varlık listesinde anahtar/günlük/kod yok</a:t>
+                      </a:r>
+                    </a:p>
+                  </a:txBody>
+                  <a:tcPr marL="54864" marR="54864" marT="27432" marB="27432" anchor="ctr">
+                    <a:solidFill>
+                      <a:srgbClr val="FFFFFF"/>
+                    </a:solidFill>
+                  </a:tcPr>
+                </a:tc>
+                <a:tc>
+                  <a:txBody>
+                    <a:bodyPr wrap="square"/>
+                    <a:lstStyle/>
+                    <a:p>
+                      <a:r>
+                        <a:rPr sz="1296" b="0">
+                          <a:solidFill>
+                            <a:srgbClr val="1F2D3A"/>
+                          </a:solidFill>
+                        </a:rPr>
+                        <a:t>Listede olmayan korunmuyor</a:t>
+                      </a:r>
+                    </a:p>
+                  </a:txBody>
+                  <a:tcPr marL="54864" marR="54864" marT="27432" marB="27432" anchor="ctr">
+                    <a:solidFill>
+                      <a:srgbClr val="FFFFFF"/>
+                    </a:solidFill>
+                  </a:tcPr>
+                </a:tc>
+              </a:tr>
+              <a:tr h="343291">
+                <a:tc>
+                  <a:txBody>
+                    <a:bodyPr wrap="square"/>
+                    <a:lstStyle/>
+                    <a:p>
+                      <a:r>
+                        <a:rPr sz="1296" b="0">
+                          <a:solidFill>
+                            <a:srgbClr val="1F2D3A"/>
+                          </a:solidFill>
+                        </a:rPr>
+                        <a:t>Genel bilgiden tehdit tablosu</a:t>
+                      </a:r>
+                    </a:p>
+                  </a:txBody>
+                  <a:tcPr marL="54864" marR="54864" marT="27432" marB="27432" anchor="ctr">
+                    <a:solidFill>
+                      <a:srgbClr val="EEF7F8"/>
+                    </a:solidFill>
+                  </a:tcPr>
+                </a:tc>
+                <a:tc>
+                  <a:txBody>
+                    <a:bodyPr wrap="square"/>
+                    <a:lstStyle/>
+                    <a:p>
+                      <a:r>
+                        <a:rPr sz="1296" b="0">
+                          <a:solidFill>
+                            <a:srgbClr val="1F2D3A"/>
+                          </a:solidFill>
+                        </a:rPr>
+                        <a:t>Projeye özgü tehditler kaçar</a:t>
+                      </a:r>
+                    </a:p>
+                  </a:txBody>
+                  <a:tcPr marL="54864" marR="54864" marT="27432" marB="27432" anchor="ctr">
+                    <a:solidFill>
+                      <a:srgbClr val="EEF7F8"/>
+                    </a:solidFill>
+                  </a:tcPr>
+                </a:tc>
+              </a:tr>
+              <a:tr h="343291">
+                <a:tc>
+                  <a:txBody>
+                    <a:bodyPr wrap="square"/>
+                    <a:lstStyle/>
+                    <a:p>
+                      <a:r>
+                        <a:rPr sz="1296" b="0">
+                          <a:solidFill>
+                            <a:srgbClr val="1F2D3A"/>
+                          </a:solidFill>
+                        </a:rPr>
+                        <a:t>Prova edilmemiş gösterim</a:t>
+                      </a:r>
+                    </a:p>
+                  </a:txBody>
+                  <a:tcPr marL="54864" marR="54864" marT="27432" marB="27432" anchor="ctr">
+                    <a:solidFill>
+                      <a:srgbClr val="FFFFFF"/>
+                    </a:solidFill>
+                  </a:tcPr>
+                </a:tc>
+                <a:tc>
+                  <a:txBody>
+                    <a:bodyPr wrap="square"/>
+                    <a:lstStyle/>
+                    <a:p>
+                      <a:r>
+                        <a:rPr sz="1296" b="0">
+                          <a:solidFill>
+                            <a:srgbClr val="1F2D3A"/>
+                          </a:solidFill>
+                        </a:rPr>
+                        <a:t>Süre boşa gider</a:t>
+                      </a:r>
+                    </a:p>
+                  </a:txBody>
+                  <a:tcPr marL="54864" marR="54864" marT="27432" marB="27432" anchor="ctr">
+                    <a:solidFill>
+                      <a:srgbClr val="FFFFFF"/>
+                    </a:solidFill>
+                  </a:tcPr>
+                </a:tc>
+              </a:tr>
+              <a:tr h="343297">
+                <a:tc>
+                  <a:txBody>
+                    <a:bodyPr wrap="square"/>
+                    <a:lstStyle/>
+                    <a:p>
+                      <a:r>
+                        <a:rPr sz="1296" b="0">
+                          <a:solidFill>
+                            <a:srgbClr val="1F2D3A"/>
+                          </a:solidFill>
+                        </a:rPr>
+                        <a:t>Depoda gerçek parola/anahtar/kişisel veri</a:t>
+                      </a:r>
+                    </a:p>
+                  </a:txBody>
+                  <a:tcPr marL="54864" marR="54864" marT="27432" marB="27432" anchor="ctr">
+                    <a:solidFill>
+                      <a:srgbClr val="EEF7F8"/>
+                    </a:solidFill>
+                  </a:tcPr>
+                </a:tc>
+                <a:tc>
+                  <a:txBody>
+                    <a:bodyPr wrap="square"/>
+                    <a:lstStyle/>
+                    <a:p>
+                      <a:r>
+                        <a:rPr sz="1296" b="0">
+                          <a:solidFill>
+                            <a:srgbClr val="1F2D3A"/>
+                          </a:solidFill>
+                        </a:rPr>
+                        <a:t>Ciddi güvenlik hatası; değerler </a:t>
+                      </a:r>
+                      <a:r>
+                        <a:rPr sz="1296" b="1">
+                          <a:solidFill>
+                            <a:srgbClr val="1F2D3A"/>
+                          </a:solidFill>
+                        </a:rPr>
+                        <a:t>sentetik</a:t>
+                      </a:r>
+                    </a:p>
+                  </a:txBody>
+                  <a:tcPr marL="54864" marR="54864" marT="27432" marB="27432" anchor="ctr">
+                    <a:solidFill>
+                      <a:srgbClr val="EEF7F8"/>
+                    </a:solidFill>
+                  </a:tcPr>
+                </a:tc>
+              </a:tr>
+            </a:tbl>
+          </a:graphicData>
+        </a:graphic>
+      </p:graphicFrame>
     </p:spTree>
   </p:cSld>
   <p:clrMapOvr>
@@ -4412,176 +4831,35 @@
                   <a:srgbClr val="006D77"/>
                 </a:solidFill>
               </a:rPr>
-              <a:t>Rubrik neyi ölçer?</a:t>
-            </a:r>
-          </a:p>
-        </p:txBody>
-      </p:sp>
-      <p:sp>
-        <p:nvSpPr>
-          <p:cNvPr id="7" name="TextBox 6"/>
-          <p:cNvSpPr txBox="1"/>
-          <p:nvPr/>
-        </p:nvSpPr>
-        <p:spPr>
-          <a:xfrm>
-            <a:off x="640080" y="1325880"/>
-            <a:ext cx="10911535" cy="439928"/>
-          </a:xfrm>
-          <a:prstGeom prst="rect">
-            <a:avLst/>
-          </a:prstGeom>
-          <a:noFill/>
-        </p:spPr>
-        <p:txBody>
-          <a:bodyPr wrap="square" lIns="45720" rIns="45720">
-            <a:spAutoFit/>
-          </a:bodyPr>
-          <a:lstStyle/>
-          <a:p>
-            <a:pPr algn="l"/>
-            <a:r>
-              <a:rPr sz="2000" b="0">
-                <a:solidFill>
-                  <a:srgbClr val="1F2D3A"/>
-                </a:solidFill>
-              </a:rPr>
-              <a:t>Vize gösterimi projenizin </a:t>
-            </a:r>
-            <a:r>
-              <a:rPr sz="2000" b="1">
-                <a:solidFill>
-                  <a:srgbClr val="1F2D3A"/>
-                </a:solidFill>
-              </a:rPr>
-              <a:t>ilk yarısını</a:t>
-            </a:r>
-            <a:r>
-              <a:rPr sz="2000" b="0">
-                <a:solidFill>
-                  <a:srgbClr val="1F2D3A"/>
-                </a:solidFill>
-              </a:rPr>
-              <a:t> ölçer:</a:t>
-            </a:r>
-          </a:p>
-        </p:txBody>
-      </p:sp>
-      <p:sp>
-        <p:nvSpPr>
-          <p:cNvPr id="8" name="TextBox 7"/>
-          <p:cNvSpPr txBox="1"/>
-          <p:nvPr/>
-        </p:nvSpPr>
-        <p:spPr>
-          <a:xfrm>
-            <a:off x="640080" y="1875536"/>
-            <a:ext cx="10911535" cy="1595120"/>
-          </a:xfrm>
-          <a:prstGeom prst="rect">
-            <a:avLst/>
-          </a:prstGeom>
-          <a:noFill/>
-        </p:spPr>
-        <p:txBody>
-          <a:bodyPr wrap="square" lIns="45720" rIns="45720">
-            <a:spAutoFit/>
-          </a:bodyPr>
-          <a:lstStyle/>
-          <a:p>
-            <a:pPr>
-              <a:spcAft>
-                <a:spcPts val="300"/>
-              </a:spcAft>
-            </a:pPr>
-            <a:r>
-              <a:rPr sz="2000" b="1">
-                <a:solidFill>
-                  <a:srgbClr val="006D77"/>
-                </a:solidFill>
-              </a:rPr>
-              <a:t>• </a:t>
-            </a:r>
-            <a:r>
-              <a:rPr sz="2000" b="0">
-                <a:solidFill>
-                  <a:srgbClr val="1F2D3A"/>
-                </a:solidFill>
-              </a:rPr>
-              <a:t>ürün, mimari, tehdit modeli</a:t>
-            </a:r>
-          </a:p>
-          <a:p>
-            <a:pPr>
-              <a:spcAft>
-                <a:spcPts val="300"/>
-              </a:spcAft>
-            </a:pPr>
-            <a:r>
-              <a:rPr sz="2000" b="1">
-                <a:solidFill>
-                  <a:srgbClr val="006D77"/>
-                </a:solidFill>
-              </a:rPr>
-              <a:t>• </a:t>
-            </a:r>
-            <a:r>
-              <a:rPr sz="2000" b="0">
-                <a:solidFill>
-                  <a:srgbClr val="1F2D3A"/>
-                </a:solidFill>
-              </a:rPr>
-              <a:t>varlık yönetimi</a:t>
-            </a:r>
-          </a:p>
-          <a:p>
-            <a:pPr>
-              <a:spcAft>
-                <a:spcPts val="300"/>
-              </a:spcAft>
-            </a:pPr>
-            <a:r>
-              <a:rPr sz="2000" b="1">
-                <a:solidFill>
-                  <a:srgbClr val="006D77"/>
-                </a:solidFill>
-              </a:rPr>
-              <a:t>• </a:t>
-            </a:r>
-            <a:r>
-              <a:rPr sz="2000" b="0">
-                <a:solidFill>
-                  <a:srgbClr val="1F2D3A"/>
-                </a:solidFill>
-              </a:rPr>
-              <a:t>temel korumalar</a:t>
-            </a:r>
-          </a:p>
-          <a:p>
-            <a:pPr>
-              <a:spcAft>
-                <a:spcPts val="300"/>
-              </a:spcAft>
-            </a:pPr>
-            <a:r>
-              <a:rPr sz="2000" b="1">
-                <a:solidFill>
-                  <a:srgbClr val="006D77"/>
-                </a:solidFill>
-              </a:rPr>
-              <a:t>• </a:t>
-            </a:r>
-            <a:r>
-              <a:rPr sz="2000" b="0">
-                <a:solidFill>
-                  <a:srgbClr val="1F2D3A"/>
-                </a:solidFill>
-              </a:rPr>
-              <a:t>belge ve sunum</a:t>
-            </a:r>
-          </a:p>
-        </p:txBody>
-      </p:sp>
+              <a:t>Sık yapılan hatalar — şema</a:t>
+            </a:r>
+          </a:p>
+        </p:txBody>
+      </p:sp>
+      <p:pic>
+        <p:nvPicPr>
+          <p:cNvPr id="7" name="Picture 6" descr="h07-03-sik-hatalar.png"/>
+          <p:cNvPicPr>
+            <a:picLocks noChangeAspect="1"/>
+          </p:cNvPicPr>
+          <p:nvPr/>
+        </p:nvPicPr>
+        <p:blipFill>
+          <a:blip r:embed="rId3"/>
+          <a:stretch>
+            <a:fillRect/>
+          </a:stretch>
+        </p:blipFill>
+        <p:spPr>
+          <a:xfrm>
+            <a:off x="2046645" y="1325880"/>
+            <a:ext cx="8098404" cy="3473778"/>
+          </a:xfrm>
+          <a:prstGeom prst="rect">
+            <a:avLst/>
+          </a:prstGeom>
+        </p:spPr>
+      </p:pic>
     </p:spTree>
   </p:cSld>
   <p:clrMapOvr>
@@ -4752,7 +5030,7 @@
                   <a:srgbClr val="006D77"/>
                 </a:solidFill>
               </a:rPr>
-              <a:t>Madde · ürün ve mimari</a:t>
+              <a:t>Akademik dürüstlük ve sonrası</a:t>
             </a:r>
           </a:p>
         </p:txBody>
@@ -4798,7 +5076,15 @@
                   <a:srgbClr val="1F2D3A"/>
                 </a:solidFill>
               </a:rPr>
-              <a:t>Ne yapıyor, hangi bileşenler?</a:t>
+              <a:t>Kaynaksız kod/metin, takım dışı çalışma, uydurma sonuç </a:t>
+            </a:r>
+            <a:r>
+              <a:rPr sz="2000" b="1">
+                <a:solidFill>
+                  <a:srgbClr val="1F2D3A"/>
+                </a:solidFill>
+              </a:rPr>
+              <a:t>kabul edilmez</a:t>
             </a:r>
           </a:p>
           <a:p>
@@ -4821,7 +5107,7 @@
                   <a:srgbClr val="1F2D3A"/>
                 </a:solidFill>
               </a:rPr>
-              <a:t>Tek şema + en kritik üç varlık.</a:t>
+              <a:t>Teslim edilen her satır açıklanabilmeli</a:t>
             </a:r>
           </a:p>
           <a:p>
@@ -4839,12 +5125,46 @@
               <a:t>• </a:t>
             </a:r>
             <a:r>
+              <a:rPr sz="2000" b="0">
+                <a:solidFill>
+                  <a:srgbClr val="1F2D3A"/>
+                </a:solidFill>
+              </a:rPr>
+              <a:t>Her takım üyesine soru sorulabilir</a:t>
+            </a:r>
+          </a:p>
+        </p:txBody>
+      </p:sp>
+      <p:sp>
+        <p:nvSpPr>
+          <p:cNvPr id="8" name="TextBox 7"/>
+          <p:cNvSpPr txBox="1"/>
+          <p:nvPr/>
+        </p:nvSpPr>
+        <p:spPr>
+          <a:xfrm>
+            <a:off x="640080" y="2654808"/>
+            <a:ext cx="10911535" cy="770128"/>
+          </a:xfrm>
+          <a:prstGeom prst="rect">
+            <a:avLst/>
+          </a:prstGeom>
+          <a:noFill/>
+        </p:spPr>
+        <p:txBody>
+          <a:bodyPr wrap="square" lIns="45720" rIns="45720">
+            <a:spAutoFit/>
+          </a:bodyPr>
+          <a:lstStyle/>
+          <a:p>
+            <a:pPr algn="l"/>
+            <a:r>
               <a:rPr sz="2000" b="1">
                 <a:solidFill>
                   <a:srgbClr val="1F2D3A"/>
                 </a:solidFill>
               </a:rPr>
-              <a:t>Kanıt:</a:t>
+              <a:t>Gösterimden sonra:</a:t>
             </a:r>
             <a:r>
               <a:rPr sz="2000" b="0">
@@ -4852,7 +5172,57 @@
                   <a:srgbClr val="1F2D3A"/>
                 </a:solidFill>
               </a:rPr>
-              <a:t> S2–S4 belgesi.</a:t>
+              <a:t> geri bildirimi </a:t>
+            </a:r>
+            <a:r>
+              <a:rPr sz="2000" b="1">
+                <a:solidFill>
+                  <a:srgbClr val="1F2D3A"/>
+                </a:solidFill>
+              </a:rPr>
+              <a:t>bulgu listesi</a:t>
+            </a:r>
+            <a:r>
+              <a:rPr sz="2000" b="0">
+                <a:solidFill>
+                  <a:srgbClr val="1F2D3A"/>
+                </a:solidFill>
+              </a:rPr>
+              <a:t> olarak yaz (bulgu · önem · düzeltme · tarih) → 12. haftanın küçük modeli</a:t>
+            </a:r>
+          </a:p>
+        </p:txBody>
+      </p:sp>
+      <p:sp>
+        <p:nvSpPr>
+          <p:cNvPr id="9" name="TextBox 8"/>
+          <p:cNvSpPr txBox="1"/>
+          <p:nvPr/>
+        </p:nvSpPr>
+        <p:spPr>
+          <a:xfrm>
+            <a:off x="640080" y="3534664"/>
+            <a:ext cx="10911535" cy="439928"/>
+          </a:xfrm>
+          <a:prstGeom prst="rect">
+            <a:avLst/>
+          </a:prstGeom>
+          <a:noFill/>
+        </p:spPr>
+        <p:txBody>
+          <a:bodyPr wrap="square" lIns="45720" rIns="45720">
+            <a:spAutoFit/>
+          </a:bodyPr>
+          <a:lstStyle/>
+          <a:p>
+            <a:pPr algn="l"/>
+            <a:r>
+              <a:rPr sz="2000" b="0">
+                <a:solidFill>
+                  <a:srgbClr val="1F2D3A"/>
+                </a:solidFill>
+              </a:rPr>
+              <a:t>Final bölümleri: S6 · S8 · S11 · S14 · S15 · S16 sonuç · S17</a:t>
             </a:r>
           </a:p>
         </p:txBody>
@@ -5027,7 +5397,7 @@
                   <a:srgbClr val="006D77"/>
                 </a:solidFill>
               </a:rPr>
-              <a:t>Madde · tehdit modeli</a:t>
+              <a:t>Gelecek hafta</a:t>
             </a:r>
           </a:p>
         </p:txBody>
@@ -5041,7 +5411,41 @@
         <p:spPr>
           <a:xfrm>
             <a:off x="640080" y="1325880"/>
-            <a:ext cx="10911535" cy="1219200"/>
+            <a:ext cx="10911535" cy="439928"/>
+          </a:xfrm>
+          <a:prstGeom prst="rect">
+            <a:avLst/>
+          </a:prstGeom>
+          <a:noFill/>
+        </p:spPr>
+        <p:txBody>
+          <a:bodyPr wrap="square" lIns="45720" rIns="45720">
+            <a:spAutoFit/>
+          </a:bodyPr>
+          <a:lstStyle/>
+          <a:p>
+            <a:pPr algn="l"/>
+            <a:r>
+              <a:rPr sz="2000" b="1">
+                <a:solidFill>
+                  <a:srgbClr val="1F2D3A"/>
+                </a:solidFill>
+              </a:rPr>
+              <a:t>Hafta 8 — Ara sınav haftası: Quiz-1</a:t>
+            </a:r>
+          </a:p>
+        </p:txBody>
+      </p:sp>
+      <p:sp>
+        <p:nvSpPr>
+          <p:cNvPr id="8" name="TextBox 7"/>
+          <p:cNvSpPr txBox="1"/>
+          <p:nvPr/>
+        </p:nvSpPr>
+        <p:spPr>
+          <a:xfrm>
+            <a:off x="640080" y="1875536"/>
+            <a:ext cx="10911535" cy="843280"/>
           </a:xfrm>
           <a:prstGeom prst="rect">
             <a:avLst/>
@@ -5073,7 +5477,7 @@
                   <a:srgbClr val="1F2D3A"/>
                 </a:solidFill>
               </a:rPr>
-              <a:t>STRIDE / saldırı ağacı.</a:t>
+              <a:t>Kapsam: 1–6. haftalar</a:t>
             </a:r>
           </a:p>
           <a:p>
@@ -5096,38 +5500,7 @@
                   <a:srgbClr val="1F2D3A"/>
                 </a:solidFill>
               </a:rPr>
-              <a:t>Her tehdide bir önlem.</a:t>
-            </a:r>
-          </a:p>
-          <a:p>
-            <a:pPr>
-              <a:spcAft>
-                <a:spcPts val="300"/>
-              </a:spcAft>
-            </a:pPr>
-            <a:r>
-              <a:rPr sz="2000" b="1">
-                <a:solidFill>
-                  <a:srgbClr val="006D77"/>
-                </a:solidFill>
-              </a:rPr>
-              <a:t>• </a:t>
-            </a:r>
-            <a:r>
-              <a:rPr sz="2000" b="1">
-                <a:solidFill>
-                  <a:srgbClr val="1F2D3A"/>
-                </a:solidFill>
-              </a:rPr>
-              <a:t>Kanıt:</a:t>
-            </a:r>
-            <a:r>
-              <a:rPr sz="2000" b="0">
-                <a:solidFill>
-                  <a:srgbClr val="1F2D3A"/>
-                </a:solidFill>
-              </a:rPr>
-              <a:t> S4 tehdit tablosu.</a:t>
+              <a:t>Çalışma rehberi ve örnek sorular: 8. hafta sayfası</a:t>
             </a:r>
           </a:p>
         </p:txBody>
@@ -5143,6 +5516,14 @@
 <file path=ppt/slides/slide15.xml><?xml version="1.0" encoding="utf-8"?>
 <p:sld xmlns:a="http://schemas.openxmlformats.org/drawingml/2006/main" xmlns:p="http://schemas.openxmlformats.org/presentationml/2006/main" xmlns:r="http://schemas.openxmlformats.org/officeDocument/2006/relationships">
   <p:cSld>
+    <p:bg>
+      <p:bgPr>
+        <a:solidFill>
+          <a:srgbClr val="006D77"/>
+        </a:solidFill>
+        <a:effectLst/>
+      </p:bgPr>
+    </p:bg>
     <p:spTree>
       <p:nvGrpSpPr>
         <p:cNvPr id="1" name=""/>
@@ -5150,33 +5531,9 @@
         <p:nvPr/>
       </p:nvGrpSpPr>
       <p:grpSpPr/>
-      <p:pic>
-        <p:nvPicPr>
-          <p:cNvPr id="2" name="Picture 1" descr="rteu_logo_kucuk.jpg"/>
-          <p:cNvPicPr>
-            <a:picLocks noChangeAspect="1"/>
-          </p:cNvPicPr>
-          <p:nvPr/>
-        </p:nvPicPr>
-        <p:blipFill>
-          <a:blip r:embed="rId2"/>
-          <a:stretch>
-            <a:fillRect/>
-          </a:stretch>
-        </p:blipFill>
-        <p:spPr>
-          <a:xfrm>
-            <a:off x="640080" y="164592"/>
-            <a:ext cx="242773" cy="329184"/>
-          </a:xfrm>
-          <a:prstGeom prst="rect">
-            <a:avLst/>
-          </a:prstGeom>
-        </p:spPr>
-      </p:pic>
-      <p:sp>
-        <p:nvSpPr>
-          <p:cNvPr id="3" name="TextBox 2"/>
+      <p:sp>
+        <p:nvSpPr>
+          <p:cNvPr id="2" name="TextBox 1"/>
           <p:cNvSpPr txBox="1"/>
           <p:nvPr/>
         </p:nvSpPr>
@@ -5199,7 +5556,7 @@
             <a:r>
               <a:rPr sz="1100" b="0">
                 <a:solidFill>
-                  <a:srgbClr val="5B6770"/>
+                  <a:srgbClr val="D8F0F2"/>
                 </a:solidFill>
               </a:rPr>
               <a:t>CEN429 Güvenli Programlama · Hafta 7</a:t>
@@ -5209,7 +5566,7 @@
       </p:sp>
       <p:sp>
         <p:nvSpPr>
-          <p:cNvPr id="4" name="TextBox 3"/>
+          <p:cNvPr id="3" name="TextBox 2"/>
           <p:cNvSpPr txBox="1"/>
           <p:nvPr/>
         </p:nvSpPr>
@@ -5232,7 +5589,7 @@
             <a:r>
               <a:rPr sz="1000" b="0">
                 <a:solidFill>
-                  <a:srgbClr val="5B6770"/>
+                  <a:srgbClr val="D8F0F2"/>
                 </a:solidFill>
               </a:rPr>
               <a:t>RTEÜ Bilgisayar Mühendisliği · 2026-2027 Güz</a:t>
@@ -5242,7 +5599,7 @@
       </p:sp>
       <p:sp>
         <p:nvSpPr>
-          <p:cNvPr id="5" name="TextBox 4"/>
+          <p:cNvPr id="4" name="TextBox 3"/>
           <p:cNvSpPr txBox="1"/>
           <p:nvPr/>
         </p:nvSpPr>
@@ -5266,7 +5623,7 @@
             <a:r>
               <a:rPr sz="1000" b="0">
                 <a:solidFill>
-                  <a:srgbClr val="5B6770"/>
+                  <a:srgbClr val="D8F0F2"/>
                 </a:solidFill>
               </a:rPr>
               <a:t>15</a:t>
@@ -5276,133 +5633,34 @@
       </p:sp>
       <p:sp>
         <p:nvSpPr>
-          <p:cNvPr id="6" name="TextBox 5"/>
-          <p:cNvSpPr txBox="1"/>
-          <p:nvPr/>
-        </p:nvSpPr>
-        <p:spPr>
-          <a:xfrm>
-            <a:off x="640080" y="548640"/>
-            <a:ext cx="10911535" cy="731520"/>
-          </a:xfrm>
-          <a:prstGeom prst="rect">
-            <a:avLst/>
-          </a:prstGeom>
-          <a:noFill/>
-        </p:spPr>
-        <p:txBody>
-          <a:bodyPr wrap="square" lIns="45720" rIns="45720" anchor="ctr">
-            <a:spAutoFit/>
-          </a:bodyPr>
-          <a:lstStyle/>
-          <a:p>
-            <a:r>
-              <a:rPr sz="3000" b="1">
-                <a:solidFill>
-                  <a:srgbClr val="006D77"/>
-                </a:solidFill>
-              </a:rPr>
-              <a:t>Madde · varlık yönetimi</a:t>
-            </a:r>
-          </a:p>
-        </p:txBody>
-      </p:sp>
-      <p:sp>
-        <p:nvSpPr>
-          <p:cNvPr id="7" name="TextBox 6"/>
-          <p:cNvSpPr txBox="1"/>
-          <p:nvPr/>
-        </p:nvSpPr>
-        <p:spPr>
-          <a:xfrm>
-            <a:off x="640080" y="1325880"/>
-            <a:ext cx="10911535" cy="1219200"/>
-          </a:xfrm>
-          <a:prstGeom prst="rect">
-            <a:avLst/>
-          </a:prstGeom>
-          <a:noFill/>
-        </p:spPr>
-        <p:txBody>
-          <a:bodyPr wrap="square" lIns="45720" rIns="45720">
-            <a:spAutoFit/>
-          </a:bodyPr>
-          <a:lstStyle/>
-          <a:p>
-            <a:pPr>
-              <a:spcAft>
-                <a:spcPts val="300"/>
-              </a:spcAft>
-            </a:pPr>
-            <a:r>
-              <a:rPr sz="2000" b="1">
-                <a:solidFill>
-                  <a:srgbClr val="006D77"/>
-                </a:solidFill>
-              </a:rPr>
-              <a:t>• </a:t>
-            </a:r>
-            <a:r>
-              <a:rPr sz="2000" b="0">
-                <a:solidFill>
-                  <a:srgbClr val="1F2D3A"/>
-                </a:solidFill>
-              </a:rPr>
-              <a:t>Varlık listesi + C/I/I+.</a:t>
-            </a:r>
-          </a:p>
-          <a:p>
-            <a:pPr>
-              <a:spcAft>
-                <a:spcPts val="300"/>
-              </a:spcAft>
-            </a:pPr>
-            <a:r>
-              <a:rPr sz="2000" b="1">
-                <a:solidFill>
-                  <a:srgbClr val="006D77"/>
-                </a:solidFill>
-              </a:rPr>
-              <a:t>• </a:t>
-            </a:r>
-            <a:r>
-              <a:rPr sz="2000" b="0">
-                <a:solidFill>
-                  <a:srgbClr val="1F2D3A"/>
-                </a:solidFill>
-              </a:rPr>
-              <a:t>Yaşam döngüsü.</a:t>
-            </a:r>
-          </a:p>
-          <a:p>
-            <a:pPr>
-              <a:spcAft>
-                <a:spcPts val="300"/>
-              </a:spcAft>
-            </a:pPr>
-            <a:r>
-              <a:rPr sz="2000" b="1">
-                <a:solidFill>
-                  <a:srgbClr val="006D77"/>
-                </a:solidFill>
-              </a:rPr>
-              <a:t>• </a:t>
-            </a:r>
-            <a:r>
-              <a:rPr sz="2000" b="1">
-                <a:solidFill>
-                  <a:srgbClr val="1F2D3A"/>
-                </a:solidFill>
-              </a:rPr>
-              <a:t>Kanıt:</a:t>
-            </a:r>
-            <a:r>
-              <a:rPr sz="2000" b="0">
-                <a:solidFill>
-                  <a:srgbClr val="1F2D3A"/>
-                </a:solidFill>
-              </a:rPr>
-              <a:t> S5.</a:t>
+          <p:cNvPr id="5" name="TextBox 4"/>
+          <p:cNvSpPr txBox="1"/>
+          <p:nvPr/>
+        </p:nvSpPr>
+        <p:spPr>
+          <a:xfrm>
+            <a:off x="640080" y="2743200"/>
+            <a:ext cx="10911535" cy="1280160"/>
+          </a:xfrm>
+          <a:prstGeom prst="rect">
+            <a:avLst/>
+          </a:prstGeom>
+          <a:noFill/>
+        </p:spPr>
+        <p:txBody>
+          <a:bodyPr wrap="square" lIns="45720" rIns="45720">
+            <a:spAutoFit/>
+          </a:bodyPr>
+          <a:lstStyle/>
+          <a:p>
+            <a:pPr algn="l"/>
+            <a:r>
+              <a:rPr sz="4000" b="1">
+                <a:solidFill>
+                  <a:srgbClr val="FFFFFF"/>
+                </a:solidFill>
+              </a:rPr>
+              <a:t>Ek · Rubrik madde madde</a:t>
             </a:r>
           </a:p>
         </p:txBody>
@@ -5577,7 +5835,7 @@
                   <a:srgbClr val="006D77"/>
                 </a:solidFill>
               </a:rPr>
-              <a:t>Madde · temel korumalar</a:t>
+              <a:t>Rubrik neyi ölçer?</a:t>
             </a:r>
           </a:p>
         </p:txBody>
@@ -5591,7 +5849,57 @@
         <p:spPr>
           <a:xfrm>
             <a:off x="640080" y="1325880"/>
-            <a:ext cx="10911535" cy="843280"/>
+            <a:ext cx="10911535" cy="439928"/>
+          </a:xfrm>
+          <a:prstGeom prst="rect">
+            <a:avLst/>
+          </a:prstGeom>
+          <a:noFill/>
+        </p:spPr>
+        <p:txBody>
+          <a:bodyPr wrap="square" lIns="45720" rIns="45720">
+            <a:spAutoFit/>
+          </a:bodyPr>
+          <a:lstStyle/>
+          <a:p>
+            <a:pPr algn="l"/>
+            <a:r>
+              <a:rPr sz="2000" b="0">
+                <a:solidFill>
+                  <a:srgbClr val="1F2D3A"/>
+                </a:solidFill>
+              </a:rPr>
+              <a:t>Vize gösterimi projenizin </a:t>
+            </a:r>
+            <a:r>
+              <a:rPr sz="2000" b="1">
+                <a:solidFill>
+                  <a:srgbClr val="1F2D3A"/>
+                </a:solidFill>
+              </a:rPr>
+              <a:t>ilk yarısını</a:t>
+            </a:r>
+            <a:r>
+              <a:rPr sz="2000" b="0">
+                <a:solidFill>
+                  <a:srgbClr val="1F2D3A"/>
+                </a:solidFill>
+              </a:rPr>
+              <a:t> ölçer:</a:t>
+            </a:r>
+          </a:p>
+        </p:txBody>
+      </p:sp>
+      <p:sp>
+        <p:nvSpPr>
+          <p:cNvPr id="8" name="TextBox 7"/>
+          <p:cNvSpPr txBox="1"/>
+          <p:nvPr/>
+        </p:nvSpPr>
+        <p:spPr>
+          <a:xfrm>
+            <a:off x="640080" y="1875536"/>
+            <a:ext cx="10911535" cy="1595120"/>
           </a:xfrm>
           <a:prstGeom prst="rect">
             <a:avLst/>
@@ -5623,7 +5931,7 @@
                   <a:srgbClr val="1F2D3A"/>
                 </a:solidFill>
               </a:rPr>
-              <a:t>Kripto (S8, kısmi), güvenli kod (S9, kısmi).</a:t>
+              <a:t>ürün, mimari, tehdit modeli</a:t>
             </a:r>
           </a:p>
           <a:p>
@@ -5641,12 +5949,50 @@
               <a:t>• </a:t>
             </a:r>
             <a:r>
+              <a:rPr sz="2000" b="0">
+                <a:solidFill>
+                  <a:srgbClr val="1F2D3A"/>
+                </a:solidFill>
+              </a:rPr>
+              <a:t>varlık yönetimi</a:t>
+            </a:r>
+          </a:p>
+          <a:p>
+            <a:pPr>
+              <a:spcAft>
+                <a:spcPts val="300"/>
+              </a:spcAft>
+            </a:pPr>
+            <a:r>
               <a:rPr sz="2000" b="1">
                 <a:solidFill>
+                  <a:srgbClr val="006D77"/>
+                </a:solidFill>
+              </a:rPr>
+              <a:t>• </a:t>
+            </a:r>
+            <a:r>
+              <a:rPr sz="2000" b="0">
+                <a:solidFill>
                   <a:srgbClr val="1F2D3A"/>
                 </a:solidFill>
               </a:rPr>
-              <a:t>Kanıt:</a:t>
+              <a:t>temel korumalar</a:t>
+            </a:r>
+          </a:p>
+          <a:p>
+            <a:pPr>
+              <a:spcAft>
+                <a:spcPts val="300"/>
+              </a:spcAft>
+            </a:pPr>
+            <a:r>
+              <a:rPr sz="2000" b="1">
+                <a:solidFill>
+                  <a:srgbClr val="006D77"/>
+                </a:solidFill>
+              </a:rPr>
+              <a:t>• </a:t>
             </a:r>
             <a:r>
               <a:rPr sz="2000" b="0">
@@ -5654,7 +6000,7 @@
                   <a:srgbClr val="1F2D3A"/>
                 </a:solidFill>
               </a:rPr>
-              <a:t> kod + test.</a:t>
+              <a:t>belge ve sunum</a:t>
             </a:r>
           </a:p>
         </p:txBody>
@@ -5829,7 +6175,7 @@
                   <a:srgbClr val="006D77"/>
                 </a:solidFill>
               </a:rPr>
-              <a:t>Madde · belge ve sunum</a:t>
+              <a:t>Madde · ürün ve mimari</a:t>
             </a:r>
           </a:p>
         </p:txBody>
@@ -5875,7 +6221,7 @@
                   <a:srgbClr val="1F2D3A"/>
                 </a:solidFill>
               </a:rPr>
-              <a:t>Tutarlılık, sürüm kimliği.</a:t>
+              <a:t>Ne yapıyor, hangi bileşenler?</a:t>
             </a:r>
           </a:p>
           <a:p>
@@ -5898,7 +6244,7 @@
                   <a:srgbClr val="1F2D3A"/>
                 </a:solidFill>
               </a:rPr>
-              <a:t>Anlaşılır anlatım.</a:t>
+              <a:t>Tek şema + en kritik üç varlık.</a:t>
             </a:r>
           </a:p>
           <a:p>
@@ -5929,7 +6275,7 @@
                   <a:srgbClr val="1F2D3A"/>
                 </a:solidFill>
               </a:rPr>
-              <a:t> kılavuzun tamamı.</a:t>
+              <a:t> S2–S4 belgesi.</a:t>
             </a:r>
           </a:p>
         </p:txBody>
@@ -5945,14 +6291,6 @@
 <file path=ppt/slides/slide18.xml><?xml version="1.0" encoding="utf-8"?>
 <p:sld xmlns:a="http://schemas.openxmlformats.org/drawingml/2006/main" xmlns:p="http://schemas.openxmlformats.org/presentationml/2006/main" xmlns:r="http://schemas.openxmlformats.org/officeDocument/2006/relationships">
   <p:cSld>
-    <p:bg>
-      <p:bgPr>
-        <a:solidFill>
-          <a:srgbClr val="006D77"/>
-        </a:solidFill>
-        <a:effectLst/>
-      </p:bgPr>
-    </p:bg>
     <p:spTree>
       <p:nvGrpSpPr>
         <p:cNvPr id="1" name=""/>
@@ -5960,9 +6298,33 @@
         <p:nvPr/>
       </p:nvGrpSpPr>
       <p:grpSpPr/>
-      <p:sp>
-        <p:nvSpPr>
-          <p:cNvPr id="2" name="TextBox 1"/>
+      <p:pic>
+        <p:nvPicPr>
+          <p:cNvPr id="2" name="Picture 1" descr="rteu_logo_kucuk.jpg"/>
+          <p:cNvPicPr>
+            <a:picLocks noChangeAspect="1"/>
+          </p:cNvPicPr>
+          <p:nvPr/>
+        </p:nvPicPr>
+        <p:blipFill>
+          <a:blip r:embed="rId2"/>
+          <a:stretch>
+            <a:fillRect/>
+          </a:stretch>
+        </p:blipFill>
+        <p:spPr>
+          <a:xfrm>
+            <a:off x="640080" y="164592"/>
+            <a:ext cx="242773" cy="329184"/>
+          </a:xfrm>
+          <a:prstGeom prst="rect">
+            <a:avLst/>
+          </a:prstGeom>
+        </p:spPr>
+      </p:pic>
+      <p:sp>
+        <p:nvSpPr>
+          <p:cNvPr id="3" name="TextBox 2"/>
           <p:cNvSpPr txBox="1"/>
           <p:nvPr/>
         </p:nvSpPr>
@@ -5985,7 +6347,7 @@
             <a:r>
               <a:rPr sz="1100" b="0">
                 <a:solidFill>
-                  <a:srgbClr val="D8F0F2"/>
+                  <a:srgbClr val="5B6770"/>
                 </a:solidFill>
               </a:rPr>
               <a:t>CEN429 Güvenli Programlama · Hafta 7</a:t>
@@ -5995,7 +6357,7 @@
       </p:sp>
       <p:sp>
         <p:nvSpPr>
-          <p:cNvPr id="3" name="TextBox 2"/>
+          <p:cNvPr id="4" name="TextBox 3"/>
           <p:cNvSpPr txBox="1"/>
           <p:nvPr/>
         </p:nvSpPr>
@@ -6018,7 +6380,7 @@
             <a:r>
               <a:rPr sz="1000" b="0">
                 <a:solidFill>
-                  <a:srgbClr val="D8F0F2"/>
+                  <a:srgbClr val="5B6770"/>
                 </a:solidFill>
               </a:rPr>
               <a:t>RTEÜ Bilgisayar Mühendisliği · 2026-2027 Güz</a:t>
@@ -6028,7 +6390,7 @@
       </p:sp>
       <p:sp>
         <p:nvSpPr>
-          <p:cNvPr id="4" name="TextBox 3"/>
+          <p:cNvPr id="5" name="TextBox 4"/>
           <p:cNvSpPr txBox="1"/>
           <p:nvPr/>
         </p:nvSpPr>
@@ -6052,7 +6414,7 @@
             <a:r>
               <a:rPr sz="1000" b="0">
                 <a:solidFill>
-                  <a:srgbClr val="D8F0F2"/>
+                  <a:srgbClr val="5B6770"/>
                 </a:solidFill>
               </a:rPr>
               <a:t>18</a:t>
@@ -6062,34 +6424,133 @@
       </p:sp>
       <p:sp>
         <p:nvSpPr>
-          <p:cNvPr id="5" name="TextBox 4"/>
-          <p:cNvSpPr txBox="1"/>
-          <p:nvPr/>
-        </p:nvSpPr>
-        <p:spPr>
-          <a:xfrm>
-            <a:off x="640080" y="2743200"/>
-            <a:ext cx="10911535" cy="1280160"/>
-          </a:xfrm>
-          <a:prstGeom prst="rect">
-            <a:avLst/>
-          </a:prstGeom>
-          <a:noFill/>
-        </p:spPr>
-        <p:txBody>
-          <a:bodyPr wrap="square" lIns="45720" rIns="45720">
-            <a:spAutoFit/>
-          </a:bodyPr>
-          <a:lstStyle/>
-          <a:p>
-            <a:pPr algn="l"/>
-            <a:r>
-              <a:rPr sz="4000" b="1">
-                <a:solidFill>
-                  <a:srgbClr val="FFFFFF"/>
-                </a:solidFill>
-              </a:rPr>
-              <a:t>Ek · Gösterim akışı</a:t>
+          <p:cNvPr id="6" name="TextBox 5"/>
+          <p:cNvSpPr txBox="1"/>
+          <p:nvPr/>
+        </p:nvSpPr>
+        <p:spPr>
+          <a:xfrm>
+            <a:off x="640080" y="548640"/>
+            <a:ext cx="10911535" cy="731520"/>
+          </a:xfrm>
+          <a:prstGeom prst="rect">
+            <a:avLst/>
+          </a:prstGeom>
+          <a:noFill/>
+        </p:spPr>
+        <p:txBody>
+          <a:bodyPr wrap="square" lIns="45720" rIns="45720" anchor="ctr">
+            <a:spAutoFit/>
+          </a:bodyPr>
+          <a:lstStyle/>
+          <a:p>
+            <a:r>
+              <a:rPr sz="3000" b="1">
+                <a:solidFill>
+                  <a:srgbClr val="006D77"/>
+                </a:solidFill>
+              </a:rPr>
+              <a:t>Madde · tehdit modeli</a:t>
+            </a:r>
+          </a:p>
+        </p:txBody>
+      </p:sp>
+      <p:sp>
+        <p:nvSpPr>
+          <p:cNvPr id="7" name="TextBox 6"/>
+          <p:cNvSpPr txBox="1"/>
+          <p:nvPr/>
+        </p:nvSpPr>
+        <p:spPr>
+          <a:xfrm>
+            <a:off x="640080" y="1325880"/>
+            <a:ext cx="10911535" cy="1219200"/>
+          </a:xfrm>
+          <a:prstGeom prst="rect">
+            <a:avLst/>
+          </a:prstGeom>
+          <a:noFill/>
+        </p:spPr>
+        <p:txBody>
+          <a:bodyPr wrap="square" lIns="45720" rIns="45720">
+            <a:spAutoFit/>
+          </a:bodyPr>
+          <a:lstStyle/>
+          <a:p>
+            <a:pPr>
+              <a:spcAft>
+                <a:spcPts val="300"/>
+              </a:spcAft>
+            </a:pPr>
+            <a:r>
+              <a:rPr sz="2000" b="1">
+                <a:solidFill>
+                  <a:srgbClr val="006D77"/>
+                </a:solidFill>
+              </a:rPr>
+              <a:t>• </a:t>
+            </a:r>
+            <a:r>
+              <a:rPr sz="2000" b="0">
+                <a:solidFill>
+                  <a:srgbClr val="1F2D3A"/>
+                </a:solidFill>
+              </a:rPr>
+              <a:t>STRIDE / saldırı ağacı.</a:t>
+            </a:r>
+          </a:p>
+          <a:p>
+            <a:pPr>
+              <a:spcAft>
+                <a:spcPts val="300"/>
+              </a:spcAft>
+            </a:pPr>
+            <a:r>
+              <a:rPr sz="2000" b="1">
+                <a:solidFill>
+                  <a:srgbClr val="006D77"/>
+                </a:solidFill>
+              </a:rPr>
+              <a:t>• </a:t>
+            </a:r>
+            <a:r>
+              <a:rPr sz="2000" b="0">
+                <a:solidFill>
+                  <a:srgbClr val="1F2D3A"/>
+                </a:solidFill>
+              </a:rPr>
+              <a:t>Her tehdide bir önlem.</a:t>
+            </a:r>
+          </a:p>
+          <a:p>
+            <a:pPr>
+              <a:spcAft>
+                <a:spcPts val="300"/>
+              </a:spcAft>
+            </a:pPr>
+            <a:r>
+              <a:rPr sz="2000" b="1">
+                <a:solidFill>
+                  <a:srgbClr val="006D77"/>
+                </a:solidFill>
+              </a:rPr>
+              <a:t>• </a:t>
+            </a:r>
+            <a:r>
+              <a:rPr sz="2000" b="1">
+                <a:solidFill>
+                  <a:srgbClr val="1F2D3A"/>
+                </a:solidFill>
+              </a:rPr>
+              <a:t>Kanıt:</a:t>
+            </a:r>
+            <a:r>
+              <a:rPr sz="2000" b="0">
+                <a:solidFill>
+                  <a:srgbClr val="1F2D3A"/>
+                </a:solidFill>
+              </a:rPr>
+              <a:t> S4 tehdit tablosu.</a:t>
             </a:r>
           </a:p>
         </p:txBody>
@@ -6264,7 +6725,7 @@
                   <a:srgbClr val="006D77"/>
                 </a:solidFill>
               </a:rPr>
-              <a:t>Akış · 1. özet</a:t>
+              <a:t>Madde · varlık yönetimi</a:t>
             </a:r>
           </a:p>
         </p:txBody>
@@ -6278,7 +6739,7 @@
         <p:spPr>
           <a:xfrm>
             <a:off x="640080" y="1325880"/>
-            <a:ext cx="10911535" cy="843280"/>
+            <a:ext cx="10911535" cy="1219200"/>
           </a:xfrm>
           <a:prstGeom prst="rect">
             <a:avLst/>
@@ -6310,7 +6771,7 @@
                   <a:srgbClr val="1F2D3A"/>
                 </a:solidFill>
               </a:rPr>
-              <a:t>Ürün, mimari, en kritik üç varlık.</a:t>
+              <a:t>Varlık listesi + C/I/I+.</a:t>
             </a:r>
           </a:p>
           <a:p>
@@ -6333,7 +6794,38 @@
                   <a:srgbClr val="1F2D3A"/>
                 </a:solidFill>
               </a:rPr>
-              <a:t>Tek şema, iki dakika.</a:t>
+              <a:t>Yaşam döngüsü.</a:t>
+            </a:r>
+          </a:p>
+          <a:p>
+            <a:pPr>
+              <a:spcAft>
+                <a:spcPts val="300"/>
+              </a:spcAft>
+            </a:pPr>
+            <a:r>
+              <a:rPr sz="2000" b="1">
+                <a:solidFill>
+                  <a:srgbClr val="006D77"/>
+                </a:solidFill>
+              </a:rPr>
+              <a:t>• </a:t>
+            </a:r>
+            <a:r>
+              <a:rPr sz="2000" b="1">
+                <a:solidFill>
+                  <a:srgbClr val="1F2D3A"/>
+                </a:solidFill>
+              </a:rPr>
+              <a:t>Kanıt:</a:t>
+            </a:r>
+            <a:r>
+              <a:rPr sz="2000" b="0">
+                <a:solidFill>
+                  <a:srgbClr val="1F2D3A"/>
+                </a:solidFill>
+              </a:rPr>
+              <a:t> S5.</a:t>
             </a:r>
           </a:p>
         </p:txBody>
@@ -6863,7 +7355,7 @@
                   <a:srgbClr val="006D77"/>
                 </a:solidFill>
               </a:rPr>
-              <a:t>Akış · 2. tehdit modeli</a:t>
+              <a:t>Madde · temel korumalar</a:t>
             </a:r>
           </a:p>
         </p:txBody>
@@ -6909,7 +7401,7 @@
                   <a:srgbClr val="1F2D3A"/>
                 </a:solidFill>
               </a:rPr>
-              <a:t>STRIDE ve saldırı ağacından bir örnek.</a:t>
+              <a:t>Kripto (S8, kısmi), güvenli kod (S9, kısmi).</a:t>
             </a:r>
           </a:p>
           <a:p>
@@ -6927,12 +7419,20 @@
               <a:t>• </a:t>
             </a:r>
             <a:r>
+              <a:rPr sz="2000" b="1">
+                <a:solidFill>
+                  <a:srgbClr val="1F2D3A"/>
+                </a:solidFill>
+              </a:rPr>
+              <a:t>Kanıt:</a:t>
+            </a:r>
+            <a:r>
               <a:rPr sz="2000" b="0">
                 <a:solidFill>
                   <a:srgbClr val="1F2D3A"/>
                 </a:solidFill>
               </a:rPr>
-              <a:t>"Bu tehdide şu önlem."</a:t>
+              <a:t> kod + test.</a:t>
             </a:r>
           </a:p>
         </p:txBody>
@@ -7107,7 +7607,7 @@
                   <a:srgbClr val="006D77"/>
                 </a:solidFill>
               </a:rPr>
-              <a:t>Akış · 3. canlı gösterim</a:t>
+              <a:t>Madde · belge ve sunum</a:t>
             </a:r>
           </a:p>
         </p:txBody>
@@ -7121,7 +7621,7 @@
         <p:spPr>
           <a:xfrm>
             <a:off x="640080" y="1325880"/>
-            <a:ext cx="10911535" cy="843280"/>
+            <a:ext cx="10911535" cy="1219200"/>
           </a:xfrm>
           <a:prstGeom prst="rect">
             <a:avLst/>
@@ -7153,23 +7653,7 @@
                   <a:srgbClr val="1F2D3A"/>
                 </a:solidFill>
               </a:rPr>
-              <a:t>Bir korumayı </a:t>
-            </a:r>
-            <a:r>
-              <a:rPr sz="2000" b="1">
-                <a:solidFill>
-                  <a:srgbClr val="1F2D3A"/>
-                </a:solidFill>
-              </a:rPr>
-              <a:t>çalışırken</a:t>
-            </a:r>
-            <a:r>
-              <a:rPr sz="2000" b="0">
-                <a:solidFill>
-                  <a:srgbClr val="1F2D3A"/>
-                </a:solidFill>
-              </a:rPr>
-              <a:t> göster.</a:t>
+              <a:t>Tutarlılık, sürüm kimliği.</a:t>
             </a:r>
           </a:p>
           <a:p>
@@ -7192,7 +7676,38 @@
                   <a:srgbClr val="1F2D3A"/>
                 </a:solidFill>
               </a:rPr>
-              <a:t>Ör. şifreli veri, doğrulanan imza.</a:t>
+              <a:t>Anlaşılır anlatım.</a:t>
+            </a:r>
+          </a:p>
+          <a:p>
+            <a:pPr>
+              <a:spcAft>
+                <a:spcPts val="300"/>
+              </a:spcAft>
+            </a:pPr>
+            <a:r>
+              <a:rPr sz="2000" b="1">
+                <a:solidFill>
+                  <a:srgbClr val="006D77"/>
+                </a:solidFill>
+              </a:rPr>
+              <a:t>• </a:t>
+            </a:r>
+            <a:r>
+              <a:rPr sz="2000" b="1">
+                <a:solidFill>
+                  <a:srgbClr val="1F2D3A"/>
+                </a:solidFill>
+              </a:rPr>
+              <a:t>Kanıt:</a:t>
+            </a:r>
+            <a:r>
+              <a:rPr sz="2000" b="0">
+                <a:solidFill>
+                  <a:srgbClr val="1F2D3A"/>
+                </a:solidFill>
+              </a:rPr>
+              <a:t> kılavuzun tamamı.</a:t>
             </a:r>
           </a:p>
         </p:txBody>
@@ -7208,6 +7723,14 @@
 <file path=ppt/slides/slide22.xml><?xml version="1.0" encoding="utf-8"?>
 <p:sld xmlns:a="http://schemas.openxmlformats.org/drawingml/2006/main" xmlns:p="http://schemas.openxmlformats.org/presentationml/2006/main" xmlns:r="http://schemas.openxmlformats.org/officeDocument/2006/relationships">
   <p:cSld>
+    <p:bg>
+      <p:bgPr>
+        <a:solidFill>
+          <a:srgbClr val="006D77"/>
+        </a:solidFill>
+        <a:effectLst/>
+      </p:bgPr>
+    </p:bg>
     <p:spTree>
       <p:nvGrpSpPr>
         <p:cNvPr id="1" name=""/>
@@ -7215,33 +7738,9 @@
         <p:nvPr/>
       </p:nvGrpSpPr>
       <p:grpSpPr/>
-      <p:pic>
-        <p:nvPicPr>
-          <p:cNvPr id="2" name="Picture 1" descr="rteu_logo_kucuk.jpg"/>
-          <p:cNvPicPr>
-            <a:picLocks noChangeAspect="1"/>
-          </p:cNvPicPr>
-          <p:nvPr/>
-        </p:nvPicPr>
-        <p:blipFill>
-          <a:blip r:embed="rId2"/>
-          <a:stretch>
-            <a:fillRect/>
-          </a:stretch>
-        </p:blipFill>
-        <p:spPr>
-          <a:xfrm>
-            <a:off x="640080" y="164592"/>
-            <a:ext cx="242773" cy="329184"/>
-          </a:xfrm>
-          <a:prstGeom prst="rect">
-            <a:avLst/>
-          </a:prstGeom>
-        </p:spPr>
-      </p:pic>
-      <p:sp>
-        <p:nvSpPr>
-          <p:cNvPr id="3" name="TextBox 2"/>
+      <p:sp>
+        <p:nvSpPr>
+          <p:cNvPr id="2" name="TextBox 1"/>
           <p:cNvSpPr txBox="1"/>
           <p:nvPr/>
         </p:nvSpPr>
@@ -7264,7 +7763,7 @@
             <a:r>
               <a:rPr sz="1100" b="0">
                 <a:solidFill>
-                  <a:srgbClr val="5B6770"/>
+                  <a:srgbClr val="D8F0F2"/>
                 </a:solidFill>
               </a:rPr>
               <a:t>CEN429 Güvenli Programlama · Hafta 7</a:t>
@@ -7274,7 +7773,7 @@
       </p:sp>
       <p:sp>
         <p:nvSpPr>
-          <p:cNvPr id="4" name="TextBox 3"/>
+          <p:cNvPr id="3" name="TextBox 2"/>
           <p:cNvSpPr txBox="1"/>
           <p:nvPr/>
         </p:nvSpPr>
@@ -7297,7 +7796,7 @@
             <a:r>
               <a:rPr sz="1000" b="0">
                 <a:solidFill>
-                  <a:srgbClr val="5B6770"/>
+                  <a:srgbClr val="D8F0F2"/>
                 </a:solidFill>
               </a:rPr>
               <a:t>RTEÜ Bilgisayar Mühendisliği · 2026-2027 Güz</a:t>
@@ -7307,7 +7806,7 @@
       </p:sp>
       <p:sp>
         <p:nvSpPr>
-          <p:cNvPr id="5" name="TextBox 4"/>
+          <p:cNvPr id="4" name="TextBox 3"/>
           <p:cNvSpPr txBox="1"/>
           <p:nvPr/>
         </p:nvSpPr>
@@ -7331,7 +7830,7 @@
             <a:r>
               <a:rPr sz="1000" b="0">
                 <a:solidFill>
-                  <a:srgbClr val="5B6770"/>
+                  <a:srgbClr val="D8F0F2"/>
                 </a:solidFill>
               </a:rPr>
               <a:t>22</a:t>
@@ -7341,102 +7840,34 @@
       </p:sp>
       <p:sp>
         <p:nvSpPr>
-          <p:cNvPr id="6" name="TextBox 5"/>
-          <p:cNvSpPr txBox="1"/>
-          <p:nvPr/>
-        </p:nvSpPr>
-        <p:spPr>
-          <a:xfrm>
-            <a:off x="640080" y="548640"/>
-            <a:ext cx="10911535" cy="731520"/>
-          </a:xfrm>
-          <a:prstGeom prst="rect">
-            <a:avLst/>
-          </a:prstGeom>
-          <a:noFill/>
-        </p:spPr>
-        <p:txBody>
-          <a:bodyPr wrap="square" lIns="45720" rIns="45720" anchor="ctr">
-            <a:spAutoFit/>
-          </a:bodyPr>
-          <a:lstStyle/>
-          <a:p>
-            <a:r>
-              <a:rPr sz="3000" b="1">
-                <a:solidFill>
-                  <a:srgbClr val="006D77"/>
-                </a:solidFill>
-              </a:rPr>
-              <a:t>Akış · 4. kanıt</a:t>
-            </a:r>
-          </a:p>
-        </p:txBody>
-      </p:sp>
-      <p:sp>
-        <p:nvSpPr>
-          <p:cNvPr id="7" name="TextBox 6"/>
-          <p:cNvSpPr txBox="1"/>
-          <p:nvPr/>
-        </p:nvSpPr>
-        <p:spPr>
-          <a:xfrm>
-            <a:off x="640080" y="1325880"/>
-            <a:ext cx="10911535" cy="843280"/>
-          </a:xfrm>
-          <a:prstGeom prst="rect">
-            <a:avLst/>
-          </a:prstGeom>
-          <a:noFill/>
-        </p:spPr>
-        <p:txBody>
-          <a:bodyPr wrap="square" lIns="45720" rIns="45720">
-            <a:spAutoFit/>
-          </a:bodyPr>
-          <a:lstStyle/>
-          <a:p>
-            <a:pPr>
-              <a:spcAft>
-                <a:spcPts val="300"/>
-              </a:spcAft>
-            </a:pPr>
-            <a:r>
-              <a:rPr sz="2000" b="1">
-                <a:solidFill>
-                  <a:srgbClr val="006D77"/>
-                </a:solidFill>
-              </a:rPr>
-              <a:t>• </a:t>
-            </a:r>
-            <a:r>
-              <a:rPr sz="2000" b="0">
-                <a:solidFill>
-                  <a:srgbClr val="1F2D3A"/>
-                </a:solidFill>
-              </a:rPr>
-              <a:t>Testler, koruma tablosu.</a:t>
-            </a:r>
-          </a:p>
-          <a:p>
-            <a:pPr>
-              <a:spcAft>
-                <a:spcPts val="300"/>
-              </a:spcAft>
-            </a:pPr>
-            <a:r>
-              <a:rPr sz="2000" b="1">
-                <a:solidFill>
-                  <a:srgbClr val="006D77"/>
-                </a:solidFill>
-              </a:rPr>
-              <a:t>• </a:t>
-            </a:r>
-            <a:r>
-              <a:rPr sz="2000" b="0">
-                <a:solidFill>
-                  <a:srgbClr val="1F2D3A"/>
-                </a:solidFill>
-              </a:rPr>
-              <a:t>"Şu komutla şu çıktı."</a:t>
+          <p:cNvPr id="5" name="TextBox 4"/>
+          <p:cNvSpPr txBox="1"/>
+          <p:nvPr/>
+        </p:nvSpPr>
+        <p:spPr>
+          <a:xfrm>
+            <a:off x="640080" y="2743200"/>
+            <a:ext cx="10911535" cy="1280160"/>
+          </a:xfrm>
+          <a:prstGeom prst="rect">
+            <a:avLst/>
+          </a:prstGeom>
+          <a:noFill/>
+        </p:spPr>
+        <p:txBody>
+          <a:bodyPr wrap="square" lIns="45720" rIns="45720">
+            <a:spAutoFit/>
+          </a:bodyPr>
+          <a:lstStyle/>
+          <a:p>
+            <a:pPr algn="l"/>
+            <a:r>
+              <a:rPr sz="4000" b="1">
+                <a:solidFill>
+                  <a:srgbClr val="FFFFFF"/>
+                </a:solidFill>
+              </a:rPr>
+              <a:t>Ek · Gösterim akışı</a:t>
             </a:r>
           </a:p>
         </p:txBody>
@@ -7611,7 +8042,7 @@
                   <a:srgbClr val="006D77"/>
                 </a:solidFill>
               </a:rPr>
-              <a:t>Akış · 5. kalan risk</a:t>
+              <a:t>Akış · 1. özet</a:t>
             </a:r>
           </a:p>
         </p:txBody>
@@ -7657,7 +8088,7 @@
                   <a:srgbClr val="1F2D3A"/>
                 </a:solidFill>
               </a:rPr>
-              <a:t>Neyi bilerek kapsam dışı bıraktınız?</a:t>
+              <a:t>Ürün, mimari, en kritik üç varlık.</a:t>
             </a:r>
           </a:p>
           <a:p>
@@ -7680,7 +8111,7 @@
                   <a:srgbClr val="1F2D3A"/>
                 </a:solidFill>
               </a:rPr>
-              <a:t>Dürüst analiz puan getirir.</a:t>
+              <a:t>Tek şema, iki dakika.</a:t>
             </a:r>
           </a:p>
         </p:txBody>
@@ -7696,14 +8127,6 @@
 <file path=ppt/slides/slide24.xml><?xml version="1.0" encoding="utf-8"?>
 <p:sld xmlns:a="http://schemas.openxmlformats.org/drawingml/2006/main" xmlns:p="http://schemas.openxmlformats.org/presentationml/2006/main" xmlns:r="http://schemas.openxmlformats.org/officeDocument/2006/relationships">
   <p:cSld>
-    <p:bg>
-      <p:bgPr>
-        <a:solidFill>
-          <a:srgbClr val="006D77"/>
-        </a:solidFill>
-        <a:effectLst/>
-      </p:bgPr>
-    </p:bg>
     <p:spTree>
       <p:nvGrpSpPr>
         <p:cNvPr id="1" name=""/>
@@ -7711,9 +8134,33 @@
         <p:nvPr/>
       </p:nvGrpSpPr>
       <p:grpSpPr/>
-      <p:sp>
-        <p:nvSpPr>
-          <p:cNvPr id="2" name="TextBox 1"/>
+      <p:pic>
+        <p:nvPicPr>
+          <p:cNvPr id="2" name="Picture 1" descr="rteu_logo_kucuk.jpg"/>
+          <p:cNvPicPr>
+            <a:picLocks noChangeAspect="1"/>
+          </p:cNvPicPr>
+          <p:nvPr/>
+        </p:nvPicPr>
+        <p:blipFill>
+          <a:blip r:embed="rId2"/>
+          <a:stretch>
+            <a:fillRect/>
+          </a:stretch>
+        </p:blipFill>
+        <p:spPr>
+          <a:xfrm>
+            <a:off x="640080" y="164592"/>
+            <a:ext cx="242773" cy="329184"/>
+          </a:xfrm>
+          <a:prstGeom prst="rect">
+            <a:avLst/>
+          </a:prstGeom>
+        </p:spPr>
+      </p:pic>
+      <p:sp>
+        <p:nvSpPr>
+          <p:cNvPr id="3" name="TextBox 2"/>
           <p:cNvSpPr txBox="1"/>
           <p:nvPr/>
         </p:nvSpPr>
@@ -7736,7 +8183,7 @@
             <a:r>
               <a:rPr sz="1100" b="0">
                 <a:solidFill>
-                  <a:srgbClr val="D8F0F2"/>
+                  <a:srgbClr val="5B6770"/>
                 </a:solidFill>
               </a:rPr>
               <a:t>CEN429 Güvenli Programlama · Hafta 7</a:t>
@@ -7746,7 +8193,7 @@
       </p:sp>
       <p:sp>
         <p:nvSpPr>
-          <p:cNvPr id="3" name="TextBox 2"/>
+          <p:cNvPr id="4" name="TextBox 3"/>
           <p:cNvSpPr txBox="1"/>
           <p:nvPr/>
         </p:nvSpPr>
@@ -7769,7 +8216,7 @@
             <a:r>
               <a:rPr sz="1000" b="0">
                 <a:solidFill>
-                  <a:srgbClr val="D8F0F2"/>
+                  <a:srgbClr val="5B6770"/>
                 </a:solidFill>
               </a:rPr>
               <a:t>RTEÜ Bilgisayar Mühendisliği · 2026-2027 Güz</a:t>
@@ -7779,7 +8226,7 @@
       </p:sp>
       <p:sp>
         <p:nvSpPr>
-          <p:cNvPr id="4" name="TextBox 3"/>
+          <p:cNvPr id="5" name="TextBox 4"/>
           <p:cNvSpPr txBox="1"/>
           <p:nvPr/>
         </p:nvSpPr>
@@ -7803,7 +8250,7 @@
             <a:r>
               <a:rPr sz="1000" b="0">
                 <a:solidFill>
-                  <a:srgbClr val="D8F0F2"/>
+                  <a:srgbClr val="5B6770"/>
                 </a:solidFill>
               </a:rPr>
               <a:t>24</a:t>
@@ -7813,34 +8260,102 @@
       </p:sp>
       <p:sp>
         <p:nvSpPr>
-          <p:cNvPr id="5" name="TextBox 4"/>
-          <p:cNvSpPr txBox="1"/>
-          <p:nvPr/>
-        </p:nvSpPr>
-        <p:spPr>
-          <a:xfrm>
-            <a:off x="640080" y="2743200"/>
-            <a:ext cx="10911535" cy="1280160"/>
-          </a:xfrm>
-          <a:prstGeom prst="rect">
-            <a:avLst/>
-          </a:prstGeom>
-          <a:noFill/>
-        </p:spPr>
-        <p:txBody>
-          <a:bodyPr wrap="square" lIns="45720" rIns="45720">
-            <a:spAutoFit/>
-          </a:bodyPr>
-          <a:lstStyle/>
-          <a:p>
-            <a:pPr algn="l"/>
-            <a:r>
-              <a:rPr sz="4000" b="1">
-                <a:solidFill>
-                  <a:srgbClr val="FFFFFF"/>
-                </a:solidFill>
-              </a:rPr>
-              <a:t>Ek · Hazırlık kontrol listesi</a:t>
+          <p:cNvPr id="6" name="TextBox 5"/>
+          <p:cNvSpPr txBox="1"/>
+          <p:nvPr/>
+        </p:nvSpPr>
+        <p:spPr>
+          <a:xfrm>
+            <a:off x="640080" y="548640"/>
+            <a:ext cx="10911535" cy="731520"/>
+          </a:xfrm>
+          <a:prstGeom prst="rect">
+            <a:avLst/>
+          </a:prstGeom>
+          <a:noFill/>
+        </p:spPr>
+        <p:txBody>
+          <a:bodyPr wrap="square" lIns="45720" rIns="45720" anchor="ctr">
+            <a:spAutoFit/>
+          </a:bodyPr>
+          <a:lstStyle/>
+          <a:p>
+            <a:r>
+              <a:rPr sz="3000" b="1">
+                <a:solidFill>
+                  <a:srgbClr val="006D77"/>
+                </a:solidFill>
+              </a:rPr>
+              <a:t>Akış · 2. tehdit modeli</a:t>
+            </a:r>
+          </a:p>
+        </p:txBody>
+      </p:sp>
+      <p:sp>
+        <p:nvSpPr>
+          <p:cNvPr id="7" name="TextBox 6"/>
+          <p:cNvSpPr txBox="1"/>
+          <p:nvPr/>
+        </p:nvSpPr>
+        <p:spPr>
+          <a:xfrm>
+            <a:off x="640080" y="1325880"/>
+            <a:ext cx="10911535" cy="843280"/>
+          </a:xfrm>
+          <a:prstGeom prst="rect">
+            <a:avLst/>
+          </a:prstGeom>
+          <a:noFill/>
+        </p:spPr>
+        <p:txBody>
+          <a:bodyPr wrap="square" lIns="45720" rIns="45720">
+            <a:spAutoFit/>
+          </a:bodyPr>
+          <a:lstStyle/>
+          <a:p>
+            <a:pPr>
+              <a:spcAft>
+                <a:spcPts val="300"/>
+              </a:spcAft>
+            </a:pPr>
+            <a:r>
+              <a:rPr sz="2000" b="1">
+                <a:solidFill>
+                  <a:srgbClr val="006D77"/>
+                </a:solidFill>
+              </a:rPr>
+              <a:t>• </a:t>
+            </a:r>
+            <a:r>
+              <a:rPr sz="2000" b="0">
+                <a:solidFill>
+                  <a:srgbClr val="1F2D3A"/>
+                </a:solidFill>
+              </a:rPr>
+              <a:t>STRIDE ve saldırı ağacından bir örnek.</a:t>
+            </a:r>
+          </a:p>
+          <a:p>
+            <a:pPr>
+              <a:spcAft>
+                <a:spcPts val="300"/>
+              </a:spcAft>
+            </a:pPr>
+            <a:r>
+              <a:rPr sz="2000" b="1">
+                <a:solidFill>
+                  <a:srgbClr val="006D77"/>
+                </a:solidFill>
+              </a:rPr>
+              <a:t>• </a:t>
+            </a:r>
+            <a:r>
+              <a:rPr sz="2000" b="0">
+                <a:solidFill>
+                  <a:srgbClr val="1F2D3A"/>
+                </a:solidFill>
+              </a:rPr>
+              <a:t>"Bu tehdide şu önlem."</a:t>
             </a:r>
           </a:p>
         </p:txBody>
@@ -8015,7 +8530,7 @@
                   <a:srgbClr val="006D77"/>
                 </a:solidFill>
               </a:rPr>
-              <a:t>Kontrol · belge</a:t>
+              <a:t>Akış · 3. canlı gösterim</a:t>
             </a:r>
           </a:p>
         </p:txBody>
@@ -8029,7 +8544,7 @@
         <p:spPr>
           <a:xfrm>
             <a:off x="640080" y="1325880"/>
-            <a:ext cx="10911535" cy="1219200"/>
+            <a:ext cx="10911535" cy="843280"/>
           </a:xfrm>
           <a:prstGeom prst="rect">
             <a:avLst/>
@@ -8061,7 +8576,23 @@
                   <a:srgbClr val="1F2D3A"/>
                 </a:solidFill>
               </a:rPr>
-              <a:t> </a:t>
+              <a:t>Bir korumayı </a:t>
+            </a:r>
+            <a:r>
+              <a:rPr sz="2000" b="1">
+                <a:solidFill>
+                  <a:srgbClr val="1F2D3A"/>
+                </a:solidFill>
+              </a:rPr>
+              <a:t>çalışırken</a:t>
+            </a:r>
+            <a:r>
+              <a:rPr sz="2000" b="0">
+                <a:solidFill>
+                  <a:srgbClr val="1F2D3A"/>
+                </a:solidFill>
+              </a:rPr>
+              <a:t> göster.</a:t>
             </a:r>
           </a:p>
           <a:p>
@@ -8084,30 +8615,7 @@
                   <a:srgbClr val="1F2D3A"/>
                 </a:solidFill>
               </a:rPr>
-              <a:t> </a:t>
-            </a:r>
-          </a:p>
-          <a:p>
-            <a:pPr>
-              <a:spcAft>
-                <a:spcPts val="300"/>
-              </a:spcAft>
-            </a:pPr>
-            <a:r>
-              <a:rPr sz="2000" b="1">
-                <a:solidFill>
-                  <a:srgbClr val="006D77"/>
-                </a:solidFill>
-              </a:rPr>
-              <a:t>• </a:t>
-            </a:r>
-            <a:r>
-              <a:rPr sz="2000" b="0">
-                <a:solidFill>
-                  <a:srgbClr val="1F2D3A"/>
-                </a:solidFill>
-              </a:rPr>
-              <a:t> </a:t>
+              <a:t>Ör. şifreli veri, doğrulanan imza.</a:t>
             </a:r>
           </a:p>
         </p:txBody>
@@ -8282,7 +8790,7 @@
                   <a:srgbClr val="006D77"/>
                 </a:solidFill>
               </a:rPr>
-              <a:t>Kontrol · gösterim</a:t>
+              <a:t>Akış · 4. kanıt</a:t>
             </a:r>
           </a:p>
         </p:txBody>
@@ -8296,7 +8804,7 @@
         <p:spPr>
           <a:xfrm>
             <a:off x="640080" y="1325880"/>
-            <a:ext cx="10911535" cy="1219200"/>
+            <a:ext cx="10911535" cy="843280"/>
           </a:xfrm>
           <a:prstGeom prst="rect">
             <a:avLst/>
@@ -8328,7 +8836,7 @@
                   <a:srgbClr val="1F2D3A"/>
                 </a:solidFill>
               </a:rPr>
-              <a:t> </a:t>
+              <a:t>Testler, koruma tablosu.</a:t>
             </a:r>
           </a:p>
           <a:p>
@@ -8351,30 +8859,7 @@
                   <a:srgbClr val="1F2D3A"/>
                 </a:solidFill>
               </a:rPr>
-              <a:t> </a:t>
-            </a:r>
-          </a:p>
-          <a:p>
-            <a:pPr>
-              <a:spcAft>
-                <a:spcPts val="300"/>
-              </a:spcAft>
-            </a:pPr>
-            <a:r>
-              <a:rPr sz="2000" b="1">
-                <a:solidFill>
-                  <a:srgbClr val="006D77"/>
-                </a:solidFill>
-              </a:rPr>
-              <a:t>• </a:t>
-            </a:r>
-            <a:r>
-              <a:rPr sz="2000" b="0">
-                <a:solidFill>
-                  <a:srgbClr val="1F2D3A"/>
-                </a:solidFill>
-              </a:rPr>
-              <a:t> </a:t>
+              <a:t>"Şu komutla şu çıktı."</a:t>
             </a:r>
           </a:p>
         </p:txBody>
@@ -8549,7 +9034,7 @@
                   <a:srgbClr val="006D77"/>
                 </a:solidFill>
               </a:rPr>
-              <a:t>Kontrol · güvenlik</a:t>
+              <a:t>Akış · 5. kalan risk</a:t>
             </a:r>
           </a:p>
         </p:txBody>
@@ -8563,7 +9048,7 @@
         <p:spPr>
           <a:xfrm>
             <a:off x="640080" y="1325880"/>
-            <a:ext cx="10911535" cy="1219200"/>
+            <a:ext cx="10911535" cy="843280"/>
           </a:xfrm>
           <a:prstGeom prst="rect">
             <a:avLst/>
@@ -8595,7 +9080,7 @@
                   <a:srgbClr val="1F2D3A"/>
                 </a:solidFill>
               </a:rPr>
-              <a:t> </a:t>
+              <a:t>Neyi bilerek kapsam dışı bıraktınız?</a:t>
             </a:r>
           </a:p>
           <a:p>
@@ -8618,30 +9103,7 @@
                   <a:srgbClr val="1F2D3A"/>
                 </a:solidFill>
               </a:rPr>
-              <a:t> </a:t>
-            </a:r>
-          </a:p>
-          <a:p>
-            <a:pPr>
-              <a:spcAft>
-                <a:spcPts val="300"/>
-              </a:spcAft>
-            </a:pPr>
-            <a:r>
-              <a:rPr sz="2000" b="1">
-                <a:solidFill>
-                  <a:srgbClr val="006D77"/>
-                </a:solidFill>
-              </a:rPr>
-              <a:t>• </a:t>
-            </a:r>
-            <a:r>
-              <a:rPr sz="2000" b="0">
-                <a:solidFill>
-                  <a:srgbClr val="1F2D3A"/>
-                </a:solidFill>
-              </a:rPr>
-              <a:t> </a:t>
+              <a:t>Dürüst analiz puan getirir.</a:t>
             </a:r>
           </a:p>
         </p:txBody>
@@ -8801,7 +9263,7 @@
                   <a:srgbClr val="FFFFFF"/>
                 </a:solidFill>
               </a:rPr>
-              <a:t>Ek · Örnek sorular</a:t>
+              <a:t>Ek · Hazırlık kontrol listesi</a:t>
             </a:r>
           </a:p>
         </p:txBody>
@@ -8976,7 +9438,7 @@
                   <a:srgbClr val="006D77"/>
                 </a:solidFill>
               </a:rPr>
-              <a:t>Soru 1</a:t>
+              <a:t>Kontrol · belge</a:t>
             </a:r>
           </a:p>
         </p:txBody>
@@ -8990,61 +9452,85 @@
         <p:spPr>
           <a:xfrm>
             <a:off x="640080" y="1325880"/>
-            <a:ext cx="10911535" cy="439928"/>
-          </a:xfrm>
-          <a:prstGeom prst="rect">
-            <a:avLst/>
-          </a:prstGeom>
-          <a:noFill/>
-        </p:spPr>
-        <p:txBody>
-          <a:bodyPr wrap="square" lIns="45720" rIns="45720">
-            <a:spAutoFit/>
-          </a:bodyPr>
-          <a:lstStyle/>
-          <a:p>
-            <a:pPr algn="l"/>
+            <a:ext cx="10911535" cy="1219200"/>
+          </a:xfrm>
+          <a:prstGeom prst="rect">
+            <a:avLst/>
+          </a:prstGeom>
+          <a:noFill/>
+        </p:spPr>
+        <p:txBody>
+          <a:bodyPr wrap="square" lIns="45720" rIns="45720">
+            <a:spAutoFit/>
+          </a:bodyPr>
+          <a:lstStyle/>
+          <a:p>
+            <a:pPr>
+              <a:spcAft>
+                <a:spcPts val="300"/>
+              </a:spcAft>
+            </a:pPr>
             <a:r>
               <a:rPr sz="2000" b="1">
                 <a:solidFill>
+                  <a:srgbClr val="006D77"/>
+                </a:solidFill>
+              </a:rPr>
+              <a:t>• </a:t>
+            </a:r>
+            <a:r>
+              <a:rPr sz="2000" b="0">
+                <a:solidFill>
                   <a:srgbClr val="1F2D3A"/>
                 </a:solidFill>
               </a:rPr>
-              <a:t>En kritik üç varlığınız ve C/I/I+ etiketleri?</a:t>
-            </a:r>
-          </a:p>
-        </p:txBody>
-      </p:sp>
-      <p:sp>
-        <p:nvSpPr>
-          <p:cNvPr id="8" name="TextBox 7"/>
-          <p:cNvSpPr txBox="1"/>
-          <p:nvPr/>
-        </p:nvSpPr>
-        <p:spPr>
-          <a:xfrm>
-            <a:off x="640080" y="1875536"/>
-            <a:ext cx="10911535" cy="439928"/>
-          </a:xfrm>
-          <a:prstGeom prst="rect">
-            <a:avLst/>
-          </a:prstGeom>
-          <a:noFill/>
-        </p:spPr>
-        <p:txBody>
-          <a:bodyPr wrap="square" lIns="45720" rIns="45720">
-            <a:spAutoFit/>
-          </a:bodyPr>
-          <a:lstStyle/>
-          <a:p>
-            <a:pPr algn="l"/>
+              <a:t> </a:t>
+            </a:r>
+          </a:p>
+          <a:p>
+            <a:pPr>
+              <a:spcAft>
+                <a:spcPts val="300"/>
+              </a:spcAft>
+            </a:pPr>
+            <a:r>
+              <a:rPr sz="2000" b="1">
+                <a:solidFill>
+                  <a:srgbClr val="006D77"/>
+                </a:solidFill>
+              </a:rPr>
+              <a:t>• </a:t>
+            </a:r>
             <a:r>
               <a:rPr sz="2000" b="0">
                 <a:solidFill>
                   <a:srgbClr val="1F2D3A"/>
                 </a:solidFill>
               </a:rPr>
-              <a:t>Cevabı hazır tutun; her varlığın yaşam döngüsünü bilin.</a:t>
+              <a:t> </a:t>
+            </a:r>
+          </a:p>
+          <a:p>
+            <a:pPr>
+              <a:spcAft>
+                <a:spcPts val="300"/>
+              </a:spcAft>
+            </a:pPr>
+            <a:r>
+              <a:rPr sz="2000" b="1">
+                <a:solidFill>
+                  <a:srgbClr val="006D77"/>
+                </a:solidFill>
+              </a:rPr>
+              <a:t>• </a:t>
+            </a:r>
+            <a:r>
+              <a:rPr sz="2000" b="0">
+                <a:solidFill>
+                  <a:srgbClr val="1F2D3A"/>
+                </a:solidFill>
+              </a:rPr>
+              <a:t> </a:t>
             </a:r>
           </a:p>
         </p:txBody>
@@ -9811,7 +10297,7 @@
                   <a:srgbClr val="006D77"/>
                 </a:solidFill>
               </a:rPr>
-              <a:t>Soru 2</a:t>
+              <a:t>Kontrol · gösterim</a:t>
             </a:r>
           </a:p>
         </p:txBody>
@@ -9825,61 +10311,85 @@
         <p:spPr>
           <a:xfrm>
             <a:off x="640080" y="1325880"/>
-            <a:ext cx="10911535" cy="439928"/>
-          </a:xfrm>
-          <a:prstGeom prst="rect">
-            <a:avLst/>
-          </a:prstGeom>
-          <a:noFill/>
-        </p:spPr>
-        <p:txBody>
-          <a:bodyPr wrap="square" lIns="45720" rIns="45720">
-            <a:spAutoFit/>
-          </a:bodyPr>
-          <a:lstStyle/>
-          <a:p>
-            <a:pPr algn="l"/>
+            <a:ext cx="10911535" cy="1219200"/>
+          </a:xfrm>
+          <a:prstGeom prst="rect">
+            <a:avLst/>
+          </a:prstGeom>
+          <a:noFill/>
+        </p:spPr>
+        <p:txBody>
+          <a:bodyPr wrap="square" lIns="45720" rIns="45720">
+            <a:spAutoFit/>
+          </a:bodyPr>
+          <a:lstStyle/>
+          <a:p>
+            <a:pPr>
+              <a:spcAft>
+                <a:spcPts val="300"/>
+              </a:spcAft>
+            </a:pPr>
             <a:r>
               <a:rPr sz="2000" b="1">
                 <a:solidFill>
+                  <a:srgbClr val="006D77"/>
+                </a:solidFill>
+              </a:rPr>
+              <a:t>• </a:t>
+            </a:r>
+            <a:r>
+              <a:rPr sz="2000" b="0">
+                <a:solidFill>
                   <a:srgbClr val="1F2D3A"/>
                 </a:solidFill>
               </a:rPr>
-              <a:t>Bu tehdide karşı hangi önlem, nasıl doğrulandı?</a:t>
-            </a:r>
-          </a:p>
-        </p:txBody>
-      </p:sp>
-      <p:sp>
-        <p:nvSpPr>
-          <p:cNvPr id="8" name="TextBox 7"/>
-          <p:cNvSpPr txBox="1"/>
-          <p:nvPr/>
-        </p:nvSpPr>
-        <p:spPr>
-          <a:xfrm>
-            <a:off x="640080" y="1875536"/>
-            <a:ext cx="10911535" cy="439928"/>
-          </a:xfrm>
-          <a:prstGeom prst="rect">
-            <a:avLst/>
-          </a:prstGeom>
-          <a:noFill/>
-        </p:spPr>
-        <p:txBody>
-          <a:bodyPr wrap="square" lIns="45720" rIns="45720">
-            <a:spAutoFit/>
-          </a:bodyPr>
-          <a:lstStyle/>
-          <a:p>
-            <a:pPr algn="l"/>
+              <a:t> </a:t>
+            </a:r>
+          </a:p>
+          <a:p>
+            <a:pPr>
+              <a:spcAft>
+                <a:spcPts val="300"/>
+              </a:spcAft>
+            </a:pPr>
+            <a:r>
+              <a:rPr sz="2000" b="1">
+                <a:solidFill>
+                  <a:srgbClr val="006D77"/>
+                </a:solidFill>
+              </a:rPr>
+              <a:t>• </a:t>
+            </a:r>
             <a:r>
               <a:rPr sz="2000" b="0">
                 <a:solidFill>
                   <a:srgbClr val="1F2D3A"/>
                 </a:solidFill>
               </a:rPr>
-              <a:t>Tehdit → önlem → kanıt zincirini gösterin.</a:t>
+              <a:t> </a:t>
+            </a:r>
+          </a:p>
+          <a:p>
+            <a:pPr>
+              <a:spcAft>
+                <a:spcPts val="300"/>
+              </a:spcAft>
+            </a:pPr>
+            <a:r>
+              <a:rPr sz="2000" b="1">
+                <a:solidFill>
+                  <a:srgbClr val="006D77"/>
+                </a:solidFill>
+              </a:rPr>
+              <a:t>• </a:t>
+            </a:r>
+            <a:r>
+              <a:rPr sz="2000" b="0">
+                <a:solidFill>
+                  <a:srgbClr val="1F2D3A"/>
+                </a:solidFill>
+              </a:rPr>
+              <a:t> </a:t>
             </a:r>
           </a:p>
         </p:txBody>
@@ -10054,7 +10564,7 @@
                   <a:srgbClr val="006D77"/>
                 </a:solidFill>
               </a:rPr>
-              <a:t>Soru 3</a:t>
+              <a:t>Kontrol · güvenlik</a:t>
             </a:r>
           </a:p>
         </p:txBody>
@@ -10068,61 +10578,85 @@
         <p:spPr>
           <a:xfrm>
             <a:off x="640080" y="1325880"/>
-            <a:ext cx="10911535" cy="439928"/>
-          </a:xfrm>
-          <a:prstGeom prst="rect">
-            <a:avLst/>
-          </a:prstGeom>
-          <a:noFill/>
-        </p:spPr>
-        <p:txBody>
-          <a:bodyPr wrap="square" lIns="45720" rIns="45720">
-            <a:spAutoFit/>
-          </a:bodyPr>
-          <a:lstStyle/>
-          <a:p>
-            <a:pPr algn="l"/>
+            <a:ext cx="10911535" cy="1219200"/>
+          </a:xfrm>
+          <a:prstGeom prst="rect">
+            <a:avLst/>
+          </a:prstGeom>
+          <a:noFill/>
+        </p:spPr>
+        <p:txBody>
+          <a:bodyPr wrap="square" lIns="45720" rIns="45720">
+            <a:spAutoFit/>
+          </a:bodyPr>
+          <a:lstStyle/>
+          <a:p>
+            <a:pPr>
+              <a:spcAft>
+                <a:spcPts val="300"/>
+              </a:spcAft>
+            </a:pPr>
             <a:r>
               <a:rPr sz="2000" b="1">
                 <a:solidFill>
+                  <a:srgbClr val="006D77"/>
+                </a:solidFill>
+              </a:rPr>
+              <a:t>• </a:t>
+            </a:r>
+            <a:r>
+              <a:rPr sz="2000" b="0">
+                <a:solidFill>
                   <a:srgbClr val="1F2D3A"/>
                 </a:solidFill>
               </a:rPr>
-              <a:t>Bu anahtar nereden geliyor, nerede duruyor, ne zaman siliniyor?</a:t>
-            </a:r>
-          </a:p>
-        </p:txBody>
-      </p:sp>
-      <p:sp>
-        <p:nvSpPr>
-          <p:cNvPr id="8" name="TextBox 7"/>
-          <p:cNvSpPr txBox="1"/>
-          <p:nvPr/>
-        </p:nvSpPr>
-        <p:spPr>
-          <a:xfrm>
-            <a:off x="640080" y="1875536"/>
-            <a:ext cx="10911535" cy="439928"/>
-          </a:xfrm>
-          <a:prstGeom prst="rect">
-            <a:avLst/>
-          </a:prstGeom>
-          <a:noFill/>
-        </p:spPr>
-        <p:txBody>
-          <a:bodyPr wrap="square" lIns="45720" rIns="45720">
-            <a:spAutoFit/>
-          </a:bodyPr>
-          <a:lstStyle/>
-          <a:p>
-            <a:pPr algn="l"/>
+              <a:t> </a:t>
+            </a:r>
+          </a:p>
+          <a:p>
+            <a:pPr>
+              <a:spcAft>
+                <a:spcPts val="300"/>
+              </a:spcAft>
+            </a:pPr>
+            <a:r>
+              <a:rPr sz="2000" b="1">
+                <a:solidFill>
+                  <a:srgbClr val="006D77"/>
+                </a:solidFill>
+              </a:rPr>
+              <a:t>• </a:t>
+            </a:r>
             <a:r>
               <a:rPr sz="2000" b="0">
                 <a:solidFill>
                   <a:srgbClr val="1F2D3A"/>
                 </a:solidFill>
               </a:rPr>
-              <a:t>Anahtar yaşam döngüsünü açıklayın.</a:t>
+              <a:t> </a:t>
+            </a:r>
+          </a:p>
+          <a:p>
+            <a:pPr>
+              <a:spcAft>
+                <a:spcPts val="300"/>
+              </a:spcAft>
+            </a:pPr>
+            <a:r>
+              <a:rPr sz="2000" b="1">
+                <a:solidFill>
+                  <a:srgbClr val="006D77"/>
+                </a:solidFill>
+              </a:rPr>
+              <a:t>• </a:t>
+            </a:r>
+            <a:r>
+              <a:rPr sz="2000" b="0">
+                <a:solidFill>
+                  <a:srgbClr val="1F2D3A"/>
+                </a:solidFill>
+              </a:rPr>
+              <a:t> </a:t>
             </a:r>
           </a:p>
         </p:txBody>
@@ -10136,249 +10670,6 @@
 </file>
 
 <file path=ppt/slides/slide32.xml><?xml version="1.0" encoding="utf-8"?>
-<p:sld xmlns:a="http://schemas.openxmlformats.org/drawingml/2006/main" xmlns:p="http://schemas.openxmlformats.org/presentationml/2006/main" xmlns:r="http://schemas.openxmlformats.org/officeDocument/2006/relationships">
-  <p:cSld>
-    <p:spTree>
-      <p:nvGrpSpPr>
-        <p:cNvPr id="1" name=""/>
-        <p:cNvGrpSpPr/>
-        <p:nvPr/>
-      </p:nvGrpSpPr>
-      <p:grpSpPr/>
-      <p:pic>
-        <p:nvPicPr>
-          <p:cNvPr id="2" name="Picture 1" descr="rteu_logo_kucuk.jpg"/>
-          <p:cNvPicPr>
-            <a:picLocks noChangeAspect="1"/>
-          </p:cNvPicPr>
-          <p:nvPr/>
-        </p:nvPicPr>
-        <p:blipFill>
-          <a:blip r:embed="rId2"/>
-          <a:stretch>
-            <a:fillRect/>
-          </a:stretch>
-        </p:blipFill>
-        <p:spPr>
-          <a:xfrm>
-            <a:off x="640080" y="164592"/>
-            <a:ext cx="242773" cy="329184"/>
-          </a:xfrm>
-          <a:prstGeom prst="rect">
-            <a:avLst/>
-          </a:prstGeom>
-        </p:spPr>
-      </p:pic>
-      <p:sp>
-        <p:nvSpPr>
-          <p:cNvPr id="3" name="TextBox 2"/>
-          <p:cNvSpPr txBox="1"/>
-          <p:nvPr/>
-        </p:nvSpPr>
-        <p:spPr>
-          <a:xfrm>
-            <a:off x="1051560" y="182880"/>
-            <a:ext cx="7315200" cy="320040"/>
-          </a:xfrm>
-          <a:prstGeom prst="rect">
-            <a:avLst/>
-          </a:prstGeom>
-          <a:noFill/>
-        </p:spPr>
-        <p:txBody>
-          <a:bodyPr wrap="square" lIns="45720" rIns="45720">
-            <a:spAutoFit/>
-          </a:bodyPr>
-          <a:lstStyle/>
-          <a:p>
-            <a:r>
-              <a:rPr sz="1100" b="0">
-                <a:solidFill>
-                  <a:srgbClr val="5B6770"/>
-                </a:solidFill>
-              </a:rPr>
-              <a:t>CEN429 Güvenli Programlama · Hafta 7</a:t>
-            </a:r>
-          </a:p>
-        </p:txBody>
-      </p:sp>
-      <p:sp>
-        <p:nvSpPr>
-          <p:cNvPr id="4" name="TextBox 3"/>
-          <p:cNvSpPr txBox="1"/>
-          <p:nvPr/>
-        </p:nvSpPr>
-        <p:spPr>
-          <a:xfrm>
-            <a:off x="640080" y="6446520"/>
-            <a:ext cx="7315200" cy="274320"/>
-          </a:xfrm>
-          <a:prstGeom prst="rect">
-            <a:avLst/>
-          </a:prstGeom>
-          <a:noFill/>
-        </p:spPr>
-        <p:txBody>
-          <a:bodyPr wrap="square" lIns="45720" rIns="45720">
-            <a:spAutoFit/>
-          </a:bodyPr>
-          <a:lstStyle/>
-          <a:p>
-            <a:r>
-              <a:rPr sz="1000" b="0">
-                <a:solidFill>
-                  <a:srgbClr val="5B6770"/>
-                </a:solidFill>
-              </a:rPr>
-              <a:t>RTEÜ Bilgisayar Mühendisliği · 2026-2027 Güz</a:t>
-            </a:r>
-          </a:p>
-        </p:txBody>
-      </p:sp>
-      <p:sp>
-        <p:nvSpPr>
-          <p:cNvPr id="5" name="TextBox 4"/>
-          <p:cNvSpPr txBox="1"/>
-          <p:nvPr/>
-        </p:nvSpPr>
-        <p:spPr>
-          <a:xfrm>
-            <a:off x="10637215" y="6446520"/>
-            <a:ext cx="914400" cy="274320"/>
-          </a:xfrm>
-          <a:prstGeom prst="rect">
-            <a:avLst/>
-          </a:prstGeom>
-          <a:noFill/>
-        </p:spPr>
-        <p:txBody>
-          <a:bodyPr wrap="square" lIns="45720" rIns="45720">
-            <a:spAutoFit/>
-          </a:bodyPr>
-          <a:lstStyle/>
-          <a:p>
-            <a:pPr algn="r"/>
-            <a:r>
-              <a:rPr sz="1000" b="0">
-                <a:solidFill>
-                  <a:srgbClr val="5B6770"/>
-                </a:solidFill>
-              </a:rPr>
-              <a:t>32</a:t>
-            </a:r>
-          </a:p>
-        </p:txBody>
-      </p:sp>
-      <p:sp>
-        <p:nvSpPr>
-          <p:cNvPr id="6" name="TextBox 5"/>
-          <p:cNvSpPr txBox="1"/>
-          <p:nvPr/>
-        </p:nvSpPr>
-        <p:spPr>
-          <a:xfrm>
-            <a:off x="640080" y="548640"/>
-            <a:ext cx="10911535" cy="731520"/>
-          </a:xfrm>
-          <a:prstGeom prst="rect">
-            <a:avLst/>
-          </a:prstGeom>
-          <a:noFill/>
-        </p:spPr>
-        <p:txBody>
-          <a:bodyPr wrap="square" lIns="45720" rIns="45720" anchor="ctr">
-            <a:spAutoFit/>
-          </a:bodyPr>
-          <a:lstStyle/>
-          <a:p>
-            <a:r>
-              <a:rPr sz="3000" b="1">
-                <a:solidFill>
-                  <a:srgbClr val="006D77"/>
-                </a:solidFill>
-              </a:rPr>
-              <a:t>Soru 4</a:t>
-            </a:r>
-          </a:p>
-        </p:txBody>
-      </p:sp>
-      <p:sp>
-        <p:nvSpPr>
-          <p:cNvPr id="7" name="TextBox 6"/>
-          <p:cNvSpPr txBox="1"/>
-          <p:nvPr/>
-        </p:nvSpPr>
-        <p:spPr>
-          <a:xfrm>
-            <a:off x="640080" y="1325880"/>
-            <a:ext cx="10911535" cy="439928"/>
-          </a:xfrm>
-          <a:prstGeom prst="rect">
-            <a:avLst/>
-          </a:prstGeom>
-          <a:noFill/>
-        </p:spPr>
-        <p:txBody>
-          <a:bodyPr wrap="square" lIns="45720" rIns="45720">
-            <a:spAutoFit/>
-          </a:bodyPr>
-          <a:lstStyle/>
-          <a:p>
-            <a:pPr algn="l"/>
-            <a:r>
-              <a:rPr sz="2000" b="1">
-                <a:solidFill>
-                  <a:srgbClr val="1F2D3A"/>
-                </a:solidFill>
-              </a:rPr>
-              <a:t>Kalan riskiniz ne? Neden kabul edilebilir?</a:t>
-            </a:r>
-          </a:p>
-        </p:txBody>
-      </p:sp>
-      <p:sp>
-        <p:nvSpPr>
-          <p:cNvPr id="8" name="TextBox 7"/>
-          <p:cNvSpPr txBox="1"/>
-          <p:nvPr/>
-        </p:nvSpPr>
-        <p:spPr>
-          <a:xfrm>
-            <a:off x="640080" y="1875536"/>
-            <a:ext cx="10911535" cy="439928"/>
-          </a:xfrm>
-          <a:prstGeom prst="rect">
-            <a:avLst/>
-          </a:prstGeom>
-          <a:noFill/>
-        </p:spPr>
-        <p:txBody>
-          <a:bodyPr wrap="square" lIns="45720" rIns="45720">
-            <a:spAutoFit/>
-          </a:bodyPr>
-          <a:lstStyle/>
-          <a:p>
-            <a:pPr algn="l"/>
-            <a:r>
-              <a:rPr sz="2000" b="0">
-                <a:solidFill>
-                  <a:srgbClr val="1F2D3A"/>
-                </a:solidFill>
-              </a:rPr>
-              <a:t>Dürüst ve gerekçeli yanıtlayın.</a:t>
-            </a:r>
-          </a:p>
-        </p:txBody>
-      </p:sp>
-    </p:spTree>
-  </p:cSld>
-  <p:clrMapOvr>
-    <a:masterClrMapping/>
-  </p:clrMapOvr>
-</p:sld>
-</file>
-
-<file path=ppt/slides/slide33.xml><?xml version="1.0" encoding="utf-8"?>
 <p:sld xmlns:a="http://schemas.openxmlformats.org/drawingml/2006/main" xmlns:p="http://schemas.openxmlformats.org/presentationml/2006/main" xmlns:r="http://schemas.openxmlformats.org/officeDocument/2006/relationships">
   <p:cSld>
     <p:bg>
@@ -10491,7 +10782,7 @@
                   <a:srgbClr val="D8F0F2"/>
                 </a:solidFill>
               </a:rPr>
-              <a:t>33</a:t>
+              <a:t>32</a:t>
             </a:r>
           </a:p>
         </p:txBody>
@@ -10525,7 +10816,250 @@
                   <a:srgbClr val="FFFFFF"/>
                 </a:solidFill>
               </a:rPr>
-              <a:t>Ek · Sık yapılan hatalar</a:t>
+              <a:t>Ek · Örnek sorular</a:t>
+            </a:r>
+          </a:p>
+        </p:txBody>
+      </p:sp>
+    </p:spTree>
+  </p:cSld>
+  <p:clrMapOvr>
+    <a:masterClrMapping/>
+  </p:clrMapOvr>
+</p:sld>
+</file>
+
+<file path=ppt/slides/slide33.xml><?xml version="1.0" encoding="utf-8"?>
+<p:sld xmlns:a="http://schemas.openxmlformats.org/drawingml/2006/main" xmlns:p="http://schemas.openxmlformats.org/presentationml/2006/main" xmlns:r="http://schemas.openxmlformats.org/officeDocument/2006/relationships">
+  <p:cSld>
+    <p:spTree>
+      <p:nvGrpSpPr>
+        <p:cNvPr id="1" name=""/>
+        <p:cNvGrpSpPr/>
+        <p:nvPr/>
+      </p:nvGrpSpPr>
+      <p:grpSpPr/>
+      <p:pic>
+        <p:nvPicPr>
+          <p:cNvPr id="2" name="Picture 1" descr="rteu_logo_kucuk.jpg"/>
+          <p:cNvPicPr>
+            <a:picLocks noChangeAspect="1"/>
+          </p:cNvPicPr>
+          <p:nvPr/>
+        </p:nvPicPr>
+        <p:blipFill>
+          <a:blip r:embed="rId2"/>
+          <a:stretch>
+            <a:fillRect/>
+          </a:stretch>
+        </p:blipFill>
+        <p:spPr>
+          <a:xfrm>
+            <a:off x="640080" y="164592"/>
+            <a:ext cx="242773" cy="329184"/>
+          </a:xfrm>
+          <a:prstGeom prst="rect">
+            <a:avLst/>
+          </a:prstGeom>
+        </p:spPr>
+      </p:pic>
+      <p:sp>
+        <p:nvSpPr>
+          <p:cNvPr id="3" name="TextBox 2"/>
+          <p:cNvSpPr txBox="1"/>
+          <p:nvPr/>
+        </p:nvSpPr>
+        <p:spPr>
+          <a:xfrm>
+            <a:off x="1051560" y="182880"/>
+            <a:ext cx="7315200" cy="320040"/>
+          </a:xfrm>
+          <a:prstGeom prst="rect">
+            <a:avLst/>
+          </a:prstGeom>
+          <a:noFill/>
+        </p:spPr>
+        <p:txBody>
+          <a:bodyPr wrap="square" lIns="45720" rIns="45720">
+            <a:spAutoFit/>
+          </a:bodyPr>
+          <a:lstStyle/>
+          <a:p>
+            <a:r>
+              <a:rPr sz="1100" b="0">
+                <a:solidFill>
+                  <a:srgbClr val="5B6770"/>
+                </a:solidFill>
+              </a:rPr>
+              <a:t>CEN429 Güvenli Programlama · Hafta 7</a:t>
+            </a:r>
+          </a:p>
+        </p:txBody>
+      </p:sp>
+      <p:sp>
+        <p:nvSpPr>
+          <p:cNvPr id="4" name="TextBox 3"/>
+          <p:cNvSpPr txBox="1"/>
+          <p:nvPr/>
+        </p:nvSpPr>
+        <p:spPr>
+          <a:xfrm>
+            <a:off x="640080" y="6446520"/>
+            <a:ext cx="7315200" cy="274320"/>
+          </a:xfrm>
+          <a:prstGeom prst="rect">
+            <a:avLst/>
+          </a:prstGeom>
+          <a:noFill/>
+        </p:spPr>
+        <p:txBody>
+          <a:bodyPr wrap="square" lIns="45720" rIns="45720">
+            <a:spAutoFit/>
+          </a:bodyPr>
+          <a:lstStyle/>
+          <a:p>
+            <a:r>
+              <a:rPr sz="1000" b="0">
+                <a:solidFill>
+                  <a:srgbClr val="5B6770"/>
+                </a:solidFill>
+              </a:rPr>
+              <a:t>RTEÜ Bilgisayar Mühendisliği · 2026-2027 Güz</a:t>
+            </a:r>
+          </a:p>
+        </p:txBody>
+      </p:sp>
+      <p:sp>
+        <p:nvSpPr>
+          <p:cNvPr id="5" name="TextBox 4"/>
+          <p:cNvSpPr txBox="1"/>
+          <p:nvPr/>
+        </p:nvSpPr>
+        <p:spPr>
+          <a:xfrm>
+            <a:off x="10637215" y="6446520"/>
+            <a:ext cx="914400" cy="274320"/>
+          </a:xfrm>
+          <a:prstGeom prst="rect">
+            <a:avLst/>
+          </a:prstGeom>
+          <a:noFill/>
+        </p:spPr>
+        <p:txBody>
+          <a:bodyPr wrap="square" lIns="45720" rIns="45720">
+            <a:spAutoFit/>
+          </a:bodyPr>
+          <a:lstStyle/>
+          <a:p>
+            <a:pPr algn="r"/>
+            <a:r>
+              <a:rPr sz="1000" b="0">
+                <a:solidFill>
+                  <a:srgbClr val="5B6770"/>
+                </a:solidFill>
+              </a:rPr>
+              <a:t>33</a:t>
+            </a:r>
+          </a:p>
+        </p:txBody>
+      </p:sp>
+      <p:sp>
+        <p:nvSpPr>
+          <p:cNvPr id="6" name="TextBox 5"/>
+          <p:cNvSpPr txBox="1"/>
+          <p:nvPr/>
+        </p:nvSpPr>
+        <p:spPr>
+          <a:xfrm>
+            <a:off x="640080" y="548640"/>
+            <a:ext cx="10911535" cy="731520"/>
+          </a:xfrm>
+          <a:prstGeom prst="rect">
+            <a:avLst/>
+          </a:prstGeom>
+          <a:noFill/>
+        </p:spPr>
+        <p:txBody>
+          <a:bodyPr wrap="square" lIns="45720" rIns="45720" anchor="ctr">
+            <a:spAutoFit/>
+          </a:bodyPr>
+          <a:lstStyle/>
+          <a:p>
+            <a:r>
+              <a:rPr sz="3000" b="1">
+                <a:solidFill>
+                  <a:srgbClr val="006D77"/>
+                </a:solidFill>
+              </a:rPr>
+              <a:t>Soru 1</a:t>
+            </a:r>
+          </a:p>
+        </p:txBody>
+      </p:sp>
+      <p:sp>
+        <p:nvSpPr>
+          <p:cNvPr id="7" name="TextBox 6"/>
+          <p:cNvSpPr txBox="1"/>
+          <p:nvPr/>
+        </p:nvSpPr>
+        <p:spPr>
+          <a:xfrm>
+            <a:off x="640080" y="1325880"/>
+            <a:ext cx="10911535" cy="439928"/>
+          </a:xfrm>
+          <a:prstGeom prst="rect">
+            <a:avLst/>
+          </a:prstGeom>
+          <a:noFill/>
+        </p:spPr>
+        <p:txBody>
+          <a:bodyPr wrap="square" lIns="45720" rIns="45720">
+            <a:spAutoFit/>
+          </a:bodyPr>
+          <a:lstStyle/>
+          <a:p>
+            <a:pPr algn="l"/>
+            <a:r>
+              <a:rPr sz="2000" b="1">
+                <a:solidFill>
+                  <a:srgbClr val="1F2D3A"/>
+                </a:solidFill>
+              </a:rPr>
+              <a:t>En kritik üç varlığınız ve C/I/I+ etiketleri?</a:t>
+            </a:r>
+          </a:p>
+        </p:txBody>
+      </p:sp>
+      <p:sp>
+        <p:nvSpPr>
+          <p:cNvPr id="8" name="TextBox 7"/>
+          <p:cNvSpPr txBox="1"/>
+          <p:nvPr/>
+        </p:nvSpPr>
+        <p:spPr>
+          <a:xfrm>
+            <a:off x="640080" y="1875536"/>
+            <a:ext cx="10911535" cy="439928"/>
+          </a:xfrm>
+          <a:prstGeom prst="rect">
+            <a:avLst/>
+          </a:prstGeom>
+          <a:noFill/>
+        </p:spPr>
+        <p:txBody>
+          <a:bodyPr wrap="square" lIns="45720" rIns="45720">
+            <a:spAutoFit/>
+          </a:bodyPr>
+          <a:lstStyle/>
+          <a:p>
+            <a:pPr algn="l"/>
+            <a:r>
+              <a:rPr sz="2000" b="0">
+                <a:solidFill>
+                  <a:srgbClr val="1F2D3A"/>
+                </a:solidFill>
+              </a:rPr>
+              <a:t>Cevabı hazır tutun; her varlığın yaşam döngüsünü bilin.</a:t>
             </a:r>
           </a:p>
         </p:txBody>
@@ -10700,7 +11234,7 @@
                   <a:srgbClr val="006D77"/>
                 </a:solidFill>
               </a:rPr>
-              <a:t>Hata listesi</a:t>
+              <a:t>Soru 2</a:t>
             </a:r>
           </a:p>
         </p:txBody>
@@ -10714,131 +11248,61 @@
         <p:spPr>
           <a:xfrm>
             <a:off x="640080" y="1325880"/>
-            <a:ext cx="10911535" cy="1971040"/>
-          </a:xfrm>
-          <a:prstGeom prst="rect">
-            <a:avLst/>
-          </a:prstGeom>
-          <a:noFill/>
-        </p:spPr>
-        <p:txBody>
-          <a:bodyPr wrap="square" lIns="45720" rIns="45720">
-            <a:spAutoFit/>
-          </a:bodyPr>
-          <a:lstStyle/>
-          <a:p>
-            <a:pPr>
-              <a:spcAft>
-                <a:spcPts val="300"/>
-              </a:spcAft>
-            </a:pPr>
+            <a:ext cx="10911535" cy="439928"/>
+          </a:xfrm>
+          <a:prstGeom prst="rect">
+            <a:avLst/>
+          </a:prstGeom>
+          <a:noFill/>
+        </p:spPr>
+        <p:txBody>
+          <a:bodyPr wrap="square" lIns="45720" rIns="45720">
+            <a:spAutoFit/>
+          </a:bodyPr>
+          <a:lstStyle/>
+          <a:p>
+            <a:pPr algn="l"/>
             <a:r>
               <a:rPr sz="2000" b="1">
                 <a:solidFill>
-                  <a:srgbClr val="006D77"/>
-                </a:solidFill>
-              </a:rPr>
-              <a:t>• </a:t>
-            </a:r>
+                  <a:srgbClr val="1F2D3A"/>
+                </a:solidFill>
+              </a:rPr>
+              <a:t>Bu tehdide karşı hangi önlem, nasıl doğrulandı?</a:t>
+            </a:r>
+          </a:p>
+        </p:txBody>
+      </p:sp>
+      <p:sp>
+        <p:nvSpPr>
+          <p:cNvPr id="8" name="TextBox 7"/>
+          <p:cNvSpPr txBox="1"/>
+          <p:nvPr/>
+        </p:nvSpPr>
+        <p:spPr>
+          <a:xfrm>
+            <a:off x="640080" y="1875536"/>
+            <a:ext cx="10911535" cy="439928"/>
+          </a:xfrm>
+          <a:prstGeom prst="rect">
+            <a:avLst/>
+          </a:prstGeom>
+          <a:noFill/>
+        </p:spPr>
+        <p:txBody>
+          <a:bodyPr wrap="square" lIns="45720" rIns="45720">
+            <a:spAutoFit/>
+          </a:bodyPr>
+          <a:lstStyle/>
+          <a:p>
+            <a:pPr algn="l"/>
             <a:r>
               <a:rPr sz="2000" b="0">
                 <a:solidFill>
                   <a:srgbClr val="1F2D3A"/>
                 </a:solidFill>
               </a:rPr>
-              <a:t>Kılavuz ile kod sürümü farklı.</a:t>
-            </a:r>
-          </a:p>
-          <a:p>
-            <a:pPr>
-              <a:spcAft>
-                <a:spcPts val="300"/>
-              </a:spcAft>
-            </a:pPr>
-            <a:r>
-              <a:rPr sz="2000" b="1">
-                <a:solidFill>
-                  <a:srgbClr val="006D77"/>
-                </a:solidFill>
-              </a:rPr>
-              <a:t>• </a:t>
-            </a:r>
-            <a:r>
-              <a:rPr sz="2000" b="0">
-                <a:solidFill>
-                  <a:srgbClr val="1F2D3A"/>
-                </a:solidFill>
-              </a:rPr>
-              <a:t>Kanıtsız "yapıldı".</a:t>
-            </a:r>
-          </a:p>
-          <a:p>
-            <a:pPr>
-              <a:spcAft>
-                <a:spcPts val="300"/>
-              </a:spcAft>
-            </a:pPr>
-            <a:r>
-              <a:rPr sz="2000" b="1">
-                <a:solidFill>
-                  <a:srgbClr val="006D77"/>
-                </a:solidFill>
-              </a:rPr>
-              <a:t>• </a:t>
-            </a:r>
-            <a:r>
-              <a:rPr sz="2000" b="0">
-                <a:solidFill>
-                  <a:srgbClr val="1F2D3A"/>
-                </a:solidFill>
-              </a:rPr>
-              <a:t>Canlı demo çökmesi (yedek yok).</a:t>
-            </a:r>
-          </a:p>
-          <a:p>
-            <a:pPr>
-              <a:spcAft>
-                <a:spcPts val="300"/>
-              </a:spcAft>
-            </a:pPr>
-            <a:r>
-              <a:rPr sz="2000" b="1">
-                <a:solidFill>
-                  <a:srgbClr val="006D77"/>
-                </a:solidFill>
-              </a:rPr>
-              <a:t>• </a:t>
-            </a:r>
-            <a:r>
-              <a:rPr sz="2000" b="0">
-                <a:solidFill>
-                  <a:srgbClr val="1F2D3A"/>
-                </a:solidFill>
-              </a:rPr>
-              <a:t>Kalan risk bölümü boş.</a:t>
-            </a:r>
-          </a:p>
-          <a:p>
-            <a:pPr>
-              <a:spcAft>
-                <a:spcPts val="300"/>
-              </a:spcAft>
-            </a:pPr>
-            <a:r>
-              <a:rPr sz="2000" b="1">
-                <a:solidFill>
-                  <a:srgbClr val="006D77"/>
-                </a:solidFill>
-              </a:rPr>
-              <a:t>• </a:t>
-            </a:r>
-            <a:r>
-              <a:rPr sz="2000" b="0">
-                <a:solidFill>
-                  <a:srgbClr val="1F2D3A"/>
-                </a:solidFill>
-              </a:rPr>
-              <a:t>Depoda gerçek veri.</a:t>
+              <a:t>Tehdit → önlem → kanıt zincirini gösterin.</a:t>
             </a:r>
           </a:p>
         </p:txBody>
@@ -11013,6 +11477,965 @@
                   <a:srgbClr val="006D77"/>
                 </a:solidFill>
               </a:rPr>
+              <a:t>Soru 3</a:t>
+            </a:r>
+          </a:p>
+        </p:txBody>
+      </p:sp>
+      <p:sp>
+        <p:nvSpPr>
+          <p:cNvPr id="7" name="TextBox 6"/>
+          <p:cNvSpPr txBox="1"/>
+          <p:nvPr/>
+        </p:nvSpPr>
+        <p:spPr>
+          <a:xfrm>
+            <a:off x="640080" y="1325880"/>
+            <a:ext cx="10911535" cy="439928"/>
+          </a:xfrm>
+          <a:prstGeom prst="rect">
+            <a:avLst/>
+          </a:prstGeom>
+          <a:noFill/>
+        </p:spPr>
+        <p:txBody>
+          <a:bodyPr wrap="square" lIns="45720" rIns="45720">
+            <a:spAutoFit/>
+          </a:bodyPr>
+          <a:lstStyle/>
+          <a:p>
+            <a:pPr algn="l"/>
+            <a:r>
+              <a:rPr sz="2000" b="1">
+                <a:solidFill>
+                  <a:srgbClr val="1F2D3A"/>
+                </a:solidFill>
+              </a:rPr>
+              <a:t>Bu anahtar nereden geliyor, nerede duruyor, ne zaman siliniyor?</a:t>
+            </a:r>
+          </a:p>
+        </p:txBody>
+      </p:sp>
+      <p:sp>
+        <p:nvSpPr>
+          <p:cNvPr id="8" name="TextBox 7"/>
+          <p:cNvSpPr txBox="1"/>
+          <p:nvPr/>
+        </p:nvSpPr>
+        <p:spPr>
+          <a:xfrm>
+            <a:off x="640080" y="1875536"/>
+            <a:ext cx="10911535" cy="439928"/>
+          </a:xfrm>
+          <a:prstGeom prst="rect">
+            <a:avLst/>
+          </a:prstGeom>
+          <a:noFill/>
+        </p:spPr>
+        <p:txBody>
+          <a:bodyPr wrap="square" lIns="45720" rIns="45720">
+            <a:spAutoFit/>
+          </a:bodyPr>
+          <a:lstStyle/>
+          <a:p>
+            <a:pPr algn="l"/>
+            <a:r>
+              <a:rPr sz="2000" b="0">
+                <a:solidFill>
+                  <a:srgbClr val="1F2D3A"/>
+                </a:solidFill>
+              </a:rPr>
+              <a:t>Anahtar yaşam döngüsünü açıklayın.</a:t>
+            </a:r>
+          </a:p>
+        </p:txBody>
+      </p:sp>
+    </p:spTree>
+  </p:cSld>
+  <p:clrMapOvr>
+    <a:masterClrMapping/>
+  </p:clrMapOvr>
+</p:sld>
+</file>
+
+<file path=ppt/slides/slide36.xml><?xml version="1.0" encoding="utf-8"?>
+<p:sld xmlns:a="http://schemas.openxmlformats.org/drawingml/2006/main" xmlns:p="http://schemas.openxmlformats.org/presentationml/2006/main" xmlns:r="http://schemas.openxmlformats.org/officeDocument/2006/relationships">
+  <p:cSld>
+    <p:spTree>
+      <p:nvGrpSpPr>
+        <p:cNvPr id="1" name=""/>
+        <p:cNvGrpSpPr/>
+        <p:nvPr/>
+      </p:nvGrpSpPr>
+      <p:grpSpPr/>
+      <p:pic>
+        <p:nvPicPr>
+          <p:cNvPr id="2" name="Picture 1" descr="rteu_logo_kucuk.jpg"/>
+          <p:cNvPicPr>
+            <a:picLocks noChangeAspect="1"/>
+          </p:cNvPicPr>
+          <p:nvPr/>
+        </p:nvPicPr>
+        <p:blipFill>
+          <a:blip r:embed="rId2"/>
+          <a:stretch>
+            <a:fillRect/>
+          </a:stretch>
+        </p:blipFill>
+        <p:spPr>
+          <a:xfrm>
+            <a:off x="640080" y="164592"/>
+            <a:ext cx="242773" cy="329184"/>
+          </a:xfrm>
+          <a:prstGeom prst="rect">
+            <a:avLst/>
+          </a:prstGeom>
+        </p:spPr>
+      </p:pic>
+      <p:sp>
+        <p:nvSpPr>
+          <p:cNvPr id="3" name="TextBox 2"/>
+          <p:cNvSpPr txBox="1"/>
+          <p:nvPr/>
+        </p:nvSpPr>
+        <p:spPr>
+          <a:xfrm>
+            <a:off x="1051560" y="182880"/>
+            <a:ext cx="7315200" cy="320040"/>
+          </a:xfrm>
+          <a:prstGeom prst="rect">
+            <a:avLst/>
+          </a:prstGeom>
+          <a:noFill/>
+        </p:spPr>
+        <p:txBody>
+          <a:bodyPr wrap="square" lIns="45720" rIns="45720">
+            <a:spAutoFit/>
+          </a:bodyPr>
+          <a:lstStyle/>
+          <a:p>
+            <a:r>
+              <a:rPr sz="1100" b="0">
+                <a:solidFill>
+                  <a:srgbClr val="5B6770"/>
+                </a:solidFill>
+              </a:rPr>
+              <a:t>CEN429 Güvenli Programlama · Hafta 7</a:t>
+            </a:r>
+          </a:p>
+        </p:txBody>
+      </p:sp>
+      <p:sp>
+        <p:nvSpPr>
+          <p:cNvPr id="4" name="TextBox 3"/>
+          <p:cNvSpPr txBox="1"/>
+          <p:nvPr/>
+        </p:nvSpPr>
+        <p:spPr>
+          <a:xfrm>
+            <a:off x="640080" y="6446520"/>
+            <a:ext cx="7315200" cy="274320"/>
+          </a:xfrm>
+          <a:prstGeom prst="rect">
+            <a:avLst/>
+          </a:prstGeom>
+          <a:noFill/>
+        </p:spPr>
+        <p:txBody>
+          <a:bodyPr wrap="square" lIns="45720" rIns="45720">
+            <a:spAutoFit/>
+          </a:bodyPr>
+          <a:lstStyle/>
+          <a:p>
+            <a:r>
+              <a:rPr sz="1000" b="0">
+                <a:solidFill>
+                  <a:srgbClr val="5B6770"/>
+                </a:solidFill>
+              </a:rPr>
+              <a:t>RTEÜ Bilgisayar Mühendisliği · 2026-2027 Güz</a:t>
+            </a:r>
+          </a:p>
+        </p:txBody>
+      </p:sp>
+      <p:sp>
+        <p:nvSpPr>
+          <p:cNvPr id="5" name="TextBox 4"/>
+          <p:cNvSpPr txBox="1"/>
+          <p:nvPr/>
+        </p:nvSpPr>
+        <p:spPr>
+          <a:xfrm>
+            <a:off x="10637215" y="6446520"/>
+            <a:ext cx="914400" cy="274320"/>
+          </a:xfrm>
+          <a:prstGeom prst="rect">
+            <a:avLst/>
+          </a:prstGeom>
+          <a:noFill/>
+        </p:spPr>
+        <p:txBody>
+          <a:bodyPr wrap="square" lIns="45720" rIns="45720">
+            <a:spAutoFit/>
+          </a:bodyPr>
+          <a:lstStyle/>
+          <a:p>
+            <a:pPr algn="r"/>
+            <a:r>
+              <a:rPr sz="1000" b="0">
+                <a:solidFill>
+                  <a:srgbClr val="5B6770"/>
+                </a:solidFill>
+              </a:rPr>
+              <a:t>36</a:t>
+            </a:r>
+          </a:p>
+        </p:txBody>
+      </p:sp>
+      <p:sp>
+        <p:nvSpPr>
+          <p:cNvPr id="6" name="TextBox 5"/>
+          <p:cNvSpPr txBox="1"/>
+          <p:nvPr/>
+        </p:nvSpPr>
+        <p:spPr>
+          <a:xfrm>
+            <a:off x="640080" y="548640"/>
+            <a:ext cx="10911535" cy="731520"/>
+          </a:xfrm>
+          <a:prstGeom prst="rect">
+            <a:avLst/>
+          </a:prstGeom>
+          <a:noFill/>
+        </p:spPr>
+        <p:txBody>
+          <a:bodyPr wrap="square" lIns="45720" rIns="45720" anchor="ctr">
+            <a:spAutoFit/>
+          </a:bodyPr>
+          <a:lstStyle/>
+          <a:p>
+            <a:r>
+              <a:rPr sz="3000" b="1">
+                <a:solidFill>
+                  <a:srgbClr val="006D77"/>
+                </a:solidFill>
+              </a:rPr>
+              <a:t>Soru 4</a:t>
+            </a:r>
+          </a:p>
+        </p:txBody>
+      </p:sp>
+      <p:sp>
+        <p:nvSpPr>
+          <p:cNvPr id="7" name="TextBox 6"/>
+          <p:cNvSpPr txBox="1"/>
+          <p:nvPr/>
+        </p:nvSpPr>
+        <p:spPr>
+          <a:xfrm>
+            <a:off x="640080" y="1325880"/>
+            <a:ext cx="10911535" cy="439928"/>
+          </a:xfrm>
+          <a:prstGeom prst="rect">
+            <a:avLst/>
+          </a:prstGeom>
+          <a:noFill/>
+        </p:spPr>
+        <p:txBody>
+          <a:bodyPr wrap="square" lIns="45720" rIns="45720">
+            <a:spAutoFit/>
+          </a:bodyPr>
+          <a:lstStyle/>
+          <a:p>
+            <a:pPr algn="l"/>
+            <a:r>
+              <a:rPr sz="2000" b="1">
+                <a:solidFill>
+                  <a:srgbClr val="1F2D3A"/>
+                </a:solidFill>
+              </a:rPr>
+              <a:t>Kalan riskiniz ne? Neden kabul edilebilir?</a:t>
+            </a:r>
+          </a:p>
+        </p:txBody>
+      </p:sp>
+      <p:sp>
+        <p:nvSpPr>
+          <p:cNvPr id="8" name="TextBox 7"/>
+          <p:cNvSpPr txBox="1"/>
+          <p:nvPr/>
+        </p:nvSpPr>
+        <p:spPr>
+          <a:xfrm>
+            <a:off x="640080" y="1875536"/>
+            <a:ext cx="10911535" cy="439928"/>
+          </a:xfrm>
+          <a:prstGeom prst="rect">
+            <a:avLst/>
+          </a:prstGeom>
+          <a:noFill/>
+        </p:spPr>
+        <p:txBody>
+          <a:bodyPr wrap="square" lIns="45720" rIns="45720">
+            <a:spAutoFit/>
+          </a:bodyPr>
+          <a:lstStyle/>
+          <a:p>
+            <a:pPr algn="l"/>
+            <a:r>
+              <a:rPr sz="2000" b="0">
+                <a:solidFill>
+                  <a:srgbClr val="1F2D3A"/>
+                </a:solidFill>
+              </a:rPr>
+              <a:t>Dürüst ve gerekçeli yanıtlayın.</a:t>
+            </a:r>
+          </a:p>
+        </p:txBody>
+      </p:sp>
+    </p:spTree>
+  </p:cSld>
+  <p:clrMapOvr>
+    <a:masterClrMapping/>
+  </p:clrMapOvr>
+</p:sld>
+</file>
+
+<file path=ppt/slides/slide37.xml><?xml version="1.0" encoding="utf-8"?>
+<p:sld xmlns:a="http://schemas.openxmlformats.org/drawingml/2006/main" xmlns:p="http://schemas.openxmlformats.org/presentationml/2006/main" xmlns:r="http://schemas.openxmlformats.org/officeDocument/2006/relationships">
+  <p:cSld>
+    <p:bg>
+      <p:bgPr>
+        <a:solidFill>
+          <a:srgbClr val="006D77"/>
+        </a:solidFill>
+        <a:effectLst/>
+      </p:bgPr>
+    </p:bg>
+    <p:spTree>
+      <p:nvGrpSpPr>
+        <p:cNvPr id="1" name=""/>
+        <p:cNvGrpSpPr/>
+        <p:nvPr/>
+      </p:nvGrpSpPr>
+      <p:grpSpPr/>
+      <p:sp>
+        <p:nvSpPr>
+          <p:cNvPr id="2" name="TextBox 1"/>
+          <p:cNvSpPr txBox="1"/>
+          <p:nvPr/>
+        </p:nvSpPr>
+        <p:spPr>
+          <a:xfrm>
+            <a:off x="1051560" y="182880"/>
+            <a:ext cx="7315200" cy="320040"/>
+          </a:xfrm>
+          <a:prstGeom prst="rect">
+            <a:avLst/>
+          </a:prstGeom>
+          <a:noFill/>
+        </p:spPr>
+        <p:txBody>
+          <a:bodyPr wrap="square" lIns="45720" rIns="45720">
+            <a:spAutoFit/>
+          </a:bodyPr>
+          <a:lstStyle/>
+          <a:p>
+            <a:r>
+              <a:rPr sz="1100" b="0">
+                <a:solidFill>
+                  <a:srgbClr val="D8F0F2"/>
+                </a:solidFill>
+              </a:rPr>
+              <a:t>CEN429 Güvenli Programlama · Hafta 7</a:t>
+            </a:r>
+          </a:p>
+        </p:txBody>
+      </p:sp>
+      <p:sp>
+        <p:nvSpPr>
+          <p:cNvPr id="3" name="TextBox 2"/>
+          <p:cNvSpPr txBox="1"/>
+          <p:nvPr/>
+        </p:nvSpPr>
+        <p:spPr>
+          <a:xfrm>
+            <a:off x="640080" y="6446520"/>
+            <a:ext cx="7315200" cy="274320"/>
+          </a:xfrm>
+          <a:prstGeom prst="rect">
+            <a:avLst/>
+          </a:prstGeom>
+          <a:noFill/>
+        </p:spPr>
+        <p:txBody>
+          <a:bodyPr wrap="square" lIns="45720" rIns="45720">
+            <a:spAutoFit/>
+          </a:bodyPr>
+          <a:lstStyle/>
+          <a:p>
+            <a:r>
+              <a:rPr sz="1000" b="0">
+                <a:solidFill>
+                  <a:srgbClr val="D8F0F2"/>
+                </a:solidFill>
+              </a:rPr>
+              <a:t>RTEÜ Bilgisayar Mühendisliği · 2026-2027 Güz</a:t>
+            </a:r>
+          </a:p>
+        </p:txBody>
+      </p:sp>
+      <p:sp>
+        <p:nvSpPr>
+          <p:cNvPr id="4" name="TextBox 3"/>
+          <p:cNvSpPr txBox="1"/>
+          <p:nvPr/>
+        </p:nvSpPr>
+        <p:spPr>
+          <a:xfrm>
+            <a:off x="10637215" y="6446520"/>
+            <a:ext cx="914400" cy="274320"/>
+          </a:xfrm>
+          <a:prstGeom prst="rect">
+            <a:avLst/>
+          </a:prstGeom>
+          <a:noFill/>
+        </p:spPr>
+        <p:txBody>
+          <a:bodyPr wrap="square" lIns="45720" rIns="45720">
+            <a:spAutoFit/>
+          </a:bodyPr>
+          <a:lstStyle/>
+          <a:p>
+            <a:pPr algn="r"/>
+            <a:r>
+              <a:rPr sz="1000" b="0">
+                <a:solidFill>
+                  <a:srgbClr val="D8F0F2"/>
+                </a:solidFill>
+              </a:rPr>
+              <a:t>37</a:t>
+            </a:r>
+          </a:p>
+        </p:txBody>
+      </p:sp>
+      <p:sp>
+        <p:nvSpPr>
+          <p:cNvPr id="5" name="TextBox 4"/>
+          <p:cNvSpPr txBox="1"/>
+          <p:nvPr/>
+        </p:nvSpPr>
+        <p:spPr>
+          <a:xfrm>
+            <a:off x="640080" y="2743200"/>
+            <a:ext cx="10911535" cy="1280160"/>
+          </a:xfrm>
+          <a:prstGeom prst="rect">
+            <a:avLst/>
+          </a:prstGeom>
+          <a:noFill/>
+        </p:spPr>
+        <p:txBody>
+          <a:bodyPr wrap="square" lIns="45720" rIns="45720">
+            <a:spAutoFit/>
+          </a:bodyPr>
+          <a:lstStyle/>
+          <a:p>
+            <a:pPr algn="l"/>
+            <a:r>
+              <a:rPr sz="4000" b="1">
+                <a:solidFill>
+                  <a:srgbClr val="FFFFFF"/>
+                </a:solidFill>
+              </a:rPr>
+              <a:t>Ek · Sık yapılan hatalar</a:t>
+            </a:r>
+          </a:p>
+        </p:txBody>
+      </p:sp>
+    </p:spTree>
+  </p:cSld>
+  <p:clrMapOvr>
+    <a:masterClrMapping/>
+  </p:clrMapOvr>
+</p:sld>
+</file>
+
+<file path=ppt/slides/slide38.xml><?xml version="1.0" encoding="utf-8"?>
+<p:sld xmlns:a="http://schemas.openxmlformats.org/drawingml/2006/main" xmlns:p="http://schemas.openxmlformats.org/presentationml/2006/main" xmlns:r="http://schemas.openxmlformats.org/officeDocument/2006/relationships">
+  <p:cSld>
+    <p:spTree>
+      <p:nvGrpSpPr>
+        <p:cNvPr id="1" name=""/>
+        <p:cNvGrpSpPr/>
+        <p:nvPr/>
+      </p:nvGrpSpPr>
+      <p:grpSpPr/>
+      <p:pic>
+        <p:nvPicPr>
+          <p:cNvPr id="2" name="Picture 1" descr="rteu_logo_kucuk.jpg"/>
+          <p:cNvPicPr>
+            <a:picLocks noChangeAspect="1"/>
+          </p:cNvPicPr>
+          <p:nvPr/>
+        </p:nvPicPr>
+        <p:blipFill>
+          <a:blip r:embed="rId2"/>
+          <a:stretch>
+            <a:fillRect/>
+          </a:stretch>
+        </p:blipFill>
+        <p:spPr>
+          <a:xfrm>
+            <a:off x="640080" y="164592"/>
+            <a:ext cx="242773" cy="329184"/>
+          </a:xfrm>
+          <a:prstGeom prst="rect">
+            <a:avLst/>
+          </a:prstGeom>
+        </p:spPr>
+      </p:pic>
+      <p:sp>
+        <p:nvSpPr>
+          <p:cNvPr id="3" name="TextBox 2"/>
+          <p:cNvSpPr txBox="1"/>
+          <p:nvPr/>
+        </p:nvSpPr>
+        <p:spPr>
+          <a:xfrm>
+            <a:off x="1051560" y="182880"/>
+            <a:ext cx="7315200" cy="320040"/>
+          </a:xfrm>
+          <a:prstGeom prst="rect">
+            <a:avLst/>
+          </a:prstGeom>
+          <a:noFill/>
+        </p:spPr>
+        <p:txBody>
+          <a:bodyPr wrap="square" lIns="45720" rIns="45720">
+            <a:spAutoFit/>
+          </a:bodyPr>
+          <a:lstStyle/>
+          <a:p>
+            <a:r>
+              <a:rPr sz="1100" b="0">
+                <a:solidFill>
+                  <a:srgbClr val="5B6770"/>
+                </a:solidFill>
+              </a:rPr>
+              <a:t>CEN429 Güvenli Programlama · Hafta 7</a:t>
+            </a:r>
+          </a:p>
+        </p:txBody>
+      </p:sp>
+      <p:sp>
+        <p:nvSpPr>
+          <p:cNvPr id="4" name="TextBox 3"/>
+          <p:cNvSpPr txBox="1"/>
+          <p:nvPr/>
+        </p:nvSpPr>
+        <p:spPr>
+          <a:xfrm>
+            <a:off x="640080" y="6446520"/>
+            <a:ext cx="7315200" cy="274320"/>
+          </a:xfrm>
+          <a:prstGeom prst="rect">
+            <a:avLst/>
+          </a:prstGeom>
+          <a:noFill/>
+        </p:spPr>
+        <p:txBody>
+          <a:bodyPr wrap="square" lIns="45720" rIns="45720">
+            <a:spAutoFit/>
+          </a:bodyPr>
+          <a:lstStyle/>
+          <a:p>
+            <a:r>
+              <a:rPr sz="1000" b="0">
+                <a:solidFill>
+                  <a:srgbClr val="5B6770"/>
+                </a:solidFill>
+              </a:rPr>
+              <a:t>RTEÜ Bilgisayar Mühendisliği · 2026-2027 Güz</a:t>
+            </a:r>
+          </a:p>
+        </p:txBody>
+      </p:sp>
+      <p:sp>
+        <p:nvSpPr>
+          <p:cNvPr id="5" name="TextBox 4"/>
+          <p:cNvSpPr txBox="1"/>
+          <p:nvPr/>
+        </p:nvSpPr>
+        <p:spPr>
+          <a:xfrm>
+            <a:off x="10637215" y="6446520"/>
+            <a:ext cx="914400" cy="274320"/>
+          </a:xfrm>
+          <a:prstGeom prst="rect">
+            <a:avLst/>
+          </a:prstGeom>
+          <a:noFill/>
+        </p:spPr>
+        <p:txBody>
+          <a:bodyPr wrap="square" lIns="45720" rIns="45720">
+            <a:spAutoFit/>
+          </a:bodyPr>
+          <a:lstStyle/>
+          <a:p>
+            <a:pPr algn="r"/>
+            <a:r>
+              <a:rPr sz="1000" b="0">
+                <a:solidFill>
+                  <a:srgbClr val="5B6770"/>
+                </a:solidFill>
+              </a:rPr>
+              <a:t>38</a:t>
+            </a:r>
+          </a:p>
+        </p:txBody>
+      </p:sp>
+      <p:sp>
+        <p:nvSpPr>
+          <p:cNvPr id="6" name="TextBox 5"/>
+          <p:cNvSpPr txBox="1"/>
+          <p:nvPr/>
+        </p:nvSpPr>
+        <p:spPr>
+          <a:xfrm>
+            <a:off x="640080" y="548640"/>
+            <a:ext cx="10911535" cy="731520"/>
+          </a:xfrm>
+          <a:prstGeom prst="rect">
+            <a:avLst/>
+          </a:prstGeom>
+          <a:noFill/>
+        </p:spPr>
+        <p:txBody>
+          <a:bodyPr wrap="square" lIns="45720" rIns="45720" anchor="ctr">
+            <a:spAutoFit/>
+          </a:bodyPr>
+          <a:lstStyle/>
+          <a:p>
+            <a:r>
+              <a:rPr sz="3000" b="1">
+                <a:solidFill>
+                  <a:srgbClr val="006D77"/>
+                </a:solidFill>
+              </a:rPr>
+              <a:t>Hata listesi</a:t>
+            </a:r>
+          </a:p>
+        </p:txBody>
+      </p:sp>
+      <p:sp>
+        <p:nvSpPr>
+          <p:cNvPr id="7" name="TextBox 6"/>
+          <p:cNvSpPr txBox="1"/>
+          <p:nvPr/>
+        </p:nvSpPr>
+        <p:spPr>
+          <a:xfrm>
+            <a:off x="640080" y="1325880"/>
+            <a:ext cx="10911535" cy="1971040"/>
+          </a:xfrm>
+          <a:prstGeom prst="rect">
+            <a:avLst/>
+          </a:prstGeom>
+          <a:noFill/>
+        </p:spPr>
+        <p:txBody>
+          <a:bodyPr wrap="square" lIns="45720" rIns="45720">
+            <a:spAutoFit/>
+          </a:bodyPr>
+          <a:lstStyle/>
+          <a:p>
+            <a:pPr>
+              <a:spcAft>
+                <a:spcPts val="300"/>
+              </a:spcAft>
+            </a:pPr>
+            <a:r>
+              <a:rPr sz="2000" b="1">
+                <a:solidFill>
+                  <a:srgbClr val="006D77"/>
+                </a:solidFill>
+              </a:rPr>
+              <a:t>• </a:t>
+            </a:r>
+            <a:r>
+              <a:rPr sz="2000" b="0">
+                <a:solidFill>
+                  <a:srgbClr val="1F2D3A"/>
+                </a:solidFill>
+              </a:rPr>
+              <a:t>Kılavuz ile kod sürümü farklı.</a:t>
+            </a:r>
+          </a:p>
+          <a:p>
+            <a:pPr>
+              <a:spcAft>
+                <a:spcPts val="300"/>
+              </a:spcAft>
+            </a:pPr>
+            <a:r>
+              <a:rPr sz="2000" b="1">
+                <a:solidFill>
+                  <a:srgbClr val="006D77"/>
+                </a:solidFill>
+              </a:rPr>
+              <a:t>• </a:t>
+            </a:r>
+            <a:r>
+              <a:rPr sz="2000" b="0">
+                <a:solidFill>
+                  <a:srgbClr val="1F2D3A"/>
+                </a:solidFill>
+              </a:rPr>
+              <a:t>Kanıtsız "yapıldı".</a:t>
+            </a:r>
+          </a:p>
+          <a:p>
+            <a:pPr>
+              <a:spcAft>
+                <a:spcPts val="300"/>
+              </a:spcAft>
+            </a:pPr>
+            <a:r>
+              <a:rPr sz="2000" b="1">
+                <a:solidFill>
+                  <a:srgbClr val="006D77"/>
+                </a:solidFill>
+              </a:rPr>
+              <a:t>• </a:t>
+            </a:r>
+            <a:r>
+              <a:rPr sz="2000" b="0">
+                <a:solidFill>
+                  <a:srgbClr val="1F2D3A"/>
+                </a:solidFill>
+              </a:rPr>
+              <a:t>Canlı demo çökmesi (yedek yok).</a:t>
+            </a:r>
+          </a:p>
+          <a:p>
+            <a:pPr>
+              <a:spcAft>
+                <a:spcPts val="300"/>
+              </a:spcAft>
+            </a:pPr>
+            <a:r>
+              <a:rPr sz="2000" b="1">
+                <a:solidFill>
+                  <a:srgbClr val="006D77"/>
+                </a:solidFill>
+              </a:rPr>
+              <a:t>• </a:t>
+            </a:r>
+            <a:r>
+              <a:rPr sz="2000" b="0">
+                <a:solidFill>
+                  <a:srgbClr val="1F2D3A"/>
+                </a:solidFill>
+              </a:rPr>
+              <a:t>Kalan risk bölümü boş.</a:t>
+            </a:r>
+          </a:p>
+          <a:p>
+            <a:pPr>
+              <a:spcAft>
+                <a:spcPts val="300"/>
+              </a:spcAft>
+            </a:pPr>
+            <a:r>
+              <a:rPr sz="2000" b="1">
+                <a:solidFill>
+                  <a:srgbClr val="006D77"/>
+                </a:solidFill>
+              </a:rPr>
+              <a:t>• </a:t>
+            </a:r>
+            <a:r>
+              <a:rPr sz="2000" b="0">
+                <a:solidFill>
+                  <a:srgbClr val="1F2D3A"/>
+                </a:solidFill>
+              </a:rPr>
+              <a:t>Depoda gerçek veri.</a:t>
+            </a:r>
+          </a:p>
+        </p:txBody>
+      </p:sp>
+    </p:spTree>
+  </p:cSld>
+  <p:clrMapOvr>
+    <a:masterClrMapping/>
+  </p:clrMapOvr>
+</p:sld>
+</file>
+
+<file path=ppt/slides/slide39.xml><?xml version="1.0" encoding="utf-8"?>
+<p:sld xmlns:a="http://schemas.openxmlformats.org/drawingml/2006/main" xmlns:p="http://schemas.openxmlformats.org/presentationml/2006/main" xmlns:r="http://schemas.openxmlformats.org/officeDocument/2006/relationships">
+  <p:cSld>
+    <p:spTree>
+      <p:nvGrpSpPr>
+        <p:cNvPr id="1" name=""/>
+        <p:cNvGrpSpPr/>
+        <p:nvPr/>
+      </p:nvGrpSpPr>
+      <p:grpSpPr/>
+      <p:pic>
+        <p:nvPicPr>
+          <p:cNvPr id="2" name="Picture 1" descr="rteu_logo_kucuk.jpg"/>
+          <p:cNvPicPr>
+            <a:picLocks noChangeAspect="1"/>
+          </p:cNvPicPr>
+          <p:nvPr/>
+        </p:nvPicPr>
+        <p:blipFill>
+          <a:blip r:embed="rId2"/>
+          <a:stretch>
+            <a:fillRect/>
+          </a:stretch>
+        </p:blipFill>
+        <p:spPr>
+          <a:xfrm>
+            <a:off x="640080" y="164592"/>
+            <a:ext cx="242773" cy="329184"/>
+          </a:xfrm>
+          <a:prstGeom prst="rect">
+            <a:avLst/>
+          </a:prstGeom>
+        </p:spPr>
+      </p:pic>
+      <p:sp>
+        <p:nvSpPr>
+          <p:cNvPr id="3" name="TextBox 2"/>
+          <p:cNvSpPr txBox="1"/>
+          <p:nvPr/>
+        </p:nvSpPr>
+        <p:spPr>
+          <a:xfrm>
+            <a:off x="1051560" y="182880"/>
+            <a:ext cx="7315200" cy="320040"/>
+          </a:xfrm>
+          <a:prstGeom prst="rect">
+            <a:avLst/>
+          </a:prstGeom>
+          <a:noFill/>
+        </p:spPr>
+        <p:txBody>
+          <a:bodyPr wrap="square" lIns="45720" rIns="45720">
+            <a:spAutoFit/>
+          </a:bodyPr>
+          <a:lstStyle/>
+          <a:p>
+            <a:r>
+              <a:rPr sz="1100" b="0">
+                <a:solidFill>
+                  <a:srgbClr val="5B6770"/>
+                </a:solidFill>
+              </a:rPr>
+              <a:t>CEN429 Güvenli Programlama · Hafta 7</a:t>
+            </a:r>
+          </a:p>
+        </p:txBody>
+      </p:sp>
+      <p:sp>
+        <p:nvSpPr>
+          <p:cNvPr id="4" name="TextBox 3"/>
+          <p:cNvSpPr txBox="1"/>
+          <p:nvPr/>
+        </p:nvSpPr>
+        <p:spPr>
+          <a:xfrm>
+            <a:off x="640080" y="6446520"/>
+            <a:ext cx="7315200" cy="274320"/>
+          </a:xfrm>
+          <a:prstGeom prst="rect">
+            <a:avLst/>
+          </a:prstGeom>
+          <a:noFill/>
+        </p:spPr>
+        <p:txBody>
+          <a:bodyPr wrap="square" lIns="45720" rIns="45720">
+            <a:spAutoFit/>
+          </a:bodyPr>
+          <a:lstStyle/>
+          <a:p>
+            <a:r>
+              <a:rPr sz="1000" b="0">
+                <a:solidFill>
+                  <a:srgbClr val="5B6770"/>
+                </a:solidFill>
+              </a:rPr>
+              <a:t>RTEÜ Bilgisayar Mühendisliği · 2026-2027 Güz</a:t>
+            </a:r>
+          </a:p>
+        </p:txBody>
+      </p:sp>
+      <p:sp>
+        <p:nvSpPr>
+          <p:cNvPr id="5" name="TextBox 4"/>
+          <p:cNvSpPr txBox="1"/>
+          <p:nvPr/>
+        </p:nvSpPr>
+        <p:spPr>
+          <a:xfrm>
+            <a:off x="10637215" y="6446520"/>
+            <a:ext cx="914400" cy="274320"/>
+          </a:xfrm>
+          <a:prstGeom prst="rect">
+            <a:avLst/>
+          </a:prstGeom>
+          <a:noFill/>
+        </p:spPr>
+        <p:txBody>
+          <a:bodyPr wrap="square" lIns="45720" rIns="45720">
+            <a:spAutoFit/>
+          </a:bodyPr>
+          <a:lstStyle/>
+          <a:p>
+            <a:pPr algn="r"/>
+            <a:r>
+              <a:rPr sz="1000" b="0">
+                <a:solidFill>
+                  <a:srgbClr val="5B6770"/>
+                </a:solidFill>
+              </a:rPr>
+              <a:t>39</a:t>
+            </a:r>
+          </a:p>
+        </p:txBody>
+      </p:sp>
+      <p:sp>
+        <p:nvSpPr>
+          <p:cNvPr id="6" name="TextBox 5"/>
+          <p:cNvSpPr txBox="1"/>
+          <p:nvPr/>
+        </p:nvSpPr>
+        <p:spPr>
+          <a:xfrm>
+            <a:off x="640080" y="548640"/>
+            <a:ext cx="10911535" cy="731520"/>
+          </a:xfrm>
+          <a:prstGeom prst="rect">
+            <a:avLst/>
+          </a:prstGeom>
+          <a:noFill/>
+        </p:spPr>
+        <p:txBody>
+          <a:bodyPr wrap="square" lIns="45720" rIns="45720" anchor="ctr">
+            <a:spAutoFit/>
+          </a:bodyPr>
+          <a:lstStyle/>
+          <a:p>
+            <a:r>
+              <a:rPr sz="3000" b="1">
+                <a:solidFill>
+                  <a:srgbClr val="006D77"/>
+                </a:solidFill>
+              </a:rPr>
               <a:t>Son söz (RAP1)</a:t>
             </a:r>
           </a:p>
@@ -11275,6 +12698,205 @@
                 </a:solidFill>
               </a:rPr>
               <a:t>4</a:t>
+            </a:r>
+          </a:p>
+        </p:txBody>
+      </p:sp>
+      <p:sp>
+        <p:nvSpPr>
+          <p:cNvPr id="6" name="TextBox 5"/>
+          <p:cNvSpPr txBox="1"/>
+          <p:nvPr/>
+        </p:nvSpPr>
+        <p:spPr>
+          <a:xfrm>
+            <a:off x="640080" y="548640"/>
+            <a:ext cx="10911535" cy="731520"/>
+          </a:xfrm>
+          <a:prstGeom prst="rect">
+            <a:avLst/>
+          </a:prstGeom>
+          <a:noFill/>
+        </p:spPr>
+        <p:txBody>
+          <a:bodyPr wrap="square" lIns="45720" rIns="45720" anchor="ctr">
+            <a:spAutoFit/>
+          </a:bodyPr>
+          <a:lstStyle/>
+          <a:p>
+            <a:r>
+              <a:rPr sz="3000" b="1">
+                <a:solidFill>
+                  <a:srgbClr val="006D77"/>
+                </a:solidFill>
+              </a:rPr>
+              <a:t>Rubriğin okunuşu — şema</a:t>
+            </a:r>
+          </a:p>
+        </p:txBody>
+      </p:sp>
+      <p:pic>
+        <p:nvPicPr>
+          <p:cNvPr id="7" name="Picture 6" descr="h07-04-rubrik.png"/>
+          <p:cNvPicPr>
+            <a:picLocks noChangeAspect="1"/>
+          </p:cNvPicPr>
+          <p:nvPr/>
+        </p:nvPicPr>
+        <p:blipFill>
+          <a:blip r:embed="rId3"/>
+          <a:stretch>
+            <a:fillRect/>
+          </a:stretch>
+        </p:blipFill>
+        <p:spPr>
+          <a:xfrm>
+            <a:off x="2046645" y="1325880"/>
+            <a:ext cx="8098404" cy="3210484"/>
+          </a:xfrm>
+          <a:prstGeom prst="rect">
+            <a:avLst/>
+          </a:prstGeom>
+        </p:spPr>
+      </p:pic>
+    </p:spTree>
+  </p:cSld>
+  <p:clrMapOvr>
+    <a:masterClrMapping/>
+  </p:clrMapOvr>
+</p:sld>
+</file>
+
+<file path=ppt/slides/slide5.xml><?xml version="1.0" encoding="utf-8"?>
+<p:sld xmlns:a="http://schemas.openxmlformats.org/drawingml/2006/main" xmlns:p="http://schemas.openxmlformats.org/presentationml/2006/main" xmlns:r="http://schemas.openxmlformats.org/officeDocument/2006/relationships">
+  <p:cSld>
+    <p:spTree>
+      <p:nvGrpSpPr>
+        <p:cNvPr id="1" name=""/>
+        <p:cNvGrpSpPr/>
+        <p:nvPr/>
+      </p:nvGrpSpPr>
+      <p:grpSpPr/>
+      <p:pic>
+        <p:nvPicPr>
+          <p:cNvPr id="2" name="Picture 1" descr="rteu_logo_kucuk.jpg"/>
+          <p:cNvPicPr>
+            <a:picLocks noChangeAspect="1"/>
+          </p:cNvPicPr>
+          <p:nvPr/>
+        </p:nvPicPr>
+        <p:blipFill>
+          <a:blip r:embed="rId2"/>
+          <a:stretch>
+            <a:fillRect/>
+          </a:stretch>
+        </p:blipFill>
+        <p:spPr>
+          <a:xfrm>
+            <a:off x="640080" y="164592"/>
+            <a:ext cx="242773" cy="329184"/>
+          </a:xfrm>
+          <a:prstGeom prst="rect">
+            <a:avLst/>
+          </a:prstGeom>
+        </p:spPr>
+      </p:pic>
+      <p:sp>
+        <p:nvSpPr>
+          <p:cNvPr id="3" name="TextBox 2"/>
+          <p:cNvSpPr txBox="1"/>
+          <p:nvPr/>
+        </p:nvSpPr>
+        <p:spPr>
+          <a:xfrm>
+            <a:off x="1051560" y="182880"/>
+            <a:ext cx="7315200" cy="320040"/>
+          </a:xfrm>
+          <a:prstGeom prst="rect">
+            <a:avLst/>
+          </a:prstGeom>
+          <a:noFill/>
+        </p:spPr>
+        <p:txBody>
+          <a:bodyPr wrap="square" lIns="45720" rIns="45720">
+            <a:spAutoFit/>
+          </a:bodyPr>
+          <a:lstStyle/>
+          <a:p>
+            <a:r>
+              <a:rPr sz="1100" b="0">
+                <a:solidFill>
+                  <a:srgbClr val="5B6770"/>
+                </a:solidFill>
+              </a:rPr>
+              <a:t>CEN429 Güvenli Programlama · Hafta 7</a:t>
+            </a:r>
+          </a:p>
+        </p:txBody>
+      </p:sp>
+      <p:sp>
+        <p:nvSpPr>
+          <p:cNvPr id="4" name="TextBox 3"/>
+          <p:cNvSpPr txBox="1"/>
+          <p:nvPr/>
+        </p:nvSpPr>
+        <p:spPr>
+          <a:xfrm>
+            <a:off x="640080" y="6446520"/>
+            <a:ext cx="7315200" cy="274320"/>
+          </a:xfrm>
+          <a:prstGeom prst="rect">
+            <a:avLst/>
+          </a:prstGeom>
+          <a:noFill/>
+        </p:spPr>
+        <p:txBody>
+          <a:bodyPr wrap="square" lIns="45720" rIns="45720">
+            <a:spAutoFit/>
+          </a:bodyPr>
+          <a:lstStyle/>
+          <a:p>
+            <a:r>
+              <a:rPr sz="1000" b="0">
+                <a:solidFill>
+                  <a:srgbClr val="5B6770"/>
+                </a:solidFill>
+              </a:rPr>
+              <a:t>RTEÜ Bilgisayar Mühendisliği · 2026-2027 Güz</a:t>
+            </a:r>
+          </a:p>
+        </p:txBody>
+      </p:sp>
+      <p:sp>
+        <p:nvSpPr>
+          <p:cNvPr id="5" name="TextBox 4"/>
+          <p:cNvSpPr txBox="1"/>
+          <p:nvPr/>
+        </p:nvSpPr>
+        <p:spPr>
+          <a:xfrm>
+            <a:off x="10637215" y="6446520"/>
+            <a:ext cx="914400" cy="274320"/>
+          </a:xfrm>
+          <a:prstGeom prst="rect">
+            <a:avLst/>
+          </a:prstGeom>
+          <a:noFill/>
+        </p:spPr>
+        <p:txBody>
+          <a:bodyPr wrap="square" lIns="45720" rIns="45720">
+            <a:spAutoFit/>
+          </a:bodyPr>
+          <a:lstStyle/>
+          <a:p>
+            <a:pPr algn="r"/>
+            <a:r>
+              <a:rPr sz="1000" b="0">
+                <a:solidFill>
+                  <a:srgbClr val="5B6770"/>
+                </a:solidFill>
+              </a:rPr>
+              <a:t>5</a:t>
             </a:r>
           </a:p>
         </p:txBody>
@@ -11547,7 +13169,7 @@
 </p:sld>
 </file>
 
-<file path=ppt/slides/slide5.xml><?xml version="1.0" encoding="utf-8"?>
+<file path=ppt/slides/slide6.xml><?xml version="1.0" encoding="utf-8"?>
 <p:sld xmlns:a="http://schemas.openxmlformats.org/drawingml/2006/main" xmlns:p="http://schemas.openxmlformats.org/presentationml/2006/main" xmlns:r="http://schemas.openxmlformats.org/officeDocument/2006/relationships">
   <p:cSld>
     <p:spTree>
@@ -11676,7 +13298,206 @@
                   <a:srgbClr val="5B6770"/>
                 </a:solidFill>
               </a:rPr>
-              <a:t>5</a:t>
+              <a:t>6</a:t>
+            </a:r>
+          </a:p>
+        </p:txBody>
+      </p:sp>
+      <p:sp>
+        <p:nvSpPr>
+          <p:cNvPr id="6" name="TextBox 5"/>
+          <p:cNvSpPr txBox="1"/>
+          <p:nvPr/>
+        </p:nvSpPr>
+        <p:spPr>
+          <a:xfrm>
+            <a:off x="640080" y="548640"/>
+            <a:ext cx="10911535" cy="731520"/>
+          </a:xfrm>
+          <a:prstGeom prst="rect">
+            <a:avLst/>
+          </a:prstGeom>
+          <a:noFill/>
+        </p:spPr>
+        <p:txBody>
+          <a:bodyPr wrap="square" lIns="45720" rIns="45720" anchor="ctr">
+            <a:spAutoFit/>
+          </a:bodyPr>
+          <a:lstStyle/>
+          <a:p>
+            <a:r>
+              <a:rPr sz="3000" b="1">
+                <a:solidFill>
+                  <a:srgbClr val="006D77"/>
+                </a:solidFill>
+              </a:rPr>
+              <a:t>RAP1 teslimi — şema</a:t>
+            </a:r>
+          </a:p>
+        </p:txBody>
+      </p:sp>
+      <p:pic>
+        <p:nvPicPr>
+          <p:cNvPr id="7" name="Picture 6" descr="h07-02-rap1.png"/>
+          <p:cNvPicPr>
+            <a:picLocks noChangeAspect="1"/>
+          </p:cNvPicPr>
+          <p:nvPr/>
+        </p:nvPicPr>
+        <p:blipFill>
+          <a:blip r:embed="rId3"/>
+          <a:stretch>
+            <a:fillRect/>
+          </a:stretch>
+        </p:blipFill>
+        <p:spPr>
+          <a:xfrm>
+            <a:off x="2046645" y="1325880"/>
+            <a:ext cx="8098404" cy="3778947"/>
+          </a:xfrm>
+          <a:prstGeom prst="rect">
+            <a:avLst/>
+          </a:prstGeom>
+        </p:spPr>
+      </p:pic>
+    </p:spTree>
+  </p:cSld>
+  <p:clrMapOvr>
+    <a:masterClrMapping/>
+  </p:clrMapOvr>
+</p:sld>
+</file>
+
+<file path=ppt/slides/slide7.xml><?xml version="1.0" encoding="utf-8"?>
+<p:sld xmlns:a="http://schemas.openxmlformats.org/drawingml/2006/main" xmlns:p="http://schemas.openxmlformats.org/presentationml/2006/main" xmlns:r="http://schemas.openxmlformats.org/officeDocument/2006/relationships">
+  <p:cSld>
+    <p:spTree>
+      <p:nvGrpSpPr>
+        <p:cNvPr id="1" name=""/>
+        <p:cNvGrpSpPr/>
+        <p:nvPr/>
+      </p:nvGrpSpPr>
+      <p:grpSpPr/>
+      <p:pic>
+        <p:nvPicPr>
+          <p:cNvPr id="2" name="Picture 1" descr="rteu_logo_kucuk.jpg"/>
+          <p:cNvPicPr>
+            <a:picLocks noChangeAspect="1"/>
+          </p:cNvPicPr>
+          <p:nvPr/>
+        </p:nvPicPr>
+        <p:blipFill>
+          <a:blip r:embed="rId2"/>
+          <a:stretch>
+            <a:fillRect/>
+          </a:stretch>
+        </p:blipFill>
+        <p:spPr>
+          <a:xfrm>
+            <a:off x="640080" y="164592"/>
+            <a:ext cx="242773" cy="329184"/>
+          </a:xfrm>
+          <a:prstGeom prst="rect">
+            <a:avLst/>
+          </a:prstGeom>
+        </p:spPr>
+      </p:pic>
+      <p:sp>
+        <p:nvSpPr>
+          <p:cNvPr id="3" name="TextBox 2"/>
+          <p:cNvSpPr txBox="1"/>
+          <p:nvPr/>
+        </p:nvSpPr>
+        <p:spPr>
+          <a:xfrm>
+            <a:off x="1051560" y="182880"/>
+            <a:ext cx="7315200" cy="320040"/>
+          </a:xfrm>
+          <a:prstGeom prst="rect">
+            <a:avLst/>
+          </a:prstGeom>
+          <a:noFill/>
+        </p:spPr>
+        <p:txBody>
+          <a:bodyPr wrap="square" lIns="45720" rIns="45720">
+            <a:spAutoFit/>
+          </a:bodyPr>
+          <a:lstStyle/>
+          <a:p>
+            <a:r>
+              <a:rPr sz="1100" b="0">
+                <a:solidFill>
+                  <a:srgbClr val="5B6770"/>
+                </a:solidFill>
+              </a:rPr>
+              <a:t>CEN429 Güvenli Programlama · Hafta 7</a:t>
+            </a:r>
+          </a:p>
+        </p:txBody>
+      </p:sp>
+      <p:sp>
+        <p:nvSpPr>
+          <p:cNvPr id="4" name="TextBox 3"/>
+          <p:cNvSpPr txBox="1"/>
+          <p:nvPr/>
+        </p:nvSpPr>
+        <p:spPr>
+          <a:xfrm>
+            <a:off x="640080" y="6446520"/>
+            <a:ext cx="7315200" cy="274320"/>
+          </a:xfrm>
+          <a:prstGeom prst="rect">
+            <a:avLst/>
+          </a:prstGeom>
+          <a:noFill/>
+        </p:spPr>
+        <p:txBody>
+          <a:bodyPr wrap="square" lIns="45720" rIns="45720">
+            <a:spAutoFit/>
+          </a:bodyPr>
+          <a:lstStyle/>
+          <a:p>
+            <a:r>
+              <a:rPr sz="1000" b="0">
+                <a:solidFill>
+                  <a:srgbClr val="5B6770"/>
+                </a:solidFill>
+              </a:rPr>
+              <a:t>RTEÜ Bilgisayar Mühendisliği · 2026-2027 Güz</a:t>
+            </a:r>
+          </a:p>
+        </p:txBody>
+      </p:sp>
+      <p:sp>
+        <p:nvSpPr>
+          <p:cNvPr id="5" name="TextBox 4"/>
+          <p:cNvSpPr txBox="1"/>
+          <p:nvPr/>
+        </p:nvSpPr>
+        <p:spPr>
+          <a:xfrm>
+            <a:off x="10637215" y="6446520"/>
+            <a:ext cx="914400" cy="274320"/>
+          </a:xfrm>
+          <a:prstGeom prst="rect">
+            <a:avLst/>
+          </a:prstGeom>
+          <a:noFill/>
+        </p:spPr>
+        <p:txBody>
+          <a:bodyPr wrap="square" lIns="45720" rIns="45720">
+            <a:spAutoFit/>
+          </a:bodyPr>
+          <a:lstStyle/>
+          <a:p>
+            <a:pPr algn="r"/>
+            <a:r>
+              <a:rPr sz="1000" b="0">
+                <a:solidFill>
+                  <a:srgbClr val="5B6770"/>
+                </a:solidFill>
+              </a:rPr>
+              <a:t>7</a:t>
             </a:r>
           </a:p>
         </p:txBody>
@@ -12056,745 +13877,6 @@
 </p:sld>
 </file>
 
-<file path=ppt/slides/slide6.xml><?xml version="1.0" encoding="utf-8"?>
-<p:sld xmlns:a="http://schemas.openxmlformats.org/drawingml/2006/main" xmlns:p="http://schemas.openxmlformats.org/presentationml/2006/main" xmlns:r="http://schemas.openxmlformats.org/officeDocument/2006/relationships">
-  <p:cSld>
-    <p:spTree>
-      <p:nvGrpSpPr>
-        <p:cNvPr id="1" name=""/>
-        <p:cNvGrpSpPr/>
-        <p:nvPr/>
-      </p:nvGrpSpPr>
-      <p:grpSpPr/>
-      <p:pic>
-        <p:nvPicPr>
-          <p:cNvPr id="2" name="Picture 1" descr="rteu_logo_kucuk.jpg"/>
-          <p:cNvPicPr>
-            <a:picLocks noChangeAspect="1"/>
-          </p:cNvPicPr>
-          <p:nvPr/>
-        </p:nvPicPr>
-        <p:blipFill>
-          <a:blip r:embed="rId2"/>
-          <a:stretch>
-            <a:fillRect/>
-          </a:stretch>
-        </p:blipFill>
-        <p:spPr>
-          <a:xfrm>
-            <a:off x="640080" y="164592"/>
-            <a:ext cx="242773" cy="329184"/>
-          </a:xfrm>
-          <a:prstGeom prst="rect">
-            <a:avLst/>
-          </a:prstGeom>
-        </p:spPr>
-      </p:pic>
-      <p:sp>
-        <p:nvSpPr>
-          <p:cNvPr id="3" name="TextBox 2"/>
-          <p:cNvSpPr txBox="1"/>
-          <p:nvPr/>
-        </p:nvSpPr>
-        <p:spPr>
-          <a:xfrm>
-            <a:off x="1051560" y="182880"/>
-            <a:ext cx="7315200" cy="320040"/>
-          </a:xfrm>
-          <a:prstGeom prst="rect">
-            <a:avLst/>
-          </a:prstGeom>
-          <a:noFill/>
-        </p:spPr>
-        <p:txBody>
-          <a:bodyPr wrap="square" lIns="45720" rIns="45720">
-            <a:spAutoFit/>
-          </a:bodyPr>
-          <a:lstStyle/>
-          <a:p>
-            <a:r>
-              <a:rPr sz="1100" b="0">
-                <a:solidFill>
-                  <a:srgbClr val="5B6770"/>
-                </a:solidFill>
-              </a:rPr>
-              <a:t>CEN429 Güvenli Programlama · Hafta 7</a:t>
-            </a:r>
-          </a:p>
-        </p:txBody>
-      </p:sp>
-      <p:sp>
-        <p:nvSpPr>
-          <p:cNvPr id="4" name="TextBox 3"/>
-          <p:cNvSpPr txBox="1"/>
-          <p:nvPr/>
-        </p:nvSpPr>
-        <p:spPr>
-          <a:xfrm>
-            <a:off x="640080" y="6446520"/>
-            <a:ext cx="7315200" cy="274320"/>
-          </a:xfrm>
-          <a:prstGeom prst="rect">
-            <a:avLst/>
-          </a:prstGeom>
-          <a:noFill/>
-        </p:spPr>
-        <p:txBody>
-          <a:bodyPr wrap="square" lIns="45720" rIns="45720">
-            <a:spAutoFit/>
-          </a:bodyPr>
-          <a:lstStyle/>
-          <a:p>
-            <a:r>
-              <a:rPr sz="1000" b="0">
-                <a:solidFill>
-                  <a:srgbClr val="5B6770"/>
-                </a:solidFill>
-              </a:rPr>
-              <a:t>RTEÜ Bilgisayar Mühendisliği · 2026-2027 Güz</a:t>
-            </a:r>
-          </a:p>
-        </p:txBody>
-      </p:sp>
-      <p:sp>
-        <p:nvSpPr>
-          <p:cNvPr id="5" name="TextBox 4"/>
-          <p:cNvSpPr txBox="1"/>
-          <p:nvPr/>
-        </p:nvSpPr>
-        <p:spPr>
-          <a:xfrm>
-            <a:off x="10637215" y="6446520"/>
-            <a:ext cx="914400" cy="274320"/>
-          </a:xfrm>
-          <a:prstGeom prst="rect">
-            <a:avLst/>
-          </a:prstGeom>
-          <a:noFill/>
-        </p:spPr>
-        <p:txBody>
-          <a:bodyPr wrap="square" lIns="45720" rIns="45720">
-            <a:spAutoFit/>
-          </a:bodyPr>
-          <a:lstStyle/>
-          <a:p>
-            <a:pPr algn="r"/>
-            <a:r>
-              <a:rPr sz="1000" b="0">
-                <a:solidFill>
-                  <a:srgbClr val="5B6770"/>
-                </a:solidFill>
-              </a:rPr>
-              <a:t>6</a:t>
-            </a:r>
-          </a:p>
-        </p:txBody>
-      </p:sp>
-      <p:sp>
-        <p:nvSpPr>
-          <p:cNvPr id="6" name="TextBox 5"/>
-          <p:cNvSpPr txBox="1"/>
-          <p:nvPr/>
-        </p:nvSpPr>
-        <p:spPr>
-          <a:xfrm>
-            <a:off x="640080" y="548640"/>
-            <a:ext cx="10911535" cy="731520"/>
-          </a:xfrm>
-          <a:prstGeom prst="rect">
-            <a:avLst/>
-          </a:prstGeom>
-          <a:noFill/>
-        </p:spPr>
-        <p:txBody>
-          <a:bodyPr wrap="square" lIns="45720" rIns="45720" anchor="ctr">
-            <a:spAutoFit/>
-          </a:bodyPr>
-          <a:lstStyle/>
-          <a:p>
-            <a:r>
-              <a:rPr sz="3000" b="1">
-                <a:solidFill>
-                  <a:srgbClr val="006D77"/>
-                </a:solidFill>
-              </a:rPr>
-              <a:t>Önerilen gösterim akışı</a:t>
-            </a:r>
-          </a:p>
-        </p:txBody>
-      </p:sp>
-      <p:sp>
-        <p:nvSpPr>
-          <p:cNvPr id="7" name="TextBox 6"/>
-          <p:cNvSpPr txBox="1"/>
-          <p:nvPr/>
-        </p:nvSpPr>
-        <p:spPr>
-          <a:xfrm>
-            <a:off x="640080" y="1325880"/>
-            <a:ext cx="10911535" cy="1971040"/>
-          </a:xfrm>
-          <a:prstGeom prst="rect">
-            <a:avLst/>
-          </a:prstGeom>
-          <a:noFill/>
-        </p:spPr>
-        <p:txBody>
-          <a:bodyPr wrap="square" lIns="45720" rIns="45720">
-            <a:spAutoFit/>
-          </a:bodyPr>
-          <a:lstStyle/>
-          <a:p>
-            <a:pPr>
-              <a:spcAft>
-                <a:spcPts val="300"/>
-              </a:spcAft>
-            </a:pPr>
-            <a:r>
-              <a:rPr sz="2000" b="1">
-                <a:solidFill>
-                  <a:srgbClr val="006D77"/>
-                </a:solidFill>
-              </a:rPr>
-              <a:t>1. </a:t>
-            </a:r>
-            <a:r>
-              <a:rPr sz="2000" b="1">
-                <a:solidFill>
-                  <a:srgbClr val="1F2D3A"/>
-                </a:solidFill>
-              </a:rPr>
-              <a:t>Ürün ve mimari</a:t>
-            </a:r>
-            <a:r>
-              <a:rPr sz="2000" b="0">
-                <a:solidFill>
-                  <a:srgbClr val="1F2D3A"/>
-                </a:solidFill>
-              </a:rPr>
-              <a:t> (S2–S3): tek şema, güven sınırları</a:t>
-            </a:r>
-          </a:p>
-          <a:p>
-            <a:pPr>
-              <a:spcAft>
-                <a:spcPts val="300"/>
-              </a:spcAft>
-            </a:pPr>
-            <a:r>
-              <a:rPr sz="2000" b="1">
-                <a:solidFill>
-                  <a:srgbClr val="006D77"/>
-                </a:solidFill>
-              </a:rPr>
-              <a:t>2. </a:t>
-            </a:r>
-            <a:r>
-              <a:rPr sz="2000" b="1">
-                <a:solidFill>
-                  <a:srgbClr val="1F2D3A"/>
-                </a:solidFill>
-              </a:rPr>
-              <a:t>Tehditler ve varlıklar</a:t>
-            </a:r>
-            <a:r>
-              <a:rPr sz="2000" b="0">
-                <a:solidFill>
-                  <a:srgbClr val="1F2D3A"/>
-                </a:solidFill>
-              </a:rPr>
-              <a:t> (S4–S5): en kritik üç tehdit</a:t>
-            </a:r>
-          </a:p>
-          <a:p>
-            <a:pPr>
-              <a:spcAft>
-                <a:spcPts val="300"/>
-              </a:spcAft>
-            </a:pPr>
-            <a:r>
-              <a:rPr sz="2000" b="1">
-                <a:solidFill>
-                  <a:srgbClr val="006D77"/>
-                </a:solidFill>
-              </a:rPr>
-              <a:t>3. </a:t>
-            </a:r>
-            <a:r>
-              <a:rPr sz="2000" b="1">
-                <a:solidFill>
-                  <a:srgbClr val="1F2D3A"/>
-                </a:solidFill>
-              </a:rPr>
-              <a:t>Canlı gösterim:</a:t>
-            </a:r>
-            <a:r>
-              <a:rPr sz="2000" b="0">
-                <a:solidFill>
-                  <a:srgbClr val="1F2D3A"/>
-                </a:solidFill>
-              </a:rPr>
-              <a:t> en az bir önlem </a:t>
-            </a:r>
-            <a:r>
-              <a:rPr sz="2000" b="1">
-                <a:solidFill>
-                  <a:srgbClr val="1F2D3A"/>
-                </a:solidFill>
-              </a:rPr>
-              <a:t>çalışırken</a:t>
-            </a:r>
-          </a:p>
-          <a:p>
-            <a:pPr>
-              <a:spcAft>
-                <a:spcPts val="300"/>
-              </a:spcAft>
-            </a:pPr>
-            <a:r>
-              <a:rPr sz="2000" b="1">
-                <a:solidFill>
-                  <a:srgbClr val="006D77"/>
-                </a:solidFill>
-              </a:rPr>
-              <a:t>4. </a:t>
-            </a:r>
-            <a:r>
-              <a:rPr sz="2000" b="1">
-                <a:solidFill>
-                  <a:srgbClr val="1F2D3A"/>
-                </a:solidFill>
-              </a:rPr>
-              <a:t>Kanıt:</a:t>
-            </a:r>
-            <a:r>
-              <a:rPr sz="2000" b="0">
-                <a:solidFill>
-                  <a:srgbClr val="1F2D3A"/>
-                </a:solidFill>
-              </a:rPr>
-              <a:t> koruma tablosu, sanitizer/fuzz, SBOM — komut + çıktı</a:t>
-            </a:r>
-          </a:p>
-          <a:p>
-            <a:pPr>
-              <a:spcAft>
-                <a:spcPts val="300"/>
-              </a:spcAft>
-            </a:pPr>
-            <a:r>
-              <a:rPr sz="2000" b="1">
-                <a:solidFill>
-                  <a:srgbClr val="006D77"/>
-                </a:solidFill>
-              </a:rPr>
-              <a:t>5. </a:t>
-            </a:r>
-            <a:r>
-              <a:rPr sz="2000" b="1">
-                <a:solidFill>
-                  <a:srgbClr val="1F2D3A"/>
-                </a:solidFill>
-              </a:rPr>
-              <a:t>Kalan risk ve plan:</a:t>
-            </a:r>
-            <a:r>
-              <a:rPr sz="2000" b="0">
-                <a:solidFill>
-                  <a:srgbClr val="1F2D3A"/>
-                </a:solidFill>
-              </a:rPr>
-              <a:t> finale kadar ne yapılacak?</a:t>
-            </a:r>
-          </a:p>
-        </p:txBody>
-      </p:sp>
-      <p:sp>
-        <p:nvSpPr>
-          <p:cNvPr id="8" name="TextBox 7"/>
-          <p:cNvSpPr txBox="1"/>
-          <p:nvPr/>
-        </p:nvSpPr>
-        <p:spPr>
-          <a:xfrm>
-            <a:off x="640080" y="3406648"/>
-            <a:ext cx="10911535" cy="439928"/>
-          </a:xfrm>
-          <a:prstGeom prst="rect">
-            <a:avLst/>
-          </a:prstGeom>
-          <a:noFill/>
-        </p:spPr>
-        <p:txBody>
-          <a:bodyPr wrap="square" lIns="45720" rIns="45720">
-            <a:spAutoFit/>
-          </a:bodyPr>
-          <a:lstStyle/>
-          <a:p>
-            <a:pPr algn="l"/>
-            <a:r>
-              <a:rPr sz="2000" b="0">
-                <a:solidFill>
-                  <a:srgbClr val="1F2D3A"/>
-                </a:solidFill>
-              </a:rPr>
-              <a:t>Her önlem için: </a:t>
-            </a:r>
-            <a:r>
-              <a:rPr sz="2000" b="1">
-                <a:solidFill>
-                  <a:srgbClr val="1F2D3A"/>
-                </a:solidFill>
-              </a:rPr>
-              <a:t>Neyi korur? · Nasıl yapıldı? · Nasıl kanıtlandı?</a:t>
-            </a:r>
-          </a:p>
-        </p:txBody>
-      </p:sp>
-    </p:spTree>
-  </p:cSld>
-  <p:clrMapOvr>
-    <a:masterClrMapping/>
-  </p:clrMapOvr>
-</p:sld>
-</file>
-
-<file path=ppt/slides/slide7.xml><?xml version="1.0" encoding="utf-8"?>
-<p:sld xmlns:a="http://schemas.openxmlformats.org/drawingml/2006/main" xmlns:p="http://schemas.openxmlformats.org/presentationml/2006/main" xmlns:r="http://schemas.openxmlformats.org/officeDocument/2006/relationships">
-  <p:cSld>
-    <p:spTree>
-      <p:nvGrpSpPr>
-        <p:cNvPr id="1" name=""/>
-        <p:cNvGrpSpPr/>
-        <p:nvPr/>
-      </p:nvGrpSpPr>
-      <p:grpSpPr/>
-      <p:pic>
-        <p:nvPicPr>
-          <p:cNvPr id="2" name="Picture 1" descr="rteu_logo_kucuk.jpg"/>
-          <p:cNvPicPr>
-            <a:picLocks noChangeAspect="1"/>
-          </p:cNvPicPr>
-          <p:nvPr/>
-        </p:nvPicPr>
-        <p:blipFill>
-          <a:blip r:embed="rId2"/>
-          <a:stretch>
-            <a:fillRect/>
-          </a:stretch>
-        </p:blipFill>
-        <p:spPr>
-          <a:xfrm>
-            <a:off x="640080" y="164592"/>
-            <a:ext cx="242773" cy="329184"/>
-          </a:xfrm>
-          <a:prstGeom prst="rect">
-            <a:avLst/>
-          </a:prstGeom>
-        </p:spPr>
-      </p:pic>
-      <p:sp>
-        <p:nvSpPr>
-          <p:cNvPr id="3" name="TextBox 2"/>
-          <p:cNvSpPr txBox="1"/>
-          <p:nvPr/>
-        </p:nvSpPr>
-        <p:spPr>
-          <a:xfrm>
-            <a:off x="1051560" y="182880"/>
-            <a:ext cx="7315200" cy="320040"/>
-          </a:xfrm>
-          <a:prstGeom prst="rect">
-            <a:avLst/>
-          </a:prstGeom>
-          <a:noFill/>
-        </p:spPr>
-        <p:txBody>
-          <a:bodyPr wrap="square" lIns="45720" rIns="45720">
-            <a:spAutoFit/>
-          </a:bodyPr>
-          <a:lstStyle/>
-          <a:p>
-            <a:r>
-              <a:rPr sz="1100" b="0">
-                <a:solidFill>
-                  <a:srgbClr val="5B6770"/>
-                </a:solidFill>
-              </a:rPr>
-              <a:t>CEN429 Güvenli Programlama · Hafta 7</a:t>
-            </a:r>
-          </a:p>
-        </p:txBody>
-      </p:sp>
-      <p:sp>
-        <p:nvSpPr>
-          <p:cNvPr id="4" name="TextBox 3"/>
-          <p:cNvSpPr txBox="1"/>
-          <p:nvPr/>
-        </p:nvSpPr>
-        <p:spPr>
-          <a:xfrm>
-            <a:off x="640080" y="6446520"/>
-            <a:ext cx="7315200" cy="274320"/>
-          </a:xfrm>
-          <a:prstGeom prst="rect">
-            <a:avLst/>
-          </a:prstGeom>
-          <a:noFill/>
-        </p:spPr>
-        <p:txBody>
-          <a:bodyPr wrap="square" lIns="45720" rIns="45720">
-            <a:spAutoFit/>
-          </a:bodyPr>
-          <a:lstStyle/>
-          <a:p>
-            <a:r>
-              <a:rPr sz="1000" b="0">
-                <a:solidFill>
-                  <a:srgbClr val="5B6770"/>
-                </a:solidFill>
-              </a:rPr>
-              <a:t>RTEÜ Bilgisayar Mühendisliği · 2026-2027 Güz</a:t>
-            </a:r>
-          </a:p>
-        </p:txBody>
-      </p:sp>
-      <p:sp>
-        <p:nvSpPr>
-          <p:cNvPr id="5" name="TextBox 4"/>
-          <p:cNvSpPr txBox="1"/>
-          <p:nvPr/>
-        </p:nvSpPr>
-        <p:spPr>
-          <a:xfrm>
-            <a:off x="10637215" y="6446520"/>
-            <a:ext cx="914400" cy="274320"/>
-          </a:xfrm>
-          <a:prstGeom prst="rect">
-            <a:avLst/>
-          </a:prstGeom>
-          <a:noFill/>
-        </p:spPr>
-        <p:txBody>
-          <a:bodyPr wrap="square" lIns="45720" rIns="45720">
-            <a:spAutoFit/>
-          </a:bodyPr>
-          <a:lstStyle/>
-          <a:p>
-            <a:pPr algn="r"/>
-            <a:r>
-              <a:rPr sz="1000" b="0">
-                <a:solidFill>
-                  <a:srgbClr val="5B6770"/>
-                </a:solidFill>
-              </a:rPr>
-              <a:t>7</a:t>
-            </a:r>
-          </a:p>
-        </p:txBody>
-      </p:sp>
-      <p:sp>
-        <p:nvSpPr>
-          <p:cNvPr id="6" name="TextBox 5"/>
-          <p:cNvSpPr txBox="1"/>
-          <p:nvPr/>
-        </p:nvSpPr>
-        <p:spPr>
-          <a:xfrm>
-            <a:off x="640080" y="548640"/>
-            <a:ext cx="10911535" cy="731520"/>
-          </a:xfrm>
-          <a:prstGeom prst="rect">
-            <a:avLst/>
-          </a:prstGeom>
-          <a:noFill/>
-        </p:spPr>
-        <p:txBody>
-          <a:bodyPr wrap="square" lIns="45720" rIns="45720" anchor="ctr">
-            <a:spAutoFit/>
-          </a:bodyPr>
-          <a:lstStyle/>
-          <a:p>
-            <a:r>
-              <a:rPr sz="3000" b="1">
-                <a:solidFill>
-                  <a:srgbClr val="006D77"/>
-                </a:solidFill>
-              </a:rPr>
-              <a:t>Örnek sorular</a:t>
-            </a:r>
-          </a:p>
-        </p:txBody>
-      </p:sp>
-      <p:sp>
-        <p:nvSpPr>
-          <p:cNvPr id="7" name="TextBox 6"/>
-          <p:cNvSpPr txBox="1"/>
-          <p:nvPr/>
-        </p:nvSpPr>
-        <p:spPr>
-          <a:xfrm>
-            <a:off x="640080" y="1325880"/>
-            <a:ext cx="10911535" cy="2346960"/>
-          </a:xfrm>
-          <a:prstGeom prst="rect">
-            <a:avLst/>
-          </a:prstGeom>
-          <a:noFill/>
-        </p:spPr>
-        <p:txBody>
-          <a:bodyPr wrap="square" lIns="45720" rIns="45720">
-            <a:spAutoFit/>
-          </a:bodyPr>
-          <a:lstStyle/>
-          <a:p>
-            <a:pPr>
-              <a:spcAft>
-                <a:spcPts val="300"/>
-              </a:spcAft>
-            </a:pPr>
-            <a:r>
-              <a:rPr sz="2000" b="1">
-                <a:solidFill>
-                  <a:srgbClr val="006D77"/>
-                </a:solidFill>
-              </a:rPr>
-              <a:t>• </a:t>
-            </a:r>
-            <a:r>
-              <a:rPr sz="2000" b="0">
-                <a:solidFill>
-                  <a:srgbClr val="1F2D3A"/>
-                </a:solidFill>
-              </a:rPr>
-              <a:t>Güven sınırını geçen en riskli akış hangisi?</a:t>
-            </a:r>
-          </a:p>
-          <a:p>
-            <a:pPr>
-              <a:spcAft>
-                <a:spcPts val="300"/>
-              </a:spcAft>
-            </a:pPr>
-            <a:r>
-              <a:rPr sz="2000" b="1">
-                <a:solidFill>
-                  <a:srgbClr val="006D77"/>
-                </a:solidFill>
-              </a:rPr>
-              <a:t>• </a:t>
-            </a:r>
-            <a:r>
-              <a:rPr sz="2000" b="0">
-                <a:solidFill>
-                  <a:srgbClr val="1F2D3A"/>
-                </a:solidFill>
-              </a:rPr>
-              <a:t>Bu varlık bellekte ne kadar açık kalıyor, nerede siliniyor?</a:t>
-            </a:r>
-          </a:p>
-          <a:p>
-            <a:pPr>
-              <a:spcAft>
-                <a:spcPts val="300"/>
-              </a:spcAft>
-            </a:pPr>
-            <a:r>
-              <a:rPr sz="2000" b="1">
-                <a:solidFill>
-                  <a:srgbClr val="006D77"/>
-                </a:solidFill>
-              </a:rPr>
-              <a:t>• </a:t>
-            </a:r>
-            <a:r>
-              <a:rPr sz="2000" b="0">
-                <a:solidFill>
-                  <a:srgbClr val="1F2D3A"/>
-                </a:solidFill>
-              </a:rPr>
-              <a:t>Anahtar nereden geliyor, nerede duruyor? Nonce tekrar edebilir mi?</a:t>
-            </a:r>
-          </a:p>
-          <a:p>
-            <a:pPr>
-              <a:spcAft>
-                <a:spcPts val="300"/>
-              </a:spcAft>
-            </a:pPr>
-            <a:r>
-              <a:rPr sz="2000" b="1">
-                <a:solidFill>
-                  <a:srgbClr val="006D77"/>
-                </a:solidFill>
-              </a:rPr>
-              <a:t>• </a:t>
-            </a:r>
-            <a:r>
-              <a:rPr sz="2000" b="0">
-                <a:solidFill>
-                  <a:srgbClr val="1F2D3A"/>
-                </a:solidFill>
-              </a:rPr>
-              <a:t>Hangi derleyici koruması kapalı, neden?</a:t>
-            </a:r>
-          </a:p>
-          <a:p>
-            <a:pPr>
-              <a:spcAft>
-                <a:spcPts val="300"/>
-              </a:spcAft>
-            </a:pPr>
-            <a:r>
-              <a:rPr sz="2000" b="1">
-                <a:solidFill>
-                  <a:srgbClr val="006D77"/>
-                </a:solidFill>
-              </a:rPr>
-              <a:t>• </a:t>
-            </a:r>
-            <a:r>
-              <a:rPr sz="2000" b="0">
-                <a:solidFill>
-                  <a:srgbClr val="1F2D3A"/>
-                </a:solidFill>
-              </a:rPr>
-              <a:t>RASP denetimi başarısız olunca ne oluyor?</a:t>
-            </a:r>
-          </a:p>
-          <a:p>
-            <a:pPr>
-              <a:spcAft>
-                <a:spcPts val="300"/>
-              </a:spcAft>
-            </a:pPr>
-            <a:r>
-              <a:rPr sz="2000" b="1">
-                <a:solidFill>
-                  <a:srgbClr val="006D77"/>
-                </a:solidFill>
-              </a:rPr>
-              <a:t>• </a:t>
-            </a:r>
-            <a:r>
-              <a:rPr sz="2000" b="0">
-                <a:solidFill>
-                  <a:srgbClr val="1F2D3A"/>
-                </a:solidFill>
-              </a:rPr>
-              <a:t>SBOM'da zafiyetli bileşen var mı? Etkileniyor musunuz?</a:t>
-            </a:r>
-          </a:p>
-        </p:txBody>
-      </p:sp>
-    </p:spTree>
-  </p:cSld>
-  <p:clrMapOvr>
-    <a:masterClrMapping/>
-  </p:clrMapOvr>
-</p:sld>
-</file>
-
 <file path=ppt/slides/slide8.xml><?xml version="1.0" encoding="utf-8"?>
 <p:sld xmlns:a="http://schemas.openxmlformats.org/drawingml/2006/main" xmlns:p="http://schemas.openxmlformats.org/presentationml/2006/main" xmlns:r="http://schemas.openxmlformats.org/officeDocument/2006/relationships">
   <p:cSld>
@@ -12952,358 +14034,244 @@
           <a:lstStyle/>
           <a:p>
             <a:r>
-              <a:rPr sz="2600" b="1">
+              <a:rPr sz="3000" b="1">
                 <a:solidFill>
                   <a:srgbClr val="006D77"/>
                 </a:solidFill>
               </a:rPr>
-              <a:t>Sık yapılan hatalar</a:t>
-            </a:r>
-          </a:p>
-        </p:txBody>
-      </p:sp>
-      <p:graphicFrame>
-        <p:nvGraphicFramePr>
-          <p:cNvPr id="7" name="Table 6"/>
-          <p:cNvGraphicFramePr>
-            <a:graphicFrameLocks noGrp="1"/>
-          </p:cNvGraphicFramePr>
-          <p:nvPr/>
-        </p:nvGraphicFramePr>
-        <p:xfrm>
-          <a:off x="640080" y="1325880"/>
-          <a:ext cx="10911535" cy="2403043"/>
-        </p:xfrm>
-        <a:graphic>
-          <a:graphicData uri="http://schemas.openxmlformats.org/drawingml/2006/table">
-            <a:tbl>
-              <a:tblPr firstRow="1" bandRow="1">
-                <a:tableStyleId>{5C22544A-7EE6-4342-B048-85BDC9FD1C3A}</a:tableStyleId>
-              </a:tblPr>
-              <a:tblGrid>
-                <a:gridCol w="5279775"/>
-                <a:gridCol w="5631760"/>
-              </a:tblGrid>
-              <a:tr h="343291">
-                <a:tc>
-                  <a:txBody>
-                    <a:bodyPr wrap="square"/>
-                    <a:lstStyle/>
-                    <a:p>
-                      <a:r>
-                        <a:rPr sz="1296" b="1">
-                          <a:solidFill>
-                            <a:srgbClr val="FFFFFF"/>
-                          </a:solidFill>
-                        </a:rPr>
-                        <a:t>Hata</a:t>
-                      </a:r>
-                    </a:p>
-                  </a:txBody>
-                  <a:tcPr marL="54864" marR="54864" marT="27432" marB="27432" anchor="ctr">
-                    <a:solidFill>
-                      <a:srgbClr val="006D77"/>
-                    </a:solidFill>
-                  </a:tcPr>
-                </a:tc>
-                <a:tc>
-                  <a:txBody>
-                    <a:bodyPr wrap="square"/>
-                    <a:lstStyle/>
-                    <a:p>
-                      <a:r>
-                        <a:rPr sz="1296" b="1">
-                          <a:solidFill>
-                            <a:srgbClr val="FFFFFF"/>
-                          </a:solidFill>
-                        </a:rPr>
-                        <a:t>Neden sorun?</a:t>
-                      </a:r>
-                    </a:p>
-                  </a:txBody>
-                  <a:tcPr marL="54864" marR="54864" marT="27432" marB="27432" anchor="ctr">
-                    <a:solidFill>
-                      <a:srgbClr val="006D77"/>
-                    </a:solidFill>
-                  </a:tcPr>
-                </a:tc>
-              </a:tr>
-              <a:tr h="343291">
-                <a:tc>
-                  <a:txBody>
-                    <a:bodyPr wrap="square"/>
-                    <a:lstStyle/>
-                    <a:p>
-                      <a:r>
-                        <a:rPr sz="1296" b="0">
-                          <a:solidFill>
-                            <a:srgbClr val="1F2D3A"/>
-                          </a:solidFill>
-                        </a:rPr>
-                        <a:t>Kılavuz ile kod tutarsız</a:t>
-                      </a:r>
-                    </a:p>
-                  </a:txBody>
-                  <a:tcPr marL="54864" marR="54864" marT="27432" marB="27432" anchor="ctr">
-                    <a:solidFill>
-                      <a:srgbClr val="FFFFFF"/>
-                    </a:solidFill>
-                  </a:tcPr>
-                </a:tc>
-                <a:tc>
-                  <a:txBody>
-                    <a:bodyPr wrap="square"/>
-                    <a:lstStyle/>
-                    <a:p>
-                      <a:r>
-                        <a:rPr sz="1296" b="0">
-                          <a:solidFill>
-                            <a:srgbClr val="1F2D3A"/>
-                          </a:solidFill>
-                        </a:rPr>
-                        <a:t>En ciddi bulgulardan biri</a:t>
-                      </a:r>
-                    </a:p>
-                  </a:txBody>
-                  <a:tcPr marL="54864" marR="54864" marT="27432" marB="27432" anchor="ctr">
-                    <a:solidFill>
-                      <a:srgbClr val="FFFFFF"/>
-                    </a:solidFill>
-                  </a:tcPr>
-                </a:tc>
-              </a:tr>
-              <a:tr h="343291">
-                <a:tc>
-                  <a:txBody>
-                    <a:bodyPr wrap="square"/>
-                    <a:lstStyle/>
-                    <a:p>
-                      <a:r>
-                        <a:rPr sz="1296" b="0">
-                          <a:solidFill>
-                            <a:srgbClr val="1F2D3A"/>
-                          </a:solidFill>
-                        </a:rPr>
-                        <a:t>Kanıtsız "güvenli" iddiası</a:t>
-                      </a:r>
-                    </a:p>
-                  </a:txBody>
-                  <a:tcPr marL="54864" marR="54864" marT="27432" marB="27432" anchor="ctr">
-                    <a:solidFill>
-                      <a:srgbClr val="EEF7F8"/>
-                    </a:solidFill>
-                  </a:tcPr>
-                </a:tc>
-                <a:tc>
-                  <a:txBody>
-                    <a:bodyPr wrap="square"/>
-                    <a:lstStyle/>
-                    <a:p>
-                      <a:r>
-                        <a:rPr sz="1296" b="0">
-                          <a:solidFill>
-                            <a:srgbClr val="1F2D3A"/>
-                          </a:solidFill>
-                        </a:rPr>
-                        <a:t>Puanlanmaz</a:t>
-                      </a:r>
-                    </a:p>
-                  </a:txBody>
-                  <a:tcPr marL="54864" marR="54864" marT="27432" marB="27432" anchor="ctr">
-                    <a:solidFill>
-                      <a:srgbClr val="EEF7F8"/>
-                    </a:solidFill>
-                  </a:tcPr>
-                </a:tc>
-              </a:tr>
-              <a:tr h="343291">
-                <a:tc>
-                  <a:txBody>
-                    <a:bodyPr wrap="square"/>
-                    <a:lstStyle/>
-                    <a:p>
-                      <a:r>
-                        <a:rPr sz="1296" b="0">
-                          <a:solidFill>
-                            <a:srgbClr val="1F2D3A"/>
-                          </a:solidFill>
-                        </a:rPr>
-                        <a:t>Varlık listesinde anahtar/günlük/kod yok</a:t>
-                      </a:r>
-                    </a:p>
-                  </a:txBody>
-                  <a:tcPr marL="54864" marR="54864" marT="27432" marB="27432" anchor="ctr">
-                    <a:solidFill>
-                      <a:srgbClr val="FFFFFF"/>
-                    </a:solidFill>
-                  </a:tcPr>
-                </a:tc>
-                <a:tc>
-                  <a:txBody>
-                    <a:bodyPr wrap="square"/>
-                    <a:lstStyle/>
-                    <a:p>
-                      <a:r>
-                        <a:rPr sz="1296" b="0">
-                          <a:solidFill>
-                            <a:srgbClr val="1F2D3A"/>
-                          </a:solidFill>
-                        </a:rPr>
-                        <a:t>Listede olmayan korunmuyor</a:t>
-                      </a:r>
-                    </a:p>
-                  </a:txBody>
-                  <a:tcPr marL="54864" marR="54864" marT="27432" marB="27432" anchor="ctr">
-                    <a:solidFill>
-                      <a:srgbClr val="FFFFFF"/>
-                    </a:solidFill>
-                  </a:tcPr>
-                </a:tc>
-              </a:tr>
-              <a:tr h="343291">
-                <a:tc>
-                  <a:txBody>
-                    <a:bodyPr wrap="square"/>
-                    <a:lstStyle/>
-                    <a:p>
-                      <a:r>
-                        <a:rPr sz="1296" b="0">
-                          <a:solidFill>
-                            <a:srgbClr val="1F2D3A"/>
-                          </a:solidFill>
-                        </a:rPr>
-                        <a:t>Genel bilgiden tehdit tablosu</a:t>
-                      </a:r>
-                    </a:p>
-                  </a:txBody>
-                  <a:tcPr marL="54864" marR="54864" marT="27432" marB="27432" anchor="ctr">
-                    <a:solidFill>
-                      <a:srgbClr val="EEF7F8"/>
-                    </a:solidFill>
-                  </a:tcPr>
-                </a:tc>
-                <a:tc>
-                  <a:txBody>
-                    <a:bodyPr wrap="square"/>
-                    <a:lstStyle/>
-                    <a:p>
-                      <a:r>
-                        <a:rPr sz="1296" b="0">
-                          <a:solidFill>
-                            <a:srgbClr val="1F2D3A"/>
-                          </a:solidFill>
-                        </a:rPr>
-                        <a:t>Projeye özgü tehditler kaçar</a:t>
-                      </a:r>
-                    </a:p>
-                  </a:txBody>
-                  <a:tcPr marL="54864" marR="54864" marT="27432" marB="27432" anchor="ctr">
-                    <a:solidFill>
-                      <a:srgbClr val="EEF7F8"/>
-                    </a:solidFill>
-                  </a:tcPr>
-                </a:tc>
-              </a:tr>
-              <a:tr h="343291">
-                <a:tc>
-                  <a:txBody>
-                    <a:bodyPr wrap="square"/>
-                    <a:lstStyle/>
-                    <a:p>
-                      <a:r>
-                        <a:rPr sz="1296" b="0">
-                          <a:solidFill>
-                            <a:srgbClr val="1F2D3A"/>
-                          </a:solidFill>
-                        </a:rPr>
-                        <a:t>Prova edilmemiş gösterim</a:t>
-                      </a:r>
-                    </a:p>
-                  </a:txBody>
-                  <a:tcPr marL="54864" marR="54864" marT="27432" marB="27432" anchor="ctr">
-                    <a:solidFill>
-                      <a:srgbClr val="FFFFFF"/>
-                    </a:solidFill>
-                  </a:tcPr>
-                </a:tc>
-                <a:tc>
-                  <a:txBody>
-                    <a:bodyPr wrap="square"/>
-                    <a:lstStyle/>
-                    <a:p>
-                      <a:r>
-                        <a:rPr sz="1296" b="0">
-                          <a:solidFill>
-                            <a:srgbClr val="1F2D3A"/>
-                          </a:solidFill>
-                        </a:rPr>
-                        <a:t>Süre boşa gider</a:t>
-                      </a:r>
-                    </a:p>
-                  </a:txBody>
-                  <a:tcPr marL="54864" marR="54864" marT="27432" marB="27432" anchor="ctr">
-                    <a:solidFill>
-                      <a:srgbClr val="FFFFFF"/>
-                    </a:solidFill>
-                  </a:tcPr>
-                </a:tc>
-              </a:tr>
-              <a:tr h="343297">
-                <a:tc>
-                  <a:txBody>
-                    <a:bodyPr wrap="square"/>
-                    <a:lstStyle/>
-                    <a:p>
-                      <a:r>
-                        <a:rPr sz="1296" b="0">
-                          <a:solidFill>
-                            <a:srgbClr val="1F2D3A"/>
-                          </a:solidFill>
-                        </a:rPr>
-                        <a:t>Depoda gerçek parola/anahtar/kişisel veri</a:t>
-                      </a:r>
-                    </a:p>
-                  </a:txBody>
-                  <a:tcPr marL="54864" marR="54864" marT="27432" marB="27432" anchor="ctr">
-                    <a:solidFill>
-                      <a:srgbClr val="EEF7F8"/>
-                    </a:solidFill>
-                  </a:tcPr>
-                </a:tc>
-                <a:tc>
-                  <a:txBody>
-                    <a:bodyPr wrap="square"/>
-                    <a:lstStyle/>
-                    <a:p>
-                      <a:r>
-                        <a:rPr sz="1296" b="0">
-                          <a:solidFill>
-                            <a:srgbClr val="1F2D3A"/>
-                          </a:solidFill>
-                        </a:rPr>
-                        <a:t>Ciddi güvenlik hatası; değerler </a:t>
-                      </a:r>
-                      <a:r>
-                        <a:rPr sz="1296" b="1">
-                          <a:solidFill>
-                            <a:srgbClr val="1F2D3A"/>
-                          </a:solidFill>
-                        </a:rPr>
-                        <a:t>sentetik</a:t>
-                      </a:r>
-                    </a:p>
-                  </a:txBody>
-                  <a:tcPr marL="54864" marR="54864" marT="27432" marB="27432" anchor="ctr">
-                    <a:solidFill>
-                      <a:srgbClr val="EEF7F8"/>
-                    </a:solidFill>
-                  </a:tcPr>
-                </a:tc>
-              </a:tr>
-            </a:tbl>
-          </a:graphicData>
-        </a:graphic>
-      </p:graphicFrame>
+              <a:t>Önerilen gösterim akışı</a:t>
+            </a:r>
+          </a:p>
+        </p:txBody>
+      </p:sp>
+      <p:sp>
+        <p:nvSpPr>
+          <p:cNvPr id="7" name="TextBox 6"/>
+          <p:cNvSpPr txBox="1"/>
+          <p:nvPr/>
+        </p:nvSpPr>
+        <p:spPr>
+          <a:xfrm>
+            <a:off x="640080" y="1325880"/>
+            <a:ext cx="10911535" cy="1971040"/>
+          </a:xfrm>
+          <a:prstGeom prst="rect">
+            <a:avLst/>
+          </a:prstGeom>
+          <a:noFill/>
+        </p:spPr>
+        <p:txBody>
+          <a:bodyPr wrap="square" lIns="45720" rIns="45720">
+            <a:spAutoFit/>
+          </a:bodyPr>
+          <a:lstStyle/>
+          <a:p>
+            <a:pPr>
+              <a:spcAft>
+                <a:spcPts val="300"/>
+              </a:spcAft>
+            </a:pPr>
+            <a:r>
+              <a:rPr sz="2000" b="1">
+                <a:solidFill>
+                  <a:srgbClr val="006D77"/>
+                </a:solidFill>
+              </a:rPr>
+              <a:t>1. </a:t>
+            </a:r>
+            <a:r>
+              <a:rPr sz="2000" b="1">
+                <a:solidFill>
+                  <a:srgbClr val="1F2D3A"/>
+                </a:solidFill>
+              </a:rPr>
+              <a:t>Ürün ve mimari</a:t>
+            </a:r>
+            <a:r>
+              <a:rPr sz="2000" b="0">
+                <a:solidFill>
+                  <a:srgbClr val="1F2D3A"/>
+                </a:solidFill>
+              </a:rPr>
+              <a:t> (S2–S3): tek şema, güven sınırları</a:t>
+            </a:r>
+          </a:p>
+          <a:p>
+            <a:pPr>
+              <a:spcAft>
+                <a:spcPts val="300"/>
+              </a:spcAft>
+            </a:pPr>
+            <a:r>
+              <a:rPr sz="2000" b="1">
+                <a:solidFill>
+                  <a:srgbClr val="006D77"/>
+                </a:solidFill>
+              </a:rPr>
+              <a:t>2. </a:t>
+            </a:r>
+            <a:r>
+              <a:rPr sz="2000" b="1">
+                <a:solidFill>
+                  <a:srgbClr val="1F2D3A"/>
+                </a:solidFill>
+              </a:rPr>
+              <a:t>Tehditler ve varlıklar</a:t>
+            </a:r>
+            <a:r>
+              <a:rPr sz="2000" b="0">
+                <a:solidFill>
+                  <a:srgbClr val="1F2D3A"/>
+                </a:solidFill>
+              </a:rPr>
+              <a:t> (S4–S5): en kritik üç tehdit</a:t>
+            </a:r>
+          </a:p>
+          <a:p>
+            <a:pPr>
+              <a:spcAft>
+                <a:spcPts val="300"/>
+              </a:spcAft>
+            </a:pPr>
+            <a:r>
+              <a:rPr sz="2000" b="1">
+                <a:solidFill>
+                  <a:srgbClr val="006D77"/>
+                </a:solidFill>
+              </a:rPr>
+              <a:t>3. </a:t>
+            </a:r>
+            <a:r>
+              <a:rPr sz="2000" b="1">
+                <a:solidFill>
+                  <a:srgbClr val="1F2D3A"/>
+                </a:solidFill>
+              </a:rPr>
+              <a:t>Canlı gösterim:</a:t>
+            </a:r>
+            <a:r>
+              <a:rPr sz="2000" b="0">
+                <a:solidFill>
+                  <a:srgbClr val="1F2D3A"/>
+                </a:solidFill>
+              </a:rPr>
+              <a:t> en az bir önlem </a:t>
+            </a:r>
+            <a:r>
+              <a:rPr sz="2000" b="1">
+                <a:solidFill>
+                  <a:srgbClr val="1F2D3A"/>
+                </a:solidFill>
+              </a:rPr>
+              <a:t>çalışırken</a:t>
+            </a:r>
+          </a:p>
+          <a:p>
+            <a:pPr>
+              <a:spcAft>
+                <a:spcPts val="300"/>
+              </a:spcAft>
+            </a:pPr>
+            <a:r>
+              <a:rPr sz="2000" b="1">
+                <a:solidFill>
+                  <a:srgbClr val="006D77"/>
+                </a:solidFill>
+              </a:rPr>
+              <a:t>4. </a:t>
+            </a:r>
+            <a:r>
+              <a:rPr sz="2000" b="1">
+                <a:solidFill>
+                  <a:srgbClr val="1F2D3A"/>
+                </a:solidFill>
+              </a:rPr>
+              <a:t>Kanıt:</a:t>
+            </a:r>
+            <a:r>
+              <a:rPr sz="2000" b="0">
+                <a:solidFill>
+                  <a:srgbClr val="1F2D3A"/>
+                </a:solidFill>
+              </a:rPr>
+              <a:t> koruma tablosu, sanitizer/fuzz, SBOM — komut + çıktı</a:t>
+            </a:r>
+          </a:p>
+          <a:p>
+            <a:pPr>
+              <a:spcAft>
+                <a:spcPts val="300"/>
+              </a:spcAft>
+            </a:pPr>
+            <a:r>
+              <a:rPr sz="2000" b="1">
+                <a:solidFill>
+                  <a:srgbClr val="006D77"/>
+                </a:solidFill>
+              </a:rPr>
+              <a:t>5. </a:t>
+            </a:r>
+            <a:r>
+              <a:rPr sz="2000" b="1">
+                <a:solidFill>
+                  <a:srgbClr val="1F2D3A"/>
+                </a:solidFill>
+              </a:rPr>
+              <a:t>Kalan risk ve plan:</a:t>
+            </a:r>
+            <a:r>
+              <a:rPr sz="2000" b="0">
+                <a:solidFill>
+                  <a:srgbClr val="1F2D3A"/>
+                </a:solidFill>
+              </a:rPr>
+              <a:t> finale kadar ne yapılacak?</a:t>
+            </a:r>
+          </a:p>
+        </p:txBody>
+      </p:sp>
+      <p:sp>
+        <p:nvSpPr>
+          <p:cNvPr id="8" name="TextBox 7"/>
+          <p:cNvSpPr txBox="1"/>
+          <p:nvPr/>
+        </p:nvSpPr>
+        <p:spPr>
+          <a:xfrm>
+            <a:off x="640080" y="3406648"/>
+            <a:ext cx="10911535" cy="439928"/>
+          </a:xfrm>
+          <a:prstGeom prst="rect">
+            <a:avLst/>
+          </a:prstGeom>
+          <a:noFill/>
+        </p:spPr>
+        <p:txBody>
+          <a:bodyPr wrap="square" lIns="45720" rIns="45720">
+            <a:spAutoFit/>
+          </a:bodyPr>
+          <a:lstStyle/>
+          <a:p>
+            <a:pPr algn="l"/>
+            <a:r>
+              <a:rPr sz="2000" b="0">
+                <a:solidFill>
+                  <a:srgbClr val="1F2D3A"/>
+                </a:solidFill>
+              </a:rPr>
+              <a:t>Her önlem için: </a:t>
+            </a:r>
+            <a:r>
+              <a:rPr sz="2000" b="1">
+                <a:solidFill>
+                  <a:srgbClr val="1F2D3A"/>
+                </a:solidFill>
+              </a:rPr>
+              <a:t>Neyi korur? · Nasıl yapıldı? · Nasıl kanıtlandı?</a:t>
+            </a:r>
+          </a:p>
+        </p:txBody>
+      </p:sp>
     </p:spTree>
   </p:cSld>
   <p:clrMapOvr>
@@ -13474,203 +14442,35 @@
                   <a:srgbClr val="006D77"/>
                 </a:solidFill>
               </a:rPr>
-              <a:t>Akademik dürüstlük ve sonrası</a:t>
-            </a:r>
-          </a:p>
-        </p:txBody>
-      </p:sp>
-      <p:sp>
-        <p:nvSpPr>
-          <p:cNvPr id="7" name="TextBox 6"/>
-          <p:cNvSpPr txBox="1"/>
-          <p:nvPr/>
-        </p:nvSpPr>
-        <p:spPr>
-          <a:xfrm>
-            <a:off x="640080" y="1325880"/>
-            <a:ext cx="10911535" cy="1219200"/>
-          </a:xfrm>
-          <a:prstGeom prst="rect">
-            <a:avLst/>
-          </a:prstGeom>
-          <a:noFill/>
-        </p:spPr>
-        <p:txBody>
-          <a:bodyPr wrap="square" lIns="45720" rIns="45720">
-            <a:spAutoFit/>
-          </a:bodyPr>
-          <a:lstStyle/>
-          <a:p>
-            <a:pPr>
-              <a:spcAft>
-                <a:spcPts val="300"/>
-              </a:spcAft>
-            </a:pPr>
-            <a:r>
-              <a:rPr sz="2000" b="1">
-                <a:solidFill>
-                  <a:srgbClr val="006D77"/>
-                </a:solidFill>
-              </a:rPr>
-              <a:t>• </a:t>
-            </a:r>
-            <a:r>
-              <a:rPr sz="2000" b="0">
-                <a:solidFill>
-                  <a:srgbClr val="1F2D3A"/>
-                </a:solidFill>
-              </a:rPr>
-              <a:t>Kaynaksız kod/metin, takım dışı çalışma, uydurma sonuç </a:t>
-            </a:r>
-            <a:r>
-              <a:rPr sz="2000" b="1">
-                <a:solidFill>
-                  <a:srgbClr val="1F2D3A"/>
-                </a:solidFill>
-              </a:rPr>
-              <a:t>kabul edilmez</a:t>
-            </a:r>
-          </a:p>
-          <a:p>
-            <a:pPr>
-              <a:spcAft>
-                <a:spcPts val="300"/>
-              </a:spcAft>
-            </a:pPr>
-            <a:r>
-              <a:rPr sz="2000" b="1">
-                <a:solidFill>
-                  <a:srgbClr val="006D77"/>
-                </a:solidFill>
-              </a:rPr>
-              <a:t>• </a:t>
-            </a:r>
-            <a:r>
-              <a:rPr sz="2000" b="0">
-                <a:solidFill>
-                  <a:srgbClr val="1F2D3A"/>
-                </a:solidFill>
-              </a:rPr>
-              <a:t>Teslim edilen her satır açıklanabilmeli</a:t>
-            </a:r>
-          </a:p>
-          <a:p>
-            <a:pPr>
-              <a:spcAft>
-                <a:spcPts val="300"/>
-              </a:spcAft>
-            </a:pPr>
-            <a:r>
-              <a:rPr sz="2000" b="1">
-                <a:solidFill>
-                  <a:srgbClr val="006D77"/>
-                </a:solidFill>
-              </a:rPr>
-              <a:t>• </a:t>
-            </a:r>
-            <a:r>
-              <a:rPr sz="2000" b="0">
-                <a:solidFill>
-                  <a:srgbClr val="1F2D3A"/>
-                </a:solidFill>
-              </a:rPr>
-              <a:t>Her takım üyesine soru sorulabilir</a:t>
-            </a:r>
-          </a:p>
-        </p:txBody>
-      </p:sp>
-      <p:sp>
-        <p:nvSpPr>
-          <p:cNvPr id="8" name="TextBox 7"/>
-          <p:cNvSpPr txBox="1"/>
-          <p:nvPr/>
-        </p:nvSpPr>
-        <p:spPr>
-          <a:xfrm>
-            <a:off x="640080" y="2654808"/>
-            <a:ext cx="10911535" cy="770128"/>
-          </a:xfrm>
-          <a:prstGeom prst="rect">
-            <a:avLst/>
-          </a:prstGeom>
-          <a:noFill/>
-        </p:spPr>
-        <p:txBody>
-          <a:bodyPr wrap="square" lIns="45720" rIns="45720">
-            <a:spAutoFit/>
-          </a:bodyPr>
-          <a:lstStyle/>
-          <a:p>
-            <a:pPr algn="l"/>
-            <a:r>
-              <a:rPr sz="2000" b="1">
-                <a:solidFill>
-                  <a:srgbClr val="1F2D3A"/>
-                </a:solidFill>
-              </a:rPr>
-              <a:t>Gösterimden sonra:</a:t>
-            </a:r>
-            <a:r>
-              <a:rPr sz="2000" b="0">
-                <a:solidFill>
-                  <a:srgbClr val="1F2D3A"/>
-                </a:solidFill>
-              </a:rPr>
-              <a:t> geri bildirimi </a:t>
-            </a:r>
-            <a:r>
-              <a:rPr sz="2000" b="1">
-                <a:solidFill>
-                  <a:srgbClr val="1F2D3A"/>
-                </a:solidFill>
-              </a:rPr>
-              <a:t>bulgu listesi</a:t>
-            </a:r>
-            <a:r>
-              <a:rPr sz="2000" b="0">
-                <a:solidFill>
-                  <a:srgbClr val="1F2D3A"/>
-                </a:solidFill>
-              </a:rPr>
-              <a:t> olarak yaz (bulgu · önem · düzeltme · tarih) → 12. haftanın küçük modeli</a:t>
-            </a:r>
-          </a:p>
-        </p:txBody>
-      </p:sp>
-      <p:sp>
-        <p:nvSpPr>
-          <p:cNvPr id="9" name="TextBox 8"/>
-          <p:cNvSpPr txBox="1"/>
-          <p:nvPr/>
-        </p:nvSpPr>
-        <p:spPr>
-          <a:xfrm>
-            <a:off x="640080" y="3534664"/>
-            <a:ext cx="10911535" cy="439928"/>
-          </a:xfrm>
-          <a:prstGeom prst="rect">
-            <a:avLst/>
-          </a:prstGeom>
-          <a:noFill/>
-        </p:spPr>
-        <p:txBody>
-          <a:bodyPr wrap="square" lIns="45720" rIns="45720">
-            <a:spAutoFit/>
-          </a:bodyPr>
-          <a:lstStyle/>
-          <a:p>
-            <a:pPr algn="l"/>
-            <a:r>
-              <a:rPr sz="2000" b="0">
-                <a:solidFill>
-                  <a:srgbClr val="1F2D3A"/>
-                </a:solidFill>
-              </a:rPr>
-              <a:t>Final bölümleri: S6 · S8 · S11 · S14 · S15 · S16 sonuç · S17</a:t>
-            </a:r>
-          </a:p>
-        </p:txBody>
-      </p:sp>
+              <a:t>Gösterim günü akışı — şema</a:t>
+            </a:r>
+          </a:p>
+        </p:txBody>
+      </p:sp>
+      <p:pic>
+        <p:nvPicPr>
+          <p:cNvPr id="7" name="Picture 6" descr="h07-01-gosterim-akisi.png"/>
+          <p:cNvPicPr>
+            <a:picLocks noChangeAspect="1"/>
+          </p:cNvPicPr>
+          <p:nvPr/>
+        </p:nvPicPr>
+        <p:blipFill>
+          <a:blip r:embed="rId3"/>
+          <a:stretch>
+            <a:fillRect/>
+          </a:stretch>
+        </p:blipFill>
+        <p:spPr>
+          <a:xfrm>
+            <a:off x="2046645" y="1325880"/>
+            <a:ext cx="8098404" cy="3864472"/>
+          </a:xfrm>
+          <a:prstGeom prst="rect">
+            <a:avLst/>
+          </a:prstGeom>
+        </p:spPr>
+      </p:pic>
     </p:spTree>
   </p:cSld>
   <p:clrMapOvr>

--- a/docs/week-7/cen429-week-7-sunum.tr.pptx
+++ b/docs/week-7/cen429-week-7-sunum.tr.pptx
@@ -20,30 +20,6 @@
     <p:sldId id="268" r:id="rId20"/>
     <p:sldId id="269" r:id="rId21"/>
     <p:sldId id="270" r:id="rId22"/>
-    <p:sldId id="271" r:id="rId23"/>
-    <p:sldId id="272" r:id="rId24"/>
-    <p:sldId id="273" r:id="rId25"/>
-    <p:sldId id="274" r:id="rId26"/>
-    <p:sldId id="275" r:id="rId27"/>
-    <p:sldId id="276" r:id="rId28"/>
-    <p:sldId id="277" r:id="rId29"/>
-    <p:sldId id="278" r:id="rId30"/>
-    <p:sldId id="279" r:id="rId31"/>
-    <p:sldId id="280" r:id="rId32"/>
-    <p:sldId id="281" r:id="rId33"/>
-    <p:sldId id="282" r:id="rId34"/>
-    <p:sldId id="283" r:id="rId35"/>
-    <p:sldId id="284" r:id="rId36"/>
-    <p:sldId id="285" r:id="rId37"/>
-    <p:sldId id="286" r:id="rId38"/>
-    <p:sldId id="287" r:id="rId39"/>
-    <p:sldId id="288" r:id="rId40"/>
-    <p:sldId id="289" r:id="rId41"/>
-    <p:sldId id="290" r:id="rId42"/>
-    <p:sldId id="291" r:id="rId43"/>
-    <p:sldId id="292" r:id="rId44"/>
-    <p:sldId id="293" r:id="rId45"/>
-    <p:sldId id="294" r:id="rId46"/>
   </p:sldIdLst>
   <p:sldSz cx="12191695" cy="6858000" type="screen4x3"/>
   <p:notesSz cx="6858000" cy="9144000"/>
@@ -541,76 +517,6 @@
           <a:p>
             <a:r>
               <a:t>Bu hafta ders değil gösterim haftası: her takım güvenlik kılavuzunun vize bölümlerini ve çalışan uygulamasını gösterir.</a:t>
-            </a:r>
-          </a:p>
-        </p:txBody>
-      </p:sp>
-      <p:sp>
-        <p:nvSpPr>
-          <p:cNvPr id="4" name="Slide Number Placeholder 3"/>
-          <p:cNvSpPr>
-            <a:spLocks noGrp="1"/>
-          </p:cNvSpPr>
-          <p:nvPr>
-            <p:ph type="sldNum" idx="5" sz="quarter"/>
-          </p:nvPr>
-        </p:nvSpPr>
-        <p:spPr/>
-      </p:sp>
-    </p:spTree>
-  </p:cSld>
-  <p:clrMapOvr>
-    <a:masterClrMapping/>
-  </p:clrMapOvr>
-</p:notes>
-</file>
-
-<file path=ppt/notesSlides/notesSlide2.xml><?xml version="1.0" encoding="utf-8"?>
-<p:notes xmlns:a="http://schemas.openxmlformats.org/drawingml/2006/main" xmlns:p="http://schemas.openxmlformats.org/presentationml/2006/main" xmlns:r="http://schemas.openxmlformats.org/officeDocument/2006/relationships">
-  <p:cSld>
-    <p:spTree>
-      <p:nvGrpSpPr>
-        <p:cNvPr id="1" name=""/>
-        <p:cNvGrpSpPr/>
-        <p:nvPr/>
-      </p:nvGrpSpPr>
-      <p:grpSpPr>
-        <a:xfrm>
-          <a:off x="0" y="0"/>
-          <a:ext cx="0" cy="0"/>
-          <a:chOff x="0" y="0"/>
-          <a:chExt cx="0" cy="0"/>
-        </a:xfrm>
-      </p:grpSpPr>
-      <p:sp>
-        <p:nvSpPr>
-          <p:cNvPr id="2" name="Slide Image Placeholder 1"/>
-          <p:cNvSpPr>
-            <a:spLocks noGrp="1"/>
-          </p:cNvSpPr>
-          <p:nvPr>
-            <p:ph type="sldImg" idx="2"/>
-          </p:nvPr>
-        </p:nvSpPr>
-        <p:spPr/>
-      </p:sp>
-      <p:sp>
-        <p:nvSpPr>
-          <p:cNvPr id="3" name="Notes Placeholder 2"/>
-          <p:cNvSpPr>
-            <a:spLocks noGrp="1"/>
-          </p:cNvSpPr>
-          <p:nvPr>
-            <p:ph type="body" idx="3" sz="quarter"/>
-          </p:nvPr>
-        </p:nvSpPr>
-        <p:spPr/>
-        <p:txBody>
-          <a:bodyPr/>
-          <a:lstStyle/>
-          <a:p>
-            <a:r>
-              <a:t>Vize gösteriminde (RAP1) her rubrik maddesini ne kanıtlayacağınızı açıklıyoruz.</a:t>
             </a:r>
           </a:p>
         </p:txBody>
@@ -3973,7 +3879,7 @@
           <a:lstStyle/>
           <a:p>
             <a:r>
-              <a:rPr sz="3000" b="1">
+              <a:rPr sz="2600" b="1">
                 <a:solidFill>
                   <a:srgbClr val="006D77"/>
                 </a:solidFill>
@@ -3992,7 +3898,7 @@
         <p:spPr>
           <a:xfrm>
             <a:off x="640080" y="1325880"/>
-            <a:ext cx="10911535" cy="2346960"/>
+            <a:ext cx="10911535" cy="3177540"/>
           </a:xfrm>
           <a:prstGeom prst="rect">
             <a:avLst/>
@@ -4011,7 +3917,7 @@
               </a:spcAft>
             </a:pPr>
             <a:r>
-              <a:rPr sz="2000" b="1">
+              <a:rPr sz="1800" b="1">
                 <a:solidFill>
                   <a:srgbClr val="006D77"/>
                 </a:solidFill>
@@ -4019,7 +3925,7 @@
               <a:t>• </a:t>
             </a:r>
             <a:r>
-              <a:rPr sz="2000" b="0">
+              <a:rPr sz="1800" b="0">
                 <a:solidFill>
                   <a:srgbClr val="1F2D3A"/>
                 </a:solidFill>
@@ -4034,7 +3940,7 @@
               </a:spcAft>
             </a:pPr>
             <a:r>
-              <a:rPr sz="2000" b="1">
+              <a:rPr sz="1800" b="1">
                 <a:solidFill>
                   <a:srgbClr val="006D77"/>
                 </a:solidFill>
@@ -4042,7 +3948,7 @@
               <a:t>• </a:t>
             </a:r>
             <a:r>
-              <a:rPr sz="2000" b="0">
+              <a:rPr sz="1800" b="0">
                 <a:solidFill>
                   <a:srgbClr val="1F2D3A"/>
                 </a:solidFill>
@@ -4057,7 +3963,7 @@
               </a:spcAft>
             </a:pPr>
             <a:r>
-              <a:rPr sz="2000" b="1">
+              <a:rPr sz="1800" b="1">
                 <a:solidFill>
                   <a:srgbClr val="006D77"/>
                 </a:solidFill>
@@ -4065,12 +3971,12 @@
               <a:t>• </a:t>
             </a:r>
             <a:r>
-              <a:rPr sz="2000" b="0">
+              <a:rPr sz="1800" b="0">
                 <a:solidFill>
                   <a:srgbClr val="1F2D3A"/>
                 </a:solidFill>
               </a:rPr>
-              <a:t>Anahtar nereden geliyor, nerede duruyor? Nonce tekrar edebilir mi?</a:t>
+              <a:t>Anahtar nereden geliyor, nerede duruyor, ne zaman siliniyor? Nonce tekrar edebilir mi?</a:t>
             </a:r>
           </a:p>
           <a:p>
@@ -4080,7 +3986,7 @@
               </a:spcAft>
             </a:pPr>
             <a:r>
-              <a:rPr sz="2000" b="1">
+              <a:rPr sz="1800" b="1">
                 <a:solidFill>
                   <a:srgbClr val="006D77"/>
                 </a:solidFill>
@@ -4088,7 +3994,7 @@
               <a:t>• </a:t>
             </a:r>
             <a:r>
-              <a:rPr sz="2000" b="0">
+              <a:rPr sz="1800" b="0">
                 <a:solidFill>
                   <a:srgbClr val="1F2D3A"/>
                 </a:solidFill>
@@ -4103,7 +4009,7 @@
               </a:spcAft>
             </a:pPr>
             <a:r>
-              <a:rPr sz="2000" b="1">
+              <a:rPr sz="1800" b="1">
                 <a:solidFill>
                   <a:srgbClr val="006D77"/>
                 </a:solidFill>
@@ -4111,7 +4017,7 @@
               <a:t>• </a:t>
             </a:r>
             <a:r>
-              <a:rPr sz="2000" b="0">
+              <a:rPr sz="1800" b="0">
                 <a:solidFill>
                   <a:srgbClr val="1F2D3A"/>
                 </a:solidFill>
@@ -4126,7 +4032,7 @@
               </a:spcAft>
             </a:pPr>
             <a:r>
-              <a:rPr sz="2000" b="1">
+              <a:rPr sz="1800" b="1">
                 <a:solidFill>
                   <a:srgbClr val="006D77"/>
                 </a:solidFill>
@@ -4134,12 +4040,81 @@
               <a:t>• </a:t>
             </a:r>
             <a:r>
-              <a:rPr sz="2000" b="0">
+              <a:rPr sz="1800" b="0">
                 <a:solidFill>
                   <a:srgbClr val="1F2D3A"/>
                 </a:solidFill>
               </a:rPr>
               <a:t>SBOM'da zafiyetli bileşen var mı? Etkileniyor musunuz?</a:t>
+            </a:r>
+          </a:p>
+          <a:p>
+            <a:pPr>
+              <a:spcAft>
+                <a:spcPts val="300"/>
+              </a:spcAft>
+            </a:pPr>
+            <a:r>
+              <a:rPr sz="1800" b="1">
+                <a:solidFill>
+                  <a:srgbClr val="006D77"/>
+                </a:solidFill>
+              </a:rPr>
+              <a:t>• </a:t>
+            </a:r>
+            <a:r>
+              <a:rPr sz="1800" b="0">
+                <a:solidFill>
+                  <a:srgbClr val="1F2D3A"/>
+                </a:solidFill>
+              </a:rPr>
+              <a:t>En kritik üç varlığınız, C/I/I+ etiketleri ve yaşam döngüsü nedir?</a:t>
+            </a:r>
+          </a:p>
+          <a:p>
+            <a:pPr>
+              <a:spcAft>
+                <a:spcPts val="300"/>
+              </a:spcAft>
+            </a:pPr>
+            <a:r>
+              <a:rPr sz="1800" b="1">
+                <a:solidFill>
+                  <a:srgbClr val="006D77"/>
+                </a:solidFill>
+              </a:rPr>
+              <a:t>• </a:t>
+            </a:r>
+            <a:r>
+              <a:rPr sz="1800" b="0">
+                <a:solidFill>
+                  <a:srgbClr val="1F2D3A"/>
+                </a:solidFill>
+              </a:rPr>
+              <a:t>Bir tehdide karşı hangi önlem var, nasıl doğrulandı? (tehdit → önlem → kanıt)</a:t>
+            </a:r>
+          </a:p>
+          <a:p>
+            <a:pPr>
+              <a:spcAft>
+                <a:spcPts val="300"/>
+              </a:spcAft>
+            </a:pPr>
+            <a:r>
+              <a:rPr sz="1800" b="1">
+                <a:solidFill>
+                  <a:srgbClr val="006D77"/>
+                </a:solidFill>
+              </a:rPr>
+              <a:t>• </a:t>
+            </a:r>
+            <a:r>
+              <a:rPr sz="1800" b="0">
+                <a:solidFill>
+                  <a:srgbClr val="1F2D3A"/>
+                </a:solidFill>
+              </a:rPr>
+              <a:t>Kalan riskiniz ne, neden kabul edilebilir? (dürüst ve gerekçeli yanıtlayın)</a:t>
             </a:r>
           </a:p>
         </p:txBody>
@@ -4329,7 +4304,7 @@
         </p:nvGraphicFramePr>
         <p:xfrm>
           <a:off x="640080" y="1325880"/>
-          <a:ext cx="10911535" cy="2403043"/>
+          <a:ext cx="10911534" cy="2726740"/>
         </p:xfrm>
         <a:graphic>
           <a:graphicData uri="http://schemas.openxmlformats.org/drawingml/2006/table">
@@ -4338,10 +4313,10 @@
                 <a:tableStyleId>{5C22544A-7EE6-4342-B048-85BDC9FD1C3A}</a:tableStyleId>
               </a:tblPr>
               <a:tblGrid>
-                <a:gridCol w="5279775"/>
-                <a:gridCol w="5631760"/>
+                <a:gridCol w="5310924"/>
+                <a:gridCol w="5600610"/>
               </a:tblGrid>
-              <a:tr h="343291">
+              <a:tr h="340842">
                 <a:tc>
                   <a:txBody>
                     <a:bodyPr wrap="square"/>
@@ -4385,7 +4360,7 @@
                   </a:tcPr>
                 </a:tc>
               </a:tr>
-              <a:tr h="343291">
+              <a:tr h="340842">
                 <a:tc>
                   <a:txBody>
                     <a:bodyPr wrap="square"/>
@@ -4429,7 +4404,7 @@
                   </a:tcPr>
                 </a:tc>
               </a:tr>
-              <a:tr h="343291">
+              <a:tr h="340842">
                 <a:tc>
                   <a:txBody>
                     <a:bodyPr wrap="square"/>
@@ -4473,7 +4448,7 @@
                   </a:tcPr>
                 </a:tc>
               </a:tr>
-              <a:tr h="343291">
+              <a:tr h="340842">
                 <a:tc>
                   <a:txBody>
                     <a:bodyPr wrap="square"/>
@@ -4517,7 +4492,7 @@
                   </a:tcPr>
                 </a:tc>
               </a:tr>
-              <a:tr h="343291">
+              <a:tr h="340842">
                 <a:tc>
                   <a:txBody>
                     <a:bodyPr wrap="square"/>
@@ -4561,7 +4536,7 @@
                   </a:tcPr>
                 </a:tc>
               </a:tr>
-              <a:tr h="343291">
+              <a:tr h="340842">
                 <a:tc>
                   <a:txBody>
                     <a:bodyPr wrap="square"/>
@@ -4605,7 +4580,7 @@
                   </a:tcPr>
                 </a:tc>
               </a:tr>
-              <a:tr h="343297">
+              <a:tr h="340842">
                 <a:tc>
                   <a:txBody>
                     <a:bodyPr wrap="square"/>
@@ -4657,6 +4632,50 @@
                   </a:tcPr>
                 </a:tc>
               </a:tr>
+              <a:tr h="340846">
+                <a:tc>
+                  <a:txBody>
+                    <a:bodyPr wrap="square"/>
+                    <a:lstStyle/>
+                    <a:p>
+                      <a:r>
+                        <a:rPr sz="1296" b="0">
+                          <a:solidFill>
+                            <a:srgbClr val="1F2D3A"/>
+                          </a:solidFill>
+                        </a:rPr>
+                        <a:t>Canlı demo yedeksiz çöküyor / kalan risk bölümü boş</a:t>
+                      </a:r>
+                    </a:p>
+                  </a:txBody>
+                  <a:tcPr marL="54864" marR="54864" marT="27432" marB="27432" anchor="ctr">
+                    <a:solidFill>
+                      <a:srgbClr val="FFFFFF"/>
+                    </a:solidFill>
+                  </a:tcPr>
+                </a:tc>
+                <a:tc>
+                  <a:txBody>
+                    <a:bodyPr wrap="square"/>
+                    <a:lstStyle/>
+                    <a:p>
+                      <a:r>
+                        <a:rPr sz="1296" b="0">
+                          <a:solidFill>
+                            <a:srgbClr val="1F2D3A"/>
+                          </a:solidFill>
+                        </a:rPr>
+                        <a:t>Hazırlıksızlık ve dürüst olmayan analiz izlenimi verir</a:t>
+                      </a:r>
+                    </a:p>
+                  </a:txBody>
+                  <a:tcPr marL="54864" marR="54864" marT="27432" marB="27432" anchor="ctr">
+                    <a:solidFill>
+                      <a:srgbClr val="FFFFFF"/>
+                    </a:solidFill>
+                  </a:tcPr>
+                </a:tc>
+              </a:tr>
             </a:tbl>
           </a:graphicData>
         </a:graphic>
@@ -4852,8 +4871,8 @@
         </p:blipFill>
         <p:spPr>
           <a:xfrm>
-            <a:off x="2046645" y="1325880"/>
-            <a:ext cx="8098404" cy="3473778"/>
+            <a:off x="640080" y="1325880"/>
+            <a:ext cx="10911535" cy="3481384"/>
           </a:xfrm>
           <a:prstGeom prst="rect">
             <a:avLst/>
@@ -5030,7 +5049,7 @@
                   <a:srgbClr val="006D77"/>
                 </a:solidFill>
               </a:rPr>
-              <a:t>Akademik dürüstlük ve sonrası</a:t>
+              <a:t>Akademik dürüstlük</a:t>
             </a:r>
           </a:p>
         </p:txBody>
@@ -5130,99 +5149,7 @@
                   <a:srgbClr val="1F2D3A"/>
                 </a:solidFill>
               </a:rPr>
-              <a:t>Her takım üyesine soru sorulabilir</a:t>
-            </a:r>
-          </a:p>
-        </p:txBody>
-      </p:sp>
-      <p:sp>
-        <p:nvSpPr>
-          <p:cNvPr id="8" name="TextBox 7"/>
-          <p:cNvSpPr txBox="1"/>
-          <p:nvPr/>
-        </p:nvSpPr>
-        <p:spPr>
-          <a:xfrm>
-            <a:off x="640080" y="2654808"/>
-            <a:ext cx="10911535" cy="770128"/>
-          </a:xfrm>
-          <a:prstGeom prst="rect">
-            <a:avLst/>
-          </a:prstGeom>
-          <a:noFill/>
-        </p:spPr>
-        <p:txBody>
-          <a:bodyPr wrap="square" lIns="45720" rIns="45720">
-            <a:spAutoFit/>
-          </a:bodyPr>
-          <a:lstStyle/>
-          <a:p>
-            <a:pPr algn="l"/>
-            <a:r>
-              <a:rPr sz="2000" b="1">
-                <a:solidFill>
-                  <a:srgbClr val="1F2D3A"/>
-                </a:solidFill>
-              </a:rPr>
-              <a:t>Gösterimden sonra:</a:t>
-            </a:r>
-            <a:r>
-              <a:rPr sz="2000" b="0">
-                <a:solidFill>
-                  <a:srgbClr val="1F2D3A"/>
-                </a:solidFill>
-              </a:rPr>
-              <a:t> geri bildirimi </a:t>
-            </a:r>
-            <a:r>
-              <a:rPr sz="2000" b="1">
-                <a:solidFill>
-                  <a:srgbClr val="1F2D3A"/>
-                </a:solidFill>
-              </a:rPr>
-              <a:t>bulgu listesi</a:t>
-            </a:r>
-            <a:r>
-              <a:rPr sz="2000" b="0">
-                <a:solidFill>
-                  <a:srgbClr val="1F2D3A"/>
-                </a:solidFill>
-              </a:rPr>
-              <a:t> olarak yaz (bulgu · önem · düzeltme · tarih) → 12. haftanın küçük modeli</a:t>
-            </a:r>
-          </a:p>
-        </p:txBody>
-      </p:sp>
-      <p:sp>
-        <p:nvSpPr>
-          <p:cNvPr id="9" name="TextBox 8"/>
-          <p:cNvSpPr txBox="1"/>
-          <p:nvPr/>
-        </p:nvSpPr>
-        <p:spPr>
-          <a:xfrm>
-            <a:off x="640080" y="3534664"/>
-            <a:ext cx="10911535" cy="439928"/>
-          </a:xfrm>
-          <a:prstGeom prst="rect">
-            <a:avLst/>
-          </a:prstGeom>
-          <a:noFill/>
-        </p:spPr>
-        <p:txBody>
-          <a:bodyPr wrap="square" lIns="45720" rIns="45720">
-            <a:spAutoFit/>
-          </a:bodyPr>
-          <a:lstStyle/>
-          <a:p>
-            <a:pPr algn="l"/>
-            <a:r>
-              <a:rPr sz="2000" b="0">
-                <a:solidFill>
-                  <a:srgbClr val="1F2D3A"/>
-                </a:solidFill>
-              </a:rPr>
-              <a:t>Final bölümleri: S6 · S8 · S11 · S14 · S15 · S16 sonuç · S17</a:t>
+              <a:t>Her takım üyesi kendi bölümünü anlatabilmeli; herkese soru sorulabilir</a:t>
             </a:r>
           </a:p>
         </p:txBody>
@@ -5397,7 +5324,7 @@
                   <a:srgbClr val="006D77"/>
                 </a:solidFill>
               </a:rPr>
-              <a:t>Gelecek hafta</a:t>
+              <a:t>Gösterimden sonra</a:t>
             </a:r>
           </a:p>
         </p:txBody>
@@ -5411,41 +5338,7 @@
         <p:spPr>
           <a:xfrm>
             <a:off x="640080" y="1325880"/>
-            <a:ext cx="10911535" cy="439928"/>
-          </a:xfrm>
-          <a:prstGeom prst="rect">
-            <a:avLst/>
-          </a:prstGeom>
-          <a:noFill/>
-        </p:spPr>
-        <p:txBody>
-          <a:bodyPr wrap="square" lIns="45720" rIns="45720">
-            <a:spAutoFit/>
-          </a:bodyPr>
-          <a:lstStyle/>
-          <a:p>
-            <a:pPr algn="l"/>
-            <a:r>
-              <a:rPr sz="2000" b="1">
-                <a:solidFill>
-                  <a:srgbClr val="1F2D3A"/>
-                </a:solidFill>
-              </a:rPr>
-              <a:t>Hafta 8 — Ara sınav haftası: Quiz-1</a:t>
-            </a:r>
-          </a:p>
-        </p:txBody>
-      </p:sp>
-      <p:sp>
-        <p:nvSpPr>
-          <p:cNvPr id="8" name="TextBox 7"/>
-          <p:cNvSpPr txBox="1"/>
-          <p:nvPr/>
-        </p:nvSpPr>
-        <p:spPr>
-          <a:xfrm>
-            <a:off x="640080" y="1875536"/>
-            <a:ext cx="10911535" cy="843280"/>
+            <a:ext cx="10911535" cy="1173480"/>
           </a:xfrm>
           <a:prstGeom prst="rect">
             <a:avLst/>
@@ -5477,7 +5370,23 @@
                   <a:srgbClr val="1F2D3A"/>
                 </a:solidFill>
               </a:rPr>
-              <a:t>Kapsam: 1–6. haftalar</a:t>
+              <a:t>Geri bildirimi </a:t>
+            </a:r>
+            <a:r>
+              <a:rPr sz="2000" b="1">
+                <a:solidFill>
+                  <a:srgbClr val="1F2D3A"/>
+                </a:solidFill>
+              </a:rPr>
+              <a:t>bulgu listesi</a:t>
+            </a:r>
+            <a:r>
+              <a:rPr sz="2000" b="0">
+                <a:solidFill>
+                  <a:srgbClr val="1F2D3A"/>
+                </a:solidFill>
+              </a:rPr>
+              <a:t> olarak yazın (bulgu · önem · düzeltme · tarih) → 12. haftanın küçük modeli</a:t>
             </a:r>
           </a:p>
           <a:p>
@@ -5500,7 +5409,76 @@
                   <a:srgbClr val="1F2D3A"/>
                 </a:solidFill>
               </a:rPr>
-              <a:t>Çalışma rehberi ve örnek sorular: 8. hafta sayfası</a:t>
+              <a:t>Final bölümleri: S6 · S8 · S11 · S14 · S15 · S16 sonuç · S17</a:t>
+            </a:r>
+          </a:p>
+        </p:txBody>
+      </p:sp>
+      <p:sp>
+        <p:nvSpPr>
+          <p:cNvPr id="8" name="Rectangle 7"/>
+          <p:cNvSpPr/>
+          <p:nvPr/>
+        </p:nvSpPr>
+        <p:spPr>
+          <a:xfrm>
+            <a:off x="640080" y="2609088"/>
+            <a:ext cx="10911535" cy="934719"/>
+          </a:xfrm>
+          <a:prstGeom prst="rect">
+            <a:avLst/>
+          </a:prstGeom>
+          <a:solidFill>
+            <a:srgbClr val="EEF7F8"/>
+          </a:solidFill>
+          <a:ln>
+            <a:solidFill>
+              <a:srgbClr val="006D77"/>
+            </a:solidFill>
+          </a:ln>
+        </p:spPr>
+        <p:style>
+          <a:lnRef idx="1">
+            <a:schemeClr val="accent1"/>
+          </a:lnRef>
+          <a:fillRef idx="3">
+            <a:schemeClr val="accent1"/>
+          </a:fillRef>
+          <a:effectRef idx="2">
+            <a:schemeClr val="accent1"/>
+          </a:effectRef>
+          <a:fontRef idx="minor">
+            <a:schemeClr val="lt1"/>
+          </a:fontRef>
+        </p:style>
+        <p:txBody>
+          <a:bodyPr rtlCol="0" anchor="ctr" wrap="square" lIns="182880"/>
+          <a:lstStyle/>
+          <a:p>
+            <a:pPr algn="l"/>
+            <a:r>
+              <a:rPr sz="2000" b="0">
+                <a:solidFill>
+                  <a:srgbClr val="1F2D3A"/>
+                </a:solidFill>
+              </a:rPr>
+              <a:t>Gösterim bir </a:t>
+            </a:r>
+            <a:r>
+              <a:rPr sz="2000" b="1">
+                <a:solidFill>
+                  <a:srgbClr val="1F2D3A"/>
+                </a:solidFill>
+              </a:rPr>
+              <a:t>kanıt</a:t>
+            </a:r>
+            <a:r>
+              <a:rPr sz="2000" b="0">
+                <a:solidFill>
+                  <a:srgbClr val="1F2D3A"/>
+                </a:solidFill>
+              </a:rPr>
+              <a:t> sunumudur: her iddianın arkasında bir belge, test ya da canlı çıktı olsun.</a:t>
             </a:r>
           </a:p>
         </p:txBody>
@@ -5514,166 +5492,6 @@
 </file>
 
 <file path=ppt/slides/slide15.xml><?xml version="1.0" encoding="utf-8"?>
-<p:sld xmlns:a="http://schemas.openxmlformats.org/drawingml/2006/main" xmlns:p="http://schemas.openxmlformats.org/presentationml/2006/main" xmlns:r="http://schemas.openxmlformats.org/officeDocument/2006/relationships">
-  <p:cSld>
-    <p:bg>
-      <p:bgPr>
-        <a:solidFill>
-          <a:srgbClr val="006D77"/>
-        </a:solidFill>
-        <a:effectLst/>
-      </p:bgPr>
-    </p:bg>
-    <p:spTree>
-      <p:nvGrpSpPr>
-        <p:cNvPr id="1" name=""/>
-        <p:cNvGrpSpPr/>
-        <p:nvPr/>
-      </p:nvGrpSpPr>
-      <p:grpSpPr/>
-      <p:sp>
-        <p:nvSpPr>
-          <p:cNvPr id="2" name="TextBox 1"/>
-          <p:cNvSpPr txBox="1"/>
-          <p:nvPr/>
-        </p:nvSpPr>
-        <p:spPr>
-          <a:xfrm>
-            <a:off x="1051560" y="182880"/>
-            <a:ext cx="7315200" cy="320040"/>
-          </a:xfrm>
-          <a:prstGeom prst="rect">
-            <a:avLst/>
-          </a:prstGeom>
-          <a:noFill/>
-        </p:spPr>
-        <p:txBody>
-          <a:bodyPr wrap="square" lIns="45720" rIns="45720">
-            <a:spAutoFit/>
-          </a:bodyPr>
-          <a:lstStyle/>
-          <a:p>
-            <a:r>
-              <a:rPr sz="1100" b="0">
-                <a:solidFill>
-                  <a:srgbClr val="D8F0F2"/>
-                </a:solidFill>
-              </a:rPr>
-              <a:t>CEN429 Güvenli Programlama · Hafta 7</a:t>
-            </a:r>
-          </a:p>
-        </p:txBody>
-      </p:sp>
-      <p:sp>
-        <p:nvSpPr>
-          <p:cNvPr id="3" name="TextBox 2"/>
-          <p:cNvSpPr txBox="1"/>
-          <p:nvPr/>
-        </p:nvSpPr>
-        <p:spPr>
-          <a:xfrm>
-            <a:off x="640080" y="6446520"/>
-            <a:ext cx="7315200" cy="274320"/>
-          </a:xfrm>
-          <a:prstGeom prst="rect">
-            <a:avLst/>
-          </a:prstGeom>
-          <a:noFill/>
-        </p:spPr>
-        <p:txBody>
-          <a:bodyPr wrap="square" lIns="45720" rIns="45720">
-            <a:spAutoFit/>
-          </a:bodyPr>
-          <a:lstStyle/>
-          <a:p>
-            <a:r>
-              <a:rPr sz="1000" b="0">
-                <a:solidFill>
-                  <a:srgbClr val="D8F0F2"/>
-                </a:solidFill>
-              </a:rPr>
-              <a:t>RTEÜ Bilgisayar Mühendisliği · 2026-2027 Güz</a:t>
-            </a:r>
-          </a:p>
-        </p:txBody>
-      </p:sp>
-      <p:sp>
-        <p:nvSpPr>
-          <p:cNvPr id="4" name="TextBox 3"/>
-          <p:cNvSpPr txBox="1"/>
-          <p:nvPr/>
-        </p:nvSpPr>
-        <p:spPr>
-          <a:xfrm>
-            <a:off x="10637215" y="6446520"/>
-            <a:ext cx="914400" cy="274320"/>
-          </a:xfrm>
-          <a:prstGeom prst="rect">
-            <a:avLst/>
-          </a:prstGeom>
-          <a:noFill/>
-        </p:spPr>
-        <p:txBody>
-          <a:bodyPr wrap="square" lIns="45720" rIns="45720">
-            <a:spAutoFit/>
-          </a:bodyPr>
-          <a:lstStyle/>
-          <a:p>
-            <a:pPr algn="r"/>
-            <a:r>
-              <a:rPr sz="1000" b="0">
-                <a:solidFill>
-                  <a:srgbClr val="D8F0F2"/>
-                </a:solidFill>
-              </a:rPr>
-              <a:t>15</a:t>
-            </a:r>
-          </a:p>
-        </p:txBody>
-      </p:sp>
-      <p:sp>
-        <p:nvSpPr>
-          <p:cNvPr id="5" name="TextBox 4"/>
-          <p:cNvSpPr txBox="1"/>
-          <p:nvPr/>
-        </p:nvSpPr>
-        <p:spPr>
-          <a:xfrm>
-            <a:off x="640080" y="2743200"/>
-            <a:ext cx="10911535" cy="1280160"/>
-          </a:xfrm>
-          <a:prstGeom prst="rect">
-            <a:avLst/>
-          </a:prstGeom>
-          <a:noFill/>
-        </p:spPr>
-        <p:txBody>
-          <a:bodyPr wrap="square" lIns="45720" rIns="45720">
-            <a:spAutoFit/>
-          </a:bodyPr>
-          <a:lstStyle/>
-          <a:p>
-            <a:pPr algn="l"/>
-            <a:r>
-              <a:rPr sz="4000" b="1">
-                <a:solidFill>
-                  <a:srgbClr val="FFFFFF"/>
-                </a:solidFill>
-              </a:rPr>
-              <a:t>Ek · Rubrik madde madde</a:t>
-            </a:r>
-          </a:p>
-        </p:txBody>
-      </p:sp>
-    </p:spTree>
-  </p:cSld>
-  <p:clrMapOvr>
-    <a:masterClrMapping/>
-  </p:clrMapOvr>
-</p:sld>
-</file>
-
-<file path=ppt/slides/slide16.xml><?xml version="1.0" encoding="utf-8"?>
 <p:sld xmlns:a="http://schemas.openxmlformats.org/drawingml/2006/main" xmlns:p="http://schemas.openxmlformats.org/presentationml/2006/main" xmlns:r="http://schemas.openxmlformats.org/officeDocument/2006/relationships">
   <p:cSld>
     <p:spTree>
@@ -5802,7 +5620,7 @@
                   <a:srgbClr val="5B6770"/>
                 </a:solidFill>
               </a:rPr>
-              <a:t>16</a:t>
+              <a:t>15</a:t>
             </a:r>
           </a:p>
         </p:txBody>
@@ -5835,7 +5653,7 @@
                   <a:srgbClr val="006D77"/>
                 </a:solidFill>
               </a:rPr>
-              <a:t>Rubrik neyi ölçer?</a:t>
+              <a:t>Gelecek hafta</a:t>
             </a:r>
           </a:p>
         </p:txBody>
@@ -5864,28 +5682,12 @@
           <a:p>
             <a:pPr algn="l"/>
             <a:r>
-              <a:rPr sz="2000" b="0">
+              <a:rPr sz="2000" b="1">
                 <a:solidFill>
                   <a:srgbClr val="1F2D3A"/>
                 </a:solidFill>
               </a:rPr>
-              <a:t>Vize gösterimi projenizin </a:t>
-            </a:r>
-            <a:r>
-              <a:rPr sz="2000" b="1">
-                <a:solidFill>
-                  <a:srgbClr val="1F2D3A"/>
-                </a:solidFill>
-              </a:rPr>
-              <a:t>ilk yarısını</a:t>
-            </a:r>
-            <a:r>
-              <a:rPr sz="2000" b="0">
-                <a:solidFill>
-                  <a:srgbClr val="1F2D3A"/>
-                </a:solidFill>
-              </a:rPr>
-              <a:t> ölçer:</a:t>
+              <a:t>Hafta 8 — Ara sınav haftası: Quiz-1</a:t>
             </a:r>
           </a:p>
         </p:txBody>
@@ -5899,7 +5701,7 @@
         <p:spPr>
           <a:xfrm>
             <a:off x="640080" y="1875536"/>
-            <a:ext cx="10911535" cy="1595120"/>
+            <a:ext cx="10911535" cy="843280"/>
           </a:xfrm>
           <a:prstGeom prst="rect">
             <a:avLst/>
@@ -5931,7 +5733,7 @@
                   <a:srgbClr val="1F2D3A"/>
                 </a:solidFill>
               </a:rPr>
-              <a:t>ürün, mimari, tehdit modeli</a:t>
+              <a:t>Kapsam: 1–6. haftalar</a:t>
             </a:r>
           </a:p>
           <a:p>
@@ -5954,878 +5756,7 @@
                   <a:srgbClr val="1F2D3A"/>
                 </a:solidFill>
               </a:rPr>
-              <a:t>varlık yönetimi</a:t>
-            </a:r>
-          </a:p>
-          <a:p>
-            <a:pPr>
-              <a:spcAft>
-                <a:spcPts val="300"/>
-              </a:spcAft>
-            </a:pPr>
-            <a:r>
-              <a:rPr sz="2000" b="1">
-                <a:solidFill>
-                  <a:srgbClr val="006D77"/>
-                </a:solidFill>
-              </a:rPr>
-              <a:t>• </a:t>
-            </a:r>
-            <a:r>
-              <a:rPr sz="2000" b="0">
-                <a:solidFill>
-                  <a:srgbClr val="1F2D3A"/>
-                </a:solidFill>
-              </a:rPr>
-              <a:t>temel korumalar</a:t>
-            </a:r>
-          </a:p>
-          <a:p>
-            <a:pPr>
-              <a:spcAft>
-                <a:spcPts val="300"/>
-              </a:spcAft>
-            </a:pPr>
-            <a:r>
-              <a:rPr sz="2000" b="1">
-                <a:solidFill>
-                  <a:srgbClr val="006D77"/>
-                </a:solidFill>
-              </a:rPr>
-              <a:t>• </a:t>
-            </a:r>
-            <a:r>
-              <a:rPr sz="2000" b="0">
-                <a:solidFill>
-                  <a:srgbClr val="1F2D3A"/>
-                </a:solidFill>
-              </a:rPr>
-              <a:t>belge ve sunum</a:t>
-            </a:r>
-          </a:p>
-        </p:txBody>
-      </p:sp>
-    </p:spTree>
-  </p:cSld>
-  <p:clrMapOvr>
-    <a:masterClrMapping/>
-  </p:clrMapOvr>
-</p:sld>
-</file>
-
-<file path=ppt/slides/slide17.xml><?xml version="1.0" encoding="utf-8"?>
-<p:sld xmlns:a="http://schemas.openxmlformats.org/drawingml/2006/main" xmlns:p="http://schemas.openxmlformats.org/presentationml/2006/main" xmlns:r="http://schemas.openxmlformats.org/officeDocument/2006/relationships">
-  <p:cSld>
-    <p:spTree>
-      <p:nvGrpSpPr>
-        <p:cNvPr id="1" name=""/>
-        <p:cNvGrpSpPr/>
-        <p:nvPr/>
-      </p:nvGrpSpPr>
-      <p:grpSpPr/>
-      <p:pic>
-        <p:nvPicPr>
-          <p:cNvPr id="2" name="Picture 1" descr="rteu_logo_kucuk.jpg"/>
-          <p:cNvPicPr>
-            <a:picLocks noChangeAspect="1"/>
-          </p:cNvPicPr>
-          <p:nvPr/>
-        </p:nvPicPr>
-        <p:blipFill>
-          <a:blip r:embed="rId2"/>
-          <a:stretch>
-            <a:fillRect/>
-          </a:stretch>
-        </p:blipFill>
-        <p:spPr>
-          <a:xfrm>
-            <a:off x="640080" y="164592"/>
-            <a:ext cx="242773" cy="329184"/>
-          </a:xfrm>
-          <a:prstGeom prst="rect">
-            <a:avLst/>
-          </a:prstGeom>
-        </p:spPr>
-      </p:pic>
-      <p:sp>
-        <p:nvSpPr>
-          <p:cNvPr id="3" name="TextBox 2"/>
-          <p:cNvSpPr txBox="1"/>
-          <p:nvPr/>
-        </p:nvSpPr>
-        <p:spPr>
-          <a:xfrm>
-            <a:off x="1051560" y="182880"/>
-            <a:ext cx="7315200" cy="320040"/>
-          </a:xfrm>
-          <a:prstGeom prst="rect">
-            <a:avLst/>
-          </a:prstGeom>
-          <a:noFill/>
-        </p:spPr>
-        <p:txBody>
-          <a:bodyPr wrap="square" lIns="45720" rIns="45720">
-            <a:spAutoFit/>
-          </a:bodyPr>
-          <a:lstStyle/>
-          <a:p>
-            <a:r>
-              <a:rPr sz="1100" b="0">
-                <a:solidFill>
-                  <a:srgbClr val="5B6770"/>
-                </a:solidFill>
-              </a:rPr>
-              <a:t>CEN429 Güvenli Programlama · Hafta 7</a:t>
-            </a:r>
-          </a:p>
-        </p:txBody>
-      </p:sp>
-      <p:sp>
-        <p:nvSpPr>
-          <p:cNvPr id="4" name="TextBox 3"/>
-          <p:cNvSpPr txBox="1"/>
-          <p:nvPr/>
-        </p:nvSpPr>
-        <p:spPr>
-          <a:xfrm>
-            <a:off x="640080" y="6446520"/>
-            <a:ext cx="7315200" cy="274320"/>
-          </a:xfrm>
-          <a:prstGeom prst="rect">
-            <a:avLst/>
-          </a:prstGeom>
-          <a:noFill/>
-        </p:spPr>
-        <p:txBody>
-          <a:bodyPr wrap="square" lIns="45720" rIns="45720">
-            <a:spAutoFit/>
-          </a:bodyPr>
-          <a:lstStyle/>
-          <a:p>
-            <a:r>
-              <a:rPr sz="1000" b="0">
-                <a:solidFill>
-                  <a:srgbClr val="5B6770"/>
-                </a:solidFill>
-              </a:rPr>
-              <a:t>RTEÜ Bilgisayar Mühendisliği · 2026-2027 Güz</a:t>
-            </a:r>
-          </a:p>
-        </p:txBody>
-      </p:sp>
-      <p:sp>
-        <p:nvSpPr>
-          <p:cNvPr id="5" name="TextBox 4"/>
-          <p:cNvSpPr txBox="1"/>
-          <p:nvPr/>
-        </p:nvSpPr>
-        <p:spPr>
-          <a:xfrm>
-            <a:off x="10637215" y="6446520"/>
-            <a:ext cx="914400" cy="274320"/>
-          </a:xfrm>
-          <a:prstGeom prst="rect">
-            <a:avLst/>
-          </a:prstGeom>
-          <a:noFill/>
-        </p:spPr>
-        <p:txBody>
-          <a:bodyPr wrap="square" lIns="45720" rIns="45720">
-            <a:spAutoFit/>
-          </a:bodyPr>
-          <a:lstStyle/>
-          <a:p>
-            <a:pPr algn="r"/>
-            <a:r>
-              <a:rPr sz="1000" b="0">
-                <a:solidFill>
-                  <a:srgbClr val="5B6770"/>
-                </a:solidFill>
-              </a:rPr>
-              <a:t>17</a:t>
-            </a:r>
-          </a:p>
-        </p:txBody>
-      </p:sp>
-      <p:sp>
-        <p:nvSpPr>
-          <p:cNvPr id="6" name="TextBox 5"/>
-          <p:cNvSpPr txBox="1"/>
-          <p:nvPr/>
-        </p:nvSpPr>
-        <p:spPr>
-          <a:xfrm>
-            <a:off x="640080" y="548640"/>
-            <a:ext cx="10911535" cy="731520"/>
-          </a:xfrm>
-          <a:prstGeom prst="rect">
-            <a:avLst/>
-          </a:prstGeom>
-          <a:noFill/>
-        </p:spPr>
-        <p:txBody>
-          <a:bodyPr wrap="square" lIns="45720" rIns="45720" anchor="ctr">
-            <a:spAutoFit/>
-          </a:bodyPr>
-          <a:lstStyle/>
-          <a:p>
-            <a:r>
-              <a:rPr sz="3000" b="1">
-                <a:solidFill>
-                  <a:srgbClr val="006D77"/>
-                </a:solidFill>
-              </a:rPr>
-              <a:t>Madde · ürün ve mimari</a:t>
-            </a:r>
-          </a:p>
-        </p:txBody>
-      </p:sp>
-      <p:sp>
-        <p:nvSpPr>
-          <p:cNvPr id="7" name="TextBox 6"/>
-          <p:cNvSpPr txBox="1"/>
-          <p:nvPr/>
-        </p:nvSpPr>
-        <p:spPr>
-          <a:xfrm>
-            <a:off x="640080" y="1325880"/>
-            <a:ext cx="10911535" cy="1219200"/>
-          </a:xfrm>
-          <a:prstGeom prst="rect">
-            <a:avLst/>
-          </a:prstGeom>
-          <a:noFill/>
-        </p:spPr>
-        <p:txBody>
-          <a:bodyPr wrap="square" lIns="45720" rIns="45720">
-            <a:spAutoFit/>
-          </a:bodyPr>
-          <a:lstStyle/>
-          <a:p>
-            <a:pPr>
-              <a:spcAft>
-                <a:spcPts val="300"/>
-              </a:spcAft>
-            </a:pPr>
-            <a:r>
-              <a:rPr sz="2000" b="1">
-                <a:solidFill>
-                  <a:srgbClr val="006D77"/>
-                </a:solidFill>
-              </a:rPr>
-              <a:t>• </a:t>
-            </a:r>
-            <a:r>
-              <a:rPr sz="2000" b="0">
-                <a:solidFill>
-                  <a:srgbClr val="1F2D3A"/>
-                </a:solidFill>
-              </a:rPr>
-              <a:t>Ne yapıyor, hangi bileşenler?</a:t>
-            </a:r>
-          </a:p>
-          <a:p>
-            <a:pPr>
-              <a:spcAft>
-                <a:spcPts val="300"/>
-              </a:spcAft>
-            </a:pPr>
-            <a:r>
-              <a:rPr sz="2000" b="1">
-                <a:solidFill>
-                  <a:srgbClr val="006D77"/>
-                </a:solidFill>
-              </a:rPr>
-              <a:t>• </a:t>
-            </a:r>
-            <a:r>
-              <a:rPr sz="2000" b="0">
-                <a:solidFill>
-                  <a:srgbClr val="1F2D3A"/>
-                </a:solidFill>
-              </a:rPr>
-              <a:t>Tek şema + en kritik üç varlık.</a:t>
-            </a:r>
-          </a:p>
-          <a:p>
-            <a:pPr>
-              <a:spcAft>
-                <a:spcPts val="300"/>
-              </a:spcAft>
-            </a:pPr>
-            <a:r>
-              <a:rPr sz="2000" b="1">
-                <a:solidFill>
-                  <a:srgbClr val="006D77"/>
-                </a:solidFill>
-              </a:rPr>
-              <a:t>• </a:t>
-            </a:r>
-            <a:r>
-              <a:rPr sz="2000" b="1">
-                <a:solidFill>
-                  <a:srgbClr val="1F2D3A"/>
-                </a:solidFill>
-              </a:rPr>
-              <a:t>Kanıt:</a:t>
-            </a:r>
-            <a:r>
-              <a:rPr sz="2000" b="0">
-                <a:solidFill>
-                  <a:srgbClr val="1F2D3A"/>
-                </a:solidFill>
-              </a:rPr>
-              <a:t> S2–S4 belgesi.</a:t>
-            </a:r>
-          </a:p>
-        </p:txBody>
-      </p:sp>
-    </p:spTree>
-  </p:cSld>
-  <p:clrMapOvr>
-    <a:masterClrMapping/>
-  </p:clrMapOvr>
-</p:sld>
-</file>
-
-<file path=ppt/slides/slide18.xml><?xml version="1.0" encoding="utf-8"?>
-<p:sld xmlns:a="http://schemas.openxmlformats.org/drawingml/2006/main" xmlns:p="http://schemas.openxmlformats.org/presentationml/2006/main" xmlns:r="http://schemas.openxmlformats.org/officeDocument/2006/relationships">
-  <p:cSld>
-    <p:spTree>
-      <p:nvGrpSpPr>
-        <p:cNvPr id="1" name=""/>
-        <p:cNvGrpSpPr/>
-        <p:nvPr/>
-      </p:nvGrpSpPr>
-      <p:grpSpPr/>
-      <p:pic>
-        <p:nvPicPr>
-          <p:cNvPr id="2" name="Picture 1" descr="rteu_logo_kucuk.jpg"/>
-          <p:cNvPicPr>
-            <a:picLocks noChangeAspect="1"/>
-          </p:cNvPicPr>
-          <p:nvPr/>
-        </p:nvPicPr>
-        <p:blipFill>
-          <a:blip r:embed="rId2"/>
-          <a:stretch>
-            <a:fillRect/>
-          </a:stretch>
-        </p:blipFill>
-        <p:spPr>
-          <a:xfrm>
-            <a:off x="640080" y="164592"/>
-            <a:ext cx="242773" cy="329184"/>
-          </a:xfrm>
-          <a:prstGeom prst="rect">
-            <a:avLst/>
-          </a:prstGeom>
-        </p:spPr>
-      </p:pic>
-      <p:sp>
-        <p:nvSpPr>
-          <p:cNvPr id="3" name="TextBox 2"/>
-          <p:cNvSpPr txBox="1"/>
-          <p:nvPr/>
-        </p:nvSpPr>
-        <p:spPr>
-          <a:xfrm>
-            <a:off x="1051560" y="182880"/>
-            <a:ext cx="7315200" cy="320040"/>
-          </a:xfrm>
-          <a:prstGeom prst="rect">
-            <a:avLst/>
-          </a:prstGeom>
-          <a:noFill/>
-        </p:spPr>
-        <p:txBody>
-          <a:bodyPr wrap="square" lIns="45720" rIns="45720">
-            <a:spAutoFit/>
-          </a:bodyPr>
-          <a:lstStyle/>
-          <a:p>
-            <a:r>
-              <a:rPr sz="1100" b="0">
-                <a:solidFill>
-                  <a:srgbClr val="5B6770"/>
-                </a:solidFill>
-              </a:rPr>
-              <a:t>CEN429 Güvenli Programlama · Hafta 7</a:t>
-            </a:r>
-          </a:p>
-        </p:txBody>
-      </p:sp>
-      <p:sp>
-        <p:nvSpPr>
-          <p:cNvPr id="4" name="TextBox 3"/>
-          <p:cNvSpPr txBox="1"/>
-          <p:nvPr/>
-        </p:nvSpPr>
-        <p:spPr>
-          <a:xfrm>
-            <a:off x="640080" y="6446520"/>
-            <a:ext cx="7315200" cy="274320"/>
-          </a:xfrm>
-          <a:prstGeom prst="rect">
-            <a:avLst/>
-          </a:prstGeom>
-          <a:noFill/>
-        </p:spPr>
-        <p:txBody>
-          <a:bodyPr wrap="square" lIns="45720" rIns="45720">
-            <a:spAutoFit/>
-          </a:bodyPr>
-          <a:lstStyle/>
-          <a:p>
-            <a:r>
-              <a:rPr sz="1000" b="0">
-                <a:solidFill>
-                  <a:srgbClr val="5B6770"/>
-                </a:solidFill>
-              </a:rPr>
-              <a:t>RTEÜ Bilgisayar Mühendisliği · 2026-2027 Güz</a:t>
-            </a:r>
-          </a:p>
-        </p:txBody>
-      </p:sp>
-      <p:sp>
-        <p:nvSpPr>
-          <p:cNvPr id="5" name="TextBox 4"/>
-          <p:cNvSpPr txBox="1"/>
-          <p:nvPr/>
-        </p:nvSpPr>
-        <p:spPr>
-          <a:xfrm>
-            <a:off x="10637215" y="6446520"/>
-            <a:ext cx="914400" cy="274320"/>
-          </a:xfrm>
-          <a:prstGeom prst="rect">
-            <a:avLst/>
-          </a:prstGeom>
-          <a:noFill/>
-        </p:spPr>
-        <p:txBody>
-          <a:bodyPr wrap="square" lIns="45720" rIns="45720">
-            <a:spAutoFit/>
-          </a:bodyPr>
-          <a:lstStyle/>
-          <a:p>
-            <a:pPr algn="r"/>
-            <a:r>
-              <a:rPr sz="1000" b="0">
-                <a:solidFill>
-                  <a:srgbClr val="5B6770"/>
-                </a:solidFill>
-              </a:rPr>
-              <a:t>18</a:t>
-            </a:r>
-          </a:p>
-        </p:txBody>
-      </p:sp>
-      <p:sp>
-        <p:nvSpPr>
-          <p:cNvPr id="6" name="TextBox 5"/>
-          <p:cNvSpPr txBox="1"/>
-          <p:nvPr/>
-        </p:nvSpPr>
-        <p:spPr>
-          <a:xfrm>
-            <a:off x="640080" y="548640"/>
-            <a:ext cx="10911535" cy="731520"/>
-          </a:xfrm>
-          <a:prstGeom prst="rect">
-            <a:avLst/>
-          </a:prstGeom>
-          <a:noFill/>
-        </p:spPr>
-        <p:txBody>
-          <a:bodyPr wrap="square" lIns="45720" rIns="45720" anchor="ctr">
-            <a:spAutoFit/>
-          </a:bodyPr>
-          <a:lstStyle/>
-          <a:p>
-            <a:r>
-              <a:rPr sz="3000" b="1">
-                <a:solidFill>
-                  <a:srgbClr val="006D77"/>
-                </a:solidFill>
-              </a:rPr>
-              <a:t>Madde · tehdit modeli</a:t>
-            </a:r>
-          </a:p>
-        </p:txBody>
-      </p:sp>
-      <p:sp>
-        <p:nvSpPr>
-          <p:cNvPr id="7" name="TextBox 6"/>
-          <p:cNvSpPr txBox="1"/>
-          <p:nvPr/>
-        </p:nvSpPr>
-        <p:spPr>
-          <a:xfrm>
-            <a:off x="640080" y="1325880"/>
-            <a:ext cx="10911535" cy="1219200"/>
-          </a:xfrm>
-          <a:prstGeom prst="rect">
-            <a:avLst/>
-          </a:prstGeom>
-          <a:noFill/>
-        </p:spPr>
-        <p:txBody>
-          <a:bodyPr wrap="square" lIns="45720" rIns="45720">
-            <a:spAutoFit/>
-          </a:bodyPr>
-          <a:lstStyle/>
-          <a:p>
-            <a:pPr>
-              <a:spcAft>
-                <a:spcPts val="300"/>
-              </a:spcAft>
-            </a:pPr>
-            <a:r>
-              <a:rPr sz="2000" b="1">
-                <a:solidFill>
-                  <a:srgbClr val="006D77"/>
-                </a:solidFill>
-              </a:rPr>
-              <a:t>• </a:t>
-            </a:r>
-            <a:r>
-              <a:rPr sz="2000" b="0">
-                <a:solidFill>
-                  <a:srgbClr val="1F2D3A"/>
-                </a:solidFill>
-              </a:rPr>
-              <a:t>STRIDE / saldırı ağacı.</a:t>
-            </a:r>
-          </a:p>
-          <a:p>
-            <a:pPr>
-              <a:spcAft>
-                <a:spcPts val="300"/>
-              </a:spcAft>
-            </a:pPr>
-            <a:r>
-              <a:rPr sz="2000" b="1">
-                <a:solidFill>
-                  <a:srgbClr val="006D77"/>
-                </a:solidFill>
-              </a:rPr>
-              <a:t>• </a:t>
-            </a:r>
-            <a:r>
-              <a:rPr sz="2000" b="0">
-                <a:solidFill>
-                  <a:srgbClr val="1F2D3A"/>
-                </a:solidFill>
-              </a:rPr>
-              <a:t>Her tehdide bir önlem.</a:t>
-            </a:r>
-          </a:p>
-          <a:p>
-            <a:pPr>
-              <a:spcAft>
-                <a:spcPts val="300"/>
-              </a:spcAft>
-            </a:pPr>
-            <a:r>
-              <a:rPr sz="2000" b="1">
-                <a:solidFill>
-                  <a:srgbClr val="006D77"/>
-                </a:solidFill>
-              </a:rPr>
-              <a:t>• </a:t>
-            </a:r>
-            <a:r>
-              <a:rPr sz="2000" b="1">
-                <a:solidFill>
-                  <a:srgbClr val="1F2D3A"/>
-                </a:solidFill>
-              </a:rPr>
-              <a:t>Kanıt:</a:t>
-            </a:r>
-            <a:r>
-              <a:rPr sz="2000" b="0">
-                <a:solidFill>
-                  <a:srgbClr val="1F2D3A"/>
-                </a:solidFill>
-              </a:rPr>
-              <a:t> S4 tehdit tablosu.</a:t>
-            </a:r>
-          </a:p>
-        </p:txBody>
-      </p:sp>
-    </p:spTree>
-  </p:cSld>
-  <p:clrMapOvr>
-    <a:masterClrMapping/>
-  </p:clrMapOvr>
-</p:sld>
-</file>
-
-<file path=ppt/slides/slide19.xml><?xml version="1.0" encoding="utf-8"?>
-<p:sld xmlns:a="http://schemas.openxmlformats.org/drawingml/2006/main" xmlns:p="http://schemas.openxmlformats.org/presentationml/2006/main" xmlns:r="http://schemas.openxmlformats.org/officeDocument/2006/relationships">
-  <p:cSld>
-    <p:spTree>
-      <p:nvGrpSpPr>
-        <p:cNvPr id="1" name=""/>
-        <p:cNvGrpSpPr/>
-        <p:nvPr/>
-      </p:nvGrpSpPr>
-      <p:grpSpPr/>
-      <p:pic>
-        <p:nvPicPr>
-          <p:cNvPr id="2" name="Picture 1" descr="rteu_logo_kucuk.jpg"/>
-          <p:cNvPicPr>
-            <a:picLocks noChangeAspect="1"/>
-          </p:cNvPicPr>
-          <p:nvPr/>
-        </p:nvPicPr>
-        <p:blipFill>
-          <a:blip r:embed="rId2"/>
-          <a:stretch>
-            <a:fillRect/>
-          </a:stretch>
-        </p:blipFill>
-        <p:spPr>
-          <a:xfrm>
-            <a:off x="640080" y="164592"/>
-            <a:ext cx="242773" cy="329184"/>
-          </a:xfrm>
-          <a:prstGeom prst="rect">
-            <a:avLst/>
-          </a:prstGeom>
-        </p:spPr>
-      </p:pic>
-      <p:sp>
-        <p:nvSpPr>
-          <p:cNvPr id="3" name="TextBox 2"/>
-          <p:cNvSpPr txBox="1"/>
-          <p:nvPr/>
-        </p:nvSpPr>
-        <p:spPr>
-          <a:xfrm>
-            <a:off x="1051560" y="182880"/>
-            <a:ext cx="7315200" cy="320040"/>
-          </a:xfrm>
-          <a:prstGeom prst="rect">
-            <a:avLst/>
-          </a:prstGeom>
-          <a:noFill/>
-        </p:spPr>
-        <p:txBody>
-          <a:bodyPr wrap="square" lIns="45720" rIns="45720">
-            <a:spAutoFit/>
-          </a:bodyPr>
-          <a:lstStyle/>
-          <a:p>
-            <a:r>
-              <a:rPr sz="1100" b="0">
-                <a:solidFill>
-                  <a:srgbClr val="5B6770"/>
-                </a:solidFill>
-              </a:rPr>
-              <a:t>CEN429 Güvenli Programlama · Hafta 7</a:t>
-            </a:r>
-          </a:p>
-        </p:txBody>
-      </p:sp>
-      <p:sp>
-        <p:nvSpPr>
-          <p:cNvPr id="4" name="TextBox 3"/>
-          <p:cNvSpPr txBox="1"/>
-          <p:nvPr/>
-        </p:nvSpPr>
-        <p:spPr>
-          <a:xfrm>
-            <a:off x="640080" y="6446520"/>
-            <a:ext cx="7315200" cy="274320"/>
-          </a:xfrm>
-          <a:prstGeom prst="rect">
-            <a:avLst/>
-          </a:prstGeom>
-          <a:noFill/>
-        </p:spPr>
-        <p:txBody>
-          <a:bodyPr wrap="square" lIns="45720" rIns="45720">
-            <a:spAutoFit/>
-          </a:bodyPr>
-          <a:lstStyle/>
-          <a:p>
-            <a:r>
-              <a:rPr sz="1000" b="0">
-                <a:solidFill>
-                  <a:srgbClr val="5B6770"/>
-                </a:solidFill>
-              </a:rPr>
-              <a:t>RTEÜ Bilgisayar Mühendisliği · 2026-2027 Güz</a:t>
-            </a:r>
-          </a:p>
-        </p:txBody>
-      </p:sp>
-      <p:sp>
-        <p:nvSpPr>
-          <p:cNvPr id="5" name="TextBox 4"/>
-          <p:cNvSpPr txBox="1"/>
-          <p:nvPr/>
-        </p:nvSpPr>
-        <p:spPr>
-          <a:xfrm>
-            <a:off x="10637215" y="6446520"/>
-            <a:ext cx="914400" cy="274320"/>
-          </a:xfrm>
-          <a:prstGeom prst="rect">
-            <a:avLst/>
-          </a:prstGeom>
-          <a:noFill/>
-        </p:spPr>
-        <p:txBody>
-          <a:bodyPr wrap="square" lIns="45720" rIns="45720">
-            <a:spAutoFit/>
-          </a:bodyPr>
-          <a:lstStyle/>
-          <a:p>
-            <a:pPr algn="r"/>
-            <a:r>
-              <a:rPr sz="1000" b="0">
-                <a:solidFill>
-                  <a:srgbClr val="5B6770"/>
-                </a:solidFill>
-              </a:rPr>
-              <a:t>19</a:t>
-            </a:r>
-          </a:p>
-        </p:txBody>
-      </p:sp>
-      <p:sp>
-        <p:nvSpPr>
-          <p:cNvPr id="6" name="TextBox 5"/>
-          <p:cNvSpPr txBox="1"/>
-          <p:nvPr/>
-        </p:nvSpPr>
-        <p:spPr>
-          <a:xfrm>
-            <a:off x="640080" y="548640"/>
-            <a:ext cx="10911535" cy="731520"/>
-          </a:xfrm>
-          <a:prstGeom prst="rect">
-            <a:avLst/>
-          </a:prstGeom>
-          <a:noFill/>
-        </p:spPr>
-        <p:txBody>
-          <a:bodyPr wrap="square" lIns="45720" rIns="45720" anchor="ctr">
-            <a:spAutoFit/>
-          </a:bodyPr>
-          <a:lstStyle/>
-          <a:p>
-            <a:r>
-              <a:rPr sz="3000" b="1">
-                <a:solidFill>
-                  <a:srgbClr val="006D77"/>
-                </a:solidFill>
-              </a:rPr>
-              <a:t>Madde · varlık yönetimi</a:t>
-            </a:r>
-          </a:p>
-        </p:txBody>
-      </p:sp>
-      <p:sp>
-        <p:nvSpPr>
-          <p:cNvPr id="7" name="TextBox 6"/>
-          <p:cNvSpPr txBox="1"/>
-          <p:nvPr/>
-        </p:nvSpPr>
-        <p:spPr>
-          <a:xfrm>
-            <a:off x="640080" y="1325880"/>
-            <a:ext cx="10911535" cy="1219200"/>
-          </a:xfrm>
-          <a:prstGeom prst="rect">
-            <a:avLst/>
-          </a:prstGeom>
-          <a:noFill/>
-        </p:spPr>
-        <p:txBody>
-          <a:bodyPr wrap="square" lIns="45720" rIns="45720">
-            <a:spAutoFit/>
-          </a:bodyPr>
-          <a:lstStyle/>
-          <a:p>
-            <a:pPr>
-              <a:spcAft>
-                <a:spcPts val="300"/>
-              </a:spcAft>
-            </a:pPr>
-            <a:r>
-              <a:rPr sz="2000" b="1">
-                <a:solidFill>
-                  <a:srgbClr val="006D77"/>
-                </a:solidFill>
-              </a:rPr>
-              <a:t>• </a:t>
-            </a:r>
-            <a:r>
-              <a:rPr sz="2000" b="0">
-                <a:solidFill>
-                  <a:srgbClr val="1F2D3A"/>
-                </a:solidFill>
-              </a:rPr>
-              <a:t>Varlık listesi + C/I/I+.</a:t>
-            </a:r>
-          </a:p>
-          <a:p>
-            <a:pPr>
-              <a:spcAft>
-                <a:spcPts val="300"/>
-              </a:spcAft>
-            </a:pPr>
-            <a:r>
-              <a:rPr sz="2000" b="1">
-                <a:solidFill>
-                  <a:srgbClr val="006D77"/>
-                </a:solidFill>
-              </a:rPr>
-              <a:t>• </a:t>
-            </a:r>
-            <a:r>
-              <a:rPr sz="2000" b="0">
-                <a:solidFill>
-                  <a:srgbClr val="1F2D3A"/>
-                </a:solidFill>
-              </a:rPr>
-              <a:t>Yaşam döngüsü.</a:t>
-            </a:r>
-          </a:p>
-          <a:p>
-            <a:pPr>
-              <a:spcAft>
-                <a:spcPts val="300"/>
-              </a:spcAft>
-            </a:pPr>
-            <a:r>
-              <a:rPr sz="2000" b="1">
-                <a:solidFill>
-                  <a:srgbClr val="006D77"/>
-                </a:solidFill>
-              </a:rPr>
-              <a:t>• </a:t>
-            </a:r>
-            <a:r>
-              <a:rPr sz="2000" b="1">
-                <a:solidFill>
-                  <a:srgbClr val="1F2D3A"/>
-                </a:solidFill>
-              </a:rPr>
-              <a:t>Kanıt:</a:t>
-            </a:r>
-            <a:r>
-              <a:rPr sz="2000" b="0">
-                <a:solidFill>
-                  <a:srgbClr val="1F2D3A"/>
-                </a:solidFill>
-              </a:rPr>
-              <a:t> S5.</a:t>
+              <a:t>Çalışma rehberi ve örnek sorular: 8. hafta sayfası</a:t>
             </a:r>
           </a:p>
         </p:txBody>
@@ -7193,2356 +6124,6 @@
 </p:sld>
 </file>
 
-<file path=ppt/slides/slide20.xml><?xml version="1.0" encoding="utf-8"?>
-<p:sld xmlns:a="http://schemas.openxmlformats.org/drawingml/2006/main" xmlns:p="http://schemas.openxmlformats.org/presentationml/2006/main" xmlns:r="http://schemas.openxmlformats.org/officeDocument/2006/relationships">
-  <p:cSld>
-    <p:spTree>
-      <p:nvGrpSpPr>
-        <p:cNvPr id="1" name=""/>
-        <p:cNvGrpSpPr/>
-        <p:nvPr/>
-      </p:nvGrpSpPr>
-      <p:grpSpPr/>
-      <p:pic>
-        <p:nvPicPr>
-          <p:cNvPr id="2" name="Picture 1" descr="rteu_logo_kucuk.jpg"/>
-          <p:cNvPicPr>
-            <a:picLocks noChangeAspect="1"/>
-          </p:cNvPicPr>
-          <p:nvPr/>
-        </p:nvPicPr>
-        <p:blipFill>
-          <a:blip r:embed="rId2"/>
-          <a:stretch>
-            <a:fillRect/>
-          </a:stretch>
-        </p:blipFill>
-        <p:spPr>
-          <a:xfrm>
-            <a:off x="640080" y="164592"/>
-            <a:ext cx="242773" cy="329184"/>
-          </a:xfrm>
-          <a:prstGeom prst="rect">
-            <a:avLst/>
-          </a:prstGeom>
-        </p:spPr>
-      </p:pic>
-      <p:sp>
-        <p:nvSpPr>
-          <p:cNvPr id="3" name="TextBox 2"/>
-          <p:cNvSpPr txBox="1"/>
-          <p:nvPr/>
-        </p:nvSpPr>
-        <p:spPr>
-          <a:xfrm>
-            <a:off x="1051560" y="182880"/>
-            <a:ext cx="7315200" cy="320040"/>
-          </a:xfrm>
-          <a:prstGeom prst="rect">
-            <a:avLst/>
-          </a:prstGeom>
-          <a:noFill/>
-        </p:spPr>
-        <p:txBody>
-          <a:bodyPr wrap="square" lIns="45720" rIns="45720">
-            <a:spAutoFit/>
-          </a:bodyPr>
-          <a:lstStyle/>
-          <a:p>
-            <a:r>
-              <a:rPr sz="1100" b="0">
-                <a:solidFill>
-                  <a:srgbClr val="5B6770"/>
-                </a:solidFill>
-              </a:rPr>
-              <a:t>CEN429 Güvenli Programlama · Hafta 7</a:t>
-            </a:r>
-          </a:p>
-        </p:txBody>
-      </p:sp>
-      <p:sp>
-        <p:nvSpPr>
-          <p:cNvPr id="4" name="TextBox 3"/>
-          <p:cNvSpPr txBox="1"/>
-          <p:nvPr/>
-        </p:nvSpPr>
-        <p:spPr>
-          <a:xfrm>
-            <a:off x="640080" y="6446520"/>
-            <a:ext cx="7315200" cy="274320"/>
-          </a:xfrm>
-          <a:prstGeom prst="rect">
-            <a:avLst/>
-          </a:prstGeom>
-          <a:noFill/>
-        </p:spPr>
-        <p:txBody>
-          <a:bodyPr wrap="square" lIns="45720" rIns="45720">
-            <a:spAutoFit/>
-          </a:bodyPr>
-          <a:lstStyle/>
-          <a:p>
-            <a:r>
-              <a:rPr sz="1000" b="0">
-                <a:solidFill>
-                  <a:srgbClr val="5B6770"/>
-                </a:solidFill>
-              </a:rPr>
-              <a:t>RTEÜ Bilgisayar Mühendisliği · 2026-2027 Güz</a:t>
-            </a:r>
-          </a:p>
-        </p:txBody>
-      </p:sp>
-      <p:sp>
-        <p:nvSpPr>
-          <p:cNvPr id="5" name="TextBox 4"/>
-          <p:cNvSpPr txBox="1"/>
-          <p:nvPr/>
-        </p:nvSpPr>
-        <p:spPr>
-          <a:xfrm>
-            <a:off x="10637215" y="6446520"/>
-            <a:ext cx="914400" cy="274320"/>
-          </a:xfrm>
-          <a:prstGeom prst="rect">
-            <a:avLst/>
-          </a:prstGeom>
-          <a:noFill/>
-        </p:spPr>
-        <p:txBody>
-          <a:bodyPr wrap="square" lIns="45720" rIns="45720">
-            <a:spAutoFit/>
-          </a:bodyPr>
-          <a:lstStyle/>
-          <a:p>
-            <a:pPr algn="r"/>
-            <a:r>
-              <a:rPr sz="1000" b="0">
-                <a:solidFill>
-                  <a:srgbClr val="5B6770"/>
-                </a:solidFill>
-              </a:rPr>
-              <a:t>20</a:t>
-            </a:r>
-          </a:p>
-        </p:txBody>
-      </p:sp>
-      <p:sp>
-        <p:nvSpPr>
-          <p:cNvPr id="6" name="TextBox 5"/>
-          <p:cNvSpPr txBox="1"/>
-          <p:nvPr/>
-        </p:nvSpPr>
-        <p:spPr>
-          <a:xfrm>
-            <a:off x="640080" y="548640"/>
-            <a:ext cx="10911535" cy="731520"/>
-          </a:xfrm>
-          <a:prstGeom prst="rect">
-            <a:avLst/>
-          </a:prstGeom>
-          <a:noFill/>
-        </p:spPr>
-        <p:txBody>
-          <a:bodyPr wrap="square" lIns="45720" rIns="45720" anchor="ctr">
-            <a:spAutoFit/>
-          </a:bodyPr>
-          <a:lstStyle/>
-          <a:p>
-            <a:r>
-              <a:rPr sz="3000" b="1">
-                <a:solidFill>
-                  <a:srgbClr val="006D77"/>
-                </a:solidFill>
-              </a:rPr>
-              <a:t>Madde · temel korumalar</a:t>
-            </a:r>
-          </a:p>
-        </p:txBody>
-      </p:sp>
-      <p:sp>
-        <p:nvSpPr>
-          <p:cNvPr id="7" name="TextBox 6"/>
-          <p:cNvSpPr txBox="1"/>
-          <p:nvPr/>
-        </p:nvSpPr>
-        <p:spPr>
-          <a:xfrm>
-            <a:off x="640080" y="1325880"/>
-            <a:ext cx="10911535" cy="843280"/>
-          </a:xfrm>
-          <a:prstGeom prst="rect">
-            <a:avLst/>
-          </a:prstGeom>
-          <a:noFill/>
-        </p:spPr>
-        <p:txBody>
-          <a:bodyPr wrap="square" lIns="45720" rIns="45720">
-            <a:spAutoFit/>
-          </a:bodyPr>
-          <a:lstStyle/>
-          <a:p>
-            <a:pPr>
-              <a:spcAft>
-                <a:spcPts val="300"/>
-              </a:spcAft>
-            </a:pPr>
-            <a:r>
-              <a:rPr sz="2000" b="1">
-                <a:solidFill>
-                  <a:srgbClr val="006D77"/>
-                </a:solidFill>
-              </a:rPr>
-              <a:t>• </a:t>
-            </a:r>
-            <a:r>
-              <a:rPr sz="2000" b="0">
-                <a:solidFill>
-                  <a:srgbClr val="1F2D3A"/>
-                </a:solidFill>
-              </a:rPr>
-              <a:t>Kripto (S8, kısmi), güvenli kod (S9, kısmi).</a:t>
-            </a:r>
-          </a:p>
-          <a:p>
-            <a:pPr>
-              <a:spcAft>
-                <a:spcPts val="300"/>
-              </a:spcAft>
-            </a:pPr>
-            <a:r>
-              <a:rPr sz="2000" b="1">
-                <a:solidFill>
-                  <a:srgbClr val="006D77"/>
-                </a:solidFill>
-              </a:rPr>
-              <a:t>• </a:t>
-            </a:r>
-            <a:r>
-              <a:rPr sz="2000" b="1">
-                <a:solidFill>
-                  <a:srgbClr val="1F2D3A"/>
-                </a:solidFill>
-              </a:rPr>
-              <a:t>Kanıt:</a:t>
-            </a:r>
-            <a:r>
-              <a:rPr sz="2000" b="0">
-                <a:solidFill>
-                  <a:srgbClr val="1F2D3A"/>
-                </a:solidFill>
-              </a:rPr>
-              <a:t> kod + test.</a:t>
-            </a:r>
-          </a:p>
-        </p:txBody>
-      </p:sp>
-    </p:spTree>
-  </p:cSld>
-  <p:clrMapOvr>
-    <a:masterClrMapping/>
-  </p:clrMapOvr>
-</p:sld>
-</file>
-
-<file path=ppt/slides/slide21.xml><?xml version="1.0" encoding="utf-8"?>
-<p:sld xmlns:a="http://schemas.openxmlformats.org/drawingml/2006/main" xmlns:p="http://schemas.openxmlformats.org/presentationml/2006/main" xmlns:r="http://schemas.openxmlformats.org/officeDocument/2006/relationships">
-  <p:cSld>
-    <p:spTree>
-      <p:nvGrpSpPr>
-        <p:cNvPr id="1" name=""/>
-        <p:cNvGrpSpPr/>
-        <p:nvPr/>
-      </p:nvGrpSpPr>
-      <p:grpSpPr/>
-      <p:pic>
-        <p:nvPicPr>
-          <p:cNvPr id="2" name="Picture 1" descr="rteu_logo_kucuk.jpg"/>
-          <p:cNvPicPr>
-            <a:picLocks noChangeAspect="1"/>
-          </p:cNvPicPr>
-          <p:nvPr/>
-        </p:nvPicPr>
-        <p:blipFill>
-          <a:blip r:embed="rId2"/>
-          <a:stretch>
-            <a:fillRect/>
-          </a:stretch>
-        </p:blipFill>
-        <p:spPr>
-          <a:xfrm>
-            <a:off x="640080" y="164592"/>
-            <a:ext cx="242773" cy="329184"/>
-          </a:xfrm>
-          <a:prstGeom prst="rect">
-            <a:avLst/>
-          </a:prstGeom>
-        </p:spPr>
-      </p:pic>
-      <p:sp>
-        <p:nvSpPr>
-          <p:cNvPr id="3" name="TextBox 2"/>
-          <p:cNvSpPr txBox="1"/>
-          <p:nvPr/>
-        </p:nvSpPr>
-        <p:spPr>
-          <a:xfrm>
-            <a:off x="1051560" y="182880"/>
-            <a:ext cx="7315200" cy="320040"/>
-          </a:xfrm>
-          <a:prstGeom prst="rect">
-            <a:avLst/>
-          </a:prstGeom>
-          <a:noFill/>
-        </p:spPr>
-        <p:txBody>
-          <a:bodyPr wrap="square" lIns="45720" rIns="45720">
-            <a:spAutoFit/>
-          </a:bodyPr>
-          <a:lstStyle/>
-          <a:p>
-            <a:r>
-              <a:rPr sz="1100" b="0">
-                <a:solidFill>
-                  <a:srgbClr val="5B6770"/>
-                </a:solidFill>
-              </a:rPr>
-              <a:t>CEN429 Güvenli Programlama · Hafta 7</a:t>
-            </a:r>
-          </a:p>
-        </p:txBody>
-      </p:sp>
-      <p:sp>
-        <p:nvSpPr>
-          <p:cNvPr id="4" name="TextBox 3"/>
-          <p:cNvSpPr txBox="1"/>
-          <p:nvPr/>
-        </p:nvSpPr>
-        <p:spPr>
-          <a:xfrm>
-            <a:off x="640080" y="6446520"/>
-            <a:ext cx="7315200" cy="274320"/>
-          </a:xfrm>
-          <a:prstGeom prst="rect">
-            <a:avLst/>
-          </a:prstGeom>
-          <a:noFill/>
-        </p:spPr>
-        <p:txBody>
-          <a:bodyPr wrap="square" lIns="45720" rIns="45720">
-            <a:spAutoFit/>
-          </a:bodyPr>
-          <a:lstStyle/>
-          <a:p>
-            <a:r>
-              <a:rPr sz="1000" b="0">
-                <a:solidFill>
-                  <a:srgbClr val="5B6770"/>
-                </a:solidFill>
-              </a:rPr>
-              <a:t>RTEÜ Bilgisayar Mühendisliği · 2026-2027 Güz</a:t>
-            </a:r>
-          </a:p>
-        </p:txBody>
-      </p:sp>
-      <p:sp>
-        <p:nvSpPr>
-          <p:cNvPr id="5" name="TextBox 4"/>
-          <p:cNvSpPr txBox="1"/>
-          <p:nvPr/>
-        </p:nvSpPr>
-        <p:spPr>
-          <a:xfrm>
-            <a:off x="10637215" y="6446520"/>
-            <a:ext cx="914400" cy="274320"/>
-          </a:xfrm>
-          <a:prstGeom prst="rect">
-            <a:avLst/>
-          </a:prstGeom>
-          <a:noFill/>
-        </p:spPr>
-        <p:txBody>
-          <a:bodyPr wrap="square" lIns="45720" rIns="45720">
-            <a:spAutoFit/>
-          </a:bodyPr>
-          <a:lstStyle/>
-          <a:p>
-            <a:pPr algn="r"/>
-            <a:r>
-              <a:rPr sz="1000" b="0">
-                <a:solidFill>
-                  <a:srgbClr val="5B6770"/>
-                </a:solidFill>
-              </a:rPr>
-              <a:t>21</a:t>
-            </a:r>
-          </a:p>
-        </p:txBody>
-      </p:sp>
-      <p:sp>
-        <p:nvSpPr>
-          <p:cNvPr id="6" name="TextBox 5"/>
-          <p:cNvSpPr txBox="1"/>
-          <p:nvPr/>
-        </p:nvSpPr>
-        <p:spPr>
-          <a:xfrm>
-            <a:off x="640080" y="548640"/>
-            <a:ext cx="10911535" cy="731520"/>
-          </a:xfrm>
-          <a:prstGeom prst="rect">
-            <a:avLst/>
-          </a:prstGeom>
-          <a:noFill/>
-        </p:spPr>
-        <p:txBody>
-          <a:bodyPr wrap="square" lIns="45720" rIns="45720" anchor="ctr">
-            <a:spAutoFit/>
-          </a:bodyPr>
-          <a:lstStyle/>
-          <a:p>
-            <a:r>
-              <a:rPr sz="3000" b="1">
-                <a:solidFill>
-                  <a:srgbClr val="006D77"/>
-                </a:solidFill>
-              </a:rPr>
-              <a:t>Madde · belge ve sunum</a:t>
-            </a:r>
-          </a:p>
-        </p:txBody>
-      </p:sp>
-      <p:sp>
-        <p:nvSpPr>
-          <p:cNvPr id="7" name="TextBox 6"/>
-          <p:cNvSpPr txBox="1"/>
-          <p:nvPr/>
-        </p:nvSpPr>
-        <p:spPr>
-          <a:xfrm>
-            <a:off x="640080" y="1325880"/>
-            <a:ext cx="10911535" cy="1219200"/>
-          </a:xfrm>
-          <a:prstGeom prst="rect">
-            <a:avLst/>
-          </a:prstGeom>
-          <a:noFill/>
-        </p:spPr>
-        <p:txBody>
-          <a:bodyPr wrap="square" lIns="45720" rIns="45720">
-            <a:spAutoFit/>
-          </a:bodyPr>
-          <a:lstStyle/>
-          <a:p>
-            <a:pPr>
-              <a:spcAft>
-                <a:spcPts val="300"/>
-              </a:spcAft>
-            </a:pPr>
-            <a:r>
-              <a:rPr sz="2000" b="1">
-                <a:solidFill>
-                  <a:srgbClr val="006D77"/>
-                </a:solidFill>
-              </a:rPr>
-              <a:t>• </a:t>
-            </a:r>
-            <a:r>
-              <a:rPr sz="2000" b="0">
-                <a:solidFill>
-                  <a:srgbClr val="1F2D3A"/>
-                </a:solidFill>
-              </a:rPr>
-              <a:t>Tutarlılık, sürüm kimliği.</a:t>
-            </a:r>
-          </a:p>
-          <a:p>
-            <a:pPr>
-              <a:spcAft>
-                <a:spcPts val="300"/>
-              </a:spcAft>
-            </a:pPr>
-            <a:r>
-              <a:rPr sz="2000" b="1">
-                <a:solidFill>
-                  <a:srgbClr val="006D77"/>
-                </a:solidFill>
-              </a:rPr>
-              <a:t>• </a:t>
-            </a:r>
-            <a:r>
-              <a:rPr sz="2000" b="0">
-                <a:solidFill>
-                  <a:srgbClr val="1F2D3A"/>
-                </a:solidFill>
-              </a:rPr>
-              <a:t>Anlaşılır anlatım.</a:t>
-            </a:r>
-          </a:p>
-          <a:p>
-            <a:pPr>
-              <a:spcAft>
-                <a:spcPts val="300"/>
-              </a:spcAft>
-            </a:pPr>
-            <a:r>
-              <a:rPr sz="2000" b="1">
-                <a:solidFill>
-                  <a:srgbClr val="006D77"/>
-                </a:solidFill>
-              </a:rPr>
-              <a:t>• </a:t>
-            </a:r>
-            <a:r>
-              <a:rPr sz="2000" b="1">
-                <a:solidFill>
-                  <a:srgbClr val="1F2D3A"/>
-                </a:solidFill>
-              </a:rPr>
-              <a:t>Kanıt:</a:t>
-            </a:r>
-            <a:r>
-              <a:rPr sz="2000" b="0">
-                <a:solidFill>
-                  <a:srgbClr val="1F2D3A"/>
-                </a:solidFill>
-              </a:rPr>
-              <a:t> kılavuzun tamamı.</a:t>
-            </a:r>
-          </a:p>
-        </p:txBody>
-      </p:sp>
-    </p:spTree>
-  </p:cSld>
-  <p:clrMapOvr>
-    <a:masterClrMapping/>
-  </p:clrMapOvr>
-</p:sld>
-</file>
-
-<file path=ppt/slides/slide22.xml><?xml version="1.0" encoding="utf-8"?>
-<p:sld xmlns:a="http://schemas.openxmlformats.org/drawingml/2006/main" xmlns:p="http://schemas.openxmlformats.org/presentationml/2006/main" xmlns:r="http://schemas.openxmlformats.org/officeDocument/2006/relationships">
-  <p:cSld>
-    <p:bg>
-      <p:bgPr>
-        <a:solidFill>
-          <a:srgbClr val="006D77"/>
-        </a:solidFill>
-        <a:effectLst/>
-      </p:bgPr>
-    </p:bg>
-    <p:spTree>
-      <p:nvGrpSpPr>
-        <p:cNvPr id="1" name=""/>
-        <p:cNvGrpSpPr/>
-        <p:nvPr/>
-      </p:nvGrpSpPr>
-      <p:grpSpPr/>
-      <p:sp>
-        <p:nvSpPr>
-          <p:cNvPr id="2" name="TextBox 1"/>
-          <p:cNvSpPr txBox="1"/>
-          <p:nvPr/>
-        </p:nvSpPr>
-        <p:spPr>
-          <a:xfrm>
-            <a:off x="1051560" y="182880"/>
-            <a:ext cx="7315200" cy="320040"/>
-          </a:xfrm>
-          <a:prstGeom prst="rect">
-            <a:avLst/>
-          </a:prstGeom>
-          <a:noFill/>
-        </p:spPr>
-        <p:txBody>
-          <a:bodyPr wrap="square" lIns="45720" rIns="45720">
-            <a:spAutoFit/>
-          </a:bodyPr>
-          <a:lstStyle/>
-          <a:p>
-            <a:r>
-              <a:rPr sz="1100" b="0">
-                <a:solidFill>
-                  <a:srgbClr val="D8F0F2"/>
-                </a:solidFill>
-              </a:rPr>
-              <a:t>CEN429 Güvenli Programlama · Hafta 7</a:t>
-            </a:r>
-          </a:p>
-        </p:txBody>
-      </p:sp>
-      <p:sp>
-        <p:nvSpPr>
-          <p:cNvPr id="3" name="TextBox 2"/>
-          <p:cNvSpPr txBox="1"/>
-          <p:nvPr/>
-        </p:nvSpPr>
-        <p:spPr>
-          <a:xfrm>
-            <a:off x="640080" y="6446520"/>
-            <a:ext cx="7315200" cy="274320"/>
-          </a:xfrm>
-          <a:prstGeom prst="rect">
-            <a:avLst/>
-          </a:prstGeom>
-          <a:noFill/>
-        </p:spPr>
-        <p:txBody>
-          <a:bodyPr wrap="square" lIns="45720" rIns="45720">
-            <a:spAutoFit/>
-          </a:bodyPr>
-          <a:lstStyle/>
-          <a:p>
-            <a:r>
-              <a:rPr sz="1000" b="0">
-                <a:solidFill>
-                  <a:srgbClr val="D8F0F2"/>
-                </a:solidFill>
-              </a:rPr>
-              <a:t>RTEÜ Bilgisayar Mühendisliği · 2026-2027 Güz</a:t>
-            </a:r>
-          </a:p>
-        </p:txBody>
-      </p:sp>
-      <p:sp>
-        <p:nvSpPr>
-          <p:cNvPr id="4" name="TextBox 3"/>
-          <p:cNvSpPr txBox="1"/>
-          <p:nvPr/>
-        </p:nvSpPr>
-        <p:spPr>
-          <a:xfrm>
-            <a:off x="10637215" y="6446520"/>
-            <a:ext cx="914400" cy="274320"/>
-          </a:xfrm>
-          <a:prstGeom prst="rect">
-            <a:avLst/>
-          </a:prstGeom>
-          <a:noFill/>
-        </p:spPr>
-        <p:txBody>
-          <a:bodyPr wrap="square" lIns="45720" rIns="45720">
-            <a:spAutoFit/>
-          </a:bodyPr>
-          <a:lstStyle/>
-          <a:p>
-            <a:pPr algn="r"/>
-            <a:r>
-              <a:rPr sz="1000" b="0">
-                <a:solidFill>
-                  <a:srgbClr val="D8F0F2"/>
-                </a:solidFill>
-              </a:rPr>
-              <a:t>22</a:t>
-            </a:r>
-          </a:p>
-        </p:txBody>
-      </p:sp>
-      <p:sp>
-        <p:nvSpPr>
-          <p:cNvPr id="5" name="TextBox 4"/>
-          <p:cNvSpPr txBox="1"/>
-          <p:nvPr/>
-        </p:nvSpPr>
-        <p:spPr>
-          <a:xfrm>
-            <a:off x="640080" y="2743200"/>
-            <a:ext cx="10911535" cy="1280160"/>
-          </a:xfrm>
-          <a:prstGeom prst="rect">
-            <a:avLst/>
-          </a:prstGeom>
-          <a:noFill/>
-        </p:spPr>
-        <p:txBody>
-          <a:bodyPr wrap="square" lIns="45720" rIns="45720">
-            <a:spAutoFit/>
-          </a:bodyPr>
-          <a:lstStyle/>
-          <a:p>
-            <a:pPr algn="l"/>
-            <a:r>
-              <a:rPr sz="4000" b="1">
-                <a:solidFill>
-                  <a:srgbClr val="FFFFFF"/>
-                </a:solidFill>
-              </a:rPr>
-              <a:t>Ek · Gösterim akışı</a:t>
-            </a:r>
-          </a:p>
-        </p:txBody>
-      </p:sp>
-    </p:spTree>
-  </p:cSld>
-  <p:clrMapOvr>
-    <a:masterClrMapping/>
-  </p:clrMapOvr>
-</p:sld>
-</file>
-
-<file path=ppt/slides/slide23.xml><?xml version="1.0" encoding="utf-8"?>
-<p:sld xmlns:a="http://schemas.openxmlformats.org/drawingml/2006/main" xmlns:p="http://schemas.openxmlformats.org/presentationml/2006/main" xmlns:r="http://schemas.openxmlformats.org/officeDocument/2006/relationships">
-  <p:cSld>
-    <p:spTree>
-      <p:nvGrpSpPr>
-        <p:cNvPr id="1" name=""/>
-        <p:cNvGrpSpPr/>
-        <p:nvPr/>
-      </p:nvGrpSpPr>
-      <p:grpSpPr/>
-      <p:pic>
-        <p:nvPicPr>
-          <p:cNvPr id="2" name="Picture 1" descr="rteu_logo_kucuk.jpg"/>
-          <p:cNvPicPr>
-            <a:picLocks noChangeAspect="1"/>
-          </p:cNvPicPr>
-          <p:nvPr/>
-        </p:nvPicPr>
-        <p:blipFill>
-          <a:blip r:embed="rId2"/>
-          <a:stretch>
-            <a:fillRect/>
-          </a:stretch>
-        </p:blipFill>
-        <p:spPr>
-          <a:xfrm>
-            <a:off x="640080" y="164592"/>
-            <a:ext cx="242773" cy="329184"/>
-          </a:xfrm>
-          <a:prstGeom prst="rect">
-            <a:avLst/>
-          </a:prstGeom>
-        </p:spPr>
-      </p:pic>
-      <p:sp>
-        <p:nvSpPr>
-          <p:cNvPr id="3" name="TextBox 2"/>
-          <p:cNvSpPr txBox="1"/>
-          <p:nvPr/>
-        </p:nvSpPr>
-        <p:spPr>
-          <a:xfrm>
-            <a:off x="1051560" y="182880"/>
-            <a:ext cx="7315200" cy="320040"/>
-          </a:xfrm>
-          <a:prstGeom prst="rect">
-            <a:avLst/>
-          </a:prstGeom>
-          <a:noFill/>
-        </p:spPr>
-        <p:txBody>
-          <a:bodyPr wrap="square" lIns="45720" rIns="45720">
-            <a:spAutoFit/>
-          </a:bodyPr>
-          <a:lstStyle/>
-          <a:p>
-            <a:r>
-              <a:rPr sz="1100" b="0">
-                <a:solidFill>
-                  <a:srgbClr val="5B6770"/>
-                </a:solidFill>
-              </a:rPr>
-              <a:t>CEN429 Güvenli Programlama · Hafta 7</a:t>
-            </a:r>
-          </a:p>
-        </p:txBody>
-      </p:sp>
-      <p:sp>
-        <p:nvSpPr>
-          <p:cNvPr id="4" name="TextBox 3"/>
-          <p:cNvSpPr txBox="1"/>
-          <p:nvPr/>
-        </p:nvSpPr>
-        <p:spPr>
-          <a:xfrm>
-            <a:off x="640080" y="6446520"/>
-            <a:ext cx="7315200" cy="274320"/>
-          </a:xfrm>
-          <a:prstGeom prst="rect">
-            <a:avLst/>
-          </a:prstGeom>
-          <a:noFill/>
-        </p:spPr>
-        <p:txBody>
-          <a:bodyPr wrap="square" lIns="45720" rIns="45720">
-            <a:spAutoFit/>
-          </a:bodyPr>
-          <a:lstStyle/>
-          <a:p>
-            <a:r>
-              <a:rPr sz="1000" b="0">
-                <a:solidFill>
-                  <a:srgbClr val="5B6770"/>
-                </a:solidFill>
-              </a:rPr>
-              <a:t>RTEÜ Bilgisayar Mühendisliği · 2026-2027 Güz</a:t>
-            </a:r>
-          </a:p>
-        </p:txBody>
-      </p:sp>
-      <p:sp>
-        <p:nvSpPr>
-          <p:cNvPr id="5" name="TextBox 4"/>
-          <p:cNvSpPr txBox="1"/>
-          <p:nvPr/>
-        </p:nvSpPr>
-        <p:spPr>
-          <a:xfrm>
-            <a:off x="10637215" y="6446520"/>
-            <a:ext cx="914400" cy="274320"/>
-          </a:xfrm>
-          <a:prstGeom prst="rect">
-            <a:avLst/>
-          </a:prstGeom>
-          <a:noFill/>
-        </p:spPr>
-        <p:txBody>
-          <a:bodyPr wrap="square" lIns="45720" rIns="45720">
-            <a:spAutoFit/>
-          </a:bodyPr>
-          <a:lstStyle/>
-          <a:p>
-            <a:pPr algn="r"/>
-            <a:r>
-              <a:rPr sz="1000" b="0">
-                <a:solidFill>
-                  <a:srgbClr val="5B6770"/>
-                </a:solidFill>
-              </a:rPr>
-              <a:t>23</a:t>
-            </a:r>
-          </a:p>
-        </p:txBody>
-      </p:sp>
-      <p:sp>
-        <p:nvSpPr>
-          <p:cNvPr id="6" name="TextBox 5"/>
-          <p:cNvSpPr txBox="1"/>
-          <p:nvPr/>
-        </p:nvSpPr>
-        <p:spPr>
-          <a:xfrm>
-            <a:off x="640080" y="548640"/>
-            <a:ext cx="10911535" cy="731520"/>
-          </a:xfrm>
-          <a:prstGeom prst="rect">
-            <a:avLst/>
-          </a:prstGeom>
-          <a:noFill/>
-        </p:spPr>
-        <p:txBody>
-          <a:bodyPr wrap="square" lIns="45720" rIns="45720" anchor="ctr">
-            <a:spAutoFit/>
-          </a:bodyPr>
-          <a:lstStyle/>
-          <a:p>
-            <a:r>
-              <a:rPr sz="3000" b="1">
-                <a:solidFill>
-                  <a:srgbClr val="006D77"/>
-                </a:solidFill>
-              </a:rPr>
-              <a:t>Akış · 1. özet</a:t>
-            </a:r>
-          </a:p>
-        </p:txBody>
-      </p:sp>
-      <p:sp>
-        <p:nvSpPr>
-          <p:cNvPr id="7" name="TextBox 6"/>
-          <p:cNvSpPr txBox="1"/>
-          <p:nvPr/>
-        </p:nvSpPr>
-        <p:spPr>
-          <a:xfrm>
-            <a:off x="640080" y="1325880"/>
-            <a:ext cx="10911535" cy="843280"/>
-          </a:xfrm>
-          <a:prstGeom prst="rect">
-            <a:avLst/>
-          </a:prstGeom>
-          <a:noFill/>
-        </p:spPr>
-        <p:txBody>
-          <a:bodyPr wrap="square" lIns="45720" rIns="45720">
-            <a:spAutoFit/>
-          </a:bodyPr>
-          <a:lstStyle/>
-          <a:p>
-            <a:pPr>
-              <a:spcAft>
-                <a:spcPts val="300"/>
-              </a:spcAft>
-            </a:pPr>
-            <a:r>
-              <a:rPr sz="2000" b="1">
-                <a:solidFill>
-                  <a:srgbClr val="006D77"/>
-                </a:solidFill>
-              </a:rPr>
-              <a:t>• </a:t>
-            </a:r>
-            <a:r>
-              <a:rPr sz="2000" b="0">
-                <a:solidFill>
-                  <a:srgbClr val="1F2D3A"/>
-                </a:solidFill>
-              </a:rPr>
-              <a:t>Ürün, mimari, en kritik üç varlık.</a:t>
-            </a:r>
-          </a:p>
-          <a:p>
-            <a:pPr>
-              <a:spcAft>
-                <a:spcPts val="300"/>
-              </a:spcAft>
-            </a:pPr>
-            <a:r>
-              <a:rPr sz="2000" b="1">
-                <a:solidFill>
-                  <a:srgbClr val="006D77"/>
-                </a:solidFill>
-              </a:rPr>
-              <a:t>• </a:t>
-            </a:r>
-            <a:r>
-              <a:rPr sz="2000" b="0">
-                <a:solidFill>
-                  <a:srgbClr val="1F2D3A"/>
-                </a:solidFill>
-              </a:rPr>
-              <a:t>Tek şema, iki dakika.</a:t>
-            </a:r>
-          </a:p>
-        </p:txBody>
-      </p:sp>
-    </p:spTree>
-  </p:cSld>
-  <p:clrMapOvr>
-    <a:masterClrMapping/>
-  </p:clrMapOvr>
-</p:sld>
-</file>
-
-<file path=ppt/slides/slide24.xml><?xml version="1.0" encoding="utf-8"?>
-<p:sld xmlns:a="http://schemas.openxmlformats.org/drawingml/2006/main" xmlns:p="http://schemas.openxmlformats.org/presentationml/2006/main" xmlns:r="http://schemas.openxmlformats.org/officeDocument/2006/relationships">
-  <p:cSld>
-    <p:spTree>
-      <p:nvGrpSpPr>
-        <p:cNvPr id="1" name=""/>
-        <p:cNvGrpSpPr/>
-        <p:nvPr/>
-      </p:nvGrpSpPr>
-      <p:grpSpPr/>
-      <p:pic>
-        <p:nvPicPr>
-          <p:cNvPr id="2" name="Picture 1" descr="rteu_logo_kucuk.jpg"/>
-          <p:cNvPicPr>
-            <a:picLocks noChangeAspect="1"/>
-          </p:cNvPicPr>
-          <p:nvPr/>
-        </p:nvPicPr>
-        <p:blipFill>
-          <a:blip r:embed="rId2"/>
-          <a:stretch>
-            <a:fillRect/>
-          </a:stretch>
-        </p:blipFill>
-        <p:spPr>
-          <a:xfrm>
-            <a:off x="640080" y="164592"/>
-            <a:ext cx="242773" cy="329184"/>
-          </a:xfrm>
-          <a:prstGeom prst="rect">
-            <a:avLst/>
-          </a:prstGeom>
-        </p:spPr>
-      </p:pic>
-      <p:sp>
-        <p:nvSpPr>
-          <p:cNvPr id="3" name="TextBox 2"/>
-          <p:cNvSpPr txBox="1"/>
-          <p:nvPr/>
-        </p:nvSpPr>
-        <p:spPr>
-          <a:xfrm>
-            <a:off x="1051560" y="182880"/>
-            <a:ext cx="7315200" cy="320040"/>
-          </a:xfrm>
-          <a:prstGeom prst="rect">
-            <a:avLst/>
-          </a:prstGeom>
-          <a:noFill/>
-        </p:spPr>
-        <p:txBody>
-          <a:bodyPr wrap="square" lIns="45720" rIns="45720">
-            <a:spAutoFit/>
-          </a:bodyPr>
-          <a:lstStyle/>
-          <a:p>
-            <a:r>
-              <a:rPr sz="1100" b="0">
-                <a:solidFill>
-                  <a:srgbClr val="5B6770"/>
-                </a:solidFill>
-              </a:rPr>
-              <a:t>CEN429 Güvenli Programlama · Hafta 7</a:t>
-            </a:r>
-          </a:p>
-        </p:txBody>
-      </p:sp>
-      <p:sp>
-        <p:nvSpPr>
-          <p:cNvPr id="4" name="TextBox 3"/>
-          <p:cNvSpPr txBox="1"/>
-          <p:nvPr/>
-        </p:nvSpPr>
-        <p:spPr>
-          <a:xfrm>
-            <a:off x="640080" y="6446520"/>
-            <a:ext cx="7315200" cy="274320"/>
-          </a:xfrm>
-          <a:prstGeom prst="rect">
-            <a:avLst/>
-          </a:prstGeom>
-          <a:noFill/>
-        </p:spPr>
-        <p:txBody>
-          <a:bodyPr wrap="square" lIns="45720" rIns="45720">
-            <a:spAutoFit/>
-          </a:bodyPr>
-          <a:lstStyle/>
-          <a:p>
-            <a:r>
-              <a:rPr sz="1000" b="0">
-                <a:solidFill>
-                  <a:srgbClr val="5B6770"/>
-                </a:solidFill>
-              </a:rPr>
-              <a:t>RTEÜ Bilgisayar Mühendisliği · 2026-2027 Güz</a:t>
-            </a:r>
-          </a:p>
-        </p:txBody>
-      </p:sp>
-      <p:sp>
-        <p:nvSpPr>
-          <p:cNvPr id="5" name="TextBox 4"/>
-          <p:cNvSpPr txBox="1"/>
-          <p:nvPr/>
-        </p:nvSpPr>
-        <p:spPr>
-          <a:xfrm>
-            <a:off x="10637215" y="6446520"/>
-            <a:ext cx="914400" cy="274320"/>
-          </a:xfrm>
-          <a:prstGeom prst="rect">
-            <a:avLst/>
-          </a:prstGeom>
-          <a:noFill/>
-        </p:spPr>
-        <p:txBody>
-          <a:bodyPr wrap="square" lIns="45720" rIns="45720">
-            <a:spAutoFit/>
-          </a:bodyPr>
-          <a:lstStyle/>
-          <a:p>
-            <a:pPr algn="r"/>
-            <a:r>
-              <a:rPr sz="1000" b="0">
-                <a:solidFill>
-                  <a:srgbClr val="5B6770"/>
-                </a:solidFill>
-              </a:rPr>
-              <a:t>24</a:t>
-            </a:r>
-          </a:p>
-        </p:txBody>
-      </p:sp>
-      <p:sp>
-        <p:nvSpPr>
-          <p:cNvPr id="6" name="TextBox 5"/>
-          <p:cNvSpPr txBox="1"/>
-          <p:nvPr/>
-        </p:nvSpPr>
-        <p:spPr>
-          <a:xfrm>
-            <a:off x="640080" y="548640"/>
-            <a:ext cx="10911535" cy="731520"/>
-          </a:xfrm>
-          <a:prstGeom prst="rect">
-            <a:avLst/>
-          </a:prstGeom>
-          <a:noFill/>
-        </p:spPr>
-        <p:txBody>
-          <a:bodyPr wrap="square" lIns="45720" rIns="45720" anchor="ctr">
-            <a:spAutoFit/>
-          </a:bodyPr>
-          <a:lstStyle/>
-          <a:p>
-            <a:r>
-              <a:rPr sz="3000" b="1">
-                <a:solidFill>
-                  <a:srgbClr val="006D77"/>
-                </a:solidFill>
-              </a:rPr>
-              <a:t>Akış · 2. tehdit modeli</a:t>
-            </a:r>
-          </a:p>
-        </p:txBody>
-      </p:sp>
-      <p:sp>
-        <p:nvSpPr>
-          <p:cNvPr id="7" name="TextBox 6"/>
-          <p:cNvSpPr txBox="1"/>
-          <p:nvPr/>
-        </p:nvSpPr>
-        <p:spPr>
-          <a:xfrm>
-            <a:off x="640080" y="1325880"/>
-            <a:ext cx="10911535" cy="843280"/>
-          </a:xfrm>
-          <a:prstGeom prst="rect">
-            <a:avLst/>
-          </a:prstGeom>
-          <a:noFill/>
-        </p:spPr>
-        <p:txBody>
-          <a:bodyPr wrap="square" lIns="45720" rIns="45720">
-            <a:spAutoFit/>
-          </a:bodyPr>
-          <a:lstStyle/>
-          <a:p>
-            <a:pPr>
-              <a:spcAft>
-                <a:spcPts val="300"/>
-              </a:spcAft>
-            </a:pPr>
-            <a:r>
-              <a:rPr sz="2000" b="1">
-                <a:solidFill>
-                  <a:srgbClr val="006D77"/>
-                </a:solidFill>
-              </a:rPr>
-              <a:t>• </a:t>
-            </a:r>
-            <a:r>
-              <a:rPr sz="2000" b="0">
-                <a:solidFill>
-                  <a:srgbClr val="1F2D3A"/>
-                </a:solidFill>
-              </a:rPr>
-              <a:t>STRIDE ve saldırı ağacından bir örnek.</a:t>
-            </a:r>
-          </a:p>
-          <a:p>
-            <a:pPr>
-              <a:spcAft>
-                <a:spcPts val="300"/>
-              </a:spcAft>
-            </a:pPr>
-            <a:r>
-              <a:rPr sz="2000" b="1">
-                <a:solidFill>
-                  <a:srgbClr val="006D77"/>
-                </a:solidFill>
-              </a:rPr>
-              <a:t>• </a:t>
-            </a:r>
-            <a:r>
-              <a:rPr sz="2000" b="0">
-                <a:solidFill>
-                  <a:srgbClr val="1F2D3A"/>
-                </a:solidFill>
-              </a:rPr>
-              <a:t>"Bu tehdide şu önlem."</a:t>
-            </a:r>
-          </a:p>
-        </p:txBody>
-      </p:sp>
-    </p:spTree>
-  </p:cSld>
-  <p:clrMapOvr>
-    <a:masterClrMapping/>
-  </p:clrMapOvr>
-</p:sld>
-</file>
-
-<file path=ppt/slides/slide25.xml><?xml version="1.0" encoding="utf-8"?>
-<p:sld xmlns:a="http://schemas.openxmlformats.org/drawingml/2006/main" xmlns:p="http://schemas.openxmlformats.org/presentationml/2006/main" xmlns:r="http://schemas.openxmlformats.org/officeDocument/2006/relationships">
-  <p:cSld>
-    <p:spTree>
-      <p:nvGrpSpPr>
-        <p:cNvPr id="1" name=""/>
-        <p:cNvGrpSpPr/>
-        <p:nvPr/>
-      </p:nvGrpSpPr>
-      <p:grpSpPr/>
-      <p:pic>
-        <p:nvPicPr>
-          <p:cNvPr id="2" name="Picture 1" descr="rteu_logo_kucuk.jpg"/>
-          <p:cNvPicPr>
-            <a:picLocks noChangeAspect="1"/>
-          </p:cNvPicPr>
-          <p:nvPr/>
-        </p:nvPicPr>
-        <p:blipFill>
-          <a:blip r:embed="rId2"/>
-          <a:stretch>
-            <a:fillRect/>
-          </a:stretch>
-        </p:blipFill>
-        <p:spPr>
-          <a:xfrm>
-            <a:off x="640080" y="164592"/>
-            <a:ext cx="242773" cy="329184"/>
-          </a:xfrm>
-          <a:prstGeom prst="rect">
-            <a:avLst/>
-          </a:prstGeom>
-        </p:spPr>
-      </p:pic>
-      <p:sp>
-        <p:nvSpPr>
-          <p:cNvPr id="3" name="TextBox 2"/>
-          <p:cNvSpPr txBox="1"/>
-          <p:nvPr/>
-        </p:nvSpPr>
-        <p:spPr>
-          <a:xfrm>
-            <a:off x="1051560" y="182880"/>
-            <a:ext cx="7315200" cy="320040"/>
-          </a:xfrm>
-          <a:prstGeom prst="rect">
-            <a:avLst/>
-          </a:prstGeom>
-          <a:noFill/>
-        </p:spPr>
-        <p:txBody>
-          <a:bodyPr wrap="square" lIns="45720" rIns="45720">
-            <a:spAutoFit/>
-          </a:bodyPr>
-          <a:lstStyle/>
-          <a:p>
-            <a:r>
-              <a:rPr sz="1100" b="0">
-                <a:solidFill>
-                  <a:srgbClr val="5B6770"/>
-                </a:solidFill>
-              </a:rPr>
-              <a:t>CEN429 Güvenli Programlama · Hafta 7</a:t>
-            </a:r>
-          </a:p>
-        </p:txBody>
-      </p:sp>
-      <p:sp>
-        <p:nvSpPr>
-          <p:cNvPr id="4" name="TextBox 3"/>
-          <p:cNvSpPr txBox="1"/>
-          <p:nvPr/>
-        </p:nvSpPr>
-        <p:spPr>
-          <a:xfrm>
-            <a:off x="640080" y="6446520"/>
-            <a:ext cx="7315200" cy="274320"/>
-          </a:xfrm>
-          <a:prstGeom prst="rect">
-            <a:avLst/>
-          </a:prstGeom>
-          <a:noFill/>
-        </p:spPr>
-        <p:txBody>
-          <a:bodyPr wrap="square" lIns="45720" rIns="45720">
-            <a:spAutoFit/>
-          </a:bodyPr>
-          <a:lstStyle/>
-          <a:p>
-            <a:r>
-              <a:rPr sz="1000" b="0">
-                <a:solidFill>
-                  <a:srgbClr val="5B6770"/>
-                </a:solidFill>
-              </a:rPr>
-              <a:t>RTEÜ Bilgisayar Mühendisliği · 2026-2027 Güz</a:t>
-            </a:r>
-          </a:p>
-        </p:txBody>
-      </p:sp>
-      <p:sp>
-        <p:nvSpPr>
-          <p:cNvPr id="5" name="TextBox 4"/>
-          <p:cNvSpPr txBox="1"/>
-          <p:nvPr/>
-        </p:nvSpPr>
-        <p:spPr>
-          <a:xfrm>
-            <a:off x="10637215" y="6446520"/>
-            <a:ext cx="914400" cy="274320"/>
-          </a:xfrm>
-          <a:prstGeom prst="rect">
-            <a:avLst/>
-          </a:prstGeom>
-          <a:noFill/>
-        </p:spPr>
-        <p:txBody>
-          <a:bodyPr wrap="square" lIns="45720" rIns="45720">
-            <a:spAutoFit/>
-          </a:bodyPr>
-          <a:lstStyle/>
-          <a:p>
-            <a:pPr algn="r"/>
-            <a:r>
-              <a:rPr sz="1000" b="0">
-                <a:solidFill>
-                  <a:srgbClr val="5B6770"/>
-                </a:solidFill>
-              </a:rPr>
-              <a:t>25</a:t>
-            </a:r>
-          </a:p>
-        </p:txBody>
-      </p:sp>
-      <p:sp>
-        <p:nvSpPr>
-          <p:cNvPr id="6" name="TextBox 5"/>
-          <p:cNvSpPr txBox="1"/>
-          <p:nvPr/>
-        </p:nvSpPr>
-        <p:spPr>
-          <a:xfrm>
-            <a:off x="640080" y="548640"/>
-            <a:ext cx="10911535" cy="731520"/>
-          </a:xfrm>
-          <a:prstGeom prst="rect">
-            <a:avLst/>
-          </a:prstGeom>
-          <a:noFill/>
-        </p:spPr>
-        <p:txBody>
-          <a:bodyPr wrap="square" lIns="45720" rIns="45720" anchor="ctr">
-            <a:spAutoFit/>
-          </a:bodyPr>
-          <a:lstStyle/>
-          <a:p>
-            <a:r>
-              <a:rPr sz="3000" b="1">
-                <a:solidFill>
-                  <a:srgbClr val="006D77"/>
-                </a:solidFill>
-              </a:rPr>
-              <a:t>Akış · 3. canlı gösterim</a:t>
-            </a:r>
-          </a:p>
-        </p:txBody>
-      </p:sp>
-      <p:sp>
-        <p:nvSpPr>
-          <p:cNvPr id="7" name="TextBox 6"/>
-          <p:cNvSpPr txBox="1"/>
-          <p:nvPr/>
-        </p:nvSpPr>
-        <p:spPr>
-          <a:xfrm>
-            <a:off x="640080" y="1325880"/>
-            <a:ext cx="10911535" cy="843280"/>
-          </a:xfrm>
-          <a:prstGeom prst="rect">
-            <a:avLst/>
-          </a:prstGeom>
-          <a:noFill/>
-        </p:spPr>
-        <p:txBody>
-          <a:bodyPr wrap="square" lIns="45720" rIns="45720">
-            <a:spAutoFit/>
-          </a:bodyPr>
-          <a:lstStyle/>
-          <a:p>
-            <a:pPr>
-              <a:spcAft>
-                <a:spcPts val="300"/>
-              </a:spcAft>
-            </a:pPr>
-            <a:r>
-              <a:rPr sz="2000" b="1">
-                <a:solidFill>
-                  <a:srgbClr val="006D77"/>
-                </a:solidFill>
-              </a:rPr>
-              <a:t>• </a:t>
-            </a:r>
-            <a:r>
-              <a:rPr sz="2000" b="0">
-                <a:solidFill>
-                  <a:srgbClr val="1F2D3A"/>
-                </a:solidFill>
-              </a:rPr>
-              <a:t>Bir korumayı </a:t>
-            </a:r>
-            <a:r>
-              <a:rPr sz="2000" b="1">
-                <a:solidFill>
-                  <a:srgbClr val="1F2D3A"/>
-                </a:solidFill>
-              </a:rPr>
-              <a:t>çalışırken</a:t>
-            </a:r>
-            <a:r>
-              <a:rPr sz="2000" b="0">
-                <a:solidFill>
-                  <a:srgbClr val="1F2D3A"/>
-                </a:solidFill>
-              </a:rPr>
-              <a:t> göster.</a:t>
-            </a:r>
-          </a:p>
-          <a:p>
-            <a:pPr>
-              <a:spcAft>
-                <a:spcPts val="300"/>
-              </a:spcAft>
-            </a:pPr>
-            <a:r>
-              <a:rPr sz="2000" b="1">
-                <a:solidFill>
-                  <a:srgbClr val="006D77"/>
-                </a:solidFill>
-              </a:rPr>
-              <a:t>• </a:t>
-            </a:r>
-            <a:r>
-              <a:rPr sz="2000" b="0">
-                <a:solidFill>
-                  <a:srgbClr val="1F2D3A"/>
-                </a:solidFill>
-              </a:rPr>
-              <a:t>Ör. şifreli veri, doğrulanan imza.</a:t>
-            </a:r>
-          </a:p>
-        </p:txBody>
-      </p:sp>
-    </p:spTree>
-  </p:cSld>
-  <p:clrMapOvr>
-    <a:masterClrMapping/>
-  </p:clrMapOvr>
-</p:sld>
-</file>
-
-<file path=ppt/slides/slide26.xml><?xml version="1.0" encoding="utf-8"?>
-<p:sld xmlns:a="http://schemas.openxmlformats.org/drawingml/2006/main" xmlns:p="http://schemas.openxmlformats.org/presentationml/2006/main" xmlns:r="http://schemas.openxmlformats.org/officeDocument/2006/relationships">
-  <p:cSld>
-    <p:spTree>
-      <p:nvGrpSpPr>
-        <p:cNvPr id="1" name=""/>
-        <p:cNvGrpSpPr/>
-        <p:nvPr/>
-      </p:nvGrpSpPr>
-      <p:grpSpPr/>
-      <p:pic>
-        <p:nvPicPr>
-          <p:cNvPr id="2" name="Picture 1" descr="rteu_logo_kucuk.jpg"/>
-          <p:cNvPicPr>
-            <a:picLocks noChangeAspect="1"/>
-          </p:cNvPicPr>
-          <p:nvPr/>
-        </p:nvPicPr>
-        <p:blipFill>
-          <a:blip r:embed="rId2"/>
-          <a:stretch>
-            <a:fillRect/>
-          </a:stretch>
-        </p:blipFill>
-        <p:spPr>
-          <a:xfrm>
-            <a:off x="640080" y="164592"/>
-            <a:ext cx="242773" cy="329184"/>
-          </a:xfrm>
-          <a:prstGeom prst="rect">
-            <a:avLst/>
-          </a:prstGeom>
-        </p:spPr>
-      </p:pic>
-      <p:sp>
-        <p:nvSpPr>
-          <p:cNvPr id="3" name="TextBox 2"/>
-          <p:cNvSpPr txBox="1"/>
-          <p:nvPr/>
-        </p:nvSpPr>
-        <p:spPr>
-          <a:xfrm>
-            <a:off x="1051560" y="182880"/>
-            <a:ext cx="7315200" cy="320040"/>
-          </a:xfrm>
-          <a:prstGeom prst="rect">
-            <a:avLst/>
-          </a:prstGeom>
-          <a:noFill/>
-        </p:spPr>
-        <p:txBody>
-          <a:bodyPr wrap="square" lIns="45720" rIns="45720">
-            <a:spAutoFit/>
-          </a:bodyPr>
-          <a:lstStyle/>
-          <a:p>
-            <a:r>
-              <a:rPr sz="1100" b="0">
-                <a:solidFill>
-                  <a:srgbClr val="5B6770"/>
-                </a:solidFill>
-              </a:rPr>
-              <a:t>CEN429 Güvenli Programlama · Hafta 7</a:t>
-            </a:r>
-          </a:p>
-        </p:txBody>
-      </p:sp>
-      <p:sp>
-        <p:nvSpPr>
-          <p:cNvPr id="4" name="TextBox 3"/>
-          <p:cNvSpPr txBox="1"/>
-          <p:nvPr/>
-        </p:nvSpPr>
-        <p:spPr>
-          <a:xfrm>
-            <a:off x="640080" y="6446520"/>
-            <a:ext cx="7315200" cy="274320"/>
-          </a:xfrm>
-          <a:prstGeom prst="rect">
-            <a:avLst/>
-          </a:prstGeom>
-          <a:noFill/>
-        </p:spPr>
-        <p:txBody>
-          <a:bodyPr wrap="square" lIns="45720" rIns="45720">
-            <a:spAutoFit/>
-          </a:bodyPr>
-          <a:lstStyle/>
-          <a:p>
-            <a:r>
-              <a:rPr sz="1000" b="0">
-                <a:solidFill>
-                  <a:srgbClr val="5B6770"/>
-                </a:solidFill>
-              </a:rPr>
-              <a:t>RTEÜ Bilgisayar Mühendisliği · 2026-2027 Güz</a:t>
-            </a:r>
-          </a:p>
-        </p:txBody>
-      </p:sp>
-      <p:sp>
-        <p:nvSpPr>
-          <p:cNvPr id="5" name="TextBox 4"/>
-          <p:cNvSpPr txBox="1"/>
-          <p:nvPr/>
-        </p:nvSpPr>
-        <p:spPr>
-          <a:xfrm>
-            <a:off x="10637215" y="6446520"/>
-            <a:ext cx="914400" cy="274320"/>
-          </a:xfrm>
-          <a:prstGeom prst="rect">
-            <a:avLst/>
-          </a:prstGeom>
-          <a:noFill/>
-        </p:spPr>
-        <p:txBody>
-          <a:bodyPr wrap="square" lIns="45720" rIns="45720">
-            <a:spAutoFit/>
-          </a:bodyPr>
-          <a:lstStyle/>
-          <a:p>
-            <a:pPr algn="r"/>
-            <a:r>
-              <a:rPr sz="1000" b="0">
-                <a:solidFill>
-                  <a:srgbClr val="5B6770"/>
-                </a:solidFill>
-              </a:rPr>
-              <a:t>26</a:t>
-            </a:r>
-          </a:p>
-        </p:txBody>
-      </p:sp>
-      <p:sp>
-        <p:nvSpPr>
-          <p:cNvPr id="6" name="TextBox 5"/>
-          <p:cNvSpPr txBox="1"/>
-          <p:nvPr/>
-        </p:nvSpPr>
-        <p:spPr>
-          <a:xfrm>
-            <a:off x="640080" y="548640"/>
-            <a:ext cx="10911535" cy="731520"/>
-          </a:xfrm>
-          <a:prstGeom prst="rect">
-            <a:avLst/>
-          </a:prstGeom>
-          <a:noFill/>
-        </p:spPr>
-        <p:txBody>
-          <a:bodyPr wrap="square" lIns="45720" rIns="45720" anchor="ctr">
-            <a:spAutoFit/>
-          </a:bodyPr>
-          <a:lstStyle/>
-          <a:p>
-            <a:r>
-              <a:rPr sz="3000" b="1">
-                <a:solidFill>
-                  <a:srgbClr val="006D77"/>
-                </a:solidFill>
-              </a:rPr>
-              <a:t>Akış · 4. kanıt</a:t>
-            </a:r>
-          </a:p>
-        </p:txBody>
-      </p:sp>
-      <p:sp>
-        <p:nvSpPr>
-          <p:cNvPr id="7" name="TextBox 6"/>
-          <p:cNvSpPr txBox="1"/>
-          <p:nvPr/>
-        </p:nvSpPr>
-        <p:spPr>
-          <a:xfrm>
-            <a:off x="640080" y="1325880"/>
-            <a:ext cx="10911535" cy="843280"/>
-          </a:xfrm>
-          <a:prstGeom prst="rect">
-            <a:avLst/>
-          </a:prstGeom>
-          <a:noFill/>
-        </p:spPr>
-        <p:txBody>
-          <a:bodyPr wrap="square" lIns="45720" rIns="45720">
-            <a:spAutoFit/>
-          </a:bodyPr>
-          <a:lstStyle/>
-          <a:p>
-            <a:pPr>
-              <a:spcAft>
-                <a:spcPts val="300"/>
-              </a:spcAft>
-            </a:pPr>
-            <a:r>
-              <a:rPr sz="2000" b="1">
-                <a:solidFill>
-                  <a:srgbClr val="006D77"/>
-                </a:solidFill>
-              </a:rPr>
-              <a:t>• </a:t>
-            </a:r>
-            <a:r>
-              <a:rPr sz="2000" b="0">
-                <a:solidFill>
-                  <a:srgbClr val="1F2D3A"/>
-                </a:solidFill>
-              </a:rPr>
-              <a:t>Testler, koruma tablosu.</a:t>
-            </a:r>
-          </a:p>
-          <a:p>
-            <a:pPr>
-              <a:spcAft>
-                <a:spcPts val="300"/>
-              </a:spcAft>
-            </a:pPr>
-            <a:r>
-              <a:rPr sz="2000" b="1">
-                <a:solidFill>
-                  <a:srgbClr val="006D77"/>
-                </a:solidFill>
-              </a:rPr>
-              <a:t>• </a:t>
-            </a:r>
-            <a:r>
-              <a:rPr sz="2000" b="0">
-                <a:solidFill>
-                  <a:srgbClr val="1F2D3A"/>
-                </a:solidFill>
-              </a:rPr>
-              <a:t>"Şu komutla şu çıktı."</a:t>
-            </a:r>
-          </a:p>
-        </p:txBody>
-      </p:sp>
-    </p:spTree>
-  </p:cSld>
-  <p:clrMapOvr>
-    <a:masterClrMapping/>
-  </p:clrMapOvr>
-</p:sld>
-</file>
-
-<file path=ppt/slides/slide27.xml><?xml version="1.0" encoding="utf-8"?>
-<p:sld xmlns:a="http://schemas.openxmlformats.org/drawingml/2006/main" xmlns:p="http://schemas.openxmlformats.org/presentationml/2006/main" xmlns:r="http://schemas.openxmlformats.org/officeDocument/2006/relationships">
-  <p:cSld>
-    <p:spTree>
-      <p:nvGrpSpPr>
-        <p:cNvPr id="1" name=""/>
-        <p:cNvGrpSpPr/>
-        <p:nvPr/>
-      </p:nvGrpSpPr>
-      <p:grpSpPr/>
-      <p:pic>
-        <p:nvPicPr>
-          <p:cNvPr id="2" name="Picture 1" descr="rteu_logo_kucuk.jpg"/>
-          <p:cNvPicPr>
-            <a:picLocks noChangeAspect="1"/>
-          </p:cNvPicPr>
-          <p:nvPr/>
-        </p:nvPicPr>
-        <p:blipFill>
-          <a:blip r:embed="rId2"/>
-          <a:stretch>
-            <a:fillRect/>
-          </a:stretch>
-        </p:blipFill>
-        <p:spPr>
-          <a:xfrm>
-            <a:off x="640080" y="164592"/>
-            <a:ext cx="242773" cy="329184"/>
-          </a:xfrm>
-          <a:prstGeom prst="rect">
-            <a:avLst/>
-          </a:prstGeom>
-        </p:spPr>
-      </p:pic>
-      <p:sp>
-        <p:nvSpPr>
-          <p:cNvPr id="3" name="TextBox 2"/>
-          <p:cNvSpPr txBox="1"/>
-          <p:nvPr/>
-        </p:nvSpPr>
-        <p:spPr>
-          <a:xfrm>
-            <a:off x="1051560" y="182880"/>
-            <a:ext cx="7315200" cy="320040"/>
-          </a:xfrm>
-          <a:prstGeom prst="rect">
-            <a:avLst/>
-          </a:prstGeom>
-          <a:noFill/>
-        </p:spPr>
-        <p:txBody>
-          <a:bodyPr wrap="square" lIns="45720" rIns="45720">
-            <a:spAutoFit/>
-          </a:bodyPr>
-          <a:lstStyle/>
-          <a:p>
-            <a:r>
-              <a:rPr sz="1100" b="0">
-                <a:solidFill>
-                  <a:srgbClr val="5B6770"/>
-                </a:solidFill>
-              </a:rPr>
-              <a:t>CEN429 Güvenli Programlama · Hafta 7</a:t>
-            </a:r>
-          </a:p>
-        </p:txBody>
-      </p:sp>
-      <p:sp>
-        <p:nvSpPr>
-          <p:cNvPr id="4" name="TextBox 3"/>
-          <p:cNvSpPr txBox="1"/>
-          <p:nvPr/>
-        </p:nvSpPr>
-        <p:spPr>
-          <a:xfrm>
-            <a:off x="640080" y="6446520"/>
-            <a:ext cx="7315200" cy="274320"/>
-          </a:xfrm>
-          <a:prstGeom prst="rect">
-            <a:avLst/>
-          </a:prstGeom>
-          <a:noFill/>
-        </p:spPr>
-        <p:txBody>
-          <a:bodyPr wrap="square" lIns="45720" rIns="45720">
-            <a:spAutoFit/>
-          </a:bodyPr>
-          <a:lstStyle/>
-          <a:p>
-            <a:r>
-              <a:rPr sz="1000" b="0">
-                <a:solidFill>
-                  <a:srgbClr val="5B6770"/>
-                </a:solidFill>
-              </a:rPr>
-              <a:t>RTEÜ Bilgisayar Mühendisliği · 2026-2027 Güz</a:t>
-            </a:r>
-          </a:p>
-        </p:txBody>
-      </p:sp>
-      <p:sp>
-        <p:nvSpPr>
-          <p:cNvPr id="5" name="TextBox 4"/>
-          <p:cNvSpPr txBox="1"/>
-          <p:nvPr/>
-        </p:nvSpPr>
-        <p:spPr>
-          <a:xfrm>
-            <a:off x="10637215" y="6446520"/>
-            <a:ext cx="914400" cy="274320"/>
-          </a:xfrm>
-          <a:prstGeom prst="rect">
-            <a:avLst/>
-          </a:prstGeom>
-          <a:noFill/>
-        </p:spPr>
-        <p:txBody>
-          <a:bodyPr wrap="square" lIns="45720" rIns="45720">
-            <a:spAutoFit/>
-          </a:bodyPr>
-          <a:lstStyle/>
-          <a:p>
-            <a:pPr algn="r"/>
-            <a:r>
-              <a:rPr sz="1000" b="0">
-                <a:solidFill>
-                  <a:srgbClr val="5B6770"/>
-                </a:solidFill>
-              </a:rPr>
-              <a:t>27</a:t>
-            </a:r>
-          </a:p>
-        </p:txBody>
-      </p:sp>
-      <p:sp>
-        <p:nvSpPr>
-          <p:cNvPr id="6" name="TextBox 5"/>
-          <p:cNvSpPr txBox="1"/>
-          <p:nvPr/>
-        </p:nvSpPr>
-        <p:spPr>
-          <a:xfrm>
-            <a:off x="640080" y="548640"/>
-            <a:ext cx="10911535" cy="731520"/>
-          </a:xfrm>
-          <a:prstGeom prst="rect">
-            <a:avLst/>
-          </a:prstGeom>
-          <a:noFill/>
-        </p:spPr>
-        <p:txBody>
-          <a:bodyPr wrap="square" lIns="45720" rIns="45720" anchor="ctr">
-            <a:spAutoFit/>
-          </a:bodyPr>
-          <a:lstStyle/>
-          <a:p>
-            <a:r>
-              <a:rPr sz="3000" b="1">
-                <a:solidFill>
-                  <a:srgbClr val="006D77"/>
-                </a:solidFill>
-              </a:rPr>
-              <a:t>Akış · 5. kalan risk</a:t>
-            </a:r>
-          </a:p>
-        </p:txBody>
-      </p:sp>
-      <p:sp>
-        <p:nvSpPr>
-          <p:cNvPr id="7" name="TextBox 6"/>
-          <p:cNvSpPr txBox="1"/>
-          <p:nvPr/>
-        </p:nvSpPr>
-        <p:spPr>
-          <a:xfrm>
-            <a:off x="640080" y="1325880"/>
-            <a:ext cx="10911535" cy="843280"/>
-          </a:xfrm>
-          <a:prstGeom prst="rect">
-            <a:avLst/>
-          </a:prstGeom>
-          <a:noFill/>
-        </p:spPr>
-        <p:txBody>
-          <a:bodyPr wrap="square" lIns="45720" rIns="45720">
-            <a:spAutoFit/>
-          </a:bodyPr>
-          <a:lstStyle/>
-          <a:p>
-            <a:pPr>
-              <a:spcAft>
-                <a:spcPts val="300"/>
-              </a:spcAft>
-            </a:pPr>
-            <a:r>
-              <a:rPr sz="2000" b="1">
-                <a:solidFill>
-                  <a:srgbClr val="006D77"/>
-                </a:solidFill>
-              </a:rPr>
-              <a:t>• </a:t>
-            </a:r>
-            <a:r>
-              <a:rPr sz="2000" b="0">
-                <a:solidFill>
-                  <a:srgbClr val="1F2D3A"/>
-                </a:solidFill>
-              </a:rPr>
-              <a:t>Neyi bilerek kapsam dışı bıraktınız?</a:t>
-            </a:r>
-          </a:p>
-          <a:p>
-            <a:pPr>
-              <a:spcAft>
-                <a:spcPts val="300"/>
-              </a:spcAft>
-            </a:pPr>
-            <a:r>
-              <a:rPr sz="2000" b="1">
-                <a:solidFill>
-                  <a:srgbClr val="006D77"/>
-                </a:solidFill>
-              </a:rPr>
-              <a:t>• </a:t>
-            </a:r>
-            <a:r>
-              <a:rPr sz="2000" b="0">
-                <a:solidFill>
-                  <a:srgbClr val="1F2D3A"/>
-                </a:solidFill>
-              </a:rPr>
-              <a:t>Dürüst analiz puan getirir.</a:t>
-            </a:r>
-          </a:p>
-        </p:txBody>
-      </p:sp>
-    </p:spTree>
-  </p:cSld>
-  <p:clrMapOvr>
-    <a:masterClrMapping/>
-  </p:clrMapOvr>
-</p:sld>
-</file>
-
-<file path=ppt/slides/slide28.xml><?xml version="1.0" encoding="utf-8"?>
-<p:sld xmlns:a="http://schemas.openxmlformats.org/drawingml/2006/main" xmlns:p="http://schemas.openxmlformats.org/presentationml/2006/main" xmlns:r="http://schemas.openxmlformats.org/officeDocument/2006/relationships">
-  <p:cSld>
-    <p:bg>
-      <p:bgPr>
-        <a:solidFill>
-          <a:srgbClr val="006D77"/>
-        </a:solidFill>
-        <a:effectLst/>
-      </p:bgPr>
-    </p:bg>
-    <p:spTree>
-      <p:nvGrpSpPr>
-        <p:cNvPr id="1" name=""/>
-        <p:cNvGrpSpPr/>
-        <p:nvPr/>
-      </p:nvGrpSpPr>
-      <p:grpSpPr/>
-      <p:sp>
-        <p:nvSpPr>
-          <p:cNvPr id="2" name="TextBox 1"/>
-          <p:cNvSpPr txBox="1"/>
-          <p:nvPr/>
-        </p:nvSpPr>
-        <p:spPr>
-          <a:xfrm>
-            <a:off x="1051560" y="182880"/>
-            <a:ext cx="7315200" cy="320040"/>
-          </a:xfrm>
-          <a:prstGeom prst="rect">
-            <a:avLst/>
-          </a:prstGeom>
-          <a:noFill/>
-        </p:spPr>
-        <p:txBody>
-          <a:bodyPr wrap="square" lIns="45720" rIns="45720">
-            <a:spAutoFit/>
-          </a:bodyPr>
-          <a:lstStyle/>
-          <a:p>
-            <a:r>
-              <a:rPr sz="1100" b="0">
-                <a:solidFill>
-                  <a:srgbClr val="D8F0F2"/>
-                </a:solidFill>
-              </a:rPr>
-              <a:t>CEN429 Güvenli Programlama · Hafta 7</a:t>
-            </a:r>
-          </a:p>
-        </p:txBody>
-      </p:sp>
-      <p:sp>
-        <p:nvSpPr>
-          <p:cNvPr id="3" name="TextBox 2"/>
-          <p:cNvSpPr txBox="1"/>
-          <p:nvPr/>
-        </p:nvSpPr>
-        <p:spPr>
-          <a:xfrm>
-            <a:off x="640080" y="6446520"/>
-            <a:ext cx="7315200" cy="274320"/>
-          </a:xfrm>
-          <a:prstGeom prst="rect">
-            <a:avLst/>
-          </a:prstGeom>
-          <a:noFill/>
-        </p:spPr>
-        <p:txBody>
-          <a:bodyPr wrap="square" lIns="45720" rIns="45720">
-            <a:spAutoFit/>
-          </a:bodyPr>
-          <a:lstStyle/>
-          <a:p>
-            <a:r>
-              <a:rPr sz="1000" b="0">
-                <a:solidFill>
-                  <a:srgbClr val="D8F0F2"/>
-                </a:solidFill>
-              </a:rPr>
-              <a:t>RTEÜ Bilgisayar Mühendisliği · 2026-2027 Güz</a:t>
-            </a:r>
-          </a:p>
-        </p:txBody>
-      </p:sp>
-      <p:sp>
-        <p:nvSpPr>
-          <p:cNvPr id="4" name="TextBox 3"/>
-          <p:cNvSpPr txBox="1"/>
-          <p:nvPr/>
-        </p:nvSpPr>
-        <p:spPr>
-          <a:xfrm>
-            <a:off x="10637215" y="6446520"/>
-            <a:ext cx="914400" cy="274320"/>
-          </a:xfrm>
-          <a:prstGeom prst="rect">
-            <a:avLst/>
-          </a:prstGeom>
-          <a:noFill/>
-        </p:spPr>
-        <p:txBody>
-          <a:bodyPr wrap="square" lIns="45720" rIns="45720">
-            <a:spAutoFit/>
-          </a:bodyPr>
-          <a:lstStyle/>
-          <a:p>
-            <a:pPr algn="r"/>
-            <a:r>
-              <a:rPr sz="1000" b="0">
-                <a:solidFill>
-                  <a:srgbClr val="D8F0F2"/>
-                </a:solidFill>
-              </a:rPr>
-              <a:t>28</a:t>
-            </a:r>
-          </a:p>
-        </p:txBody>
-      </p:sp>
-      <p:sp>
-        <p:nvSpPr>
-          <p:cNvPr id="5" name="TextBox 4"/>
-          <p:cNvSpPr txBox="1"/>
-          <p:nvPr/>
-        </p:nvSpPr>
-        <p:spPr>
-          <a:xfrm>
-            <a:off x="640080" y="2743200"/>
-            <a:ext cx="10911535" cy="1280160"/>
-          </a:xfrm>
-          <a:prstGeom prst="rect">
-            <a:avLst/>
-          </a:prstGeom>
-          <a:noFill/>
-        </p:spPr>
-        <p:txBody>
-          <a:bodyPr wrap="square" lIns="45720" rIns="45720">
-            <a:spAutoFit/>
-          </a:bodyPr>
-          <a:lstStyle/>
-          <a:p>
-            <a:pPr algn="l"/>
-            <a:r>
-              <a:rPr sz="4000" b="1">
-                <a:solidFill>
-                  <a:srgbClr val="FFFFFF"/>
-                </a:solidFill>
-              </a:rPr>
-              <a:t>Ek · Hazırlık kontrol listesi</a:t>
-            </a:r>
-          </a:p>
-        </p:txBody>
-      </p:sp>
-    </p:spTree>
-  </p:cSld>
-  <p:clrMapOvr>
-    <a:masterClrMapping/>
-  </p:clrMapOvr>
-</p:sld>
-</file>
-
-<file path=ppt/slides/slide29.xml><?xml version="1.0" encoding="utf-8"?>
-<p:sld xmlns:a="http://schemas.openxmlformats.org/drawingml/2006/main" xmlns:p="http://schemas.openxmlformats.org/presentationml/2006/main" xmlns:r="http://schemas.openxmlformats.org/officeDocument/2006/relationships">
-  <p:cSld>
-    <p:spTree>
-      <p:nvGrpSpPr>
-        <p:cNvPr id="1" name=""/>
-        <p:cNvGrpSpPr/>
-        <p:nvPr/>
-      </p:nvGrpSpPr>
-      <p:grpSpPr/>
-      <p:pic>
-        <p:nvPicPr>
-          <p:cNvPr id="2" name="Picture 1" descr="rteu_logo_kucuk.jpg"/>
-          <p:cNvPicPr>
-            <a:picLocks noChangeAspect="1"/>
-          </p:cNvPicPr>
-          <p:nvPr/>
-        </p:nvPicPr>
-        <p:blipFill>
-          <a:blip r:embed="rId2"/>
-          <a:stretch>
-            <a:fillRect/>
-          </a:stretch>
-        </p:blipFill>
-        <p:spPr>
-          <a:xfrm>
-            <a:off x="640080" y="164592"/>
-            <a:ext cx="242773" cy="329184"/>
-          </a:xfrm>
-          <a:prstGeom prst="rect">
-            <a:avLst/>
-          </a:prstGeom>
-        </p:spPr>
-      </p:pic>
-      <p:sp>
-        <p:nvSpPr>
-          <p:cNvPr id="3" name="TextBox 2"/>
-          <p:cNvSpPr txBox="1"/>
-          <p:nvPr/>
-        </p:nvSpPr>
-        <p:spPr>
-          <a:xfrm>
-            <a:off x="1051560" y="182880"/>
-            <a:ext cx="7315200" cy="320040"/>
-          </a:xfrm>
-          <a:prstGeom prst="rect">
-            <a:avLst/>
-          </a:prstGeom>
-          <a:noFill/>
-        </p:spPr>
-        <p:txBody>
-          <a:bodyPr wrap="square" lIns="45720" rIns="45720">
-            <a:spAutoFit/>
-          </a:bodyPr>
-          <a:lstStyle/>
-          <a:p>
-            <a:r>
-              <a:rPr sz="1100" b="0">
-                <a:solidFill>
-                  <a:srgbClr val="5B6770"/>
-                </a:solidFill>
-              </a:rPr>
-              <a:t>CEN429 Güvenli Programlama · Hafta 7</a:t>
-            </a:r>
-          </a:p>
-        </p:txBody>
-      </p:sp>
-      <p:sp>
-        <p:nvSpPr>
-          <p:cNvPr id="4" name="TextBox 3"/>
-          <p:cNvSpPr txBox="1"/>
-          <p:nvPr/>
-        </p:nvSpPr>
-        <p:spPr>
-          <a:xfrm>
-            <a:off x="640080" y="6446520"/>
-            <a:ext cx="7315200" cy="274320"/>
-          </a:xfrm>
-          <a:prstGeom prst="rect">
-            <a:avLst/>
-          </a:prstGeom>
-          <a:noFill/>
-        </p:spPr>
-        <p:txBody>
-          <a:bodyPr wrap="square" lIns="45720" rIns="45720">
-            <a:spAutoFit/>
-          </a:bodyPr>
-          <a:lstStyle/>
-          <a:p>
-            <a:r>
-              <a:rPr sz="1000" b="0">
-                <a:solidFill>
-                  <a:srgbClr val="5B6770"/>
-                </a:solidFill>
-              </a:rPr>
-              <a:t>RTEÜ Bilgisayar Mühendisliği · 2026-2027 Güz</a:t>
-            </a:r>
-          </a:p>
-        </p:txBody>
-      </p:sp>
-      <p:sp>
-        <p:nvSpPr>
-          <p:cNvPr id="5" name="TextBox 4"/>
-          <p:cNvSpPr txBox="1"/>
-          <p:nvPr/>
-        </p:nvSpPr>
-        <p:spPr>
-          <a:xfrm>
-            <a:off x="10637215" y="6446520"/>
-            <a:ext cx="914400" cy="274320"/>
-          </a:xfrm>
-          <a:prstGeom prst="rect">
-            <a:avLst/>
-          </a:prstGeom>
-          <a:noFill/>
-        </p:spPr>
-        <p:txBody>
-          <a:bodyPr wrap="square" lIns="45720" rIns="45720">
-            <a:spAutoFit/>
-          </a:bodyPr>
-          <a:lstStyle/>
-          <a:p>
-            <a:pPr algn="r"/>
-            <a:r>
-              <a:rPr sz="1000" b="0">
-                <a:solidFill>
-                  <a:srgbClr val="5B6770"/>
-                </a:solidFill>
-              </a:rPr>
-              <a:t>29</a:t>
-            </a:r>
-          </a:p>
-        </p:txBody>
-      </p:sp>
-      <p:sp>
-        <p:nvSpPr>
-          <p:cNvPr id="6" name="TextBox 5"/>
-          <p:cNvSpPr txBox="1"/>
-          <p:nvPr/>
-        </p:nvSpPr>
-        <p:spPr>
-          <a:xfrm>
-            <a:off x="640080" y="548640"/>
-            <a:ext cx="10911535" cy="731520"/>
-          </a:xfrm>
-          <a:prstGeom prst="rect">
-            <a:avLst/>
-          </a:prstGeom>
-          <a:noFill/>
-        </p:spPr>
-        <p:txBody>
-          <a:bodyPr wrap="square" lIns="45720" rIns="45720" anchor="ctr">
-            <a:spAutoFit/>
-          </a:bodyPr>
-          <a:lstStyle/>
-          <a:p>
-            <a:r>
-              <a:rPr sz="3000" b="1">
-                <a:solidFill>
-                  <a:srgbClr val="006D77"/>
-                </a:solidFill>
-              </a:rPr>
-              <a:t>Kontrol · belge</a:t>
-            </a:r>
-          </a:p>
-        </p:txBody>
-      </p:sp>
-      <p:sp>
-        <p:nvSpPr>
-          <p:cNvPr id="7" name="TextBox 6"/>
-          <p:cNvSpPr txBox="1"/>
-          <p:nvPr/>
-        </p:nvSpPr>
-        <p:spPr>
-          <a:xfrm>
-            <a:off x="640080" y="1325880"/>
-            <a:ext cx="10911535" cy="1219200"/>
-          </a:xfrm>
-          <a:prstGeom prst="rect">
-            <a:avLst/>
-          </a:prstGeom>
-          <a:noFill/>
-        </p:spPr>
-        <p:txBody>
-          <a:bodyPr wrap="square" lIns="45720" rIns="45720">
-            <a:spAutoFit/>
-          </a:bodyPr>
-          <a:lstStyle/>
-          <a:p>
-            <a:pPr>
-              <a:spcAft>
-                <a:spcPts val="300"/>
-              </a:spcAft>
-            </a:pPr>
-            <a:r>
-              <a:rPr sz="2000" b="1">
-                <a:solidFill>
-                  <a:srgbClr val="006D77"/>
-                </a:solidFill>
-              </a:rPr>
-              <a:t>• </a:t>
-            </a:r>
-            <a:r>
-              <a:rPr sz="2000" b="0">
-                <a:solidFill>
-                  <a:srgbClr val="1F2D3A"/>
-                </a:solidFill>
-              </a:rPr>
-              <a:t> </a:t>
-            </a:r>
-          </a:p>
-          <a:p>
-            <a:pPr>
-              <a:spcAft>
-                <a:spcPts val="300"/>
-              </a:spcAft>
-            </a:pPr>
-            <a:r>
-              <a:rPr sz="2000" b="1">
-                <a:solidFill>
-                  <a:srgbClr val="006D77"/>
-                </a:solidFill>
-              </a:rPr>
-              <a:t>• </a:t>
-            </a:r>
-            <a:r>
-              <a:rPr sz="2000" b="0">
-                <a:solidFill>
-                  <a:srgbClr val="1F2D3A"/>
-                </a:solidFill>
-              </a:rPr>
-              <a:t> </a:t>
-            </a:r>
-          </a:p>
-          <a:p>
-            <a:pPr>
-              <a:spcAft>
-                <a:spcPts val="300"/>
-              </a:spcAft>
-            </a:pPr>
-            <a:r>
-              <a:rPr sz="2000" b="1">
-                <a:solidFill>
-                  <a:srgbClr val="006D77"/>
-                </a:solidFill>
-              </a:rPr>
-              <a:t>• </a:t>
-            </a:r>
-            <a:r>
-              <a:rPr sz="2000" b="0">
-                <a:solidFill>
-                  <a:srgbClr val="1F2D3A"/>
-                </a:solidFill>
-              </a:rPr>
-              <a:t> </a:t>
-            </a:r>
-          </a:p>
-        </p:txBody>
-      </p:sp>
-    </p:spTree>
-  </p:cSld>
-  <p:clrMapOvr>
-    <a:masterClrMapping/>
-  </p:clrMapOvr>
-</p:sld>
-</file>
-
 <file path=ppt/slides/slide3.xml><?xml version="1.0" encoding="utf-8"?>
 <p:sld xmlns:a="http://schemas.openxmlformats.org/drawingml/2006/main" xmlns:p="http://schemas.openxmlformats.org/presentationml/2006/main" xmlns:r="http://schemas.openxmlformats.org/officeDocument/2006/relationships">
   <p:cSld>
@@ -9720,7 +6301,7 @@
         </p:nvGraphicFramePr>
         <p:xfrm>
           <a:off x="640080" y="1325880"/>
-          <a:ext cx="10911534" cy="2293315"/>
+          <a:ext cx="10911533" cy="2293315"/>
         </p:xfrm>
         <a:graphic>
           <a:graphicData uri="http://schemas.openxmlformats.org/drawingml/2006/table">
@@ -9729,9 +6310,9 @@
                 <a:tableStyleId>{5C22544A-7EE6-4342-B048-85BDC9FD1C3A}</a:tableStyleId>
               </a:tblPr>
               <a:tblGrid>
-                <a:gridCol w="3754506"/>
-                <a:gridCol w="703970"/>
-                <a:gridCol w="6453058"/>
+                <a:gridCol w="4572452"/>
+                <a:gridCol w="623516"/>
+                <a:gridCol w="5715565"/>
               </a:tblGrid>
               <a:tr h="382219">
                 <a:tc>
@@ -9940,7 +6521,7 @@
                             <a:srgbClr val="1F2D3A"/>
                           </a:solidFill>
                         </a:rPr>
-                        <a:t>C/C++ sağlamlaştırma ve RASP</a:t>
+                        <a:t>C/C++ sağlamlaştırma (hardening) ve RASP</a:t>
                       </a:r>
                     </a:p>
                   </a:txBody>
@@ -10127,58 +6708,16 @@
           </a:graphicData>
         </a:graphic>
       </p:graphicFrame>
-    </p:spTree>
-  </p:cSld>
-  <p:clrMapOvr>
-    <a:masterClrMapping/>
-  </p:clrMapOvr>
-</p:sld>
-</file>
-
-<file path=ppt/slides/slide30.xml><?xml version="1.0" encoding="utf-8"?>
-<p:sld xmlns:a="http://schemas.openxmlformats.org/drawingml/2006/main" xmlns:p="http://schemas.openxmlformats.org/presentationml/2006/main" xmlns:r="http://schemas.openxmlformats.org/officeDocument/2006/relationships">
-  <p:cSld>
-    <p:spTree>
-      <p:nvGrpSpPr>
-        <p:cNvPr id="1" name=""/>
-        <p:cNvGrpSpPr/>
-        <p:nvPr/>
-      </p:nvGrpSpPr>
-      <p:grpSpPr/>
-      <p:pic>
-        <p:nvPicPr>
-          <p:cNvPr id="2" name="Picture 1" descr="rteu_logo_kucuk.jpg"/>
-          <p:cNvPicPr>
-            <a:picLocks noChangeAspect="1"/>
-          </p:cNvPicPr>
-          <p:nvPr/>
-        </p:nvPicPr>
-        <p:blipFill>
-          <a:blip r:embed="rId2"/>
-          <a:stretch>
-            <a:fillRect/>
-          </a:stretch>
-        </p:blipFill>
-        <p:spPr>
-          <a:xfrm>
-            <a:off x="640080" y="164592"/>
-            <a:ext cx="242773" cy="329184"/>
-          </a:xfrm>
-          <a:prstGeom prst="rect">
-            <a:avLst/>
-          </a:prstGeom>
-        </p:spPr>
-      </p:pic>
-      <p:sp>
-        <p:nvSpPr>
-          <p:cNvPr id="3" name="TextBox 2"/>
+      <p:sp>
+        <p:nvSpPr>
+          <p:cNvPr id="8" name="TextBox 7"/>
           <p:cNvSpPr txBox="1"/>
           <p:nvPr/>
         </p:nvSpPr>
         <p:spPr>
           <a:xfrm>
-            <a:off x="1051560" y="182880"/>
-            <a:ext cx="7315200" cy="320040"/>
+            <a:off x="640080" y="3728923"/>
+            <a:ext cx="10911535" cy="704088"/>
           </a:xfrm>
           <a:prstGeom prst="rect">
             <a:avLst/>
@@ -10191,2371 +6730,14 @@
           </a:bodyPr>
           <a:lstStyle/>
           <a:p>
-            <a:r>
-              <a:rPr sz="1100" b="0">
-                <a:solidFill>
-                  <a:srgbClr val="5B6770"/>
-                </a:solidFill>
-              </a:rPr>
-              <a:t>CEN429 Güvenli Programlama · Hafta 7</a:t>
-            </a:r>
-          </a:p>
-        </p:txBody>
-      </p:sp>
-      <p:sp>
-        <p:nvSpPr>
-          <p:cNvPr id="4" name="TextBox 3"/>
-          <p:cNvSpPr txBox="1"/>
-          <p:nvPr/>
-        </p:nvSpPr>
-        <p:spPr>
-          <a:xfrm>
-            <a:off x="640080" y="6446520"/>
-            <a:ext cx="7315200" cy="274320"/>
-          </a:xfrm>
-          <a:prstGeom prst="rect">
-            <a:avLst/>
-          </a:prstGeom>
-          <a:noFill/>
-        </p:spPr>
-        <p:txBody>
-          <a:bodyPr wrap="square" lIns="45720" rIns="45720">
-            <a:spAutoFit/>
-          </a:bodyPr>
-          <a:lstStyle/>
-          <a:p>
-            <a:r>
-              <a:rPr sz="1000" b="0">
-                <a:solidFill>
-                  <a:srgbClr val="5B6770"/>
-                </a:solidFill>
-              </a:rPr>
-              <a:t>RTEÜ Bilgisayar Mühendisliği · 2026-2027 Güz</a:t>
-            </a:r>
-          </a:p>
-        </p:txBody>
-      </p:sp>
-      <p:sp>
-        <p:nvSpPr>
-          <p:cNvPr id="5" name="TextBox 4"/>
-          <p:cNvSpPr txBox="1"/>
-          <p:nvPr/>
-        </p:nvSpPr>
-        <p:spPr>
-          <a:xfrm>
-            <a:off x="10637215" y="6446520"/>
-            <a:ext cx="914400" cy="274320"/>
-          </a:xfrm>
-          <a:prstGeom prst="rect">
-            <a:avLst/>
-          </a:prstGeom>
-          <a:noFill/>
-        </p:spPr>
-        <p:txBody>
-          <a:bodyPr wrap="square" lIns="45720" rIns="45720">
-            <a:spAutoFit/>
-          </a:bodyPr>
-          <a:lstStyle/>
-          <a:p>
-            <a:pPr algn="r"/>
-            <a:r>
-              <a:rPr sz="1000" b="0">
-                <a:solidFill>
-                  <a:srgbClr val="5B6770"/>
-                </a:solidFill>
-              </a:rPr>
-              <a:t>30</a:t>
-            </a:r>
-          </a:p>
-        </p:txBody>
-      </p:sp>
-      <p:sp>
-        <p:nvSpPr>
-          <p:cNvPr id="6" name="TextBox 5"/>
-          <p:cNvSpPr txBox="1"/>
-          <p:nvPr/>
-        </p:nvSpPr>
-        <p:spPr>
-          <a:xfrm>
-            <a:off x="640080" y="548640"/>
-            <a:ext cx="10911535" cy="731520"/>
-          </a:xfrm>
-          <a:prstGeom prst="rect">
-            <a:avLst/>
-          </a:prstGeom>
-          <a:noFill/>
-        </p:spPr>
-        <p:txBody>
-          <a:bodyPr wrap="square" lIns="45720" rIns="45720" anchor="ctr">
-            <a:spAutoFit/>
-          </a:bodyPr>
-          <a:lstStyle/>
-          <a:p>
-            <a:r>
-              <a:rPr sz="3000" b="1">
-                <a:solidFill>
-                  <a:srgbClr val="006D77"/>
-                </a:solidFill>
-              </a:rPr>
-              <a:t>Kontrol · gösterim</a:t>
-            </a:r>
-          </a:p>
-        </p:txBody>
-      </p:sp>
-      <p:sp>
-        <p:nvSpPr>
-          <p:cNvPr id="7" name="TextBox 6"/>
-          <p:cNvSpPr txBox="1"/>
-          <p:nvPr/>
-        </p:nvSpPr>
-        <p:spPr>
-          <a:xfrm>
-            <a:off x="640080" y="1325880"/>
-            <a:ext cx="10911535" cy="1219200"/>
-          </a:xfrm>
-          <a:prstGeom prst="rect">
-            <a:avLst/>
-          </a:prstGeom>
-          <a:noFill/>
-        </p:spPr>
-        <p:txBody>
-          <a:bodyPr wrap="square" lIns="45720" rIns="45720">
-            <a:spAutoFit/>
-          </a:bodyPr>
-          <a:lstStyle/>
-          <a:p>
-            <a:pPr>
-              <a:spcAft>
-                <a:spcPts val="300"/>
-              </a:spcAft>
-            </a:pPr>
-            <a:r>
-              <a:rPr sz="2000" b="1">
-                <a:solidFill>
-                  <a:srgbClr val="006D77"/>
-                </a:solidFill>
-              </a:rPr>
-              <a:t>• </a:t>
-            </a:r>
-            <a:r>
-              <a:rPr sz="2000" b="0">
+            <a:pPr algn="l"/>
+            <a:r>
+              <a:rPr sz="1800" b="0">
                 <a:solidFill>
                   <a:srgbClr val="1F2D3A"/>
                 </a:solidFill>
               </a:rPr>
-              <a:t> </a:t>
-            </a:r>
-          </a:p>
-          <a:p>
-            <a:pPr>
-              <a:spcAft>
-                <a:spcPts val="300"/>
-              </a:spcAft>
-            </a:pPr>
-            <a:r>
-              <a:rPr sz="2000" b="1">
-                <a:solidFill>
-                  <a:srgbClr val="006D77"/>
-                </a:solidFill>
-              </a:rPr>
-              <a:t>• </a:t>
-            </a:r>
-            <a:r>
-              <a:rPr sz="2000" b="0">
-                <a:solidFill>
-                  <a:srgbClr val="1F2D3A"/>
-                </a:solidFill>
-              </a:rPr>
-              <a:t> </a:t>
-            </a:r>
-          </a:p>
-          <a:p>
-            <a:pPr>
-              <a:spcAft>
-                <a:spcPts val="300"/>
-              </a:spcAft>
-            </a:pPr>
-            <a:r>
-              <a:rPr sz="2000" b="1">
-                <a:solidFill>
-                  <a:srgbClr val="006D77"/>
-                </a:solidFill>
-              </a:rPr>
-              <a:t>• </a:t>
-            </a:r>
-            <a:r>
-              <a:rPr sz="2000" b="0">
-                <a:solidFill>
-                  <a:srgbClr val="1F2D3A"/>
-                </a:solidFill>
-              </a:rPr>
-              <a:t> </a:t>
-            </a:r>
-          </a:p>
-        </p:txBody>
-      </p:sp>
-    </p:spTree>
-  </p:cSld>
-  <p:clrMapOvr>
-    <a:masterClrMapping/>
-  </p:clrMapOvr>
-</p:sld>
-</file>
-
-<file path=ppt/slides/slide31.xml><?xml version="1.0" encoding="utf-8"?>
-<p:sld xmlns:a="http://schemas.openxmlformats.org/drawingml/2006/main" xmlns:p="http://schemas.openxmlformats.org/presentationml/2006/main" xmlns:r="http://schemas.openxmlformats.org/officeDocument/2006/relationships">
-  <p:cSld>
-    <p:spTree>
-      <p:nvGrpSpPr>
-        <p:cNvPr id="1" name=""/>
-        <p:cNvGrpSpPr/>
-        <p:nvPr/>
-      </p:nvGrpSpPr>
-      <p:grpSpPr/>
-      <p:pic>
-        <p:nvPicPr>
-          <p:cNvPr id="2" name="Picture 1" descr="rteu_logo_kucuk.jpg"/>
-          <p:cNvPicPr>
-            <a:picLocks noChangeAspect="1"/>
-          </p:cNvPicPr>
-          <p:nvPr/>
-        </p:nvPicPr>
-        <p:blipFill>
-          <a:blip r:embed="rId2"/>
-          <a:stretch>
-            <a:fillRect/>
-          </a:stretch>
-        </p:blipFill>
-        <p:spPr>
-          <a:xfrm>
-            <a:off x="640080" y="164592"/>
-            <a:ext cx="242773" cy="329184"/>
-          </a:xfrm>
-          <a:prstGeom prst="rect">
-            <a:avLst/>
-          </a:prstGeom>
-        </p:spPr>
-      </p:pic>
-      <p:sp>
-        <p:nvSpPr>
-          <p:cNvPr id="3" name="TextBox 2"/>
-          <p:cNvSpPr txBox="1"/>
-          <p:nvPr/>
-        </p:nvSpPr>
-        <p:spPr>
-          <a:xfrm>
-            <a:off x="1051560" y="182880"/>
-            <a:ext cx="7315200" cy="320040"/>
-          </a:xfrm>
-          <a:prstGeom prst="rect">
-            <a:avLst/>
-          </a:prstGeom>
-          <a:noFill/>
-        </p:spPr>
-        <p:txBody>
-          <a:bodyPr wrap="square" lIns="45720" rIns="45720">
-            <a:spAutoFit/>
-          </a:bodyPr>
-          <a:lstStyle/>
-          <a:p>
-            <a:r>
-              <a:rPr sz="1100" b="0">
-                <a:solidFill>
-                  <a:srgbClr val="5B6770"/>
-                </a:solidFill>
-              </a:rPr>
-              <a:t>CEN429 Güvenli Programlama · Hafta 7</a:t>
-            </a:r>
-          </a:p>
-        </p:txBody>
-      </p:sp>
-      <p:sp>
-        <p:nvSpPr>
-          <p:cNvPr id="4" name="TextBox 3"/>
-          <p:cNvSpPr txBox="1"/>
-          <p:nvPr/>
-        </p:nvSpPr>
-        <p:spPr>
-          <a:xfrm>
-            <a:off x="640080" y="6446520"/>
-            <a:ext cx="7315200" cy="274320"/>
-          </a:xfrm>
-          <a:prstGeom prst="rect">
-            <a:avLst/>
-          </a:prstGeom>
-          <a:noFill/>
-        </p:spPr>
-        <p:txBody>
-          <a:bodyPr wrap="square" lIns="45720" rIns="45720">
-            <a:spAutoFit/>
-          </a:bodyPr>
-          <a:lstStyle/>
-          <a:p>
-            <a:r>
-              <a:rPr sz="1000" b="0">
-                <a:solidFill>
-                  <a:srgbClr val="5B6770"/>
-                </a:solidFill>
-              </a:rPr>
-              <a:t>RTEÜ Bilgisayar Mühendisliği · 2026-2027 Güz</a:t>
-            </a:r>
-          </a:p>
-        </p:txBody>
-      </p:sp>
-      <p:sp>
-        <p:nvSpPr>
-          <p:cNvPr id="5" name="TextBox 4"/>
-          <p:cNvSpPr txBox="1"/>
-          <p:nvPr/>
-        </p:nvSpPr>
-        <p:spPr>
-          <a:xfrm>
-            <a:off x="10637215" y="6446520"/>
-            <a:ext cx="914400" cy="274320"/>
-          </a:xfrm>
-          <a:prstGeom prst="rect">
-            <a:avLst/>
-          </a:prstGeom>
-          <a:noFill/>
-        </p:spPr>
-        <p:txBody>
-          <a:bodyPr wrap="square" lIns="45720" rIns="45720">
-            <a:spAutoFit/>
-          </a:bodyPr>
-          <a:lstStyle/>
-          <a:p>
-            <a:pPr algn="r"/>
-            <a:r>
-              <a:rPr sz="1000" b="0">
-                <a:solidFill>
-                  <a:srgbClr val="5B6770"/>
-                </a:solidFill>
-              </a:rPr>
-              <a:t>31</a:t>
-            </a:r>
-          </a:p>
-        </p:txBody>
-      </p:sp>
-      <p:sp>
-        <p:nvSpPr>
-          <p:cNvPr id="6" name="TextBox 5"/>
-          <p:cNvSpPr txBox="1"/>
-          <p:nvPr/>
-        </p:nvSpPr>
-        <p:spPr>
-          <a:xfrm>
-            <a:off x="640080" y="548640"/>
-            <a:ext cx="10911535" cy="731520"/>
-          </a:xfrm>
-          <a:prstGeom prst="rect">
-            <a:avLst/>
-          </a:prstGeom>
-          <a:noFill/>
-        </p:spPr>
-        <p:txBody>
-          <a:bodyPr wrap="square" lIns="45720" rIns="45720" anchor="ctr">
-            <a:spAutoFit/>
-          </a:bodyPr>
-          <a:lstStyle/>
-          <a:p>
-            <a:r>
-              <a:rPr sz="3000" b="1">
-                <a:solidFill>
-                  <a:srgbClr val="006D77"/>
-                </a:solidFill>
-              </a:rPr>
-              <a:t>Kontrol · güvenlik</a:t>
-            </a:r>
-          </a:p>
-        </p:txBody>
-      </p:sp>
-      <p:sp>
-        <p:nvSpPr>
-          <p:cNvPr id="7" name="TextBox 6"/>
-          <p:cNvSpPr txBox="1"/>
-          <p:nvPr/>
-        </p:nvSpPr>
-        <p:spPr>
-          <a:xfrm>
-            <a:off x="640080" y="1325880"/>
-            <a:ext cx="10911535" cy="1219200"/>
-          </a:xfrm>
-          <a:prstGeom prst="rect">
-            <a:avLst/>
-          </a:prstGeom>
-          <a:noFill/>
-        </p:spPr>
-        <p:txBody>
-          <a:bodyPr wrap="square" lIns="45720" rIns="45720">
-            <a:spAutoFit/>
-          </a:bodyPr>
-          <a:lstStyle/>
-          <a:p>
-            <a:pPr>
-              <a:spcAft>
-                <a:spcPts val="300"/>
-              </a:spcAft>
-            </a:pPr>
-            <a:r>
-              <a:rPr sz="2000" b="1">
-                <a:solidFill>
-                  <a:srgbClr val="006D77"/>
-                </a:solidFill>
-              </a:rPr>
-              <a:t>• </a:t>
-            </a:r>
-            <a:r>
-              <a:rPr sz="2000" b="0">
-                <a:solidFill>
-                  <a:srgbClr val="1F2D3A"/>
-                </a:solidFill>
-              </a:rPr>
-              <a:t> </a:t>
-            </a:r>
-          </a:p>
-          <a:p>
-            <a:pPr>
-              <a:spcAft>
-                <a:spcPts val="300"/>
-              </a:spcAft>
-            </a:pPr>
-            <a:r>
-              <a:rPr sz="2000" b="1">
-                <a:solidFill>
-                  <a:srgbClr val="006D77"/>
-                </a:solidFill>
-              </a:rPr>
-              <a:t>• </a:t>
-            </a:r>
-            <a:r>
-              <a:rPr sz="2000" b="0">
-                <a:solidFill>
-                  <a:srgbClr val="1F2D3A"/>
-                </a:solidFill>
-              </a:rPr>
-              <a:t> </a:t>
-            </a:r>
-          </a:p>
-          <a:p>
-            <a:pPr>
-              <a:spcAft>
-                <a:spcPts val="300"/>
-              </a:spcAft>
-            </a:pPr>
-            <a:r>
-              <a:rPr sz="2000" b="1">
-                <a:solidFill>
-                  <a:srgbClr val="006D77"/>
-                </a:solidFill>
-              </a:rPr>
-              <a:t>• </a:t>
-            </a:r>
-            <a:r>
-              <a:rPr sz="2000" b="0">
-                <a:solidFill>
-                  <a:srgbClr val="1F2D3A"/>
-                </a:solidFill>
-              </a:rPr>
-              <a:t> </a:t>
-            </a:r>
-          </a:p>
-        </p:txBody>
-      </p:sp>
-    </p:spTree>
-  </p:cSld>
-  <p:clrMapOvr>
-    <a:masterClrMapping/>
-  </p:clrMapOvr>
-</p:sld>
-</file>
-
-<file path=ppt/slides/slide32.xml><?xml version="1.0" encoding="utf-8"?>
-<p:sld xmlns:a="http://schemas.openxmlformats.org/drawingml/2006/main" xmlns:p="http://schemas.openxmlformats.org/presentationml/2006/main" xmlns:r="http://schemas.openxmlformats.org/officeDocument/2006/relationships">
-  <p:cSld>
-    <p:bg>
-      <p:bgPr>
-        <a:solidFill>
-          <a:srgbClr val="006D77"/>
-        </a:solidFill>
-        <a:effectLst/>
-      </p:bgPr>
-    </p:bg>
-    <p:spTree>
-      <p:nvGrpSpPr>
-        <p:cNvPr id="1" name=""/>
-        <p:cNvGrpSpPr/>
-        <p:nvPr/>
-      </p:nvGrpSpPr>
-      <p:grpSpPr/>
-      <p:sp>
-        <p:nvSpPr>
-          <p:cNvPr id="2" name="TextBox 1"/>
-          <p:cNvSpPr txBox="1"/>
-          <p:nvPr/>
-        </p:nvSpPr>
-        <p:spPr>
-          <a:xfrm>
-            <a:off x="1051560" y="182880"/>
-            <a:ext cx="7315200" cy="320040"/>
-          </a:xfrm>
-          <a:prstGeom prst="rect">
-            <a:avLst/>
-          </a:prstGeom>
-          <a:noFill/>
-        </p:spPr>
-        <p:txBody>
-          <a:bodyPr wrap="square" lIns="45720" rIns="45720">
-            <a:spAutoFit/>
-          </a:bodyPr>
-          <a:lstStyle/>
-          <a:p>
-            <a:r>
-              <a:rPr sz="1100" b="0">
-                <a:solidFill>
-                  <a:srgbClr val="D8F0F2"/>
-                </a:solidFill>
-              </a:rPr>
-              <a:t>CEN429 Güvenli Programlama · Hafta 7</a:t>
-            </a:r>
-          </a:p>
-        </p:txBody>
-      </p:sp>
-      <p:sp>
-        <p:nvSpPr>
-          <p:cNvPr id="3" name="TextBox 2"/>
-          <p:cNvSpPr txBox="1"/>
-          <p:nvPr/>
-        </p:nvSpPr>
-        <p:spPr>
-          <a:xfrm>
-            <a:off x="640080" y="6446520"/>
-            <a:ext cx="7315200" cy="274320"/>
-          </a:xfrm>
-          <a:prstGeom prst="rect">
-            <a:avLst/>
-          </a:prstGeom>
-          <a:noFill/>
-        </p:spPr>
-        <p:txBody>
-          <a:bodyPr wrap="square" lIns="45720" rIns="45720">
-            <a:spAutoFit/>
-          </a:bodyPr>
-          <a:lstStyle/>
-          <a:p>
-            <a:r>
-              <a:rPr sz="1000" b="0">
-                <a:solidFill>
-                  <a:srgbClr val="D8F0F2"/>
-                </a:solidFill>
-              </a:rPr>
-              <a:t>RTEÜ Bilgisayar Mühendisliği · 2026-2027 Güz</a:t>
-            </a:r>
-          </a:p>
-        </p:txBody>
-      </p:sp>
-      <p:sp>
-        <p:nvSpPr>
-          <p:cNvPr id="4" name="TextBox 3"/>
-          <p:cNvSpPr txBox="1"/>
-          <p:nvPr/>
-        </p:nvSpPr>
-        <p:spPr>
-          <a:xfrm>
-            <a:off x="10637215" y="6446520"/>
-            <a:ext cx="914400" cy="274320"/>
-          </a:xfrm>
-          <a:prstGeom prst="rect">
-            <a:avLst/>
-          </a:prstGeom>
-          <a:noFill/>
-        </p:spPr>
-        <p:txBody>
-          <a:bodyPr wrap="square" lIns="45720" rIns="45720">
-            <a:spAutoFit/>
-          </a:bodyPr>
-          <a:lstStyle/>
-          <a:p>
-            <a:pPr algn="r"/>
-            <a:r>
-              <a:rPr sz="1000" b="0">
-                <a:solidFill>
-                  <a:srgbClr val="D8F0F2"/>
-                </a:solidFill>
-              </a:rPr>
-              <a:t>32</a:t>
-            </a:r>
-          </a:p>
-        </p:txBody>
-      </p:sp>
-      <p:sp>
-        <p:nvSpPr>
-          <p:cNvPr id="5" name="TextBox 4"/>
-          <p:cNvSpPr txBox="1"/>
-          <p:nvPr/>
-        </p:nvSpPr>
-        <p:spPr>
-          <a:xfrm>
-            <a:off x="640080" y="2743200"/>
-            <a:ext cx="10911535" cy="1280160"/>
-          </a:xfrm>
-          <a:prstGeom prst="rect">
-            <a:avLst/>
-          </a:prstGeom>
-          <a:noFill/>
-        </p:spPr>
-        <p:txBody>
-          <a:bodyPr wrap="square" lIns="45720" rIns="45720">
-            <a:spAutoFit/>
-          </a:bodyPr>
-          <a:lstStyle/>
-          <a:p>
-            <a:pPr algn="l"/>
-            <a:r>
-              <a:rPr sz="4000" b="1">
-                <a:solidFill>
-                  <a:srgbClr val="FFFFFF"/>
-                </a:solidFill>
-              </a:rPr>
-              <a:t>Ek · Örnek sorular</a:t>
-            </a:r>
-          </a:p>
-        </p:txBody>
-      </p:sp>
-    </p:spTree>
-  </p:cSld>
-  <p:clrMapOvr>
-    <a:masterClrMapping/>
-  </p:clrMapOvr>
-</p:sld>
-</file>
-
-<file path=ppt/slides/slide33.xml><?xml version="1.0" encoding="utf-8"?>
-<p:sld xmlns:a="http://schemas.openxmlformats.org/drawingml/2006/main" xmlns:p="http://schemas.openxmlformats.org/presentationml/2006/main" xmlns:r="http://schemas.openxmlformats.org/officeDocument/2006/relationships">
-  <p:cSld>
-    <p:spTree>
-      <p:nvGrpSpPr>
-        <p:cNvPr id="1" name=""/>
-        <p:cNvGrpSpPr/>
-        <p:nvPr/>
-      </p:nvGrpSpPr>
-      <p:grpSpPr/>
-      <p:pic>
-        <p:nvPicPr>
-          <p:cNvPr id="2" name="Picture 1" descr="rteu_logo_kucuk.jpg"/>
-          <p:cNvPicPr>
-            <a:picLocks noChangeAspect="1"/>
-          </p:cNvPicPr>
-          <p:nvPr/>
-        </p:nvPicPr>
-        <p:blipFill>
-          <a:blip r:embed="rId2"/>
-          <a:stretch>
-            <a:fillRect/>
-          </a:stretch>
-        </p:blipFill>
-        <p:spPr>
-          <a:xfrm>
-            <a:off x="640080" y="164592"/>
-            <a:ext cx="242773" cy="329184"/>
-          </a:xfrm>
-          <a:prstGeom prst="rect">
-            <a:avLst/>
-          </a:prstGeom>
-        </p:spPr>
-      </p:pic>
-      <p:sp>
-        <p:nvSpPr>
-          <p:cNvPr id="3" name="TextBox 2"/>
-          <p:cNvSpPr txBox="1"/>
-          <p:nvPr/>
-        </p:nvSpPr>
-        <p:spPr>
-          <a:xfrm>
-            <a:off x="1051560" y="182880"/>
-            <a:ext cx="7315200" cy="320040"/>
-          </a:xfrm>
-          <a:prstGeom prst="rect">
-            <a:avLst/>
-          </a:prstGeom>
-          <a:noFill/>
-        </p:spPr>
-        <p:txBody>
-          <a:bodyPr wrap="square" lIns="45720" rIns="45720">
-            <a:spAutoFit/>
-          </a:bodyPr>
-          <a:lstStyle/>
-          <a:p>
-            <a:r>
-              <a:rPr sz="1100" b="0">
-                <a:solidFill>
-                  <a:srgbClr val="5B6770"/>
-                </a:solidFill>
-              </a:rPr>
-              <a:t>CEN429 Güvenli Programlama · Hafta 7</a:t>
-            </a:r>
-          </a:p>
-        </p:txBody>
-      </p:sp>
-      <p:sp>
-        <p:nvSpPr>
-          <p:cNvPr id="4" name="TextBox 3"/>
-          <p:cNvSpPr txBox="1"/>
-          <p:nvPr/>
-        </p:nvSpPr>
-        <p:spPr>
-          <a:xfrm>
-            <a:off x="640080" y="6446520"/>
-            <a:ext cx="7315200" cy="274320"/>
-          </a:xfrm>
-          <a:prstGeom prst="rect">
-            <a:avLst/>
-          </a:prstGeom>
-          <a:noFill/>
-        </p:spPr>
-        <p:txBody>
-          <a:bodyPr wrap="square" lIns="45720" rIns="45720">
-            <a:spAutoFit/>
-          </a:bodyPr>
-          <a:lstStyle/>
-          <a:p>
-            <a:r>
-              <a:rPr sz="1000" b="0">
-                <a:solidFill>
-                  <a:srgbClr val="5B6770"/>
-                </a:solidFill>
-              </a:rPr>
-              <a:t>RTEÜ Bilgisayar Mühendisliği · 2026-2027 Güz</a:t>
-            </a:r>
-          </a:p>
-        </p:txBody>
-      </p:sp>
-      <p:sp>
-        <p:nvSpPr>
-          <p:cNvPr id="5" name="TextBox 4"/>
-          <p:cNvSpPr txBox="1"/>
-          <p:nvPr/>
-        </p:nvSpPr>
-        <p:spPr>
-          <a:xfrm>
-            <a:off x="10637215" y="6446520"/>
-            <a:ext cx="914400" cy="274320"/>
-          </a:xfrm>
-          <a:prstGeom prst="rect">
-            <a:avLst/>
-          </a:prstGeom>
-          <a:noFill/>
-        </p:spPr>
-        <p:txBody>
-          <a:bodyPr wrap="square" lIns="45720" rIns="45720">
-            <a:spAutoFit/>
-          </a:bodyPr>
-          <a:lstStyle/>
-          <a:p>
-            <a:pPr algn="r"/>
-            <a:r>
-              <a:rPr sz="1000" b="0">
-                <a:solidFill>
-                  <a:srgbClr val="5B6770"/>
-                </a:solidFill>
-              </a:rPr>
-              <a:t>33</a:t>
-            </a:r>
-          </a:p>
-        </p:txBody>
-      </p:sp>
-      <p:sp>
-        <p:nvSpPr>
-          <p:cNvPr id="6" name="TextBox 5"/>
-          <p:cNvSpPr txBox="1"/>
-          <p:nvPr/>
-        </p:nvSpPr>
-        <p:spPr>
-          <a:xfrm>
-            <a:off x="640080" y="548640"/>
-            <a:ext cx="10911535" cy="731520"/>
-          </a:xfrm>
-          <a:prstGeom prst="rect">
-            <a:avLst/>
-          </a:prstGeom>
-          <a:noFill/>
-        </p:spPr>
-        <p:txBody>
-          <a:bodyPr wrap="square" lIns="45720" rIns="45720" anchor="ctr">
-            <a:spAutoFit/>
-          </a:bodyPr>
-          <a:lstStyle/>
-          <a:p>
-            <a:r>
-              <a:rPr sz="3000" b="1">
-                <a:solidFill>
-                  <a:srgbClr val="006D77"/>
-                </a:solidFill>
-              </a:rPr>
-              <a:t>Soru 1</a:t>
-            </a:r>
-          </a:p>
-        </p:txBody>
-      </p:sp>
-      <p:sp>
-        <p:nvSpPr>
-          <p:cNvPr id="7" name="TextBox 6"/>
-          <p:cNvSpPr txBox="1"/>
-          <p:nvPr/>
-        </p:nvSpPr>
-        <p:spPr>
-          <a:xfrm>
-            <a:off x="640080" y="1325880"/>
-            <a:ext cx="10911535" cy="439928"/>
-          </a:xfrm>
-          <a:prstGeom prst="rect">
-            <a:avLst/>
-          </a:prstGeom>
-          <a:noFill/>
-        </p:spPr>
-        <p:txBody>
-          <a:bodyPr wrap="square" lIns="45720" rIns="45720">
-            <a:spAutoFit/>
-          </a:bodyPr>
-          <a:lstStyle/>
-          <a:p>
-            <a:pPr algn="l"/>
-            <a:r>
-              <a:rPr sz="2000" b="1">
-                <a:solidFill>
-                  <a:srgbClr val="1F2D3A"/>
-                </a:solidFill>
-              </a:rPr>
-              <a:t>En kritik üç varlığınız ve C/I/I+ etiketleri?</a:t>
-            </a:r>
-          </a:p>
-        </p:txBody>
-      </p:sp>
-      <p:sp>
-        <p:nvSpPr>
-          <p:cNvPr id="8" name="TextBox 7"/>
-          <p:cNvSpPr txBox="1"/>
-          <p:nvPr/>
-        </p:nvSpPr>
-        <p:spPr>
-          <a:xfrm>
-            <a:off x="640080" y="1875536"/>
-            <a:ext cx="10911535" cy="439928"/>
-          </a:xfrm>
-          <a:prstGeom prst="rect">
-            <a:avLst/>
-          </a:prstGeom>
-          <a:noFill/>
-        </p:spPr>
-        <p:txBody>
-          <a:bodyPr wrap="square" lIns="45720" rIns="45720">
-            <a:spAutoFit/>
-          </a:bodyPr>
-          <a:lstStyle/>
-          <a:p>
-            <a:pPr algn="l"/>
-            <a:r>
-              <a:rPr sz="2000" b="0">
-                <a:solidFill>
-                  <a:srgbClr val="1F2D3A"/>
-                </a:solidFill>
-              </a:rPr>
-              <a:t>Cevabı hazır tutun; her varlığın yaşam döngüsünü bilin.</a:t>
-            </a:r>
-          </a:p>
-        </p:txBody>
-      </p:sp>
-    </p:spTree>
-  </p:cSld>
-  <p:clrMapOvr>
-    <a:masterClrMapping/>
-  </p:clrMapOvr>
-</p:sld>
-</file>
-
-<file path=ppt/slides/slide34.xml><?xml version="1.0" encoding="utf-8"?>
-<p:sld xmlns:a="http://schemas.openxmlformats.org/drawingml/2006/main" xmlns:p="http://schemas.openxmlformats.org/presentationml/2006/main" xmlns:r="http://schemas.openxmlformats.org/officeDocument/2006/relationships">
-  <p:cSld>
-    <p:spTree>
-      <p:nvGrpSpPr>
-        <p:cNvPr id="1" name=""/>
-        <p:cNvGrpSpPr/>
-        <p:nvPr/>
-      </p:nvGrpSpPr>
-      <p:grpSpPr/>
-      <p:pic>
-        <p:nvPicPr>
-          <p:cNvPr id="2" name="Picture 1" descr="rteu_logo_kucuk.jpg"/>
-          <p:cNvPicPr>
-            <a:picLocks noChangeAspect="1"/>
-          </p:cNvPicPr>
-          <p:nvPr/>
-        </p:nvPicPr>
-        <p:blipFill>
-          <a:blip r:embed="rId2"/>
-          <a:stretch>
-            <a:fillRect/>
-          </a:stretch>
-        </p:blipFill>
-        <p:spPr>
-          <a:xfrm>
-            <a:off x="640080" y="164592"/>
-            <a:ext cx="242773" cy="329184"/>
-          </a:xfrm>
-          <a:prstGeom prst="rect">
-            <a:avLst/>
-          </a:prstGeom>
-        </p:spPr>
-      </p:pic>
-      <p:sp>
-        <p:nvSpPr>
-          <p:cNvPr id="3" name="TextBox 2"/>
-          <p:cNvSpPr txBox="1"/>
-          <p:nvPr/>
-        </p:nvSpPr>
-        <p:spPr>
-          <a:xfrm>
-            <a:off x="1051560" y="182880"/>
-            <a:ext cx="7315200" cy="320040"/>
-          </a:xfrm>
-          <a:prstGeom prst="rect">
-            <a:avLst/>
-          </a:prstGeom>
-          <a:noFill/>
-        </p:spPr>
-        <p:txBody>
-          <a:bodyPr wrap="square" lIns="45720" rIns="45720">
-            <a:spAutoFit/>
-          </a:bodyPr>
-          <a:lstStyle/>
-          <a:p>
-            <a:r>
-              <a:rPr sz="1100" b="0">
-                <a:solidFill>
-                  <a:srgbClr val="5B6770"/>
-                </a:solidFill>
-              </a:rPr>
-              <a:t>CEN429 Güvenli Programlama · Hafta 7</a:t>
-            </a:r>
-          </a:p>
-        </p:txBody>
-      </p:sp>
-      <p:sp>
-        <p:nvSpPr>
-          <p:cNvPr id="4" name="TextBox 3"/>
-          <p:cNvSpPr txBox="1"/>
-          <p:nvPr/>
-        </p:nvSpPr>
-        <p:spPr>
-          <a:xfrm>
-            <a:off x="640080" y="6446520"/>
-            <a:ext cx="7315200" cy="274320"/>
-          </a:xfrm>
-          <a:prstGeom prst="rect">
-            <a:avLst/>
-          </a:prstGeom>
-          <a:noFill/>
-        </p:spPr>
-        <p:txBody>
-          <a:bodyPr wrap="square" lIns="45720" rIns="45720">
-            <a:spAutoFit/>
-          </a:bodyPr>
-          <a:lstStyle/>
-          <a:p>
-            <a:r>
-              <a:rPr sz="1000" b="0">
-                <a:solidFill>
-                  <a:srgbClr val="5B6770"/>
-                </a:solidFill>
-              </a:rPr>
-              <a:t>RTEÜ Bilgisayar Mühendisliği · 2026-2027 Güz</a:t>
-            </a:r>
-          </a:p>
-        </p:txBody>
-      </p:sp>
-      <p:sp>
-        <p:nvSpPr>
-          <p:cNvPr id="5" name="TextBox 4"/>
-          <p:cNvSpPr txBox="1"/>
-          <p:nvPr/>
-        </p:nvSpPr>
-        <p:spPr>
-          <a:xfrm>
-            <a:off x="10637215" y="6446520"/>
-            <a:ext cx="914400" cy="274320"/>
-          </a:xfrm>
-          <a:prstGeom prst="rect">
-            <a:avLst/>
-          </a:prstGeom>
-          <a:noFill/>
-        </p:spPr>
-        <p:txBody>
-          <a:bodyPr wrap="square" lIns="45720" rIns="45720">
-            <a:spAutoFit/>
-          </a:bodyPr>
-          <a:lstStyle/>
-          <a:p>
-            <a:pPr algn="r"/>
-            <a:r>
-              <a:rPr sz="1000" b="0">
-                <a:solidFill>
-                  <a:srgbClr val="5B6770"/>
-                </a:solidFill>
-              </a:rPr>
-              <a:t>34</a:t>
-            </a:r>
-          </a:p>
-        </p:txBody>
-      </p:sp>
-      <p:sp>
-        <p:nvSpPr>
-          <p:cNvPr id="6" name="TextBox 5"/>
-          <p:cNvSpPr txBox="1"/>
-          <p:nvPr/>
-        </p:nvSpPr>
-        <p:spPr>
-          <a:xfrm>
-            <a:off x="640080" y="548640"/>
-            <a:ext cx="10911535" cy="731520"/>
-          </a:xfrm>
-          <a:prstGeom prst="rect">
-            <a:avLst/>
-          </a:prstGeom>
-          <a:noFill/>
-        </p:spPr>
-        <p:txBody>
-          <a:bodyPr wrap="square" lIns="45720" rIns="45720" anchor="ctr">
-            <a:spAutoFit/>
-          </a:bodyPr>
-          <a:lstStyle/>
-          <a:p>
-            <a:r>
-              <a:rPr sz="3000" b="1">
-                <a:solidFill>
-                  <a:srgbClr val="006D77"/>
-                </a:solidFill>
-              </a:rPr>
-              <a:t>Soru 2</a:t>
-            </a:r>
-          </a:p>
-        </p:txBody>
-      </p:sp>
-      <p:sp>
-        <p:nvSpPr>
-          <p:cNvPr id="7" name="TextBox 6"/>
-          <p:cNvSpPr txBox="1"/>
-          <p:nvPr/>
-        </p:nvSpPr>
-        <p:spPr>
-          <a:xfrm>
-            <a:off x="640080" y="1325880"/>
-            <a:ext cx="10911535" cy="439928"/>
-          </a:xfrm>
-          <a:prstGeom prst="rect">
-            <a:avLst/>
-          </a:prstGeom>
-          <a:noFill/>
-        </p:spPr>
-        <p:txBody>
-          <a:bodyPr wrap="square" lIns="45720" rIns="45720">
-            <a:spAutoFit/>
-          </a:bodyPr>
-          <a:lstStyle/>
-          <a:p>
-            <a:pPr algn="l"/>
-            <a:r>
-              <a:rPr sz="2000" b="1">
-                <a:solidFill>
-                  <a:srgbClr val="1F2D3A"/>
-                </a:solidFill>
-              </a:rPr>
-              <a:t>Bu tehdide karşı hangi önlem, nasıl doğrulandı?</a:t>
-            </a:r>
-          </a:p>
-        </p:txBody>
-      </p:sp>
-      <p:sp>
-        <p:nvSpPr>
-          <p:cNvPr id="8" name="TextBox 7"/>
-          <p:cNvSpPr txBox="1"/>
-          <p:nvPr/>
-        </p:nvSpPr>
-        <p:spPr>
-          <a:xfrm>
-            <a:off x="640080" y="1875536"/>
-            <a:ext cx="10911535" cy="439928"/>
-          </a:xfrm>
-          <a:prstGeom prst="rect">
-            <a:avLst/>
-          </a:prstGeom>
-          <a:noFill/>
-        </p:spPr>
-        <p:txBody>
-          <a:bodyPr wrap="square" lIns="45720" rIns="45720">
-            <a:spAutoFit/>
-          </a:bodyPr>
-          <a:lstStyle/>
-          <a:p>
-            <a:pPr algn="l"/>
-            <a:r>
-              <a:rPr sz="2000" b="0">
-                <a:solidFill>
-                  <a:srgbClr val="1F2D3A"/>
-                </a:solidFill>
-              </a:rPr>
-              <a:t>Tehdit → önlem → kanıt zincirini gösterin.</a:t>
-            </a:r>
-          </a:p>
-        </p:txBody>
-      </p:sp>
-    </p:spTree>
-  </p:cSld>
-  <p:clrMapOvr>
-    <a:masterClrMapping/>
-  </p:clrMapOvr>
-</p:sld>
-</file>
-
-<file path=ppt/slides/slide35.xml><?xml version="1.0" encoding="utf-8"?>
-<p:sld xmlns:a="http://schemas.openxmlformats.org/drawingml/2006/main" xmlns:p="http://schemas.openxmlformats.org/presentationml/2006/main" xmlns:r="http://schemas.openxmlformats.org/officeDocument/2006/relationships">
-  <p:cSld>
-    <p:spTree>
-      <p:nvGrpSpPr>
-        <p:cNvPr id="1" name=""/>
-        <p:cNvGrpSpPr/>
-        <p:nvPr/>
-      </p:nvGrpSpPr>
-      <p:grpSpPr/>
-      <p:pic>
-        <p:nvPicPr>
-          <p:cNvPr id="2" name="Picture 1" descr="rteu_logo_kucuk.jpg"/>
-          <p:cNvPicPr>
-            <a:picLocks noChangeAspect="1"/>
-          </p:cNvPicPr>
-          <p:nvPr/>
-        </p:nvPicPr>
-        <p:blipFill>
-          <a:blip r:embed="rId2"/>
-          <a:stretch>
-            <a:fillRect/>
-          </a:stretch>
-        </p:blipFill>
-        <p:spPr>
-          <a:xfrm>
-            <a:off x="640080" y="164592"/>
-            <a:ext cx="242773" cy="329184"/>
-          </a:xfrm>
-          <a:prstGeom prst="rect">
-            <a:avLst/>
-          </a:prstGeom>
-        </p:spPr>
-      </p:pic>
-      <p:sp>
-        <p:nvSpPr>
-          <p:cNvPr id="3" name="TextBox 2"/>
-          <p:cNvSpPr txBox="1"/>
-          <p:nvPr/>
-        </p:nvSpPr>
-        <p:spPr>
-          <a:xfrm>
-            <a:off x="1051560" y="182880"/>
-            <a:ext cx="7315200" cy="320040"/>
-          </a:xfrm>
-          <a:prstGeom prst="rect">
-            <a:avLst/>
-          </a:prstGeom>
-          <a:noFill/>
-        </p:spPr>
-        <p:txBody>
-          <a:bodyPr wrap="square" lIns="45720" rIns="45720">
-            <a:spAutoFit/>
-          </a:bodyPr>
-          <a:lstStyle/>
-          <a:p>
-            <a:r>
-              <a:rPr sz="1100" b="0">
-                <a:solidFill>
-                  <a:srgbClr val="5B6770"/>
-                </a:solidFill>
-              </a:rPr>
-              <a:t>CEN429 Güvenli Programlama · Hafta 7</a:t>
-            </a:r>
-          </a:p>
-        </p:txBody>
-      </p:sp>
-      <p:sp>
-        <p:nvSpPr>
-          <p:cNvPr id="4" name="TextBox 3"/>
-          <p:cNvSpPr txBox="1"/>
-          <p:nvPr/>
-        </p:nvSpPr>
-        <p:spPr>
-          <a:xfrm>
-            <a:off x="640080" y="6446520"/>
-            <a:ext cx="7315200" cy="274320"/>
-          </a:xfrm>
-          <a:prstGeom prst="rect">
-            <a:avLst/>
-          </a:prstGeom>
-          <a:noFill/>
-        </p:spPr>
-        <p:txBody>
-          <a:bodyPr wrap="square" lIns="45720" rIns="45720">
-            <a:spAutoFit/>
-          </a:bodyPr>
-          <a:lstStyle/>
-          <a:p>
-            <a:r>
-              <a:rPr sz="1000" b="0">
-                <a:solidFill>
-                  <a:srgbClr val="5B6770"/>
-                </a:solidFill>
-              </a:rPr>
-              <a:t>RTEÜ Bilgisayar Mühendisliği · 2026-2027 Güz</a:t>
-            </a:r>
-          </a:p>
-        </p:txBody>
-      </p:sp>
-      <p:sp>
-        <p:nvSpPr>
-          <p:cNvPr id="5" name="TextBox 4"/>
-          <p:cNvSpPr txBox="1"/>
-          <p:nvPr/>
-        </p:nvSpPr>
-        <p:spPr>
-          <a:xfrm>
-            <a:off x="10637215" y="6446520"/>
-            <a:ext cx="914400" cy="274320"/>
-          </a:xfrm>
-          <a:prstGeom prst="rect">
-            <a:avLst/>
-          </a:prstGeom>
-          <a:noFill/>
-        </p:spPr>
-        <p:txBody>
-          <a:bodyPr wrap="square" lIns="45720" rIns="45720">
-            <a:spAutoFit/>
-          </a:bodyPr>
-          <a:lstStyle/>
-          <a:p>
-            <a:pPr algn="r"/>
-            <a:r>
-              <a:rPr sz="1000" b="0">
-                <a:solidFill>
-                  <a:srgbClr val="5B6770"/>
-                </a:solidFill>
-              </a:rPr>
-              <a:t>35</a:t>
-            </a:r>
-          </a:p>
-        </p:txBody>
-      </p:sp>
-      <p:sp>
-        <p:nvSpPr>
-          <p:cNvPr id="6" name="TextBox 5"/>
-          <p:cNvSpPr txBox="1"/>
-          <p:nvPr/>
-        </p:nvSpPr>
-        <p:spPr>
-          <a:xfrm>
-            <a:off x="640080" y="548640"/>
-            <a:ext cx="10911535" cy="731520"/>
-          </a:xfrm>
-          <a:prstGeom prst="rect">
-            <a:avLst/>
-          </a:prstGeom>
-          <a:noFill/>
-        </p:spPr>
-        <p:txBody>
-          <a:bodyPr wrap="square" lIns="45720" rIns="45720" anchor="ctr">
-            <a:spAutoFit/>
-          </a:bodyPr>
-          <a:lstStyle/>
-          <a:p>
-            <a:r>
-              <a:rPr sz="3000" b="1">
-                <a:solidFill>
-                  <a:srgbClr val="006D77"/>
-                </a:solidFill>
-              </a:rPr>
-              <a:t>Soru 3</a:t>
-            </a:r>
-          </a:p>
-        </p:txBody>
-      </p:sp>
-      <p:sp>
-        <p:nvSpPr>
-          <p:cNvPr id="7" name="TextBox 6"/>
-          <p:cNvSpPr txBox="1"/>
-          <p:nvPr/>
-        </p:nvSpPr>
-        <p:spPr>
-          <a:xfrm>
-            <a:off x="640080" y="1325880"/>
-            <a:ext cx="10911535" cy="439928"/>
-          </a:xfrm>
-          <a:prstGeom prst="rect">
-            <a:avLst/>
-          </a:prstGeom>
-          <a:noFill/>
-        </p:spPr>
-        <p:txBody>
-          <a:bodyPr wrap="square" lIns="45720" rIns="45720">
-            <a:spAutoFit/>
-          </a:bodyPr>
-          <a:lstStyle/>
-          <a:p>
-            <a:pPr algn="l"/>
-            <a:r>
-              <a:rPr sz="2000" b="1">
-                <a:solidFill>
-                  <a:srgbClr val="1F2D3A"/>
-                </a:solidFill>
-              </a:rPr>
-              <a:t>Bu anahtar nereden geliyor, nerede duruyor, ne zaman siliniyor?</a:t>
-            </a:r>
-          </a:p>
-        </p:txBody>
-      </p:sp>
-      <p:sp>
-        <p:nvSpPr>
-          <p:cNvPr id="8" name="TextBox 7"/>
-          <p:cNvSpPr txBox="1"/>
-          <p:nvPr/>
-        </p:nvSpPr>
-        <p:spPr>
-          <a:xfrm>
-            <a:off x="640080" y="1875536"/>
-            <a:ext cx="10911535" cy="439928"/>
-          </a:xfrm>
-          <a:prstGeom prst="rect">
-            <a:avLst/>
-          </a:prstGeom>
-          <a:noFill/>
-        </p:spPr>
-        <p:txBody>
-          <a:bodyPr wrap="square" lIns="45720" rIns="45720">
-            <a:spAutoFit/>
-          </a:bodyPr>
-          <a:lstStyle/>
-          <a:p>
-            <a:pPr algn="l"/>
-            <a:r>
-              <a:rPr sz="2000" b="0">
-                <a:solidFill>
-                  <a:srgbClr val="1F2D3A"/>
-                </a:solidFill>
-              </a:rPr>
-              <a:t>Anahtar yaşam döngüsünü açıklayın.</a:t>
-            </a:r>
-          </a:p>
-        </p:txBody>
-      </p:sp>
-    </p:spTree>
-  </p:cSld>
-  <p:clrMapOvr>
-    <a:masterClrMapping/>
-  </p:clrMapOvr>
-</p:sld>
-</file>
-
-<file path=ppt/slides/slide36.xml><?xml version="1.0" encoding="utf-8"?>
-<p:sld xmlns:a="http://schemas.openxmlformats.org/drawingml/2006/main" xmlns:p="http://schemas.openxmlformats.org/presentationml/2006/main" xmlns:r="http://schemas.openxmlformats.org/officeDocument/2006/relationships">
-  <p:cSld>
-    <p:spTree>
-      <p:nvGrpSpPr>
-        <p:cNvPr id="1" name=""/>
-        <p:cNvGrpSpPr/>
-        <p:nvPr/>
-      </p:nvGrpSpPr>
-      <p:grpSpPr/>
-      <p:pic>
-        <p:nvPicPr>
-          <p:cNvPr id="2" name="Picture 1" descr="rteu_logo_kucuk.jpg"/>
-          <p:cNvPicPr>
-            <a:picLocks noChangeAspect="1"/>
-          </p:cNvPicPr>
-          <p:nvPr/>
-        </p:nvPicPr>
-        <p:blipFill>
-          <a:blip r:embed="rId2"/>
-          <a:stretch>
-            <a:fillRect/>
-          </a:stretch>
-        </p:blipFill>
-        <p:spPr>
-          <a:xfrm>
-            <a:off x="640080" y="164592"/>
-            <a:ext cx="242773" cy="329184"/>
-          </a:xfrm>
-          <a:prstGeom prst="rect">
-            <a:avLst/>
-          </a:prstGeom>
-        </p:spPr>
-      </p:pic>
-      <p:sp>
-        <p:nvSpPr>
-          <p:cNvPr id="3" name="TextBox 2"/>
-          <p:cNvSpPr txBox="1"/>
-          <p:nvPr/>
-        </p:nvSpPr>
-        <p:spPr>
-          <a:xfrm>
-            <a:off x="1051560" y="182880"/>
-            <a:ext cx="7315200" cy="320040"/>
-          </a:xfrm>
-          <a:prstGeom prst="rect">
-            <a:avLst/>
-          </a:prstGeom>
-          <a:noFill/>
-        </p:spPr>
-        <p:txBody>
-          <a:bodyPr wrap="square" lIns="45720" rIns="45720">
-            <a:spAutoFit/>
-          </a:bodyPr>
-          <a:lstStyle/>
-          <a:p>
-            <a:r>
-              <a:rPr sz="1100" b="0">
-                <a:solidFill>
-                  <a:srgbClr val="5B6770"/>
-                </a:solidFill>
-              </a:rPr>
-              <a:t>CEN429 Güvenli Programlama · Hafta 7</a:t>
-            </a:r>
-          </a:p>
-        </p:txBody>
-      </p:sp>
-      <p:sp>
-        <p:nvSpPr>
-          <p:cNvPr id="4" name="TextBox 3"/>
-          <p:cNvSpPr txBox="1"/>
-          <p:nvPr/>
-        </p:nvSpPr>
-        <p:spPr>
-          <a:xfrm>
-            <a:off x="640080" y="6446520"/>
-            <a:ext cx="7315200" cy="274320"/>
-          </a:xfrm>
-          <a:prstGeom prst="rect">
-            <a:avLst/>
-          </a:prstGeom>
-          <a:noFill/>
-        </p:spPr>
-        <p:txBody>
-          <a:bodyPr wrap="square" lIns="45720" rIns="45720">
-            <a:spAutoFit/>
-          </a:bodyPr>
-          <a:lstStyle/>
-          <a:p>
-            <a:r>
-              <a:rPr sz="1000" b="0">
-                <a:solidFill>
-                  <a:srgbClr val="5B6770"/>
-                </a:solidFill>
-              </a:rPr>
-              <a:t>RTEÜ Bilgisayar Mühendisliği · 2026-2027 Güz</a:t>
-            </a:r>
-          </a:p>
-        </p:txBody>
-      </p:sp>
-      <p:sp>
-        <p:nvSpPr>
-          <p:cNvPr id="5" name="TextBox 4"/>
-          <p:cNvSpPr txBox="1"/>
-          <p:nvPr/>
-        </p:nvSpPr>
-        <p:spPr>
-          <a:xfrm>
-            <a:off x="10637215" y="6446520"/>
-            <a:ext cx="914400" cy="274320"/>
-          </a:xfrm>
-          <a:prstGeom prst="rect">
-            <a:avLst/>
-          </a:prstGeom>
-          <a:noFill/>
-        </p:spPr>
-        <p:txBody>
-          <a:bodyPr wrap="square" lIns="45720" rIns="45720">
-            <a:spAutoFit/>
-          </a:bodyPr>
-          <a:lstStyle/>
-          <a:p>
-            <a:pPr algn="r"/>
-            <a:r>
-              <a:rPr sz="1000" b="0">
-                <a:solidFill>
-                  <a:srgbClr val="5B6770"/>
-                </a:solidFill>
-              </a:rPr>
-              <a:t>36</a:t>
-            </a:r>
-          </a:p>
-        </p:txBody>
-      </p:sp>
-      <p:sp>
-        <p:nvSpPr>
-          <p:cNvPr id="6" name="TextBox 5"/>
-          <p:cNvSpPr txBox="1"/>
-          <p:nvPr/>
-        </p:nvSpPr>
-        <p:spPr>
-          <a:xfrm>
-            <a:off x="640080" y="548640"/>
-            <a:ext cx="10911535" cy="731520"/>
-          </a:xfrm>
-          <a:prstGeom prst="rect">
-            <a:avLst/>
-          </a:prstGeom>
-          <a:noFill/>
-        </p:spPr>
-        <p:txBody>
-          <a:bodyPr wrap="square" lIns="45720" rIns="45720" anchor="ctr">
-            <a:spAutoFit/>
-          </a:bodyPr>
-          <a:lstStyle/>
-          <a:p>
-            <a:r>
-              <a:rPr sz="3000" b="1">
-                <a:solidFill>
-                  <a:srgbClr val="006D77"/>
-                </a:solidFill>
-              </a:rPr>
-              <a:t>Soru 4</a:t>
-            </a:r>
-          </a:p>
-        </p:txBody>
-      </p:sp>
-      <p:sp>
-        <p:nvSpPr>
-          <p:cNvPr id="7" name="TextBox 6"/>
-          <p:cNvSpPr txBox="1"/>
-          <p:nvPr/>
-        </p:nvSpPr>
-        <p:spPr>
-          <a:xfrm>
-            <a:off x="640080" y="1325880"/>
-            <a:ext cx="10911535" cy="439928"/>
-          </a:xfrm>
-          <a:prstGeom prst="rect">
-            <a:avLst/>
-          </a:prstGeom>
-          <a:noFill/>
-        </p:spPr>
-        <p:txBody>
-          <a:bodyPr wrap="square" lIns="45720" rIns="45720">
-            <a:spAutoFit/>
-          </a:bodyPr>
-          <a:lstStyle/>
-          <a:p>
-            <a:pPr algn="l"/>
-            <a:r>
-              <a:rPr sz="2000" b="1">
-                <a:solidFill>
-                  <a:srgbClr val="1F2D3A"/>
-                </a:solidFill>
-              </a:rPr>
-              <a:t>Kalan riskiniz ne? Neden kabul edilebilir?</a:t>
-            </a:r>
-          </a:p>
-        </p:txBody>
-      </p:sp>
-      <p:sp>
-        <p:nvSpPr>
-          <p:cNvPr id="8" name="TextBox 7"/>
-          <p:cNvSpPr txBox="1"/>
-          <p:nvPr/>
-        </p:nvSpPr>
-        <p:spPr>
-          <a:xfrm>
-            <a:off x="640080" y="1875536"/>
-            <a:ext cx="10911535" cy="439928"/>
-          </a:xfrm>
-          <a:prstGeom prst="rect">
-            <a:avLst/>
-          </a:prstGeom>
-          <a:noFill/>
-        </p:spPr>
-        <p:txBody>
-          <a:bodyPr wrap="square" lIns="45720" rIns="45720">
-            <a:spAutoFit/>
-          </a:bodyPr>
-          <a:lstStyle/>
-          <a:p>
-            <a:pPr algn="l"/>
-            <a:r>
-              <a:rPr sz="2000" b="0">
-                <a:solidFill>
-                  <a:srgbClr val="1F2D3A"/>
-                </a:solidFill>
-              </a:rPr>
-              <a:t>Dürüst ve gerekçeli yanıtlayın.</a:t>
-            </a:r>
-          </a:p>
-        </p:txBody>
-      </p:sp>
-    </p:spTree>
-  </p:cSld>
-  <p:clrMapOvr>
-    <a:masterClrMapping/>
-  </p:clrMapOvr>
-</p:sld>
-</file>
-
-<file path=ppt/slides/slide37.xml><?xml version="1.0" encoding="utf-8"?>
-<p:sld xmlns:a="http://schemas.openxmlformats.org/drawingml/2006/main" xmlns:p="http://schemas.openxmlformats.org/presentationml/2006/main" xmlns:r="http://schemas.openxmlformats.org/officeDocument/2006/relationships">
-  <p:cSld>
-    <p:bg>
-      <p:bgPr>
-        <a:solidFill>
-          <a:srgbClr val="006D77"/>
-        </a:solidFill>
-        <a:effectLst/>
-      </p:bgPr>
-    </p:bg>
-    <p:spTree>
-      <p:nvGrpSpPr>
-        <p:cNvPr id="1" name=""/>
-        <p:cNvGrpSpPr/>
-        <p:nvPr/>
-      </p:nvGrpSpPr>
-      <p:grpSpPr/>
-      <p:sp>
-        <p:nvSpPr>
-          <p:cNvPr id="2" name="TextBox 1"/>
-          <p:cNvSpPr txBox="1"/>
-          <p:nvPr/>
-        </p:nvSpPr>
-        <p:spPr>
-          <a:xfrm>
-            <a:off x="1051560" y="182880"/>
-            <a:ext cx="7315200" cy="320040"/>
-          </a:xfrm>
-          <a:prstGeom prst="rect">
-            <a:avLst/>
-          </a:prstGeom>
-          <a:noFill/>
-        </p:spPr>
-        <p:txBody>
-          <a:bodyPr wrap="square" lIns="45720" rIns="45720">
-            <a:spAutoFit/>
-          </a:bodyPr>
-          <a:lstStyle/>
-          <a:p>
-            <a:r>
-              <a:rPr sz="1100" b="0">
-                <a:solidFill>
-                  <a:srgbClr val="D8F0F2"/>
-                </a:solidFill>
-              </a:rPr>
-              <a:t>CEN429 Güvenli Programlama · Hafta 7</a:t>
-            </a:r>
-          </a:p>
-        </p:txBody>
-      </p:sp>
-      <p:sp>
-        <p:nvSpPr>
-          <p:cNvPr id="3" name="TextBox 2"/>
-          <p:cNvSpPr txBox="1"/>
-          <p:nvPr/>
-        </p:nvSpPr>
-        <p:spPr>
-          <a:xfrm>
-            <a:off x="640080" y="6446520"/>
-            <a:ext cx="7315200" cy="274320"/>
-          </a:xfrm>
-          <a:prstGeom prst="rect">
-            <a:avLst/>
-          </a:prstGeom>
-          <a:noFill/>
-        </p:spPr>
-        <p:txBody>
-          <a:bodyPr wrap="square" lIns="45720" rIns="45720">
-            <a:spAutoFit/>
-          </a:bodyPr>
-          <a:lstStyle/>
-          <a:p>
-            <a:r>
-              <a:rPr sz="1000" b="0">
-                <a:solidFill>
-                  <a:srgbClr val="D8F0F2"/>
-                </a:solidFill>
-              </a:rPr>
-              <a:t>RTEÜ Bilgisayar Mühendisliği · 2026-2027 Güz</a:t>
-            </a:r>
-          </a:p>
-        </p:txBody>
-      </p:sp>
-      <p:sp>
-        <p:nvSpPr>
-          <p:cNvPr id="4" name="TextBox 3"/>
-          <p:cNvSpPr txBox="1"/>
-          <p:nvPr/>
-        </p:nvSpPr>
-        <p:spPr>
-          <a:xfrm>
-            <a:off x="10637215" y="6446520"/>
-            <a:ext cx="914400" cy="274320"/>
-          </a:xfrm>
-          <a:prstGeom prst="rect">
-            <a:avLst/>
-          </a:prstGeom>
-          <a:noFill/>
-        </p:spPr>
-        <p:txBody>
-          <a:bodyPr wrap="square" lIns="45720" rIns="45720">
-            <a:spAutoFit/>
-          </a:bodyPr>
-          <a:lstStyle/>
-          <a:p>
-            <a:pPr algn="r"/>
-            <a:r>
-              <a:rPr sz="1000" b="0">
-                <a:solidFill>
-                  <a:srgbClr val="D8F0F2"/>
-                </a:solidFill>
-              </a:rPr>
-              <a:t>37</a:t>
-            </a:r>
-          </a:p>
-        </p:txBody>
-      </p:sp>
-      <p:sp>
-        <p:nvSpPr>
-          <p:cNvPr id="5" name="TextBox 4"/>
-          <p:cNvSpPr txBox="1"/>
-          <p:nvPr/>
-        </p:nvSpPr>
-        <p:spPr>
-          <a:xfrm>
-            <a:off x="640080" y="2743200"/>
-            <a:ext cx="10911535" cy="1280160"/>
-          </a:xfrm>
-          <a:prstGeom prst="rect">
-            <a:avLst/>
-          </a:prstGeom>
-          <a:noFill/>
-        </p:spPr>
-        <p:txBody>
-          <a:bodyPr wrap="square" lIns="45720" rIns="45720">
-            <a:spAutoFit/>
-          </a:bodyPr>
-          <a:lstStyle/>
-          <a:p>
-            <a:pPr algn="l"/>
-            <a:r>
-              <a:rPr sz="4000" b="1">
-                <a:solidFill>
-                  <a:srgbClr val="FFFFFF"/>
-                </a:solidFill>
-              </a:rPr>
-              <a:t>Ek · Sık yapılan hatalar</a:t>
-            </a:r>
-          </a:p>
-        </p:txBody>
-      </p:sp>
-    </p:spTree>
-  </p:cSld>
-  <p:clrMapOvr>
-    <a:masterClrMapping/>
-  </p:clrMapOvr>
-</p:sld>
-</file>
-
-<file path=ppt/slides/slide38.xml><?xml version="1.0" encoding="utf-8"?>
-<p:sld xmlns:a="http://schemas.openxmlformats.org/drawingml/2006/main" xmlns:p="http://schemas.openxmlformats.org/presentationml/2006/main" xmlns:r="http://schemas.openxmlformats.org/officeDocument/2006/relationships">
-  <p:cSld>
-    <p:spTree>
-      <p:nvGrpSpPr>
-        <p:cNvPr id="1" name=""/>
-        <p:cNvGrpSpPr/>
-        <p:nvPr/>
-      </p:nvGrpSpPr>
-      <p:grpSpPr/>
-      <p:pic>
-        <p:nvPicPr>
-          <p:cNvPr id="2" name="Picture 1" descr="rteu_logo_kucuk.jpg"/>
-          <p:cNvPicPr>
-            <a:picLocks noChangeAspect="1"/>
-          </p:cNvPicPr>
-          <p:nvPr/>
-        </p:nvPicPr>
-        <p:blipFill>
-          <a:blip r:embed="rId2"/>
-          <a:stretch>
-            <a:fillRect/>
-          </a:stretch>
-        </p:blipFill>
-        <p:spPr>
-          <a:xfrm>
-            <a:off x="640080" y="164592"/>
-            <a:ext cx="242773" cy="329184"/>
-          </a:xfrm>
-          <a:prstGeom prst="rect">
-            <a:avLst/>
-          </a:prstGeom>
-        </p:spPr>
-      </p:pic>
-      <p:sp>
-        <p:nvSpPr>
-          <p:cNvPr id="3" name="TextBox 2"/>
-          <p:cNvSpPr txBox="1"/>
-          <p:nvPr/>
-        </p:nvSpPr>
-        <p:spPr>
-          <a:xfrm>
-            <a:off x="1051560" y="182880"/>
-            <a:ext cx="7315200" cy="320040"/>
-          </a:xfrm>
-          <a:prstGeom prst="rect">
-            <a:avLst/>
-          </a:prstGeom>
-          <a:noFill/>
-        </p:spPr>
-        <p:txBody>
-          <a:bodyPr wrap="square" lIns="45720" rIns="45720">
-            <a:spAutoFit/>
-          </a:bodyPr>
-          <a:lstStyle/>
-          <a:p>
-            <a:r>
-              <a:rPr sz="1100" b="0">
-                <a:solidFill>
-                  <a:srgbClr val="5B6770"/>
-                </a:solidFill>
-              </a:rPr>
-              <a:t>CEN429 Güvenli Programlama · Hafta 7</a:t>
-            </a:r>
-          </a:p>
-        </p:txBody>
-      </p:sp>
-      <p:sp>
-        <p:nvSpPr>
-          <p:cNvPr id="4" name="TextBox 3"/>
-          <p:cNvSpPr txBox="1"/>
-          <p:nvPr/>
-        </p:nvSpPr>
-        <p:spPr>
-          <a:xfrm>
-            <a:off x="640080" y="6446520"/>
-            <a:ext cx="7315200" cy="274320"/>
-          </a:xfrm>
-          <a:prstGeom prst="rect">
-            <a:avLst/>
-          </a:prstGeom>
-          <a:noFill/>
-        </p:spPr>
-        <p:txBody>
-          <a:bodyPr wrap="square" lIns="45720" rIns="45720">
-            <a:spAutoFit/>
-          </a:bodyPr>
-          <a:lstStyle/>
-          <a:p>
-            <a:r>
-              <a:rPr sz="1000" b="0">
-                <a:solidFill>
-                  <a:srgbClr val="5B6770"/>
-                </a:solidFill>
-              </a:rPr>
-              <a:t>RTEÜ Bilgisayar Mühendisliği · 2026-2027 Güz</a:t>
-            </a:r>
-          </a:p>
-        </p:txBody>
-      </p:sp>
-      <p:sp>
-        <p:nvSpPr>
-          <p:cNvPr id="5" name="TextBox 4"/>
-          <p:cNvSpPr txBox="1"/>
-          <p:nvPr/>
-        </p:nvSpPr>
-        <p:spPr>
-          <a:xfrm>
-            <a:off x="10637215" y="6446520"/>
-            <a:ext cx="914400" cy="274320"/>
-          </a:xfrm>
-          <a:prstGeom prst="rect">
-            <a:avLst/>
-          </a:prstGeom>
-          <a:noFill/>
-        </p:spPr>
-        <p:txBody>
-          <a:bodyPr wrap="square" lIns="45720" rIns="45720">
-            <a:spAutoFit/>
-          </a:bodyPr>
-          <a:lstStyle/>
-          <a:p>
-            <a:pPr algn="r"/>
-            <a:r>
-              <a:rPr sz="1000" b="0">
-                <a:solidFill>
-                  <a:srgbClr val="5B6770"/>
-                </a:solidFill>
-              </a:rPr>
-              <a:t>38</a:t>
-            </a:r>
-          </a:p>
-        </p:txBody>
-      </p:sp>
-      <p:sp>
-        <p:nvSpPr>
-          <p:cNvPr id="6" name="TextBox 5"/>
-          <p:cNvSpPr txBox="1"/>
-          <p:nvPr/>
-        </p:nvSpPr>
-        <p:spPr>
-          <a:xfrm>
-            <a:off x="640080" y="548640"/>
-            <a:ext cx="10911535" cy="731520"/>
-          </a:xfrm>
-          <a:prstGeom prst="rect">
-            <a:avLst/>
-          </a:prstGeom>
-          <a:noFill/>
-        </p:spPr>
-        <p:txBody>
-          <a:bodyPr wrap="square" lIns="45720" rIns="45720" anchor="ctr">
-            <a:spAutoFit/>
-          </a:bodyPr>
-          <a:lstStyle/>
-          <a:p>
-            <a:r>
-              <a:rPr sz="3000" b="1">
-                <a:solidFill>
-                  <a:srgbClr val="006D77"/>
-                </a:solidFill>
-              </a:rPr>
-              <a:t>Hata listesi</a:t>
-            </a:r>
-          </a:p>
-        </p:txBody>
-      </p:sp>
-      <p:sp>
-        <p:nvSpPr>
-          <p:cNvPr id="7" name="TextBox 6"/>
-          <p:cNvSpPr txBox="1"/>
-          <p:nvPr/>
-        </p:nvSpPr>
-        <p:spPr>
-          <a:xfrm>
-            <a:off x="640080" y="1325880"/>
-            <a:ext cx="10911535" cy="1971040"/>
-          </a:xfrm>
-          <a:prstGeom prst="rect">
-            <a:avLst/>
-          </a:prstGeom>
-          <a:noFill/>
-        </p:spPr>
-        <p:txBody>
-          <a:bodyPr wrap="square" lIns="45720" rIns="45720">
-            <a:spAutoFit/>
-          </a:bodyPr>
-          <a:lstStyle/>
-          <a:p>
-            <a:pPr>
-              <a:spcAft>
-                <a:spcPts val="300"/>
-              </a:spcAft>
-            </a:pPr>
-            <a:r>
-              <a:rPr sz="2000" b="1">
-                <a:solidFill>
-                  <a:srgbClr val="006D77"/>
-                </a:solidFill>
-              </a:rPr>
-              <a:t>• </a:t>
-            </a:r>
-            <a:r>
-              <a:rPr sz="2000" b="0">
-                <a:solidFill>
-                  <a:srgbClr val="1F2D3A"/>
-                </a:solidFill>
-              </a:rPr>
-              <a:t>Kılavuz ile kod sürümü farklı.</a:t>
-            </a:r>
-          </a:p>
-          <a:p>
-            <a:pPr>
-              <a:spcAft>
-                <a:spcPts val="300"/>
-              </a:spcAft>
-            </a:pPr>
-            <a:r>
-              <a:rPr sz="2000" b="1">
-                <a:solidFill>
-                  <a:srgbClr val="006D77"/>
-                </a:solidFill>
-              </a:rPr>
-              <a:t>• </a:t>
-            </a:r>
-            <a:r>
-              <a:rPr sz="2000" b="0">
-                <a:solidFill>
-                  <a:srgbClr val="1F2D3A"/>
-                </a:solidFill>
-              </a:rPr>
-              <a:t>Kanıtsız "yapıldı".</a:t>
-            </a:r>
-          </a:p>
-          <a:p>
-            <a:pPr>
-              <a:spcAft>
-                <a:spcPts val="300"/>
-              </a:spcAft>
-            </a:pPr>
-            <a:r>
-              <a:rPr sz="2000" b="1">
-                <a:solidFill>
-                  <a:srgbClr val="006D77"/>
-                </a:solidFill>
-              </a:rPr>
-              <a:t>• </a:t>
-            </a:r>
-            <a:r>
-              <a:rPr sz="2000" b="0">
-                <a:solidFill>
-                  <a:srgbClr val="1F2D3A"/>
-                </a:solidFill>
-              </a:rPr>
-              <a:t>Canlı demo çökmesi (yedek yok).</a:t>
-            </a:r>
-          </a:p>
-          <a:p>
-            <a:pPr>
-              <a:spcAft>
-                <a:spcPts val="300"/>
-              </a:spcAft>
-            </a:pPr>
-            <a:r>
-              <a:rPr sz="2000" b="1">
-                <a:solidFill>
-                  <a:srgbClr val="006D77"/>
-                </a:solidFill>
-              </a:rPr>
-              <a:t>• </a:t>
-            </a:r>
-            <a:r>
-              <a:rPr sz="2000" b="0">
-                <a:solidFill>
-                  <a:srgbClr val="1F2D3A"/>
-                </a:solidFill>
-              </a:rPr>
-              <a:t>Kalan risk bölümü boş.</a:t>
-            </a:r>
-          </a:p>
-          <a:p>
-            <a:pPr>
-              <a:spcAft>
-                <a:spcPts val="300"/>
-              </a:spcAft>
-            </a:pPr>
-            <a:r>
-              <a:rPr sz="2000" b="1">
-                <a:solidFill>
-                  <a:srgbClr val="006D77"/>
-                </a:solidFill>
-              </a:rPr>
-              <a:t>• </a:t>
-            </a:r>
-            <a:r>
-              <a:rPr sz="2000" b="0">
-                <a:solidFill>
-                  <a:srgbClr val="1F2D3A"/>
-                </a:solidFill>
-              </a:rPr>
-              <a:t>Depoda gerçek veri.</a:t>
-            </a:r>
-          </a:p>
-        </p:txBody>
-      </p:sp>
-    </p:spTree>
-  </p:cSld>
-  <p:clrMapOvr>
-    <a:masterClrMapping/>
-  </p:clrMapOvr>
-</p:sld>
-</file>
-
-<file path=ppt/slides/slide39.xml><?xml version="1.0" encoding="utf-8"?>
-<p:sld xmlns:a="http://schemas.openxmlformats.org/drawingml/2006/main" xmlns:p="http://schemas.openxmlformats.org/presentationml/2006/main" xmlns:r="http://schemas.openxmlformats.org/officeDocument/2006/relationships">
-  <p:cSld>
-    <p:spTree>
-      <p:nvGrpSpPr>
-        <p:cNvPr id="1" name=""/>
-        <p:cNvGrpSpPr/>
-        <p:nvPr/>
-      </p:nvGrpSpPr>
-      <p:grpSpPr/>
-      <p:pic>
-        <p:nvPicPr>
-          <p:cNvPr id="2" name="Picture 1" descr="rteu_logo_kucuk.jpg"/>
-          <p:cNvPicPr>
-            <a:picLocks noChangeAspect="1"/>
-          </p:cNvPicPr>
-          <p:nvPr/>
-        </p:nvPicPr>
-        <p:blipFill>
-          <a:blip r:embed="rId2"/>
-          <a:stretch>
-            <a:fillRect/>
-          </a:stretch>
-        </p:blipFill>
-        <p:spPr>
-          <a:xfrm>
-            <a:off x="640080" y="164592"/>
-            <a:ext cx="242773" cy="329184"/>
-          </a:xfrm>
-          <a:prstGeom prst="rect">
-            <a:avLst/>
-          </a:prstGeom>
-        </p:spPr>
-      </p:pic>
-      <p:sp>
-        <p:nvSpPr>
-          <p:cNvPr id="3" name="TextBox 2"/>
-          <p:cNvSpPr txBox="1"/>
-          <p:nvPr/>
-        </p:nvSpPr>
-        <p:spPr>
-          <a:xfrm>
-            <a:off x="1051560" y="182880"/>
-            <a:ext cx="7315200" cy="320040"/>
-          </a:xfrm>
-          <a:prstGeom prst="rect">
-            <a:avLst/>
-          </a:prstGeom>
-          <a:noFill/>
-        </p:spPr>
-        <p:txBody>
-          <a:bodyPr wrap="square" lIns="45720" rIns="45720">
-            <a:spAutoFit/>
-          </a:bodyPr>
-          <a:lstStyle/>
-          <a:p>
-            <a:r>
-              <a:rPr sz="1100" b="0">
-                <a:solidFill>
-                  <a:srgbClr val="5B6770"/>
-                </a:solidFill>
-              </a:rPr>
-              <a:t>CEN429 Güvenli Programlama · Hafta 7</a:t>
-            </a:r>
-          </a:p>
-        </p:txBody>
-      </p:sp>
-      <p:sp>
-        <p:nvSpPr>
-          <p:cNvPr id="4" name="TextBox 3"/>
-          <p:cNvSpPr txBox="1"/>
-          <p:nvPr/>
-        </p:nvSpPr>
-        <p:spPr>
-          <a:xfrm>
-            <a:off x="640080" y="6446520"/>
-            <a:ext cx="7315200" cy="274320"/>
-          </a:xfrm>
-          <a:prstGeom prst="rect">
-            <a:avLst/>
-          </a:prstGeom>
-          <a:noFill/>
-        </p:spPr>
-        <p:txBody>
-          <a:bodyPr wrap="square" lIns="45720" rIns="45720">
-            <a:spAutoFit/>
-          </a:bodyPr>
-          <a:lstStyle/>
-          <a:p>
-            <a:r>
-              <a:rPr sz="1000" b="0">
-                <a:solidFill>
-                  <a:srgbClr val="5B6770"/>
-                </a:solidFill>
-              </a:rPr>
-              <a:t>RTEÜ Bilgisayar Mühendisliği · 2026-2027 Güz</a:t>
-            </a:r>
-          </a:p>
-        </p:txBody>
-      </p:sp>
-      <p:sp>
-        <p:nvSpPr>
-          <p:cNvPr id="5" name="TextBox 4"/>
-          <p:cNvSpPr txBox="1"/>
-          <p:nvPr/>
-        </p:nvSpPr>
-        <p:spPr>
-          <a:xfrm>
-            <a:off x="10637215" y="6446520"/>
-            <a:ext cx="914400" cy="274320"/>
-          </a:xfrm>
-          <a:prstGeom prst="rect">
-            <a:avLst/>
-          </a:prstGeom>
-          <a:noFill/>
-        </p:spPr>
-        <p:txBody>
-          <a:bodyPr wrap="square" lIns="45720" rIns="45720">
-            <a:spAutoFit/>
-          </a:bodyPr>
-          <a:lstStyle/>
-          <a:p>
-            <a:pPr algn="r"/>
-            <a:r>
-              <a:rPr sz="1000" b="0">
-                <a:solidFill>
-                  <a:srgbClr val="5B6770"/>
-                </a:solidFill>
-              </a:rPr>
-              <a:t>39</a:t>
-            </a:r>
-          </a:p>
-        </p:txBody>
-      </p:sp>
-      <p:sp>
-        <p:nvSpPr>
-          <p:cNvPr id="6" name="TextBox 5"/>
-          <p:cNvSpPr txBox="1"/>
-          <p:nvPr/>
-        </p:nvSpPr>
-        <p:spPr>
-          <a:xfrm>
-            <a:off x="640080" y="548640"/>
-            <a:ext cx="10911535" cy="731520"/>
-          </a:xfrm>
-          <a:prstGeom prst="rect">
-            <a:avLst/>
-          </a:prstGeom>
-          <a:noFill/>
-        </p:spPr>
-        <p:txBody>
-          <a:bodyPr wrap="square" lIns="45720" rIns="45720" anchor="ctr">
-            <a:spAutoFit/>
-          </a:bodyPr>
-          <a:lstStyle/>
-          <a:p>
-            <a:r>
-              <a:rPr sz="3000" b="1">
-                <a:solidFill>
-                  <a:srgbClr val="006D77"/>
-                </a:solidFill>
-              </a:rPr>
-              <a:t>Son söz (RAP1)</a:t>
-            </a:r>
-          </a:p>
-        </p:txBody>
-      </p:sp>
-      <p:sp>
-        <p:nvSpPr>
-          <p:cNvPr id="7" name="Rectangle 6"/>
-          <p:cNvSpPr/>
-          <p:nvPr/>
-        </p:nvSpPr>
-        <p:spPr>
-          <a:xfrm>
-            <a:off x="640080" y="1325880"/>
-            <a:ext cx="10911535" cy="934719"/>
-          </a:xfrm>
-          <a:prstGeom prst="rect">
-            <a:avLst/>
-          </a:prstGeom>
-          <a:solidFill>
-            <a:srgbClr val="EEF7F8"/>
-          </a:solidFill>
-          <a:ln>
-            <a:solidFill>
-              <a:srgbClr val="006D77"/>
-            </a:solidFill>
-          </a:ln>
-        </p:spPr>
-        <p:style>
-          <a:lnRef idx="1">
-            <a:schemeClr val="accent1"/>
-          </a:lnRef>
-          <a:fillRef idx="3">
-            <a:schemeClr val="accent1"/>
-          </a:fillRef>
-          <a:effectRef idx="2">
-            <a:schemeClr val="accent1"/>
-          </a:effectRef>
-          <a:fontRef idx="minor">
-            <a:schemeClr val="lt1"/>
-          </a:fontRef>
-        </p:style>
-        <p:txBody>
-          <a:bodyPr rtlCol="0" anchor="ctr" wrap="square" lIns="182880"/>
-          <a:lstStyle/>
-          <a:p>
-            <a:pPr algn="l"/>
-            <a:r>
-              <a:rPr sz="2000" b="0">
-                <a:solidFill>
-                  <a:srgbClr val="1F2D3A"/>
-                </a:solidFill>
-              </a:rPr>
-              <a:t>Gösterim bir </a:t>
-            </a:r>
-            <a:r>
-              <a:rPr sz="2000" b="1">
-                <a:solidFill>
-                  <a:srgbClr val="1F2D3A"/>
-                </a:solidFill>
-              </a:rPr>
-              <a:t>kanıt</a:t>
-            </a:r>
-            <a:r>
-              <a:rPr sz="2000" b="0">
-                <a:solidFill>
-                  <a:srgbClr val="1F2D3A"/>
-                </a:solidFill>
-              </a:rPr>
-              <a:t> sunumudur: her iddianın arkasında bir belge, test ya da canlı çıktı olsun.</a:t>
-            </a:r>
-          </a:p>
-        </p:txBody>
-      </p:sp>
-      <p:sp>
-        <p:nvSpPr>
-          <p:cNvPr id="8" name="TextBox 7"/>
-          <p:cNvSpPr txBox="1"/>
-          <p:nvPr/>
-        </p:nvSpPr>
-        <p:spPr>
-          <a:xfrm>
-            <a:off x="640080" y="2370328"/>
-            <a:ext cx="10911535" cy="439928"/>
-          </a:xfrm>
-          <a:prstGeom prst="rect">
-            <a:avLst/>
-          </a:prstGeom>
-          <a:noFill/>
-        </p:spPr>
-        <p:txBody>
-          <a:bodyPr wrap="square" lIns="45720" rIns="45720">
-            <a:spAutoFit/>
-          </a:bodyPr>
-          <a:lstStyle/>
-          <a:p>
-            <a:pPr algn="l"/>
-            <a:r>
-              <a:rPr sz="2000" b="0">
-                <a:solidFill>
-                  <a:srgbClr val="1F2D3A"/>
-                </a:solidFill>
-              </a:rPr>
-              <a:t>Vize geri bildirimleri finalde </a:t>
-            </a:r>
-            <a:r>
-              <a:rPr sz="2000" b="1">
-                <a:solidFill>
-                  <a:srgbClr val="1F2D3A"/>
-                </a:solidFill>
-              </a:rPr>
-              <a:t>bulgu–aksiyon</a:t>
-            </a:r>
-            <a:r>
-              <a:rPr sz="2000" b="0">
-                <a:solidFill>
-                  <a:srgbClr val="1F2D3A"/>
-                </a:solidFill>
-              </a:rPr>
-              <a:t> listesine dönüşecek.</a:t>
+              <a:t>Kanıt = kılavuzun ilgili bölümü + kod + test çıktısı; her tehdide karşılık en az bir önlem gösterin.</a:t>
             </a:r>
           </a:p>
         </p:txBody>
@@ -12751,8 +6933,8 @@
         </p:blipFill>
         <p:spPr>
           <a:xfrm>
-            <a:off x="2046645" y="1325880"/>
-            <a:ext cx="8098404" cy="3210484"/>
+            <a:off x="640080" y="1325880"/>
+            <a:ext cx="10911535" cy="2397791"/>
           </a:xfrm>
           <a:prstGeom prst="rect">
             <a:avLst/>
@@ -13352,8 +7534,8 @@
         </p:blipFill>
         <p:spPr>
           <a:xfrm>
-            <a:off x="2046645" y="1325880"/>
-            <a:ext cx="8098404" cy="3778947"/>
+            <a:off x="1907058" y="1325880"/>
+            <a:ext cx="8377579" cy="4828032"/>
           </a:xfrm>
           <a:prstGeom prst="rect">
             <a:avLst/>
@@ -13554,8 +7736,8 @@
                 <a:tableStyleId>{5C22544A-7EE6-4342-B048-85BDC9FD1C3A}</a:tableStyleId>
               </a:tblPr>
               <a:tblGrid>
-                <a:gridCol w="1103413"/>
-                <a:gridCol w="9808121"/>
+                <a:gridCol w="1002079"/>
+                <a:gridCol w="9909455"/>
               </a:tblGrid>
               <a:tr h="404426">
                 <a:tc>
@@ -13634,7 +7816,7 @@
                             <a:srgbClr val="1F2D3A"/>
                           </a:solidFill>
                         </a:rPr>
-                        <a:t>Depo + plan · S2 · S3 arayüz tablosu · S4 STRIDE + saldırı ağacı · S5 taslak</a:t>
+                        <a:t>Depo + plan · S2 · S3 arayüz tablosu · S4 STRIDE + saldırı ağacı · S5 taslak (C/I/I+)</a:t>
                       </a:r>
                     </a:p>
                   </a:txBody>
@@ -14034,7 +8216,7 @@
           <a:lstStyle/>
           <a:p>
             <a:r>
-              <a:rPr sz="3000" b="1">
+              <a:rPr sz="2600" b="1">
                 <a:solidFill>
                   <a:srgbClr val="006D77"/>
                 </a:solidFill>
@@ -14053,7 +8235,7 @@
         <p:spPr>
           <a:xfrm>
             <a:off x="640080" y="1325880"/>
-            <a:ext cx="10911535" cy="1971040"/>
+            <a:ext cx="10911535" cy="2103120"/>
           </a:xfrm>
           <a:prstGeom prst="rect">
             <a:avLst/>
@@ -14072,7 +8254,7 @@
               </a:spcAft>
             </a:pPr>
             <a:r>
-              <a:rPr sz="2000" b="1">
+              <a:rPr sz="1800" b="1">
                 <a:solidFill>
                   <a:srgbClr val="006D77"/>
                 </a:solidFill>
@@ -14080,7 +8262,7 @@
               <a:t>1. </a:t>
             </a:r>
             <a:r>
-              <a:rPr sz="2000" b="1">
+              <a:rPr sz="1800" b="1">
                 <a:solidFill>
                   <a:srgbClr val="1F2D3A"/>
                 </a:solidFill>
@@ -14088,12 +8270,12 @@
               <a:t>Ürün ve mimari</a:t>
             </a:r>
             <a:r>
-              <a:rPr sz="2000" b="0">
+              <a:rPr sz="1800" b="0">
                 <a:solidFill>
                   <a:srgbClr val="1F2D3A"/>
                 </a:solidFill>
               </a:rPr>
-              <a:t> (S2–S3): tek şema, güven sınırları</a:t>
+              <a:t> (S2–S3, ~2 dk): tek şema, güven sınırları</a:t>
             </a:r>
           </a:p>
           <a:p>
@@ -14103,7 +8285,7 @@
               </a:spcAft>
             </a:pPr>
             <a:r>
-              <a:rPr sz="2000" b="1">
+              <a:rPr sz="1800" b="1">
                 <a:solidFill>
                   <a:srgbClr val="006D77"/>
                 </a:solidFill>
@@ -14111,7 +8293,7 @@
               <a:t>2. </a:t>
             </a:r>
             <a:r>
-              <a:rPr sz="2000" b="1">
+              <a:rPr sz="1800" b="1">
                 <a:solidFill>
                   <a:srgbClr val="1F2D3A"/>
                 </a:solidFill>
@@ -14119,12 +8301,12 @@
               <a:t>Tehditler ve varlıklar</a:t>
             </a:r>
             <a:r>
-              <a:rPr sz="2000" b="0">
+              <a:rPr sz="1800" b="0">
                 <a:solidFill>
                   <a:srgbClr val="1F2D3A"/>
                 </a:solidFill>
               </a:rPr>
-              <a:t> (S4–S5): en kritik üç tehdit</a:t>
+              <a:t> (S4–S5): en kritik üç tehdit, her birine bir önlem</a:t>
             </a:r>
           </a:p>
           <a:p>
@@ -14134,7 +8316,7 @@
               </a:spcAft>
             </a:pPr>
             <a:r>
-              <a:rPr sz="2000" b="1">
+              <a:rPr sz="1800" b="1">
                 <a:solidFill>
                   <a:srgbClr val="006D77"/>
                 </a:solidFill>
@@ -14142,7 +8324,7 @@
               <a:t>3. </a:t>
             </a:r>
             <a:r>
-              <a:rPr sz="2000" b="1">
+              <a:rPr sz="1800" b="1">
                 <a:solidFill>
                   <a:srgbClr val="1F2D3A"/>
                 </a:solidFill>
@@ -14150,7 +8332,7 @@
               <a:t>Canlı gösterim:</a:t>
             </a:r>
             <a:r>
-              <a:rPr sz="2000" b="0">
+              <a:rPr sz="1800" b="0">
                 <a:solidFill>
                   <a:srgbClr val="1F2D3A"/>
                 </a:solidFill>
@@ -14158,12 +8340,20 @@
               <a:t> en az bir önlem </a:t>
             </a:r>
             <a:r>
-              <a:rPr sz="2000" b="1">
+              <a:rPr sz="1800" b="1">
                 <a:solidFill>
                   <a:srgbClr val="1F2D3A"/>
                 </a:solidFill>
               </a:rPr>
               <a:t>çalışırken</a:t>
+            </a:r>
+            <a:r>
+              <a:rPr sz="1800" b="0">
+                <a:solidFill>
+                  <a:srgbClr val="1F2D3A"/>
+                </a:solidFill>
+              </a:rPr>
+              <a:t> (ör. şifreli veri, imza doğrulama, RASP tetiklenmesi) — yedek video + hazır komutlarla</a:t>
             </a:r>
           </a:p>
           <a:p>
@@ -14173,7 +8363,7 @@
               </a:spcAft>
             </a:pPr>
             <a:r>
-              <a:rPr sz="2000" b="1">
+              <a:rPr sz="1800" b="1">
                 <a:solidFill>
                   <a:srgbClr val="006D77"/>
                 </a:solidFill>
@@ -14181,7 +8371,7 @@
               <a:t>4. </a:t>
             </a:r>
             <a:r>
-              <a:rPr sz="2000" b="1">
+              <a:rPr sz="1800" b="1">
                 <a:solidFill>
                   <a:srgbClr val="1F2D3A"/>
                 </a:solidFill>
@@ -14189,7 +8379,7 @@
               <a:t>Kanıt:</a:t>
             </a:r>
             <a:r>
-              <a:rPr sz="2000" b="0">
+              <a:rPr sz="1800" b="0">
                 <a:solidFill>
                   <a:srgbClr val="1F2D3A"/>
                 </a:solidFill>
@@ -14204,7 +8394,7 @@
               </a:spcAft>
             </a:pPr>
             <a:r>
-              <a:rPr sz="2000" b="1">
+              <a:rPr sz="1800" b="1">
                 <a:solidFill>
                   <a:srgbClr val="006D77"/>
                 </a:solidFill>
@@ -14212,7 +8402,7 @@
               <a:t>5. </a:t>
             </a:r>
             <a:r>
-              <a:rPr sz="2000" b="1">
+              <a:rPr sz="1800" b="1">
                 <a:solidFill>
                   <a:srgbClr val="1F2D3A"/>
                 </a:solidFill>
@@ -14220,12 +8410,12 @@
               <a:t>Kalan risk ve plan:</a:t>
             </a:r>
             <a:r>
-              <a:rPr sz="2000" b="0">
+              <a:rPr sz="1800" b="0">
                 <a:solidFill>
                   <a:srgbClr val="1F2D3A"/>
                 </a:solidFill>
               </a:rPr>
-              <a:t> finale kadar ne yapılacak?</a:t>
+              <a:t> finale kadar ne yapılacak? (dürüst analiz puan getirir)</a:t>
             </a:r>
           </a:p>
         </p:txBody>
@@ -14238,8 +8428,8 @@
         </p:nvSpPr>
         <p:spPr>
           <a:xfrm>
-            <a:off x="640080" y="3406648"/>
-            <a:ext cx="10911535" cy="439928"/>
+            <a:off x="640080" y="3538728"/>
+            <a:ext cx="10911535" cy="406908"/>
           </a:xfrm>
           <a:prstGeom prst="rect">
             <a:avLst/>
@@ -14254,7 +8444,7 @@
           <a:p>
             <a:pPr algn="l"/>
             <a:r>
-              <a:rPr sz="2000" b="0">
+              <a:rPr sz="1800" b="0">
                 <a:solidFill>
                   <a:srgbClr val="1F2D3A"/>
                 </a:solidFill>
@@ -14262,7 +8452,7 @@
               <a:t>Her önlem için: </a:t>
             </a:r>
             <a:r>
-              <a:rPr sz="2000" b="1">
+              <a:rPr sz="1800" b="1">
                 <a:solidFill>
                   <a:srgbClr val="1F2D3A"/>
                 </a:solidFill>
@@ -14463,8 +8653,8 @@
         </p:blipFill>
         <p:spPr>
           <a:xfrm>
-            <a:off x="2046645" y="1325880"/>
-            <a:ext cx="8098404" cy="3864472"/>
+            <a:off x="640080" y="1325880"/>
+            <a:ext cx="10911535" cy="2216477"/>
           </a:xfrm>
           <a:prstGeom prst="rect">
             <a:avLst/>

--- a/docs/week-7/cen429-week-7-sunum.tr.pptx
+++ b/docs/week-7/cen429-week-7-sunum.tr.pptx
@@ -20,6 +20,7 @@
     <p:sldId id="268" r:id="rId20"/>
     <p:sldId id="269" r:id="rId21"/>
     <p:sldId id="270" r:id="rId22"/>
+    <p:sldId id="271" r:id="rId23"/>
   </p:sldIdLst>
   <p:sldSz cx="12191695" cy="6858000" type="screen4x3"/>
   <p:notesSz cx="6858000" cy="9144000"/>
@@ -3879,12 +3880,12 @@
           <a:lstStyle/>
           <a:p>
             <a:r>
-              <a:rPr sz="2600" b="1">
+              <a:rPr sz="3000" b="1">
                 <a:solidFill>
                   <a:srgbClr val="006D77"/>
                 </a:solidFill>
               </a:rPr>
-              <a:t>Örnek sorular</a:t>
+              <a:t>Gösterim kontrol listesi</a:t>
             </a:r>
           </a:p>
         </p:txBody>
@@ -3898,7 +3899,41 @@
         <p:spPr>
           <a:xfrm>
             <a:off x="640080" y="1325880"/>
-            <a:ext cx="10911535" cy="3177540"/>
+            <a:ext cx="10911535" cy="439928"/>
+          </a:xfrm>
+          <a:prstGeom prst="rect">
+            <a:avLst/>
+          </a:prstGeom>
+          <a:noFill/>
+        </p:spPr>
+        <p:txBody>
+          <a:bodyPr wrap="square" lIns="45720" rIns="45720">
+            <a:spAutoFit/>
+          </a:bodyPr>
+          <a:lstStyle/>
+          <a:p>
+            <a:pPr algn="l"/>
+            <a:r>
+              <a:rPr sz="2000" b="0">
+                <a:solidFill>
+                  <a:srgbClr val="1F2D3A"/>
+                </a:solidFill>
+              </a:rPr>
+              <a:t>Gösterimde sırayla neyi açıp göstereceğiniz:</a:t>
+            </a:r>
+          </a:p>
+        </p:txBody>
+      </p:sp>
+      <p:sp>
+        <p:nvSpPr>
+          <p:cNvPr id="8" name="TextBox 7"/>
+          <p:cNvSpPr txBox="1"/>
+          <p:nvPr/>
+        </p:nvSpPr>
+        <p:spPr>
+          <a:xfrm>
+            <a:off x="640080" y="1875536"/>
+            <a:ext cx="10911535" cy="3007360"/>
           </a:xfrm>
           <a:prstGeom prst="rect">
             <a:avLst/>
@@ -3917,20 +3952,70 @@
               </a:spcAft>
             </a:pPr>
             <a:r>
-              <a:rPr sz="1800" b="1">
+              <a:rPr sz="2000" b="1">
                 <a:solidFill>
                   <a:srgbClr val="006D77"/>
                 </a:solidFill>
               </a:rPr>
-              <a:t>• </a:t>
-            </a:r>
-            <a:r>
-              <a:rPr sz="1800" b="0">
+              <a:t>1. </a:t>
+            </a:r>
+            <a:r>
+              <a:rPr sz="2000" b="0">
                 <a:solidFill>
                   <a:srgbClr val="1F2D3A"/>
                 </a:solidFill>
               </a:rPr>
-              <a:t>Güven sınırını geçen en riskli akış hangisi?</a:t>
+              <a:t>Yerel sitenin </a:t>
+            </a:r>
+            <a:r>
+              <a:rPr sz="2000" b="1">
+                <a:solidFill>
+                  <a:srgbClr val="1F2D3A"/>
+                </a:solidFill>
+              </a:rPr>
+              <a:t>ana sayfası</a:t>
+            </a:r>
+            <a:r>
+              <a:rPr sz="2000" b="0">
+                <a:solidFill>
+                  <a:srgbClr val="1F2D3A"/>
+                </a:solidFill>
+              </a:rPr>
+              <a:t> (</a:t>
+            </a:r>
+            <a:r>
+              <a:rPr sz="2000" b="0">
+                <a:solidFill>
+                  <a:srgbClr val="A1123F"/>
+                </a:solidFill>
+                <a:latin typeface="Consolas"/>
+              </a:rPr>
+              <a:t>9-open-site-...</a:t>
+            </a:r>
+            <a:r>
+              <a:rPr sz="2000" b="0">
+                <a:solidFill>
+                  <a:srgbClr val="1F2D3A"/>
+                </a:solidFill>
+              </a:rPr>
+              <a:t>, </a:t>
+            </a:r>
+            <a:r>
+              <a:rPr sz="2000" b="0">
+                <a:solidFill>
+                  <a:srgbClr val="A1123F"/>
+                </a:solidFill>
+                <a:latin typeface="Consolas"/>
+              </a:rPr>
+              <a:t>http://localhost</a:t>
+            </a:r>
+            <a:r>
+              <a:rPr sz="2000" b="0">
+                <a:solidFill>
+                  <a:srgbClr val="1F2D3A"/>
+                </a:solidFill>
+              </a:rPr>
+              <a:t> adresinde).</a:t>
             </a:r>
           </a:p>
           <a:p>
@@ -3940,20 +4025,28 @@
               </a:spcAft>
             </a:pPr>
             <a:r>
-              <a:rPr sz="1800" b="1">
+              <a:rPr sz="2000" b="1">
                 <a:solidFill>
                   <a:srgbClr val="006D77"/>
                 </a:solidFill>
               </a:rPr>
-              <a:t>• </a:t>
-            </a:r>
-            <a:r>
-              <a:rPr sz="1800" b="0">
+              <a:t>2. </a:t>
+            </a:r>
+            <a:r>
+              <a:rPr sz="2000" b="1">
                 <a:solidFill>
                   <a:srgbClr val="1F2D3A"/>
                 </a:solidFill>
               </a:rPr>
-              <a:t>Bu varlık bellekte ne kadar açık kalıyor, nerede siliniyor?</a:t>
+              <a:t>Her rapor sayfası:</a:t>
+            </a:r>
+            <a:r>
+              <a:rPr sz="2000" b="0">
+                <a:solidFill>
+                  <a:srgbClr val="1F2D3A"/>
+                </a:solidFill>
+              </a:rPr>
+              <a:t> testler, kod kapsamı, dokümantasyon kapsamı (Windows ve Linux).</a:t>
             </a:r>
           </a:p>
           <a:p>
@@ -3963,20 +4056,20 @@
               </a:spcAft>
             </a:pPr>
             <a:r>
-              <a:rPr sz="1800" b="1">
+              <a:rPr sz="2000" b="1">
                 <a:solidFill>
                   <a:srgbClr val="006D77"/>
                 </a:solidFill>
               </a:rPr>
-              <a:t>• </a:t>
-            </a:r>
-            <a:r>
-              <a:rPr sz="1800" b="0">
+              <a:t>3. </a:t>
+            </a:r>
+            <a:r>
+              <a:rPr sz="2000" b="1">
                 <a:solidFill>
                   <a:srgbClr val="1F2D3A"/>
                 </a:solidFill>
               </a:rPr>
-              <a:t>Anahtar nereden geliyor, nerede duruyor, ne zaman siliniyor? Nonce tekrar edebilir mi?</a:t>
+              <a:t>API belgeleri.</a:t>
             </a:r>
           </a:p>
           <a:p>
@@ -3986,20 +4079,28 @@
               </a:spcAft>
             </a:pPr>
             <a:r>
-              <a:rPr sz="1800" b="1">
+              <a:rPr sz="2000" b="1">
                 <a:solidFill>
                   <a:srgbClr val="006D77"/>
                 </a:solidFill>
               </a:rPr>
-              <a:t>• </a:t>
-            </a:r>
-            <a:r>
-              <a:rPr sz="1800" b="0">
+              <a:t>4. </a:t>
+            </a:r>
+            <a:r>
+              <a:rPr sz="2000" b="1">
                 <a:solidFill>
                   <a:srgbClr val="1F2D3A"/>
                 </a:solidFill>
               </a:rPr>
-              <a:t>Hangi derleyici koruması kapalı, neden?</a:t>
+              <a:t>`release/` klasörünün</a:t>
+            </a:r>
+            <a:r>
+              <a:rPr sz="2000" b="0">
+                <a:solidFill>
+                  <a:srgbClr val="1F2D3A"/>
+                </a:solidFill>
+              </a:rPr>
+              <a:t> içeriği.</a:t>
             </a:r>
           </a:p>
           <a:p>
@@ -4009,20 +4110,28 @@
               </a:spcAft>
             </a:pPr>
             <a:r>
-              <a:rPr sz="1800" b="1">
+              <a:rPr sz="2000" b="1">
                 <a:solidFill>
                   <a:srgbClr val="006D77"/>
                 </a:solidFill>
               </a:rPr>
-              <a:t>• </a:t>
-            </a:r>
-            <a:r>
-              <a:rPr sz="1800" b="0">
+              <a:t>5. </a:t>
+            </a:r>
+            <a:r>
+              <a:rPr sz="2000" b="0">
                 <a:solidFill>
                   <a:srgbClr val="1F2D3A"/>
                 </a:solidFill>
               </a:rPr>
-              <a:t>RASP denetimi başarısız olunca ne oluyor?</a:t>
+              <a:t>Uygulamayı </a:t>
+            </a:r>
+            <a:r>
+              <a:rPr sz="2000" b="1">
+                <a:solidFill>
+                  <a:srgbClr val="1F2D3A"/>
+                </a:solidFill>
+              </a:rPr>
+              <a:t>release arşivinden çalıştırma.</a:t>
             </a:r>
           </a:p>
           <a:p>
@@ -4032,89 +4141,36 @@
               </a:spcAft>
             </a:pPr>
             <a:r>
-              <a:rPr sz="1800" b="1">
+              <a:rPr sz="2000" b="1">
                 <a:solidFill>
                   <a:srgbClr val="006D77"/>
                 </a:solidFill>
               </a:rPr>
-              <a:t>• </a:t>
-            </a:r>
-            <a:r>
-              <a:rPr sz="1800" b="0">
+              <a:t>6. </a:t>
+            </a:r>
+            <a:r>
+              <a:rPr sz="2000" b="0">
                 <a:solidFill>
                   <a:srgbClr val="1F2D3A"/>
                 </a:solidFill>
               </a:rPr>
-              <a:t>SBOM'da zafiyetli bileşen var mı? Etkileniyor musunuz?</a:t>
-            </a:r>
-          </a:p>
-          <a:p>
-            <a:pPr>
-              <a:spcAft>
-                <a:spcPts val="300"/>
-              </a:spcAft>
-            </a:pPr>
-            <a:r>
-              <a:rPr sz="1800" b="1">
-                <a:solidFill>
-                  <a:srgbClr val="006D77"/>
-                </a:solidFill>
-              </a:rPr>
-              <a:t>• </a:t>
-            </a:r>
-            <a:r>
-              <a:rPr sz="1800" b="0">
+              <a:t>Özel deponuzun </a:t>
+            </a:r>
+            <a:r>
+              <a:rPr sz="2000" b="1">
                 <a:solidFill>
                   <a:srgbClr val="1F2D3A"/>
                 </a:solidFill>
               </a:rPr>
-              <a:t>En kritik üç varlığınız, C/I/I+ etiketleri ve yaşam döngüsü nedir?</a:t>
-            </a:r>
-          </a:p>
-          <a:p>
-            <a:pPr>
-              <a:spcAft>
-                <a:spcPts val="300"/>
-              </a:spcAft>
-            </a:pPr>
-            <a:r>
-              <a:rPr sz="1800" b="1">
-                <a:solidFill>
-                  <a:srgbClr val="006D77"/>
-                </a:solidFill>
-              </a:rPr>
-              <a:t>• </a:t>
-            </a:r>
-            <a:r>
-              <a:rPr sz="1800" b="0">
+              <a:t>GitHub Release sayfası</a:t>
+            </a:r>
+            <a:r>
+              <a:rPr sz="2000" b="0">
                 <a:solidFill>
                   <a:srgbClr val="1F2D3A"/>
                 </a:solidFill>
               </a:rPr>
-              <a:t>Bir tehdide karşı hangi önlem var, nasıl doğrulandı? (tehdit → önlem → kanıt)</a:t>
-            </a:r>
-          </a:p>
-          <a:p>
-            <a:pPr>
-              <a:spcAft>
-                <a:spcPts val="300"/>
-              </a:spcAft>
-            </a:pPr>
-            <a:r>
-              <a:rPr sz="1800" b="1">
-                <a:solidFill>
-                  <a:srgbClr val="006D77"/>
-                </a:solidFill>
-              </a:rPr>
-              <a:t>• </a:t>
-            </a:r>
-            <a:r>
-              <a:rPr sz="1800" b="0">
-                <a:solidFill>
-                  <a:srgbClr val="1F2D3A"/>
-                </a:solidFill>
-              </a:rPr>
-              <a:t>Kalan riskiniz ne, neden kabul edilebilir? (dürüst ve gerekçeli yanıtlayın)</a:t>
+              <a:t> (ders sorumlusu collaborator olarak ekli).</a:t>
             </a:r>
           </a:p>
         </p:txBody>
@@ -4257,6 +4313,411 @@
                 </a:solidFill>
               </a:rPr>
               <a:t>11</a:t>
+            </a:r>
+          </a:p>
+        </p:txBody>
+      </p:sp>
+      <p:sp>
+        <p:nvSpPr>
+          <p:cNvPr id="6" name="TextBox 5"/>
+          <p:cNvSpPr txBox="1"/>
+          <p:nvPr/>
+        </p:nvSpPr>
+        <p:spPr>
+          <a:xfrm>
+            <a:off x="640080" y="548640"/>
+            <a:ext cx="10911535" cy="731520"/>
+          </a:xfrm>
+          <a:prstGeom prst="rect">
+            <a:avLst/>
+          </a:prstGeom>
+          <a:noFill/>
+        </p:spPr>
+        <p:txBody>
+          <a:bodyPr wrap="square" lIns="45720" rIns="45720" anchor="ctr">
+            <a:spAutoFit/>
+          </a:bodyPr>
+          <a:lstStyle/>
+          <a:p>
+            <a:r>
+              <a:rPr sz="2600" b="1">
+                <a:solidFill>
+                  <a:srgbClr val="006D77"/>
+                </a:solidFill>
+              </a:rPr>
+              <a:t>Örnek sorular</a:t>
+            </a:r>
+          </a:p>
+        </p:txBody>
+      </p:sp>
+      <p:sp>
+        <p:nvSpPr>
+          <p:cNvPr id="7" name="TextBox 6"/>
+          <p:cNvSpPr txBox="1"/>
+          <p:nvPr/>
+        </p:nvSpPr>
+        <p:spPr>
+          <a:xfrm>
+            <a:off x="640080" y="1325880"/>
+            <a:ext cx="10911535" cy="3177540"/>
+          </a:xfrm>
+          <a:prstGeom prst="rect">
+            <a:avLst/>
+          </a:prstGeom>
+          <a:noFill/>
+        </p:spPr>
+        <p:txBody>
+          <a:bodyPr wrap="square" lIns="45720" rIns="45720">
+            <a:spAutoFit/>
+          </a:bodyPr>
+          <a:lstStyle/>
+          <a:p>
+            <a:pPr>
+              <a:spcAft>
+                <a:spcPts val="300"/>
+              </a:spcAft>
+            </a:pPr>
+            <a:r>
+              <a:rPr sz="1800" b="1">
+                <a:solidFill>
+                  <a:srgbClr val="006D77"/>
+                </a:solidFill>
+              </a:rPr>
+              <a:t>• </a:t>
+            </a:r>
+            <a:r>
+              <a:rPr sz="1800" b="0">
+                <a:solidFill>
+                  <a:srgbClr val="1F2D3A"/>
+                </a:solidFill>
+              </a:rPr>
+              <a:t>Güven sınırını geçen en riskli akış hangisi?</a:t>
+            </a:r>
+          </a:p>
+          <a:p>
+            <a:pPr>
+              <a:spcAft>
+                <a:spcPts val="300"/>
+              </a:spcAft>
+            </a:pPr>
+            <a:r>
+              <a:rPr sz="1800" b="1">
+                <a:solidFill>
+                  <a:srgbClr val="006D77"/>
+                </a:solidFill>
+              </a:rPr>
+              <a:t>• </a:t>
+            </a:r>
+            <a:r>
+              <a:rPr sz="1800" b="0">
+                <a:solidFill>
+                  <a:srgbClr val="1F2D3A"/>
+                </a:solidFill>
+              </a:rPr>
+              <a:t>Bu varlık bellekte ne kadar açık kalıyor, nerede siliniyor?</a:t>
+            </a:r>
+          </a:p>
+          <a:p>
+            <a:pPr>
+              <a:spcAft>
+                <a:spcPts val="300"/>
+              </a:spcAft>
+            </a:pPr>
+            <a:r>
+              <a:rPr sz="1800" b="1">
+                <a:solidFill>
+                  <a:srgbClr val="006D77"/>
+                </a:solidFill>
+              </a:rPr>
+              <a:t>• </a:t>
+            </a:r>
+            <a:r>
+              <a:rPr sz="1800" b="0">
+                <a:solidFill>
+                  <a:srgbClr val="1F2D3A"/>
+                </a:solidFill>
+              </a:rPr>
+              <a:t>Anahtar nereden geliyor, nerede duruyor, ne zaman siliniyor? Nonce tekrar edebilir mi?</a:t>
+            </a:r>
+          </a:p>
+          <a:p>
+            <a:pPr>
+              <a:spcAft>
+                <a:spcPts val="300"/>
+              </a:spcAft>
+            </a:pPr>
+            <a:r>
+              <a:rPr sz="1800" b="1">
+                <a:solidFill>
+                  <a:srgbClr val="006D77"/>
+                </a:solidFill>
+              </a:rPr>
+              <a:t>• </a:t>
+            </a:r>
+            <a:r>
+              <a:rPr sz="1800" b="0">
+                <a:solidFill>
+                  <a:srgbClr val="1F2D3A"/>
+                </a:solidFill>
+              </a:rPr>
+              <a:t>Hangi derleyici koruması kapalı, neden?</a:t>
+            </a:r>
+          </a:p>
+          <a:p>
+            <a:pPr>
+              <a:spcAft>
+                <a:spcPts val="300"/>
+              </a:spcAft>
+            </a:pPr>
+            <a:r>
+              <a:rPr sz="1800" b="1">
+                <a:solidFill>
+                  <a:srgbClr val="006D77"/>
+                </a:solidFill>
+              </a:rPr>
+              <a:t>• </a:t>
+            </a:r>
+            <a:r>
+              <a:rPr sz="1800" b="0">
+                <a:solidFill>
+                  <a:srgbClr val="1F2D3A"/>
+                </a:solidFill>
+              </a:rPr>
+              <a:t>RASP denetimi başarısız olunca ne oluyor?</a:t>
+            </a:r>
+          </a:p>
+          <a:p>
+            <a:pPr>
+              <a:spcAft>
+                <a:spcPts val="300"/>
+              </a:spcAft>
+            </a:pPr>
+            <a:r>
+              <a:rPr sz="1800" b="1">
+                <a:solidFill>
+                  <a:srgbClr val="006D77"/>
+                </a:solidFill>
+              </a:rPr>
+              <a:t>• </a:t>
+            </a:r>
+            <a:r>
+              <a:rPr sz="1800" b="0">
+                <a:solidFill>
+                  <a:srgbClr val="1F2D3A"/>
+                </a:solidFill>
+              </a:rPr>
+              <a:t>SBOM'da zafiyetli bileşen var mı? Etkileniyor musunuz?</a:t>
+            </a:r>
+          </a:p>
+          <a:p>
+            <a:pPr>
+              <a:spcAft>
+                <a:spcPts val="300"/>
+              </a:spcAft>
+            </a:pPr>
+            <a:r>
+              <a:rPr sz="1800" b="1">
+                <a:solidFill>
+                  <a:srgbClr val="006D77"/>
+                </a:solidFill>
+              </a:rPr>
+              <a:t>• </a:t>
+            </a:r>
+            <a:r>
+              <a:rPr sz="1800" b="0">
+                <a:solidFill>
+                  <a:srgbClr val="1F2D3A"/>
+                </a:solidFill>
+              </a:rPr>
+              <a:t>En kritik üç varlığınız, C/I/I+ etiketleri ve yaşam döngüsü nedir?</a:t>
+            </a:r>
+          </a:p>
+          <a:p>
+            <a:pPr>
+              <a:spcAft>
+                <a:spcPts val="300"/>
+              </a:spcAft>
+            </a:pPr>
+            <a:r>
+              <a:rPr sz="1800" b="1">
+                <a:solidFill>
+                  <a:srgbClr val="006D77"/>
+                </a:solidFill>
+              </a:rPr>
+              <a:t>• </a:t>
+            </a:r>
+            <a:r>
+              <a:rPr sz="1800" b="0">
+                <a:solidFill>
+                  <a:srgbClr val="1F2D3A"/>
+                </a:solidFill>
+              </a:rPr>
+              <a:t>Bir tehdide karşı hangi önlem var, nasıl doğrulandı? (tehdit → önlem → kanıt)</a:t>
+            </a:r>
+          </a:p>
+          <a:p>
+            <a:pPr>
+              <a:spcAft>
+                <a:spcPts val="300"/>
+              </a:spcAft>
+            </a:pPr>
+            <a:r>
+              <a:rPr sz="1800" b="1">
+                <a:solidFill>
+                  <a:srgbClr val="006D77"/>
+                </a:solidFill>
+              </a:rPr>
+              <a:t>• </a:t>
+            </a:r>
+            <a:r>
+              <a:rPr sz="1800" b="0">
+                <a:solidFill>
+                  <a:srgbClr val="1F2D3A"/>
+                </a:solidFill>
+              </a:rPr>
+              <a:t>Kalan riskiniz ne, neden kabul edilebilir? (dürüst ve gerekçeli yanıtlayın)</a:t>
+            </a:r>
+          </a:p>
+        </p:txBody>
+      </p:sp>
+    </p:spTree>
+  </p:cSld>
+  <p:clrMapOvr>
+    <a:masterClrMapping/>
+  </p:clrMapOvr>
+</p:sld>
+</file>
+
+<file path=ppt/slides/slide12.xml><?xml version="1.0" encoding="utf-8"?>
+<p:sld xmlns:a="http://schemas.openxmlformats.org/drawingml/2006/main" xmlns:p="http://schemas.openxmlformats.org/presentationml/2006/main" xmlns:r="http://schemas.openxmlformats.org/officeDocument/2006/relationships">
+  <p:cSld>
+    <p:spTree>
+      <p:nvGrpSpPr>
+        <p:cNvPr id="1" name=""/>
+        <p:cNvGrpSpPr/>
+        <p:nvPr/>
+      </p:nvGrpSpPr>
+      <p:grpSpPr/>
+      <p:pic>
+        <p:nvPicPr>
+          <p:cNvPr id="2" name="Picture 1" descr="rteu_logo_kucuk.jpg"/>
+          <p:cNvPicPr>
+            <a:picLocks noChangeAspect="1"/>
+          </p:cNvPicPr>
+          <p:nvPr/>
+        </p:nvPicPr>
+        <p:blipFill>
+          <a:blip r:embed="rId2"/>
+          <a:stretch>
+            <a:fillRect/>
+          </a:stretch>
+        </p:blipFill>
+        <p:spPr>
+          <a:xfrm>
+            <a:off x="640080" y="164592"/>
+            <a:ext cx="242773" cy="329184"/>
+          </a:xfrm>
+          <a:prstGeom prst="rect">
+            <a:avLst/>
+          </a:prstGeom>
+        </p:spPr>
+      </p:pic>
+      <p:sp>
+        <p:nvSpPr>
+          <p:cNvPr id="3" name="TextBox 2"/>
+          <p:cNvSpPr txBox="1"/>
+          <p:nvPr/>
+        </p:nvSpPr>
+        <p:spPr>
+          <a:xfrm>
+            <a:off x="1051560" y="182880"/>
+            <a:ext cx="7315200" cy="320040"/>
+          </a:xfrm>
+          <a:prstGeom prst="rect">
+            <a:avLst/>
+          </a:prstGeom>
+          <a:noFill/>
+        </p:spPr>
+        <p:txBody>
+          <a:bodyPr wrap="square" lIns="45720" rIns="45720">
+            <a:spAutoFit/>
+          </a:bodyPr>
+          <a:lstStyle/>
+          <a:p>
+            <a:r>
+              <a:rPr sz="1100" b="0">
+                <a:solidFill>
+                  <a:srgbClr val="5B6770"/>
+                </a:solidFill>
+              </a:rPr>
+              <a:t>CEN429 Güvenli Programlama · Hafta 7</a:t>
+            </a:r>
+          </a:p>
+        </p:txBody>
+      </p:sp>
+      <p:sp>
+        <p:nvSpPr>
+          <p:cNvPr id="4" name="TextBox 3"/>
+          <p:cNvSpPr txBox="1"/>
+          <p:nvPr/>
+        </p:nvSpPr>
+        <p:spPr>
+          <a:xfrm>
+            <a:off x="640080" y="6446520"/>
+            <a:ext cx="7315200" cy="274320"/>
+          </a:xfrm>
+          <a:prstGeom prst="rect">
+            <a:avLst/>
+          </a:prstGeom>
+          <a:noFill/>
+        </p:spPr>
+        <p:txBody>
+          <a:bodyPr wrap="square" lIns="45720" rIns="45720">
+            <a:spAutoFit/>
+          </a:bodyPr>
+          <a:lstStyle/>
+          <a:p>
+            <a:r>
+              <a:rPr sz="1000" b="0">
+                <a:solidFill>
+                  <a:srgbClr val="5B6770"/>
+                </a:solidFill>
+              </a:rPr>
+              <a:t>RTEÜ Bilgisayar Mühendisliği · 2026-2027 Güz</a:t>
+            </a:r>
+          </a:p>
+        </p:txBody>
+      </p:sp>
+      <p:sp>
+        <p:nvSpPr>
+          <p:cNvPr id="5" name="TextBox 4"/>
+          <p:cNvSpPr txBox="1"/>
+          <p:nvPr/>
+        </p:nvSpPr>
+        <p:spPr>
+          <a:xfrm>
+            <a:off x="10637215" y="6446520"/>
+            <a:ext cx="914400" cy="274320"/>
+          </a:xfrm>
+          <a:prstGeom prst="rect">
+            <a:avLst/>
+          </a:prstGeom>
+          <a:noFill/>
+        </p:spPr>
+        <p:txBody>
+          <a:bodyPr wrap="square" lIns="45720" rIns="45720">
+            <a:spAutoFit/>
+          </a:bodyPr>
+          <a:lstStyle/>
+          <a:p>
+            <a:pPr algn="r"/>
+            <a:r>
+              <a:rPr sz="1000" b="0">
+                <a:solidFill>
+                  <a:srgbClr val="5B6770"/>
+                </a:solidFill>
+              </a:rPr>
+              <a:t>12</a:t>
             </a:r>
           </a:p>
         </p:txBody>
@@ -4688,205 +5149,6 @@
 </p:sld>
 </file>
 
-<file path=ppt/slides/slide12.xml><?xml version="1.0" encoding="utf-8"?>
-<p:sld xmlns:a="http://schemas.openxmlformats.org/drawingml/2006/main" xmlns:p="http://schemas.openxmlformats.org/presentationml/2006/main" xmlns:r="http://schemas.openxmlformats.org/officeDocument/2006/relationships">
-  <p:cSld>
-    <p:spTree>
-      <p:nvGrpSpPr>
-        <p:cNvPr id="1" name=""/>
-        <p:cNvGrpSpPr/>
-        <p:nvPr/>
-      </p:nvGrpSpPr>
-      <p:grpSpPr/>
-      <p:pic>
-        <p:nvPicPr>
-          <p:cNvPr id="2" name="Picture 1" descr="rteu_logo_kucuk.jpg"/>
-          <p:cNvPicPr>
-            <a:picLocks noChangeAspect="1"/>
-          </p:cNvPicPr>
-          <p:nvPr/>
-        </p:nvPicPr>
-        <p:blipFill>
-          <a:blip r:embed="rId2"/>
-          <a:stretch>
-            <a:fillRect/>
-          </a:stretch>
-        </p:blipFill>
-        <p:spPr>
-          <a:xfrm>
-            <a:off x="640080" y="164592"/>
-            <a:ext cx="242773" cy="329184"/>
-          </a:xfrm>
-          <a:prstGeom prst="rect">
-            <a:avLst/>
-          </a:prstGeom>
-        </p:spPr>
-      </p:pic>
-      <p:sp>
-        <p:nvSpPr>
-          <p:cNvPr id="3" name="TextBox 2"/>
-          <p:cNvSpPr txBox="1"/>
-          <p:nvPr/>
-        </p:nvSpPr>
-        <p:spPr>
-          <a:xfrm>
-            <a:off x="1051560" y="182880"/>
-            <a:ext cx="7315200" cy="320040"/>
-          </a:xfrm>
-          <a:prstGeom prst="rect">
-            <a:avLst/>
-          </a:prstGeom>
-          <a:noFill/>
-        </p:spPr>
-        <p:txBody>
-          <a:bodyPr wrap="square" lIns="45720" rIns="45720">
-            <a:spAutoFit/>
-          </a:bodyPr>
-          <a:lstStyle/>
-          <a:p>
-            <a:r>
-              <a:rPr sz="1100" b="0">
-                <a:solidFill>
-                  <a:srgbClr val="5B6770"/>
-                </a:solidFill>
-              </a:rPr>
-              <a:t>CEN429 Güvenli Programlama · Hafta 7</a:t>
-            </a:r>
-          </a:p>
-        </p:txBody>
-      </p:sp>
-      <p:sp>
-        <p:nvSpPr>
-          <p:cNvPr id="4" name="TextBox 3"/>
-          <p:cNvSpPr txBox="1"/>
-          <p:nvPr/>
-        </p:nvSpPr>
-        <p:spPr>
-          <a:xfrm>
-            <a:off x="640080" y="6446520"/>
-            <a:ext cx="7315200" cy="274320"/>
-          </a:xfrm>
-          <a:prstGeom prst="rect">
-            <a:avLst/>
-          </a:prstGeom>
-          <a:noFill/>
-        </p:spPr>
-        <p:txBody>
-          <a:bodyPr wrap="square" lIns="45720" rIns="45720">
-            <a:spAutoFit/>
-          </a:bodyPr>
-          <a:lstStyle/>
-          <a:p>
-            <a:r>
-              <a:rPr sz="1000" b="0">
-                <a:solidFill>
-                  <a:srgbClr val="5B6770"/>
-                </a:solidFill>
-              </a:rPr>
-              <a:t>RTEÜ Bilgisayar Mühendisliği · 2026-2027 Güz</a:t>
-            </a:r>
-          </a:p>
-        </p:txBody>
-      </p:sp>
-      <p:sp>
-        <p:nvSpPr>
-          <p:cNvPr id="5" name="TextBox 4"/>
-          <p:cNvSpPr txBox="1"/>
-          <p:nvPr/>
-        </p:nvSpPr>
-        <p:spPr>
-          <a:xfrm>
-            <a:off x="10637215" y="6446520"/>
-            <a:ext cx="914400" cy="274320"/>
-          </a:xfrm>
-          <a:prstGeom prst="rect">
-            <a:avLst/>
-          </a:prstGeom>
-          <a:noFill/>
-        </p:spPr>
-        <p:txBody>
-          <a:bodyPr wrap="square" lIns="45720" rIns="45720">
-            <a:spAutoFit/>
-          </a:bodyPr>
-          <a:lstStyle/>
-          <a:p>
-            <a:pPr algn="r"/>
-            <a:r>
-              <a:rPr sz="1000" b="0">
-                <a:solidFill>
-                  <a:srgbClr val="5B6770"/>
-                </a:solidFill>
-              </a:rPr>
-              <a:t>12</a:t>
-            </a:r>
-          </a:p>
-        </p:txBody>
-      </p:sp>
-      <p:sp>
-        <p:nvSpPr>
-          <p:cNvPr id="6" name="TextBox 5"/>
-          <p:cNvSpPr txBox="1"/>
-          <p:nvPr/>
-        </p:nvSpPr>
-        <p:spPr>
-          <a:xfrm>
-            <a:off x="640080" y="548640"/>
-            <a:ext cx="10911535" cy="731520"/>
-          </a:xfrm>
-          <a:prstGeom prst="rect">
-            <a:avLst/>
-          </a:prstGeom>
-          <a:noFill/>
-        </p:spPr>
-        <p:txBody>
-          <a:bodyPr wrap="square" lIns="45720" rIns="45720" anchor="ctr">
-            <a:spAutoFit/>
-          </a:bodyPr>
-          <a:lstStyle/>
-          <a:p>
-            <a:r>
-              <a:rPr sz="3000" b="1">
-                <a:solidFill>
-                  <a:srgbClr val="006D77"/>
-                </a:solidFill>
-              </a:rPr>
-              <a:t>Sık yapılan hatalar — şema</a:t>
-            </a:r>
-          </a:p>
-        </p:txBody>
-      </p:sp>
-      <p:pic>
-        <p:nvPicPr>
-          <p:cNvPr id="7" name="Picture 6" descr="h07-03-sik-hatalar.png"/>
-          <p:cNvPicPr>
-            <a:picLocks noChangeAspect="1"/>
-          </p:cNvPicPr>
-          <p:nvPr/>
-        </p:nvPicPr>
-        <p:blipFill>
-          <a:blip r:embed="rId3"/>
-          <a:stretch>
-            <a:fillRect/>
-          </a:stretch>
-        </p:blipFill>
-        <p:spPr>
-          <a:xfrm>
-            <a:off x="640080" y="1325880"/>
-            <a:ext cx="10911535" cy="3481384"/>
-          </a:xfrm>
-          <a:prstGeom prst="rect">
-            <a:avLst/>
-          </a:prstGeom>
-        </p:spPr>
-      </p:pic>
-    </p:spTree>
-  </p:cSld>
-  <p:clrMapOvr>
-    <a:masterClrMapping/>
-  </p:clrMapOvr>
-</p:sld>
-</file>
-
 <file path=ppt/slides/slide13.xml><?xml version="1.0" encoding="utf-8"?>
 <p:sld xmlns:a="http://schemas.openxmlformats.org/drawingml/2006/main" xmlns:p="http://schemas.openxmlformats.org/presentationml/2006/main" xmlns:r="http://schemas.openxmlformats.org/officeDocument/2006/relationships">
   <p:cSld>
@@ -5049,111 +5311,35 @@
                   <a:srgbClr val="006D77"/>
                 </a:solidFill>
               </a:rPr>
-              <a:t>Akademik dürüstlük</a:t>
-            </a:r>
-          </a:p>
-        </p:txBody>
-      </p:sp>
-      <p:sp>
-        <p:nvSpPr>
-          <p:cNvPr id="7" name="TextBox 6"/>
-          <p:cNvSpPr txBox="1"/>
-          <p:nvPr/>
-        </p:nvSpPr>
+              <a:t>Sık yapılan hatalar — şema</a:t>
+            </a:r>
+          </a:p>
+        </p:txBody>
+      </p:sp>
+      <p:pic>
+        <p:nvPicPr>
+          <p:cNvPr id="7" name="Picture 6" descr="h07-03-sik-hatalar.png"/>
+          <p:cNvPicPr>
+            <a:picLocks noChangeAspect="1"/>
+          </p:cNvPicPr>
+          <p:nvPr/>
+        </p:nvPicPr>
+        <p:blipFill>
+          <a:blip r:embed="rId3"/>
+          <a:stretch>
+            <a:fillRect/>
+          </a:stretch>
+        </p:blipFill>
         <p:spPr>
           <a:xfrm>
             <a:off x="640080" y="1325880"/>
-            <a:ext cx="10911535" cy="1219200"/>
-          </a:xfrm>
-          <a:prstGeom prst="rect">
-            <a:avLst/>
-          </a:prstGeom>
-          <a:noFill/>
-        </p:spPr>
-        <p:txBody>
-          <a:bodyPr wrap="square" lIns="45720" rIns="45720">
-            <a:spAutoFit/>
-          </a:bodyPr>
-          <a:lstStyle/>
-          <a:p>
-            <a:pPr>
-              <a:spcAft>
-                <a:spcPts val="300"/>
-              </a:spcAft>
-            </a:pPr>
-            <a:r>
-              <a:rPr sz="2000" b="1">
-                <a:solidFill>
-                  <a:srgbClr val="006D77"/>
-                </a:solidFill>
-              </a:rPr>
-              <a:t>• </a:t>
-            </a:r>
-            <a:r>
-              <a:rPr sz="2000" b="0">
-                <a:solidFill>
-                  <a:srgbClr val="1F2D3A"/>
-                </a:solidFill>
-              </a:rPr>
-              <a:t>Kaynaksız kod/metin, takım dışı çalışma, uydurma sonuç </a:t>
-            </a:r>
-            <a:r>
-              <a:rPr sz="2000" b="1">
-                <a:solidFill>
-                  <a:srgbClr val="1F2D3A"/>
-                </a:solidFill>
-              </a:rPr>
-              <a:t>kabul edilmez</a:t>
-            </a:r>
-          </a:p>
-          <a:p>
-            <a:pPr>
-              <a:spcAft>
-                <a:spcPts val="300"/>
-              </a:spcAft>
-            </a:pPr>
-            <a:r>
-              <a:rPr sz="2000" b="1">
-                <a:solidFill>
-                  <a:srgbClr val="006D77"/>
-                </a:solidFill>
-              </a:rPr>
-              <a:t>• </a:t>
-            </a:r>
-            <a:r>
-              <a:rPr sz="2000" b="0">
-                <a:solidFill>
-                  <a:srgbClr val="1F2D3A"/>
-                </a:solidFill>
-              </a:rPr>
-              <a:t>Teslim edilen her satır açıklanabilmeli</a:t>
-            </a:r>
-          </a:p>
-          <a:p>
-            <a:pPr>
-              <a:spcAft>
-                <a:spcPts val="300"/>
-              </a:spcAft>
-            </a:pPr>
-            <a:r>
-              <a:rPr sz="2000" b="1">
-                <a:solidFill>
-                  <a:srgbClr val="006D77"/>
-                </a:solidFill>
-              </a:rPr>
-              <a:t>• </a:t>
-            </a:r>
-            <a:r>
-              <a:rPr sz="2000" b="0">
-                <a:solidFill>
-                  <a:srgbClr val="1F2D3A"/>
-                </a:solidFill>
-              </a:rPr>
-              <a:t>Her takım üyesi kendi bölümünü anlatabilmeli; herkese soru sorulabilir</a:t>
-            </a:r>
-          </a:p>
-        </p:txBody>
-      </p:sp>
+            <a:ext cx="10911535" cy="3481384"/>
+          </a:xfrm>
+          <a:prstGeom prst="rect">
+            <a:avLst/>
+          </a:prstGeom>
+        </p:spPr>
+      </p:pic>
     </p:spTree>
   </p:cSld>
   <p:clrMapOvr>
@@ -5324,7 +5510,7 @@
                   <a:srgbClr val="006D77"/>
                 </a:solidFill>
               </a:rPr>
-              <a:t>Gösterimden sonra</a:t>
+              <a:t>Akademik dürüstlük</a:t>
             </a:r>
           </a:p>
         </p:txBody>
@@ -5338,7 +5524,7 @@
         <p:spPr>
           <a:xfrm>
             <a:off x="640080" y="1325880"/>
-            <a:ext cx="10911535" cy="1173480"/>
+            <a:ext cx="10911535" cy="1219200"/>
           </a:xfrm>
           <a:prstGeom prst="rect">
             <a:avLst/>
@@ -5370,7 +5556,7 @@
                   <a:srgbClr val="1F2D3A"/>
                 </a:solidFill>
               </a:rPr>
-              <a:t>Geri bildirimi </a:t>
+              <a:t>Kaynaksız kod/metin, takım dışı çalışma, uydurma sonuç </a:t>
             </a:r>
             <a:r>
               <a:rPr sz="2000" b="1">
@@ -5378,15 +5564,7 @@
                   <a:srgbClr val="1F2D3A"/>
                 </a:solidFill>
               </a:rPr>
-              <a:t>bulgu listesi</a:t>
-            </a:r>
-            <a:r>
-              <a:rPr sz="2000" b="0">
-                <a:solidFill>
-                  <a:srgbClr val="1F2D3A"/>
-                </a:solidFill>
-              </a:rPr>
-              <a:t> olarak yazın (bulgu · önem · düzeltme · tarih) → 12. haftanın küçük modeli</a:t>
+              <a:t>kabul edilmez</a:t>
             </a:r>
           </a:p>
           <a:p>
@@ -5409,76 +5587,30 @@
                   <a:srgbClr val="1F2D3A"/>
                 </a:solidFill>
               </a:rPr>
-              <a:t>Final bölümleri: S6 · S8 · S11 · S14 · S15 · S16 sonuç · S17</a:t>
-            </a:r>
-          </a:p>
-        </p:txBody>
-      </p:sp>
-      <p:sp>
-        <p:nvSpPr>
-          <p:cNvPr id="8" name="Rectangle 7"/>
-          <p:cNvSpPr/>
-          <p:nvPr/>
-        </p:nvSpPr>
-        <p:spPr>
-          <a:xfrm>
-            <a:off x="640080" y="2609088"/>
-            <a:ext cx="10911535" cy="934719"/>
-          </a:xfrm>
-          <a:prstGeom prst="rect">
-            <a:avLst/>
-          </a:prstGeom>
-          <a:solidFill>
-            <a:srgbClr val="EEF7F8"/>
-          </a:solidFill>
-          <a:ln>
-            <a:solidFill>
-              <a:srgbClr val="006D77"/>
-            </a:solidFill>
-          </a:ln>
-        </p:spPr>
-        <p:style>
-          <a:lnRef idx="1">
-            <a:schemeClr val="accent1"/>
-          </a:lnRef>
-          <a:fillRef idx="3">
-            <a:schemeClr val="accent1"/>
-          </a:fillRef>
-          <a:effectRef idx="2">
-            <a:schemeClr val="accent1"/>
-          </a:effectRef>
-          <a:fontRef idx="minor">
-            <a:schemeClr val="lt1"/>
-          </a:fontRef>
-        </p:style>
-        <p:txBody>
-          <a:bodyPr rtlCol="0" anchor="ctr" wrap="square" lIns="182880"/>
-          <a:lstStyle/>
-          <a:p>
-            <a:pPr algn="l"/>
+              <a:t>Teslim edilen her satır açıklanabilmeli</a:t>
+            </a:r>
+          </a:p>
+          <a:p>
+            <a:pPr>
+              <a:spcAft>
+                <a:spcPts val="300"/>
+              </a:spcAft>
+            </a:pPr>
+            <a:r>
+              <a:rPr sz="2000" b="1">
+                <a:solidFill>
+                  <a:srgbClr val="006D77"/>
+                </a:solidFill>
+              </a:rPr>
+              <a:t>• </a:t>
+            </a:r>
             <a:r>
               <a:rPr sz="2000" b="0">
                 <a:solidFill>
                   <a:srgbClr val="1F2D3A"/>
                 </a:solidFill>
               </a:rPr>
-              <a:t>Gösterim bir </a:t>
-            </a:r>
-            <a:r>
-              <a:rPr sz="2000" b="1">
-                <a:solidFill>
-                  <a:srgbClr val="1F2D3A"/>
-                </a:solidFill>
-              </a:rPr>
-              <a:t>kanıt</a:t>
-            </a:r>
-            <a:r>
-              <a:rPr sz="2000" b="0">
-                <a:solidFill>
-                  <a:srgbClr val="1F2D3A"/>
-                </a:solidFill>
-              </a:rPr>
-              <a:t> sunumudur: her iddianın arkasında bir belge, test ya da canlı çıktı olsun.</a:t>
+              <a:t>Her takım üyesi kendi bölümünü anlatabilmeli; herkese soru sorulabilir</a:t>
             </a:r>
           </a:p>
         </p:txBody>
@@ -5621,6 +5753,335 @@
                 </a:solidFill>
               </a:rPr>
               <a:t>15</a:t>
+            </a:r>
+          </a:p>
+        </p:txBody>
+      </p:sp>
+      <p:sp>
+        <p:nvSpPr>
+          <p:cNvPr id="6" name="TextBox 5"/>
+          <p:cNvSpPr txBox="1"/>
+          <p:nvPr/>
+        </p:nvSpPr>
+        <p:spPr>
+          <a:xfrm>
+            <a:off x="640080" y="548640"/>
+            <a:ext cx="10911535" cy="731520"/>
+          </a:xfrm>
+          <a:prstGeom prst="rect">
+            <a:avLst/>
+          </a:prstGeom>
+          <a:noFill/>
+        </p:spPr>
+        <p:txBody>
+          <a:bodyPr wrap="square" lIns="45720" rIns="45720" anchor="ctr">
+            <a:spAutoFit/>
+          </a:bodyPr>
+          <a:lstStyle/>
+          <a:p>
+            <a:r>
+              <a:rPr sz="3000" b="1">
+                <a:solidFill>
+                  <a:srgbClr val="006D77"/>
+                </a:solidFill>
+              </a:rPr>
+              <a:t>Gösterimden sonra</a:t>
+            </a:r>
+          </a:p>
+        </p:txBody>
+      </p:sp>
+      <p:sp>
+        <p:nvSpPr>
+          <p:cNvPr id="7" name="TextBox 6"/>
+          <p:cNvSpPr txBox="1"/>
+          <p:nvPr/>
+        </p:nvSpPr>
+        <p:spPr>
+          <a:xfrm>
+            <a:off x="640080" y="1325880"/>
+            <a:ext cx="10911535" cy="1173480"/>
+          </a:xfrm>
+          <a:prstGeom prst="rect">
+            <a:avLst/>
+          </a:prstGeom>
+          <a:noFill/>
+        </p:spPr>
+        <p:txBody>
+          <a:bodyPr wrap="square" lIns="45720" rIns="45720">
+            <a:spAutoFit/>
+          </a:bodyPr>
+          <a:lstStyle/>
+          <a:p>
+            <a:pPr>
+              <a:spcAft>
+                <a:spcPts val="300"/>
+              </a:spcAft>
+            </a:pPr>
+            <a:r>
+              <a:rPr sz="2000" b="1">
+                <a:solidFill>
+                  <a:srgbClr val="006D77"/>
+                </a:solidFill>
+              </a:rPr>
+              <a:t>• </a:t>
+            </a:r>
+            <a:r>
+              <a:rPr sz="2000" b="0">
+                <a:solidFill>
+                  <a:srgbClr val="1F2D3A"/>
+                </a:solidFill>
+              </a:rPr>
+              <a:t>Geri bildirimi </a:t>
+            </a:r>
+            <a:r>
+              <a:rPr sz="2000" b="1">
+                <a:solidFill>
+                  <a:srgbClr val="1F2D3A"/>
+                </a:solidFill>
+              </a:rPr>
+              <a:t>bulgu listesi</a:t>
+            </a:r>
+            <a:r>
+              <a:rPr sz="2000" b="0">
+                <a:solidFill>
+                  <a:srgbClr val="1F2D3A"/>
+                </a:solidFill>
+              </a:rPr>
+              <a:t> olarak yazın (bulgu · önem · düzeltme · tarih) → 12. haftanın küçük modeli</a:t>
+            </a:r>
+          </a:p>
+          <a:p>
+            <a:pPr>
+              <a:spcAft>
+                <a:spcPts val="300"/>
+              </a:spcAft>
+            </a:pPr>
+            <a:r>
+              <a:rPr sz="2000" b="1">
+                <a:solidFill>
+                  <a:srgbClr val="006D77"/>
+                </a:solidFill>
+              </a:rPr>
+              <a:t>• </a:t>
+            </a:r>
+            <a:r>
+              <a:rPr sz="2000" b="0">
+                <a:solidFill>
+                  <a:srgbClr val="1F2D3A"/>
+                </a:solidFill>
+              </a:rPr>
+              <a:t>Final bölümleri: S6 · S8 · S11 · S14 · S15 · S16 sonuç · S17</a:t>
+            </a:r>
+          </a:p>
+        </p:txBody>
+      </p:sp>
+      <p:sp>
+        <p:nvSpPr>
+          <p:cNvPr id="8" name="Rectangle 7"/>
+          <p:cNvSpPr/>
+          <p:nvPr/>
+        </p:nvSpPr>
+        <p:spPr>
+          <a:xfrm>
+            <a:off x="640080" y="2609088"/>
+            <a:ext cx="10911535" cy="934719"/>
+          </a:xfrm>
+          <a:prstGeom prst="rect">
+            <a:avLst/>
+          </a:prstGeom>
+          <a:solidFill>
+            <a:srgbClr val="EEF7F8"/>
+          </a:solidFill>
+          <a:ln>
+            <a:solidFill>
+              <a:srgbClr val="006D77"/>
+            </a:solidFill>
+          </a:ln>
+        </p:spPr>
+        <p:style>
+          <a:lnRef idx="1">
+            <a:schemeClr val="accent1"/>
+          </a:lnRef>
+          <a:fillRef idx="3">
+            <a:schemeClr val="accent1"/>
+          </a:fillRef>
+          <a:effectRef idx="2">
+            <a:schemeClr val="accent1"/>
+          </a:effectRef>
+          <a:fontRef idx="minor">
+            <a:schemeClr val="lt1"/>
+          </a:fontRef>
+        </p:style>
+        <p:txBody>
+          <a:bodyPr rtlCol="0" anchor="ctr" wrap="square" lIns="182880"/>
+          <a:lstStyle/>
+          <a:p>
+            <a:pPr algn="l"/>
+            <a:r>
+              <a:rPr sz="2000" b="0">
+                <a:solidFill>
+                  <a:srgbClr val="1F2D3A"/>
+                </a:solidFill>
+              </a:rPr>
+              <a:t>Gösterim bir </a:t>
+            </a:r>
+            <a:r>
+              <a:rPr sz="2000" b="1">
+                <a:solidFill>
+                  <a:srgbClr val="1F2D3A"/>
+                </a:solidFill>
+              </a:rPr>
+              <a:t>kanıt</a:t>
+            </a:r>
+            <a:r>
+              <a:rPr sz="2000" b="0">
+                <a:solidFill>
+                  <a:srgbClr val="1F2D3A"/>
+                </a:solidFill>
+              </a:rPr>
+              <a:t> sunumudur: her iddianın arkasında bir belge, test ya da canlı çıktı olsun.</a:t>
+            </a:r>
+          </a:p>
+        </p:txBody>
+      </p:sp>
+    </p:spTree>
+  </p:cSld>
+  <p:clrMapOvr>
+    <a:masterClrMapping/>
+  </p:clrMapOvr>
+</p:sld>
+</file>
+
+<file path=ppt/slides/slide16.xml><?xml version="1.0" encoding="utf-8"?>
+<p:sld xmlns:a="http://schemas.openxmlformats.org/drawingml/2006/main" xmlns:p="http://schemas.openxmlformats.org/presentationml/2006/main" xmlns:r="http://schemas.openxmlformats.org/officeDocument/2006/relationships">
+  <p:cSld>
+    <p:spTree>
+      <p:nvGrpSpPr>
+        <p:cNvPr id="1" name=""/>
+        <p:cNvGrpSpPr/>
+        <p:nvPr/>
+      </p:nvGrpSpPr>
+      <p:grpSpPr/>
+      <p:pic>
+        <p:nvPicPr>
+          <p:cNvPr id="2" name="Picture 1" descr="rteu_logo_kucuk.jpg"/>
+          <p:cNvPicPr>
+            <a:picLocks noChangeAspect="1"/>
+          </p:cNvPicPr>
+          <p:nvPr/>
+        </p:nvPicPr>
+        <p:blipFill>
+          <a:blip r:embed="rId2"/>
+          <a:stretch>
+            <a:fillRect/>
+          </a:stretch>
+        </p:blipFill>
+        <p:spPr>
+          <a:xfrm>
+            <a:off x="640080" y="164592"/>
+            <a:ext cx="242773" cy="329184"/>
+          </a:xfrm>
+          <a:prstGeom prst="rect">
+            <a:avLst/>
+          </a:prstGeom>
+        </p:spPr>
+      </p:pic>
+      <p:sp>
+        <p:nvSpPr>
+          <p:cNvPr id="3" name="TextBox 2"/>
+          <p:cNvSpPr txBox="1"/>
+          <p:nvPr/>
+        </p:nvSpPr>
+        <p:spPr>
+          <a:xfrm>
+            <a:off x="1051560" y="182880"/>
+            <a:ext cx="7315200" cy="320040"/>
+          </a:xfrm>
+          <a:prstGeom prst="rect">
+            <a:avLst/>
+          </a:prstGeom>
+          <a:noFill/>
+        </p:spPr>
+        <p:txBody>
+          <a:bodyPr wrap="square" lIns="45720" rIns="45720">
+            <a:spAutoFit/>
+          </a:bodyPr>
+          <a:lstStyle/>
+          <a:p>
+            <a:r>
+              <a:rPr sz="1100" b="0">
+                <a:solidFill>
+                  <a:srgbClr val="5B6770"/>
+                </a:solidFill>
+              </a:rPr>
+              <a:t>CEN429 Güvenli Programlama · Hafta 7</a:t>
+            </a:r>
+          </a:p>
+        </p:txBody>
+      </p:sp>
+      <p:sp>
+        <p:nvSpPr>
+          <p:cNvPr id="4" name="TextBox 3"/>
+          <p:cNvSpPr txBox="1"/>
+          <p:nvPr/>
+        </p:nvSpPr>
+        <p:spPr>
+          <a:xfrm>
+            <a:off x="640080" y="6446520"/>
+            <a:ext cx="7315200" cy="274320"/>
+          </a:xfrm>
+          <a:prstGeom prst="rect">
+            <a:avLst/>
+          </a:prstGeom>
+          <a:noFill/>
+        </p:spPr>
+        <p:txBody>
+          <a:bodyPr wrap="square" lIns="45720" rIns="45720">
+            <a:spAutoFit/>
+          </a:bodyPr>
+          <a:lstStyle/>
+          <a:p>
+            <a:r>
+              <a:rPr sz="1000" b="0">
+                <a:solidFill>
+                  <a:srgbClr val="5B6770"/>
+                </a:solidFill>
+              </a:rPr>
+              <a:t>RTEÜ Bilgisayar Mühendisliği · 2026-2027 Güz</a:t>
+            </a:r>
+          </a:p>
+        </p:txBody>
+      </p:sp>
+      <p:sp>
+        <p:nvSpPr>
+          <p:cNvPr id="5" name="TextBox 4"/>
+          <p:cNvSpPr txBox="1"/>
+          <p:nvPr/>
+        </p:nvSpPr>
+        <p:spPr>
+          <a:xfrm>
+            <a:off x="10637215" y="6446520"/>
+            <a:ext cx="914400" cy="274320"/>
+          </a:xfrm>
+          <a:prstGeom prst="rect">
+            <a:avLst/>
+          </a:prstGeom>
+          <a:noFill/>
+        </p:spPr>
+        <p:txBody>
+          <a:bodyPr wrap="square" lIns="45720" rIns="45720">
+            <a:spAutoFit/>
+          </a:bodyPr>
+          <a:lstStyle/>
+          <a:p>
+            <a:pPr algn="r"/>
+            <a:r>
+              <a:rPr sz="1000" b="0">
+                <a:solidFill>
+                  <a:srgbClr val="5B6770"/>
+                </a:solidFill>
+              </a:rPr>
+              <a:t>16</a:t>
             </a:r>
           </a:p>
         </p:txBody>
